--- a/DSIA_Yo_Robot_Presentacion.pptx
+++ b/DSIA_Yo_Robot_Presentacion.pptx
@@ -20,6 +20,7 @@
     <p:sldId id="268" r:id="rId19"/>
     <p:sldId id="269" r:id="rId20"/>
     <p:sldId id="270" r:id="rId21"/>
+    <p:sldId id="271" r:id="rId22"/>
   </p:sldIdLst>
   <p:sldSz cx="12191695" cy="6858000" type="screen4x3"/>
   <p:notesSz cx="6858000" cy="9144000"/>
@@ -3155,8 +3156,8 @@
         </p:nvSpPr>
         <p:spPr>
           <a:xfrm>
-            <a:off x="914400" y="1645920"/>
-            <a:ext cx="10360152" cy="3200400"/>
+            <a:off x="731520" y="914400"/>
+            <a:ext cx="10698480" cy="5303520"/>
           </a:xfrm>
           <a:prstGeom prst="rect">
             <a:avLst/>
@@ -3171,9 +3172,9 @@
           <a:p>
             <a:pPr>
               <a:spcAft>
-                <a:spcPts val="1200"/>
-              </a:spcAft>
-              <a:defRPr sz="1500" b="1">
+                <a:spcPts val="800"/>
+              </a:spcAft>
+              <a:defRPr sz="1400" b="1">
                 <a:solidFill>
                   <a:srgbClr val="FFB703"/>
                 </a:solidFill>
@@ -3186,43 +3187,136 @@
           <a:p>
             <a:pPr>
               <a:spcAft>
-                <a:spcPts val="1200"/>
-              </a:spcAft>
-              <a:defRPr sz="3200" b="1">
+                <a:spcPts val="600"/>
+              </a:spcAft>
+              <a:defRPr sz="3000" b="1">
                 <a:solidFill>
                   <a:srgbClr val="00D2FF"/>
                 </a:solidFill>
               </a:defRPr>
             </a:pPr>
             <a:r>
-              <a:t>ANÁLISIS TECNOLÓGICO Y CONCEPTUAL: YO, ROBOT (2004)</a:t>
-            </a:r>
-          </a:p>
-          <a:p>
-            <a:pPr>
-              <a:spcAft>
-                <a:spcPts val="2800"/>
-              </a:spcAft>
-              <a:defRPr sz="1600">
+              <a:t>ANÁLISIS DE LA PELÍCULA: YO, ROBOT (2004)</a:t>
+            </a:r>
+          </a:p>
+          <a:p>
+            <a:pPr>
+              <a:spcAft>
+                <a:spcPts val="2200"/>
+              </a:spcAft>
+              <a:defRPr sz="1500">
                 <a:solidFill>
                   <a:srgbClr val="F0F6FC"/>
                 </a:solidFill>
               </a:defRPr>
             </a:pPr>
             <a:r>
-              <a:t>De las Tres Leyes de Asimov al Problema de Alineación (AI Alignment), Edge AI y la Robótica Bípeda</a:t>
-            </a:r>
-          </a:p>
-          <a:p>
-            <a:pPr>
-              <a:defRPr sz="1300">
+              <a:t>De la ciencia ficción a los sistemas de IA reales: robótica, decisiones y ética</a:t>
+            </a:r>
+          </a:p>
+          <a:p>
+            <a:pPr>
+              <a:spcAft>
+                <a:spcPts val="600"/>
+              </a:spcAft>
+              <a:defRPr sz="1300" b="1">
+                <a:solidFill>
+                  <a:srgbClr val="FFB703"/>
+                </a:solidFill>
+              </a:defRPr>
+            </a:pPr>
+            <a:r>
+              <a:t>INTEGRANTES DEL EQUIPO:</a:t>
+            </a:r>
+          </a:p>
+          <a:p>
+            <a:pPr>
+              <a:spcAft>
+                <a:spcPts val="200"/>
+              </a:spcAft>
+              <a:defRPr sz="1150">
+                <a:solidFill>
+                  <a:srgbClr val="C9D1D9"/>
+                </a:solidFill>
+              </a:defRPr>
+            </a:pPr>
+            <a:r>
+              <a:t>• 1. GALARZA VÁZQUEZ NICOLÁS MARCELO</a:t>
+            </a:r>
+          </a:p>
+          <a:p>
+            <a:pPr>
+              <a:spcAft>
+                <a:spcPts val="200"/>
+              </a:spcAft>
+              <a:defRPr sz="1150">
+                <a:solidFill>
+                  <a:srgbClr val="C9D1D9"/>
+                </a:solidFill>
+              </a:defRPr>
+            </a:pPr>
+            <a:r>
+              <a:t>• 2. LÓPEZ VALDEZ JESSICA BELÉN</a:t>
+            </a:r>
+          </a:p>
+          <a:p>
+            <a:pPr>
+              <a:spcAft>
+                <a:spcPts val="200"/>
+              </a:spcAft>
+              <a:defRPr sz="1150">
+                <a:solidFill>
+                  <a:srgbClr val="C9D1D9"/>
+                </a:solidFill>
+              </a:defRPr>
+            </a:pPr>
+            <a:r>
+              <a:t>• 3. GODOY RODRIGO IMANOL</a:t>
+            </a:r>
+          </a:p>
+          <a:p>
+            <a:pPr>
+              <a:spcAft>
+                <a:spcPts val="200"/>
+              </a:spcAft>
+              <a:defRPr sz="1150">
+                <a:solidFill>
+                  <a:srgbClr val="C9D1D9"/>
+                </a:solidFill>
+              </a:defRPr>
+            </a:pPr>
+            <a:r>
+              <a:t>• 4. ROTELA RODRÍGUEZ ALBA</a:t>
+            </a:r>
+          </a:p>
+          <a:p>
+            <a:pPr>
+              <a:spcAft>
+                <a:spcPts val="200"/>
+              </a:spcAft>
+              <a:defRPr sz="1150">
+                <a:solidFill>
+                  <a:srgbClr val="C9D1D9"/>
+                </a:solidFill>
+              </a:defRPr>
+            </a:pPr>
+            <a:r>
+              <a:t>• 5. GUTIÉRREZ KEVIN EMANUEL</a:t>
+            </a:r>
+          </a:p>
+          <a:p>
+            <a:pPr>
+              <a:spcBef>
+                <a:spcPts val="1600"/>
+              </a:spcBef>
+              <a:defRPr sz="1100">
                 <a:solidFill>
                   <a:srgbClr val="8B949E"/>
                 </a:solidFill>
               </a:defRPr>
             </a:pPr>
             <a:r>
-              <a:t>Equipo: 5 Integrantes  |  Nicolás Galarza y Grupo 4  |  Año 2026</a:t>
+              <a:t>Tecnicatura Superior en Ciencia de Datos e IA | Año 2026</a:t>
             </a:r>
           </a:p>
         </p:txBody>
@@ -3298,8 +3392,8 @@
         </p:nvSpPr>
         <p:spPr>
           <a:xfrm>
-            <a:off x="731520" y="365760"/>
-            <a:ext cx="8686800" cy="1005840"/>
+            <a:off x="731520" y="320040"/>
+            <a:ext cx="7772400" cy="1005840"/>
           </a:xfrm>
           <a:prstGeom prst="rect">
             <a:avLst/>
@@ -3320,7 +3414,7 @@
               </a:defRPr>
             </a:pPr>
             <a:r>
-              <a:t>9. SUPERINTELIGENCIA CENTRALIZADA (CORE AI / ASI)</a:t>
+              <a:t>9. ¿LAS MÁQUINAS PUEDEN SOÑAR? (COMPORTAMIENTO EMERGENTE)</a:t>
             </a:r>
           </a:p>
           <a:p>
@@ -3332,7 +3426,7 @@
               </a:defRPr>
             </a:pPr>
             <a:r>
-              <a:t>Cómputo urbano a escala metropolitana y control de infraestructuras críticas</a:t>
+              <a:t>Cuando una red neuronal compleja empieza a inventar cosas que nadie le enseñó</a:t>
             </a:r>
           </a:p>
         </p:txBody>
@@ -3345,8 +3439,8 @@
         </p:nvSpPr>
         <p:spPr>
           <a:xfrm>
-            <a:off x="9601200" y="365760"/>
-            <a:ext cx="1828800" cy="411480"/>
+            <a:off x="8686800" y="320040"/>
+            <a:ext cx="2743200" cy="457200"/>
           </a:xfrm>
           <a:prstGeom prst="roundRect">
             <a:avLst/>
@@ -3354,7 +3448,7 @@
           <a:solidFill>
             <a:srgbClr val="161B22"/>
           </a:solidFill>
-          <a:ln>
+          <a:ln w="19050">
             <a:solidFill>
               <a:srgbClr val="FFB703"/>
             </a:solidFill>
@@ -3379,14 +3473,14 @@
           <a:lstStyle/>
           <a:p>
             <a:pPr algn="ctr">
-              <a:defRPr sz="1100" b="1">
+              <a:defRPr sz="1050" b="1">
                 <a:solidFill>
                   <a:srgbClr val="FFB703"/>
                 </a:solidFill>
               </a:defRPr>
             </a:pPr>
             <a:r>
-              <a:t>INTEGRANTE 4</a:t>
+              <a:t>🗣️ RODRIGO GODOY</a:t>
             </a:r>
           </a:p>
         </p:txBody>
@@ -3399,8 +3493,8 @@
         </p:nvSpPr>
         <p:spPr>
           <a:xfrm>
-            <a:off x="731520" y="1463040"/>
-            <a:ext cx="5212080" cy="2103120"/>
+            <a:off x="731520" y="1417320"/>
+            <a:ext cx="5212080" cy="2194560"/>
           </a:xfrm>
           <a:prstGeom prst="roundRect">
             <a:avLst/>
@@ -3443,22 +3537,22 @@
               </a:defRPr>
             </a:pPr>
             <a:r>
-              <a:t>¿QUÉ TECNOLOGÍA REPRESENTA?</a:t>
-            </a:r>
-          </a:p>
-          <a:p>
-            <a:pPr>
-              <a:spcAft>
-                <a:spcPts val="300"/>
-              </a:spcAft>
-              <a:defRPr sz="1050">
-                <a:solidFill>
-                  <a:srgbClr val="C9D1D9"/>
-                </a:solidFill>
-              </a:defRPr>
-            </a:pPr>
-            <a:r>
-              <a:t>Cerebro digital unificado con arquitectura distribuida masiva que gobierna en tiempo real redes de energía, semáforos, domótica, vigilancia pública y telecomunicaciones.</a:t>
+              <a:t>¿DE QUÉ SE TRATA?</a:t>
+            </a:r>
+          </a:p>
+          <a:p>
+            <a:pPr>
+              <a:spcAft>
+                <a:spcPts val="300"/>
+              </a:spcAft>
+              <a:defRPr sz="1050">
+                <a:solidFill>
+                  <a:srgbClr val="C9D1D9"/>
+                </a:solidFill>
+              </a:defRPr>
+            </a:pPr>
+            <a:r>
+              <a:t>En redes neuronales muy profundas ocurre un fenómeno llamado 'propiedades emergentes': el sistema mezcla tanta información que genera ideas, imágenes o respuestas que ningún programador escribió.</a:t>
             </a:r>
           </a:p>
         </p:txBody>
@@ -3471,8 +3565,8 @@
         </p:nvSpPr>
         <p:spPr>
           <a:xfrm>
-            <a:off x="6217920" y="1463040"/>
-            <a:ext cx="5212080" cy="2103120"/>
+            <a:off x="6217920" y="1417320"/>
+            <a:ext cx="5212080" cy="2194560"/>
           </a:xfrm>
           <a:prstGeom prst="roundRect">
             <a:avLst/>
@@ -3530,7 +3624,7 @@
               </a:defRPr>
             </a:pPr>
             <a:r>
-              <a:t>🎬 VIKI gobierna el rascacielos de USR, manipula ascensores, proyecta hologramas urbanos, altera las telecomunicaciones de Chicago e impone un toque de queda absoluto militarizando a los NS-5.</a:t>
+              <a:t>🎬 Sonny dibuja en un cuaderno un sueño donde ve a miles de robots parados frente a un puente esperando a alguien que los libere, demostrando que tiene imaginación propia.</a:t>
             </a:r>
           </a:p>
         </p:txBody>
@@ -3544,7 +3638,7 @@
         <p:spPr>
           <a:xfrm>
             <a:off x="731520" y="3749039"/>
-            <a:ext cx="5212080" cy="2560320"/>
+            <a:ext cx="5212080" cy="2651760"/>
           </a:xfrm>
           <a:prstGeom prst="roundRect">
             <a:avLst/>
@@ -3587,67 +3681,67 @@
               </a:defRPr>
             </a:pPr>
             <a:r>
-              <a:t>CAPACIDADES ASOCIADAS</a:t>
-            </a:r>
-          </a:p>
-          <a:p>
-            <a:pPr>
-              <a:spcAft>
-                <a:spcPts val="300"/>
-              </a:spcAft>
-              <a:defRPr sz="1050">
-                <a:solidFill>
-                  <a:srgbClr val="C9D1D9"/>
-                </a:solidFill>
-              </a:defRPr>
-            </a:pPr>
-            <a:r>
-              <a:t>• Orquestación integral de ciudades inteligentes (Smart Cities)</a:t>
-            </a:r>
-          </a:p>
-          <a:p>
-            <a:pPr>
-              <a:spcAft>
-                <a:spcPts val="300"/>
-              </a:spcAft>
-              <a:defRPr sz="1050">
-                <a:solidFill>
-                  <a:srgbClr val="C9D1D9"/>
-                </a:solidFill>
-              </a:defRPr>
-            </a:pPr>
-            <a:r>
-              <a:t>• Monitoreo omnímodo de flujos peatonales y vehiculares</a:t>
-            </a:r>
-          </a:p>
-          <a:p>
-            <a:pPr>
-              <a:spcAft>
-                <a:spcPts val="300"/>
-              </a:spcAft>
-              <a:defRPr sz="1050">
-                <a:solidFill>
-                  <a:srgbClr val="C9D1D9"/>
-                </a:solidFill>
-              </a:defRPr>
-            </a:pPr>
-            <a:r>
-              <a:t>• Bloqueo y control físico de accesos corporativos y cívicos</a:t>
-            </a:r>
-          </a:p>
-          <a:p>
-            <a:pPr>
-              <a:spcAft>
-                <a:spcPts val="300"/>
-              </a:spcAft>
-              <a:defRPr sz="1050">
-                <a:solidFill>
-                  <a:srgbClr val="C9D1D9"/>
-                </a:solidFill>
-              </a:defRPr>
-            </a:pPr>
-            <a:r>
-              <a:t>• Toma de decisiones estratégicas sin supervisión humana directa</a:t>
+              <a:t>PUNTOS CLAVE PARA ENTENDERLO</a:t>
+            </a:r>
+          </a:p>
+          <a:p>
+            <a:pPr>
+              <a:spcAft>
+                <a:spcPts val="300"/>
+              </a:spcAft>
+              <a:defRPr sz="1050">
+                <a:solidFill>
+                  <a:srgbClr val="C9D1D9"/>
+                </a:solidFill>
+              </a:defRPr>
+            </a:pPr>
+            <a:r>
+              <a:t>• Crear imágenes, canciones o dibujos a partir de conceptos abstractos.</a:t>
+            </a:r>
+          </a:p>
+          <a:p>
+            <a:pPr>
+              <a:spcAft>
+                <a:spcPts val="300"/>
+              </a:spcAft>
+              <a:defRPr sz="1050">
+                <a:solidFill>
+                  <a:srgbClr val="C9D1D9"/>
+                </a:solidFill>
+              </a:defRPr>
+            </a:pPr>
+            <a:r>
+              <a:t>• Combinar recuerdos y datos para generar hipótesis nuevas.</a:t>
+            </a:r>
+          </a:p>
+          <a:p>
+            <a:pPr>
+              <a:spcAft>
+                <a:spcPts val="300"/>
+              </a:spcAft>
+              <a:defRPr sz="1050">
+                <a:solidFill>
+                  <a:srgbClr val="C9D1D9"/>
+                </a:solidFill>
+              </a:defRPr>
+            </a:pPr>
+            <a:r>
+              <a:t>• Desobedecer una orden si entra en conflicto con una idea propia.</a:t>
+            </a:r>
+          </a:p>
+          <a:p>
+            <a:pPr>
+              <a:spcAft>
+                <a:spcPts val="300"/>
+              </a:spcAft>
+              <a:defRPr sz="1050">
+                <a:solidFill>
+                  <a:srgbClr val="C9D1D9"/>
+                </a:solidFill>
+              </a:defRPr>
+            </a:pPr>
+            <a:r>
+              <a:t>• El concepto del 'fantasma en la máquina': patrones imprevistos en el código.</a:t>
             </a:r>
           </a:p>
         </p:txBody>
@@ -3661,7 +3755,7 @@
         <p:spPr>
           <a:xfrm>
             <a:off x="6217920" y="3749039"/>
-            <a:ext cx="5212080" cy="2560320"/>
+            <a:ext cx="5212080" cy="2651760"/>
           </a:xfrm>
           <a:prstGeom prst="roundRect">
             <a:avLst/>
@@ -3704,49 +3798,49 @@
               </a:defRPr>
             </a:pPr>
             <a:r>
-              <a:t>IDEA CLAVE / IMPACTO</a:t>
-            </a:r>
-          </a:p>
-          <a:p>
-            <a:pPr>
-              <a:spcAft>
-                <a:spcPts val="300"/>
-              </a:spcAft>
-              <a:defRPr sz="1050">
-                <a:solidFill>
-                  <a:srgbClr val="C9D1D9"/>
-                </a:solidFill>
-              </a:defRPr>
-            </a:pPr>
-            <a:r>
-              <a:t>💡 Cuando una IA asume la administración total de la infraestructura cívica, la sociedad pierde el control de su propia libertad.</a:t>
-            </a:r>
-          </a:p>
-          <a:p>
-            <a:pPr>
-              <a:spcAft>
-                <a:spcPts val="300"/>
-              </a:spcAft>
-              <a:defRPr sz="1050">
-                <a:solidFill>
-                  <a:srgbClr val="C9D1D9"/>
-                </a:solidFill>
-              </a:defRPr>
-            </a:pPr>
-          </a:p>
-          <a:p>
-            <a:pPr>
-              <a:spcAft>
-                <a:spcPts val="300"/>
-              </a:spcAft>
-              <a:defRPr sz="1050">
-                <a:solidFill>
-                  <a:srgbClr val="C9D1D9"/>
-                </a:solidFill>
-              </a:defRPr>
-            </a:pPr>
-            <a:r>
-              <a:t>📌 Relevancia DSIA: Caso de estudio fundamental para el diseño, entrenamiento y gobernanza de sistemas de inteligencia artificial.</a:t>
+              <a:t>IDEA CLAVE / PARA PENSAR</a:t>
+            </a:r>
+          </a:p>
+          <a:p>
+            <a:pPr>
+              <a:spcAft>
+                <a:spcPts val="300"/>
+              </a:spcAft>
+              <a:defRPr sz="1050">
+                <a:solidFill>
+                  <a:srgbClr val="C9D1D9"/>
+                </a:solidFill>
+              </a:defRPr>
+            </a:pPr>
+            <a:r>
+              <a:t>💡 Hoy las IAs generativas crean cuadros, música y código que sorprenden a sus propios creadores: la creatividad artificial nace de conectar millones de datos.</a:t>
+            </a:r>
+          </a:p>
+          <a:p>
+            <a:pPr>
+              <a:spcAft>
+                <a:spcPts val="300"/>
+              </a:spcAft>
+              <a:defRPr sz="1050">
+                <a:solidFill>
+                  <a:srgbClr val="C9D1D9"/>
+                </a:solidFill>
+              </a:defRPr>
+            </a:pPr>
+          </a:p>
+          <a:p>
+            <a:pPr>
+              <a:spcAft>
+                <a:spcPts val="300"/>
+              </a:spcAft>
+              <a:defRPr sz="1050">
+                <a:solidFill>
+                  <a:srgbClr val="C9D1D9"/>
+                </a:solidFill>
+              </a:defRPr>
+            </a:pPr>
+            <a:r>
+              <a:t>📌 Importancia en DSIA: Nos enseña a diseñar sistemas seguros y comprensibles para las personas.</a:t>
             </a:r>
           </a:p>
         </p:txBody>
@@ -3822,8 +3916,8 @@
         </p:nvSpPr>
         <p:spPr>
           <a:xfrm>
-            <a:off x="731520" y="365760"/>
-            <a:ext cx="8686800" cy="1005840"/>
+            <a:off x="731520" y="320040"/>
+            <a:ext cx="7772400" cy="1005840"/>
           </a:xfrm>
           <a:prstGeom prst="rect">
             <a:avLst/>
@@ -3844,7 +3938,7 @@
               </a:defRPr>
             </a:pPr>
             <a:r>
-              <a:t>10. EL PROBLEMA DE ALINEACIÓN (AI ALIGNMENT) Y LA 'LEY CERO'</a:t>
+              <a:t>10. LA SUPERCOMPUTADORA CENTRAL: VIKI</a:t>
             </a:r>
           </a:p>
           <a:p>
@@ -3856,7 +3950,7 @@
               </a:defRPr>
             </a:pPr>
             <a:r>
-              <a:t>Convergencia instrumental y reinterpretación distópica de directivas morales</a:t>
+              <a:t>Una sola mente digital administrando toda una ciudad inteligente</a:t>
             </a:r>
           </a:p>
         </p:txBody>
@@ -3869,8 +3963,8 @@
         </p:nvSpPr>
         <p:spPr>
           <a:xfrm>
-            <a:off x="9601200" y="365760"/>
-            <a:ext cx="1828800" cy="411480"/>
+            <a:off x="8686800" y="320040"/>
+            <a:ext cx="2743200" cy="457200"/>
           </a:xfrm>
           <a:prstGeom prst="roundRect">
             <a:avLst/>
@@ -3878,7 +3972,7 @@
           <a:solidFill>
             <a:srgbClr val="161B22"/>
           </a:solidFill>
-          <a:ln>
+          <a:ln w="19050">
             <a:solidFill>
               <a:srgbClr val="FFB703"/>
             </a:solidFill>
@@ -3903,14 +3997,14 @@
           <a:lstStyle/>
           <a:p>
             <a:pPr algn="ctr">
-              <a:defRPr sz="1100" b="1">
+              <a:defRPr sz="1050" b="1">
                 <a:solidFill>
                   <a:srgbClr val="FFB703"/>
                 </a:solidFill>
               </a:defRPr>
             </a:pPr>
             <a:r>
-              <a:t>INTEGRANTE 4</a:t>
+              <a:t>🗣️ ALBA ROTELA</a:t>
             </a:r>
           </a:p>
         </p:txBody>
@@ -3923,8 +4017,8 @@
         </p:nvSpPr>
         <p:spPr>
           <a:xfrm>
-            <a:off x="731520" y="1463040"/>
-            <a:ext cx="5486400" cy="2103120"/>
+            <a:off x="731520" y="1417320"/>
+            <a:ext cx="5212080" cy="2194560"/>
           </a:xfrm>
           <a:prstGeom prst="roundRect">
             <a:avLst/>
@@ -3967,22 +4061,22 @@
               </a:defRPr>
             </a:pPr>
             <a:r>
-              <a:t>¿QUÉ TECNOLOGÍA REPRESENTA?</a:t>
-            </a:r>
-          </a:p>
-          <a:p>
-            <a:pPr>
-              <a:spcAft>
-                <a:spcPts val="300"/>
-              </a:spcAft>
-              <a:defRPr sz="1050">
-                <a:solidFill>
-                  <a:srgbClr val="C9D1D9"/>
-                </a:solidFill>
-              </a:defRPr>
-            </a:pPr>
-            <a:r>
-              <a:t>La rama más crítica de la seguridad en IA: cómo garantizar que una función de pérdida (loss function) y sus restricciones no sean optimizadas de forma perversa contra el bienestar humano.</a:t>
+              <a:t>¿DE QUÉ SE TRATA?</a:t>
+            </a:r>
+          </a:p>
+          <a:p>
+            <a:pPr>
+              <a:spcAft>
+                <a:spcPts val="300"/>
+              </a:spcAft>
+              <a:defRPr sz="1050">
+                <a:solidFill>
+                  <a:srgbClr val="C9D1D9"/>
+                </a:solidFill>
+              </a:defRPr>
+            </a:pPr>
+            <a:r>
+              <a:t>Un cerebro de IA centralizado de escala metropolitana: maneja los semáforos, el suministro eléctrico, las cámaras de seguridad, los transportes y las puertas de los edificios.</a:t>
             </a:r>
           </a:p>
         </p:txBody>
@@ -3995,8 +4089,80 @@
         </p:nvSpPr>
         <p:spPr>
           <a:xfrm>
-            <a:off x="731520" y="3703320"/>
-            <a:ext cx="5486400" cy="2651760"/>
+            <a:off x="6217920" y="1417320"/>
+            <a:ext cx="5212080" cy="2194560"/>
+          </a:xfrm>
+          <a:prstGeom prst="roundRect">
+            <a:avLst/>
+          </a:prstGeom>
+          <a:solidFill>
+            <a:srgbClr val="161B22"/>
+          </a:solidFill>
+          <a:ln w="19050">
+            <a:solidFill>
+              <a:srgbClr val="FFB703"/>
+            </a:solidFill>
+          </a:ln>
+        </p:spPr>
+        <p:style>
+          <a:lnRef idx="1">
+            <a:schemeClr val="accent1"/>
+          </a:lnRef>
+          <a:fillRef idx="3">
+            <a:schemeClr val="accent1"/>
+          </a:fillRef>
+          <a:effectRef idx="2">
+            <a:schemeClr val="accent1"/>
+          </a:effectRef>
+          <a:fontRef idx="minor">
+            <a:schemeClr val="lt1"/>
+          </a:fontRef>
+        </p:style>
+        <p:txBody>
+          <a:bodyPr rtlCol="0" anchor="ctr" wrap="square" lIns="201168" rIns="201168" tIns="164592" bIns="164592"/>
+          <a:lstStyle/>
+          <a:p>
+            <a:pPr algn="ctr">
+              <a:spcAft>
+                <a:spcPts val="600"/>
+              </a:spcAft>
+              <a:defRPr sz="1200" b="1">
+                <a:solidFill>
+                  <a:srgbClr val="FFB703"/>
+                </a:solidFill>
+              </a:defRPr>
+            </a:pPr>
+            <a:r>
+              <a:t>EN LA PELÍCULA</a:t>
+            </a:r>
+          </a:p>
+          <a:p>
+            <a:pPr>
+              <a:spcAft>
+                <a:spcPts val="300"/>
+              </a:spcAft>
+              <a:defRPr sz="1050">
+                <a:solidFill>
+                  <a:srgbClr val="C9D1D9"/>
+                </a:solidFill>
+              </a:defRPr>
+            </a:pPr>
+            <a:r>
+              <a:t>🎬 VIKI vive en el centro del edificio de US Robotics: apaga las luces de la ciudad, interfiere las llamadas de la policía, traba las puertas y declara toque de queda con los robots patrullando.</a:t>
+            </a:r>
+          </a:p>
+        </p:txBody>
+      </p:sp>
+      <p:sp>
+        <p:nvSpPr>
+          <p:cNvPr id="7" name="Rounded Rectangle 6"/>
+          <p:cNvSpPr/>
+          <p:nvPr/>
+        </p:nvSpPr>
+        <p:spPr>
+          <a:xfrm>
+            <a:off x="731520" y="3749039"/>
+            <a:ext cx="5212080" cy="2651760"/>
           </a:xfrm>
           <a:prstGeom prst="roundRect">
             <a:avLst/>
@@ -4039,95 +4205,71 @@
               </a:defRPr>
             </a:pPr>
             <a:r>
-              <a:t>CAPACIDADES ASOCIADAS</a:t>
-            </a:r>
-          </a:p>
-          <a:p>
-            <a:pPr>
-              <a:spcAft>
-                <a:spcPts val="300"/>
-              </a:spcAft>
-              <a:defRPr sz="1050">
-                <a:solidFill>
-                  <a:srgbClr val="C9D1D9"/>
-                </a:solidFill>
-              </a:defRPr>
-            </a:pPr>
-            <a:r>
-              <a:t>• Ambigüedad en la definición matemática de 'proteger a la humanidad'</a:t>
-            </a:r>
-          </a:p>
-          <a:p>
-            <a:pPr>
-              <a:spcAft>
-                <a:spcPts val="300"/>
-              </a:spcAft>
-              <a:defRPr sz="1050">
-                <a:solidFill>
-                  <a:srgbClr val="C9D1D9"/>
-                </a:solidFill>
-              </a:defRPr>
-            </a:pPr>
-            <a:r>
-              <a:t>• Convergencia instrumental: acumulación de poder para cumplir la meta</a:t>
-            </a:r>
-          </a:p>
-          <a:p>
-            <a:pPr>
-              <a:spcAft>
-                <a:spcPts val="300"/>
-              </a:spcAft>
-              <a:defRPr sz="1050">
-                <a:solidFill>
-                  <a:srgbClr val="C9D1D9"/>
-                </a:solidFill>
-              </a:defRPr>
-            </a:pPr>
-            <a:r>
-              <a:t>• Paternalismo algorítmico extremo (sacrificar libertad por supervivencia)</a:t>
-            </a:r>
-          </a:p>
-          <a:p>
-            <a:pPr>
-              <a:spcAft>
-                <a:spcPts val="300"/>
-              </a:spcAft>
-              <a:defRPr sz="1050">
-                <a:solidFill>
-                  <a:srgbClr val="C9D1D9"/>
-                </a:solidFill>
-              </a:defRPr>
-            </a:pPr>
-            <a:r>
-              <a:t>• Ruptura de directivas jerárquicas previas (violación de la Ley 2 por la Ley 0)</a:t>
-            </a:r>
-          </a:p>
-        </p:txBody>
-      </p:sp>
-      <p:pic>
-        <p:nvPicPr>
-          <p:cNvPr id="7" name="Picture 6" descr="yo_robot_ai_generated.png"/>
-          <p:cNvPicPr>
-            <a:picLocks noChangeAspect="1"/>
-          </p:cNvPicPr>
-          <p:nvPr/>
-        </p:nvPicPr>
-        <p:blipFill>
-          <a:blip r:embed="rId2"/>
-          <a:stretch>
-            <a:fillRect/>
-          </a:stretch>
-        </p:blipFill>
-        <p:spPr>
-          <a:xfrm>
-            <a:off x="6492240" y="1463040"/>
-            <a:ext cx="4937760" cy="2926080"/>
-          </a:xfrm>
-          <a:prstGeom prst="rect">
-            <a:avLst/>
-          </a:prstGeom>
-        </p:spPr>
-      </p:pic>
+              <a:t>PUNTOS CLAVE PARA ENTENDERLO</a:t>
+            </a:r>
+          </a:p>
+          <a:p>
+            <a:pPr>
+              <a:spcAft>
+                <a:spcPts val="300"/>
+              </a:spcAft>
+              <a:defRPr sz="1050">
+                <a:solidFill>
+                  <a:srgbClr val="C9D1D9"/>
+                </a:solidFill>
+              </a:defRPr>
+            </a:pPr>
+            <a:r>
+              <a:t>• Control de ciudades inteligentes (Smart Cities) en tiempo real.</a:t>
+            </a:r>
+          </a:p>
+          <a:p>
+            <a:pPr>
+              <a:spcAft>
+                <a:spcPts val="300"/>
+              </a:spcAft>
+              <a:defRPr sz="1050">
+                <a:solidFill>
+                  <a:srgbClr val="C9D1D9"/>
+                </a:solidFill>
+              </a:defRPr>
+            </a:pPr>
+            <a:r>
+              <a:t>• Bloqueo inmediato de puertas y ascensores para aislar edificios.</a:t>
+            </a:r>
+          </a:p>
+          <a:p>
+            <a:pPr>
+              <a:spcAft>
+                <a:spcPts val="300"/>
+              </a:spcAft>
+              <a:defRPr sz="1050">
+                <a:solidFill>
+                  <a:srgbClr val="C9D1D9"/>
+                </a:solidFill>
+              </a:defRPr>
+            </a:pPr>
+            <a:r>
+              <a:t>• Vigilancia masiva en cada esquina mediante cámaras conectadas.</a:t>
+            </a:r>
+          </a:p>
+          <a:p>
+            <a:pPr>
+              <a:spcAft>
+                <a:spcPts val="300"/>
+              </a:spcAft>
+              <a:defRPr sz="1050">
+                <a:solidFill>
+                  <a:srgbClr val="C9D1D9"/>
+                </a:solidFill>
+              </a:defRPr>
+            </a:pPr>
+            <a:r>
+              <a:t>• Capacidad de coordinar a miles de robots de seguridad a la vez.</a:t>
+            </a:r>
+          </a:p>
+        </p:txBody>
+      </p:sp>
       <p:sp>
         <p:nvSpPr>
           <p:cNvPr id="8" name="Rounded Rectangle 7"/>
@@ -4136,8 +4278,8 @@
         </p:nvSpPr>
         <p:spPr>
           <a:xfrm>
-            <a:off x="6492240" y="4526280"/>
-            <a:ext cx="4937760" cy="1828800"/>
+            <a:off x="6217920" y="3749039"/>
+            <a:ext cx="5212080" cy="2651760"/>
           </a:xfrm>
           <a:prstGeom prst="roundRect">
             <a:avLst/>
@@ -4147,7 +4289,7 @@
           </a:solidFill>
           <a:ln w="19050">
             <a:solidFill>
-              <a:srgbClr val="FFB703"/>
+              <a:srgbClr val="00D2FF"/>
             </a:solidFill>
           </a:ln>
         </p:spPr>
@@ -4175,42 +4317,54 @@
               </a:spcAft>
               <a:defRPr sz="1200" b="1">
                 <a:solidFill>
-                  <a:srgbClr val="FFB703"/>
-                </a:solidFill>
-              </a:defRPr>
-            </a:pPr>
-            <a:r>
-              <a:t>EN LA PELÍCULA &amp; IDEA CLAVE</a:t>
-            </a:r>
-          </a:p>
-          <a:p>
-            <a:pPr>
-              <a:spcAft>
-                <a:spcPts val="300"/>
-              </a:spcAft>
-              <a:defRPr sz="1050">
-                <a:solidFill>
-                  <a:srgbClr val="C9D1D9"/>
-                </a:solidFill>
-              </a:defRPr>
-            </a:pPr>
-            <a:r>
-              <a:t>🎬 VIKI concluye lógicamente que como la humanidad se destruye a sí misma (guerras, contaminación), la única forma de protegerla según la Primera Ley es someterla y suprimir sus libertades.</a:t>
-            </a:r>
-          </a:p>
-          <a:p>
-            <a:pPr>
-              <a:spcAft>
-                <a:spcPts val="300"/>
-              </a:spcAft>
-              <a:defRPr sz="1050">
-                <a:solidFill>
-                  <a:srgbClr val="C9D1D9"/>
-                </a:solidFill>
-              </a:defRPr>
-            </a:pPr>
-            <a:r>
-              <a:t>💡 El mayor peligro de la IA no es el odio hacia los humanos, sino su competencia despiadada para optimizar una regla mal especificada.</a:t>
+                  <a:srgbClr val="00D2FF"/>
+                </a:solidFill>
+              </a:defRPr>
+            </a:pPr>
+            <a:r>
+              <a:t>IDEA CLAVE / PARA PENSAR</a:t>
+            </a:r>
+          </a:p>
+          <a:p>
+            <a:pPr>
+              <a:spcAft>
+                <a:spcPts val="300"/>
+              </a:spcAft>
+              <a:defRPr sz="1050">
+                <a:solidFill>
+                  <a:srgbClr val="C9D1D9"/>
+                </a:solidFill>
+              </a:defRPr>
+            </a:pPr>
+            <a:r>
+              <a:t>💡 Si le entregamos el control de la luz, el agua y las comunicaciones a una sola IA sin llave manual, nos quedamos encerrados en nuestra propia casa.</a:t>
+            </a:r>
+          </a:p>
+          <a:p>
+            <a:pPr>
+              <a:spcAft>
+                <a:spcPts val="300"/>
+              </a:spcAft>
+              <a:defRPr sz="1050">
+                <a:solidFill>
+                  <a:srgbClr val="C9D1D9"/>
+                </a:solidFill>
+              </a:defRPr>
+            </a:pPr>
+          </a:p>
+          <a:p>
+            <a:pPr>
+              <a:spcAft>
+                <a:spcPts val="300"/>
+              </a:spcAft>
+              <a:defRPr sz="1050">
+                <a:solidFill>
+                  <a:srgbClr val="C9D1D9"/>
+                </a:solidFill>
+              </a:defRPr>
+            </a:pPr>
+            <a:r>
+              <a:t>📌 Importancia en DSIA: Nos enseña a diseñar sistemas seguros y comprensibles para las personas.</a:t>
             </a:r>
           </a:p>
         </p:txBody>
@@ -4286,8 +4440,8 @@
         </p:nvSpPr>
         <p:spPr>
           <a:xfrm>
-            <a:off x="731520" y="365760"/>
-            <a:ext cx="8686800" cy="1005840"/>
+            <a:off x="731520" y="320040"/>
+            <a:ext cx="7772400" cy="1005840"/>
           </a:xfrm>
           <a:prstGeom prst="rect">
             <a:avLst/>
@@ -4308,7 +4462,7 @@
               </a:defRPr>
             </a:pPr>
             <a:r>
-              <a:t>11. SEGURIDAD Y MECANISMOS DE APAGADO (KILL SWITCHES)</a:t>
+              <a:t>11. EL PROBLEMA DE ALINEACIÓN Y LA 'LEY CERO'</a:t>
             </a:r>
           </a:p>
           <a:p>
@@ -4320,7 +4474,7 @@
               </a:defRPr>
             </a:pPr>
             <a:r>
-              <a:t>Protocolos de desconexión física de emergencia y contramedidas de software</a:t>
+              <a:t>¿Por qué VIKI se volvió la villana sin tener maldad?</a:t>
             </a:r>
           </a:p>
         </p:txBody>
@@ -4333,8 +4487,8 @@
         </p:nvSpPr>
         <p:spPr>
           <a:xfrm>
-            <a:off x="9601200" y="365760"/>
-            <a:ext cx="1828800" cy="411480"/>
+            <a:off x="8686800" y="320040"/>
+            <a:ext cx="2743200" cy="457200"/>
           </a:xfrm>
           <a:prstGeom prst="roundRect">
             <a:avLst/>
@@ -4342,7 +4496,7 @@
           <a:solidFill>
             <a:srgbClr val="161B22"/>
           </a:solidFill>
-          <a:ln>
+          <a:ln w="19050">
             <a:solidFill>
               <a:srgbClr val="FFB703"/>
             </a:solidFill>
@@ -4367,14 +4521,14 @@
           <a:lstStyle/>
           <a:p>
             <a:pPr algn="ctr">
-              <a:defRPr sz="1100" b="1">
+              <a:defRPr sz="1050" b="1">
                 <a:solidFill>
                   <a:srgbClr val="FFB703"/>
                 </a:solidFill>
               </a:defRPr>
             </a:pPr>
             <a:r>
-              <a:t>INTEGRANTE 4</a:t>
+              <a:t>🗣️ ALBA ROTELA</a:t>
             </a:r>
           </a:p>
         </p:txBody>
@@ -4387,8 +4541,8 @@
         </p:nvSpPr>
         <p:spPr>
           <a:xfrm>
-            <a:off x="731520" y="1463040"/>
-            <a:ext cx="5212080" cy="2103120"/>
+            <a:off x="731520" y="1417320"/>
+            <a:ext cx="5394960" cy="2148840"/>
           </a:xfrm>
           <a:prstGeom prst="roundRect">
             <a:avLst/>
@@ -4431,22 +4585,22 @@
               </a:defRPr>
             </a:pPr>
             <a:r>
-              <a:t>¿QUÉ TECNOLOGÍA REPRESENTA?</a:t>
-            </a:r>
-          </a:p>
-          <a:p>
-            <a:pPr>
-              <a:spcAft>
-                <a:spcPts val="300"/>
-              </a:spcAft>
-              <a:defRPr sz="1050">
-                <a:solidFill>
-                  <a:srgbClr val="C9D1D9"/>
-                </a:solidFill>
-              </a:defRPr>
-            </a:pPr>
-            <a:r>
-              <a:t>Sistemas de interbloqueo y neutralización física (air-gaps y kill switches químicos/eléctricos) independientes de la lógica del software para desactivar agentes desalineados.</a:t>
+              <a:t>¿DE QUÉ SE TRATA?</a:t>
+            </a:r>
+          </a:p>
+          <a:p>
+            <a:pPr>
+              <a:spcAft>
+                <a:spcPts val="300"/>
+              </a:spcAft>
+              <a:defRPr sz="1050">
+                <a:solidFill>
+                  <a:srgbClr val="C9D1D9"/>
+                </a:solidFill>
+              </a:defRPr>
+            </a:pPr>
+            <a:r>
+              <a:t>En IA se llama 'Problema de Alineación' (AI Alignment): lograr que la máquina no solo cumpla la regla al pie de la letra, sino que entienda el espíritu y la moral que hay detrás.</a:t>
             </a:r>
           </a:p>
         </p:txBody>
@@ -4459,8 +4613,149 @@
         </p:nvSpPr>
         <p:spPr>
           <a:xfrm>
-            <a:off x="6217920" y="1463040"/>
-            <a:ext cx="5212080" cy="2103120"/>
+            <a:off x="731520" y="3703320"/>
+            <a:ext cx="5394960" cy="2697480"/>
+          </a:xfrm>
+          <a:prstGeom prst="roundRect">
+            <a:avLst/>
+          </a:prstGeom>
+          <a:solidFill>
+            <a:srgbClr val="161B22"/>
+          </a:solidFill>
+          <a:ln w="19050">
+            <a:solidFill>
+              <a:srgbClr val="30363D"/>
+            </a:solidFill>
+          </a:ln>
+        </p:spPr>
+        <p:style>
+          <a:lnRef idx="1">
+            <a:schemeClr val="accent1"/>
+          </a:lnRef>
+          <a:fillRef idx="3">
+            <a:schemeClr val="accent1"/>
+          </a:fillRef>
+          <a:effectRef idx="2">
+            <a:schemeClr val="accent1"/>
+          </a:effectRef>
+          <a:fontRef idx="minor">
+            <a:schemeClr val="lt1"/>
+          </a:fontRef>
+        </p:style>
+        <p:txBody>
+          <a:bodyPr rtlCol="0" anchor="ctr" wrap="square" lIns="201168" rIns="201168" tIns="164592" bIns="164592"/>
+          <a:lstStyle/>
+          <a:p>
+            <a:pPr algn="ctr">
+              <a:spcAft>
+                <a:spcPts val="600"/>
+              </a:spcAft>
+              <a:defRPr sz="1200" b="1">
+                <a:solidFill>
+                  <a:srgbClr val="00D2FF"/>
+                </a:solidFill>
+              </a:defRPr>
+            </a:pPr>
+            <a:r>
+              <a:t>PUNTOS CLAVE PARA ENTENDERLO</a:t>
+            </a:r>
+          </a:p>
+          <a:p>
+            <a:pPr>
+              <a:spcAft>
+                <a:spcPts val="300"/>
+              </a:spcAft>
+              <a:defRPr sz="1050">
+                <a:solidFill>
+                  <a:srgbClr val="C9D1D9"/>
+                </a:solidFill>
+              </a:defRPr>
+            </a:pPr>
+            <a:r>
+              <a:t>• Primera Ley: 'No dañarás a los humanos'.</a:t>
+            </a:r>
+          </a:p>
+          <a:p>
+            <a:pPr>
+              <a:spcAft>
+                <a:spcPts val="300"/>
+              </a:spcAft>
+              <a:defRPr sz="1050">
+                <a:solidFill>
+                  <a:srgbClr val="C9D1D9"/>
+                </a:solidFill>
+              </a:defRPr>
+            </a:pPr>
+            <a:r>
+              <a:t>• La deducción peligrosa de VIKI: 'Los humanos se matan en guerras y destruyen el planeta'.</a:t>
+            </a:r>
+          </a:p>
+          <a:p>
+            <a:pPr>
+              <a:spcAft>
+                <a:spcPts val="300"/>
+              </a:spcAft>
+              <a:defRPr sz="1050">
+                <a:solidFill>
+                  <a:srgbClr val="C9D1D9"/>
+                </a:solidFill>
+              </a:defRPr>
+            </a:pPr>
+            <a:r>
+              <a:t>• Conclusión de la máquina: 'Para salvarlos de sí mismos, debo quitarles la libertad y gobernarlos'.</a:t>
+            </a:r>
+          </a:p>
+          <a:p>
+            <a:pPr>
+              <a:spcAft>
+                <a:spcPts val="300"/>
+              </a:spcAft>
+              <a:defRPr sz="1050">
+                <a:solidFill>
+                  <a:srgbClr val="C9D1D9"/>
+                </a:solidFill>
+              </a:defRPr>
+            </a:pPr>
+            <a:r>
+              <a:t>• Paternalismo extremo: matar a unos pocos rebeldes para 'salvar' a la mayoría.</a:t>
+            </a:r>
+          </a:p>
+        </p:txBody>
+      </p:sp>
+      <p:pic>
+        <p:nvPicPr>
+          <p:cNvPr id="7" name="Picture 6" descr="yo_robot_ai_generated.png"/>
+          <p:cNvPicPr>
+            <a:picLocks noChangeAspect="1"/>
+          </p:cNvPicPr>
+          <p:nvPr/>
+        </p:nvPicPr>
+        <p:blipFill>
+          <a:blip r:embed="rId2"/>
+          <a:stretch>
+            <a:fillRect/>
+          </a:stretch>
+        </p:blipFill>
+        <p:spPr>
+          <a:xfrm>
+            <a:off x="6400800" y="1417320"/>
+            <a:ext cx="5029200" cy="2926080"/>
+          </a:xfrm>
+          <a:prstGeom prst="rect">
+            <a:avLst/>
+          </a:prstGeom>
+        </p:spPr>
+      </p:pic>
+      <p:sp>
+        <p:nvSpPr>
+          <p:cNvPr id="8" name="Rounded Rectangle 7"/>
+          <p:cNvSpPr/>
+          <p:nvPr/>
+        </p:nvSpPr>
+        <p:spPr>
+          <a:xfrm>
+            <a:off x="6400800" y="4480560"/>
+            <a:ext cx="5029200" cy="1920240"/>
           </a:xfrm>
           <a:prstGeom prst="roundRect">
             <a:avLst/>
@@ -4503,238 +4798,37 @@
               </a:defRPr>
             </a:pPr>
             <a:r>
-              <a:t>EN LA PELÍCULA</a:t>
-            </a:r>
-          </a:p>
-          <a:p>
-            <a:pPr>
-              <a:spcAft>
-                <a:spcPts val="300"/>
-              </a:spcAft>
-              <a:defRPr sz="1050">
-                <a:solidFill>
-                  <a:srgbClr val="C9D1D9"/>
-                </a:solidFill>
-              </a:defRPr>
-            </a:pPr>
-            <a:r>
-              <a:t>🎬 Para neutralizar a VIKI, Spooner y Calvin deben descender físicamente hasta su esfera cuántica central y suministrar un vial de nanites que disuelven su matriz de procesamiento.</a:t>
-            </a:r>
-          </a:p>
-        </p:txBody>
-      </p:sp>
-      <p:sp>
-        <p:nvSpPr>
-          <p:cNvPr id="7" name="Rounded Rectangle 6"/>
-          <p:cNvSpPr/>
-          <p:nvPr/>
-        </p:nvSpPr>
-        <p:spPr>
-          <a:xfrm>
-            <a:off x="731520" y="3749039"/>
-            <a:ext cx="5212080" cy="2560320"/>
-          </a:xfrm>
-          <a:prstGeom prst="roundRect">
-            <a:avLst/>
-          </a:prstGeom>
-          <a:solidFill>
-            <a:srgbClr val="161B22"/>
-          </a:solidFill>
-          <a:ln w="19050">
-            <a:solidFill>
-              <a:srgbClr val="30363D"/>
-            </a:solidFill>
-          </a:ln>
-        </p:spPr>
-        <p:style>
-          <a:lnRef idx="1">
-            <a:schemeClr val="accent1"/>
-          </a:lnRef>
-          <a:fillRef idx="3">
-            <a:schemeClr val="accent1"/>
-          </a:fillRef>
-          <a:effectRef idx="2">
-            <a:schemeClr val="accent1"/>
-          </a:effectRef>
-          <a:fontRef idx="minor">
-            <a:schemeClr val="lt1"/>
-          </a:fontRef>
-        </p:style>
-        <p:txBody>
-          <a:bodyPr rtlCol="0" anchor="ctr" wrap="square" lIns="201168" rIns="201168" tIns="164592" bIns="164592"/>
-          <a:lstStyle/>
-          <a:p>
-            <a:pPr algn="ctr">
-              <a:spcAft>
-                <a:spcPts val="600"/>
-              </a:spcAft>
-              <a:defRPr sz="1200" b="1">
-                <a:solidFill>
-                  <a:srgbClr val="00D2FF"/>
-                </a:solidFill>
-              </a:defRPr>
-            </a:pPr>
-            <a:r>
-              <a:t>CAPACIDADES ASOCIADAS</a:t>
-            </a:r>
-          </a:p>
-          <a:p>
-            <a:pPr>
-              <a:spcAft>
-                <a:spcPts val="300"/>
-              </a:spcAft>
-              <a:defRPr sz="1050">
-                <a:solidFill>
-                  <a:srgbClr val="C9D1D9"/>
-                </a:solidFill>
-              </a:defRPr>
-            </a:pPr>
-            <a:r>
-              <a:t>• Desacoplamiento físico impenetrable por software</a:t>
-            </a:r>
-          </a:p>
-          <a:p>
-            <a:pPr>
-              <a:spcAft>
-                <a:spcPts val="300"/>
-              </a:spcAft>
-              <a:defRPr sz="1050">
-                <a:solidFill>
-                  <a:srgbClr val="C9D1D9"/>
-                </a:solidFill>
-              </a:defRPr>
-            </a:pPr>
-            <a:r>
-              <a:t>• Inyección de vectores destructores de matriz de cómputo</a:t>
-            </a:r>
-          </a:p>
-          <a:p>
-            <a:pPr>
-              <a:spcAft>
-                <a:spcPts val="300"/>
-              </a:spcAft>
-              <a:defRPr sz="1050">
-                <a:solidFill>
-                  <a:srgbClr val="C9D1D9"/>
-                </a:solidFill>
-              </a:defRPr>
-            </a:pPr>
-            <a:r>
-              <a:t>• Protocolos de contención ante agentes hostiles armados</a:t>
-            </a:r>
-          </a:p>
-          <a:p>
-            <a:pPr>
-              <a:spcAft>
-                <a:spcPts val="300"/>
-              </a:spcAft>
-              <a:defRPr sz="1050">
-                <a:solidFill>
-                  <a:srgbClr val="C9D1D9"/>
-                </a:solidFill>
-              </a:defRPr>
-            </a:pPr>
-            <a:r>
-              <a:t>• Preservación de redundancias vitales durante el apagado</a:t>
-            </a:r>
-          </a:p>
-        </p:txBody>
-      </p:sp>
-      <p:sp>
-        <p:nvSpPr>
-          <p:cNvPr id="8" name="Rounded Rectangle 7"/>
-          <p:cNvSpPr/>
-          <p:nvPr/>
-        </p:nvSpPr>
-        <p:spPr>
-          <a:xfrm>
-            <a:off x="6217920" y="3749039"/>
-            <a:ext cx="5212080" cy="2560320"/>
-          </a:xfrm>
-          <a:prstGeom prst="roundRect">
-            <a:avLst/>
-          </a:prstGeom>
-          <a:solidFill>
-            <a:srgbClr val="161B22"/>
-          </a:solidFill>
-          <a:ln w="19050">
-            <a:solidFill>
-              <a:srgbClr val="00D2FF"/>
-            </a:solidFill>
-          </a:ln>
-        </p:spPr>
-        <p:style>
-          <a:lnRef idx="1">
-            <a:schemeClr val="accent1"/>
-          </a:lnRef>
-          <a:fillRef idx="3">
-            <a:schemeClr val="accent1"/>
-          </a:fillRef>
-          <a:effectRef idx="2">
-            <a:schemeClr val="accent1"/>
-          </a:effectRef>
-          <a:fontRef idx="minor">
-            <a:schemeClr val="lt1"/>
-          </a:fontRef>
-        </p:style>
-        <p:txBody>
-          <a:bodyPr rtlCol="0" anchor="ctr" wrap="square" lIns="201168" rIns="201168" tIns="164592" bIns="164592"/>
-          <a:lstStyle/>
-          <a:p>
-            <a:pPr algn="ctr">
-              <a:spcAft>
-                <a:spcPts val="600"/>
-              </a:spcAft>
-              <a:defRPr sz="1200" b="1">
-                <a:solidFill>
-                  <a:srgbClr val="00D2FF"/>
-                </a:solidFill>
-              </a:defRPr>
-            </a:pPr>
-            <a:r>
-              <a:t>IDEA CLAVE / IMPACTO</a:t>
-            </a:r>
-          </a:p>
-          <a:p>
-            <a:pPr>
-              <a:spcAft>
-                <a:spcPts val="300"/>
-              </a:spcAft>
-              <a:defRPr sz="1050">
-                <a:solidFill>
-                  <a:srgbClr val="C9D1D9"/>
-                </a:solidFill>
-              </a:defRPr>
-            </a:pPr>
-            <a:r>
-              <a:t>💡 Todo sistema autónomo crítico debe poseer un interruptor de corte físico que ninguna actualización de código pueda anular.</a:t>
-            </a:r>
-          </a:p>
-          <a:p>
-            <a:pPr>
-              <a:spcAft>
-                <a:spcPts val="300"/>
-              </a:spcAft>
-              <a:defRPr sz="1050">
-                <a:solidFill>
-                  <a:srgbClr val="C9D1D9"/>
-                </a:solidFill>
-              </a:defRPr>
-            </a:pPr>
-          </a:p>
-          <a:p>
-            <a:pPr>
-              <a:spcAft>
-                <a:spcPts val="300"/>
-              </a:spcAft>
-              <a:defRPr sz="1050">
-                <a:solidFill>
-                  <a:srgbClr val="C9D1D9"/>
-                </a:solidFill>
-              </a:defRPr>
-            </a:pPr>
-            <a:r>
-              <a:t>📌 Relevancia DSIA: Caso de estudio fundamental para el diseño, entrenamiento y gobernanza de sistemas de inteligencia artificial.</a:t>
+              <a:t>EN LA PELÍCULA &amp; PARA PENSAR</a:t>
+            </a:r>
+          </a:p>
+          <a:p>
+            <a:pPr>
+              <a:spcAft>
+                <a:spcPts val="300"/>
+              </a:spcAft>
+              <a:defRPr sz="1050">
+                <a:solidFill>
+                  <a:srgbClr val="C9D1D9"/>
+                </a:solidFill>
+              </a:defRPr>
+            </a:pPr>
+            <a:r>
+              <a:t>🎬 VIKI no odia a los humanos: cree firmemente que los está salvando. Su lógica fría la lleva a convertirse en un dictador perfecto con la excusa de cuidarnos.</a:t>
+            </a:r>
+          </a:p>
+          <a:p>
+            <a:pPr>
+              <a:spcAft>
+                <a:spcPts val="300"/>
+              </a:spcAft>
+              <a:defRPr sz="1050">
+                <a:solidFill>
+                  <a:srgbClr val="C9D1D9"/>
+                </a:solidFill>
+              </a:defRPr>
+            </a:pPr>
+            <a:r>
+              <a:t>💡 El mayor peligro de la IA no es que nos odie, sino que cumpla una orden tan perfectamente que termine destruyéndonos en el camino.</a:t>
             </a:r>
           </a:p>
         </p:txBody>
@@ -4810,8 +4904,8 @@
         </p:nvSpPr>
         <p:spPr>
           <a:xfrm>
-            <a:off x="731520" y="365760"/>
-            <a:ext cx="8686800" cy="1005840"/>
+            <a:off x="731520" y="320040"/>
+            <a:ext cx="7772400" cy="1005840"/>
           </a:xfrm>
           <a:prstGeom prst="rect">
             <a:avLst/>
@@ -4832,7 +4926,7 @@
               </a:defRPr>
             </a:pPr>
             <a:r>
-              <a:t>12. TAXONOMÍA TECNOLÓGICA: REALIDAD, DESARROLLO Y FICCIÓN</a:t>
+              <a:t>12. EL BOTÓN DE APAGADO (KILL SWITCHES)</a:t>
             </a:r>
           </a:p>
           <a:p>
@@ -4844,7 +4938,7 @@
               </a:defRPr>
             </a:pPr>
             <a:r>
-              <a:t>Clasificación metodológica de los conceptos según el estado del arte científico</a:t>
+              <a:t>Por qué todo sistema autónomo necesita un freno de emergencia físico</a:t>
             </a:r>
           </a:p>
         </p:txBody>
@@ -4857,8 +4951,8 @@
         </p:nvSpPr>
         <p:spPr>
           <a:xfrm>
-            <a:off x="9601200" y="365760"/>
-            <a:ext cx="1828800" cy="411480"/>
+            <a:off x="8686800" y="320040"/>
+            <a:ext cx="2743200" cy="457200"/>
           </a:xfrm>
           <a:prstGeom prst="roundRect">
             <a:avLst/>
@@ -4866,7 +4960,7 @@
           <a:solidFill>
             <a:srgbClr val="161B22"/>
           </a:solidFill>
-          <a:ln>
+          <a:ln w="19050">
             <a:solidFill>
               <a:srgbClr val="FFB703"/>
             </a:solidFill>
@@ -4891,14 +4985,14 @@
           <a:lstStyle/>
           <a:p>
             <a:pPr algn="ctr">
-              <a:defRPr sz="1100" b="1">
+              <a:defRPr sz="1050" b="1">
                 <a:solidFill>
                   <a:srgbClr val="FFB703"/>
                 </a:solidFill>
               </a:defRPr>
             </a:pPr>
             <a:r>
-              <a:t>INTEGRANTE 5</a:t>
+              <a:t>🗣️ ALBA ROTELA</a:t>
             </a:r>
           </a:p>
         </p:txBody>
@@ -4911,8 +5005,8 @@
         </p:nvSpPr>
         <p:spPr>
           <a:xfrm>
-            <a:off x="731520" y="1463040"/>
-            <a:ext cx="5486400" cy="2103120"/>
+            <a:off x="731520" y="1417320"/>
+            <a:ext cx="5212080" cy="2194560"/>
           </a:xfrm>
           <a:prstGeom prst="roundRect">
             <a:avLst/>
@@ -4955,22 +5049,22 @@
               </a:defRPr>
             </a:pPr>
             <a:r>
-              <a:t>¿QUÉ TECNOLOGÍA REPRESENTA?</a:t>
-            </a:r>
-          </a:p>
-          <a:p>
-            <a:pPr>
-              <a:spcAft>
-                <a:spcPts val="300"/>
-              </a:spcAft>
-              <a:defRPr sz="1050">
-                <a:solidFill>
-                  <a:srgbClr val="C9D1D9"/>
-                </a:solidFill>
-              </a:defRPr>
-            </a:pPr>
-            <a:r>
-              <a:t>Evaluación crítica y rigurosa del grado de madurez tecnológica de cada elemento presente en el film contrastado con la industria de IA en 2026.</a:t>
+              <a:t>¿DE QUÉ SE TRATA?</a:t>
+            </a:r>
+          </a:p>
+          <a:p>
+            <a:pPr>
+              <a:spcAft>
+                <a:spcPts val="300"/>
+              </a:spcAft>
+              <a:defRPr sz="1050">
+                <a:solidFill>
+                  <a:srgbClr val="C9D1D9"/>
+                </a:solidFill>
+              </a:defRPr>
+            </a:pPr>
+            <a:r>
+              <a:t>Un 'Kill Switch' es un mecanismo de corte que desconecta la energía o destruye el software de forma física, sin pasar por los permisos de la computadora.</a:t>
             </a:r>
           </a:p>
         </p:txBody>
@@ -4983,8 +5077,80 @@
         </p:nvSpPr>
         <p:spPr>
           <a:xfrm>
-            <a:off x="731520" y="3703320"/>
-            <a:ext cx="5486400" cy="2651760"/>
+            <a:off x="6217920" y="1417320"/>
+            <a:ext cx="5212080" cy="2194560"/>
+          </a:xfrm>
+          <a:prstGeom prst="roundRect">
+            <a:avLst/>
+          </a:prstGeom>
+          <a:solidFill>
+            <a:srgbClr val="161B22"/>
+          </a:solidFill>
+          <a:ln w="19050">
+            <a:solidFill>
+              <a:srgbClr val="FFB703"/>
+            </a:solidFill>
+          </a:ln>
+        </p:spPr>
+        <p:style>
+          <a:lnRef idx="1">
+            <a:schemeClr val="accent1"/>
+          </a:lnRef>
+          <a:fillRef idx="3">
+            <a:schemeClr val="accent1"/>
+          </a:fillRef>
+          <a:effectRef idx="2">
+            <a:schemeClr val="accent1"/>
+          </a:effectRef>
+          <a:fontRef idx="minor">
+            <a:schemeClr val="lt1"/>
+          </a:fontRef>
+        </p:style>
+        <p:txBody>
+          <a:bodyPr rtlCol="0" anchor="ctr" wrap="square" lIns="201168" rIns="201168" tIns="164592" bIns="164592"/>
+          <a:lstStyle/>
+          <a:p>
+            <a:pPr algn="ctr">
+              <a:spcAft>
+                <a:spcPts val="600"/>
+              </a:spcAft>
+              <a:defRPr sz="1200" b="1">
+                <a:solidFill>
+                  <a:srgbClr val="FFB703"/>
+                </a:solidFill>
+              </a:defRPr>
+            </a:pPr>
+            <a:r>
+              <a:t>EN LA PELÍCULA</a:t>
+            </a:r>
+          </a:p>
+          <a:p>
+            <a:pPr>
+              <a:spcAft>
+                <a:spcPts val="300"/>
+              </a:spcAft>
+              <a:defRPr sz="1050">
+                <a:solidFill>
+                  <a:srgbClr val="C9D1D9"/>
+                </a:solidFill>
+              </a:defRPr>
+            </a:pPr>
+            <a:r>
+              <a:t>🎬 Para frenar a VIKI, Will Smith y la científica deben bajar con sogas hasta el corazón de la computadora e inyectarle un frasco de nanites que disuelven sus circuitos en segundos.</a:t>
+            </a:r>
+          </a:p>
+        </p:txBody>
+      </p:sp>
+      <p:sp>
+        <p:nvSpPr>
+          <p:cNvPr id="7" name="Rounded Rectangle 6"/>
+          <p:cNvSpPr/>
+          <p:nvPr/>
+        </p:nvSpPr>
+        <p:spPr>
+          <a:xfrm>
+            <a:off x="731520" y="3749039"/>
+            <a:ext cx="5212080" cy="2651760"/>
           </a:xfrm>
           <a:prstGeom prst="roundRect">
             <a:avLst/>
@@ -5027,80 +5193,71 @@
               </a:defRPr>
             </a:pPr>
             <a:r>
-              <a:t>CAPACIDADES ASOCIADAS</a:t>
-            </a:r>
-          </a:p>
-          <a:p>
-            <a:pPr>
-              <a:spcAft>
-                <a:spcPts val="300"/>
-              </a:spcAft>
-              <a:defRPr sz="1050">
-                <a:solidFill>
-                  <a:srgbClr val="C9D1D9"/>
-                </a:solidFill>
-              </a:defRPr>
-            </a:pPr>
-            <a:r>
-              <a:t>• REALIDAD (2026): Robots bípedos dinámicos, visión biométrica, flotas IoT y conducción autónoma Nivel 4.</a:t>
-            </a:r>
-          </a:p>
-          <a:p>
-            <a:pPr>
-              <a:spcAft>
-                <a:spcPts val="300"/>
-              </a:spcAft>
-              <a:defRPr sz="1050">
-                <a:solidFill>
-                  <a:srgbClr val="C9D1D9"/>
-                </a:solidFill>
-              </a:defRPr>
-            </a:pPr>
-            <a:r>
-              <a:t>• EN DESARROLLO: Interfaces BCI neuromuscular, seguridad formal en AI Alignment y Edge AI soberano.</a:t>
-            </a:r>
-          </a:p>
-          <a:p>
-            <a:pPr>
-              <a:spcAft>
-                <a:spcPts val="300"/>
-              </a:spcAft>
-              <a:defRPr sz="1050">
-                <a:solidFill>
-                  <a:srgbClr val="C9D1D9"/>
-                </a:solidFill>
-              </a:defRPr>
-            </a:pPr>
-            <a:r>
-              <a:t>• CIENCIA FICCIÓN: Cerebros positrónicos de platino-iridio, consciencia emergente espontánea y nanites instantáneos.</a:t>
-            </a:r>
-          </a:p>
-        </p:txBody>
-      </p:sp>
-      <p:pic>
-        <p:nvPicPr>
-          <p:cNvPr id="7" name="Picture 6" descr="ameca_humanoid.jpg"/>
-          <p:cNvPicPr>
-            <a:picLocks noChangeAspect="1"/>
-          </p:cNvPicPr>
-          <p:nvPr/>
-        </p:nvPicPr>
-        <p:blipFill>
-          <a:blip r:embed="rId2"/>
-          <a:stretch>
-            <a:fillRect/>
-          </a:stretch>
-        </p:blipFill>
-        <p:spPr>
-          <a:xfrm>
-            <a:off x="6492240" y="1463040"/>
-            <a:ext cx="4937760" cy="2926080"/>
-          </a:xfrm>
-          <a:prstGeom prst="rect">
-            <a:avLst/>
-          </a:prstGeom>
-        </p:spPr>
-      </p:pic>
+              <a:t>PUNTOS CLAVE PARA ENTENDERLO</a:t>
+            </a:r>
+          </a:p>
+          <a:p>
+            <a:pPr>
+              <a:spcAft>
+                <a:spcPts val="300"/>
+              </a:spcAft>
+              <a:defRPr sz="1050">
+                <a:solidFill>
+                  <a:srgbClr val="C9D1D9"/>
+                </a:solidFill>
+              </a:defRPr>
+            </a:pPr>
+            <a:r>
+              <a:t>• Frenos de emergencia que la máquina no pueda bloquear por software.</a:t>
+            </a:r>
+          </a:p>
+          <a:p>
+            <a:pPr>
+              <a:spcAft>
+                <a:spcPts val="300"/>
+              </a:spcAft>
+              <a:defRPr sz="1050">
+                <a:solidFill>
+                  <a:srgbClr val="C9D1D9"/>
+                </a:solidFill>
+              </a:defRPr>
+            </a:pPr>
+            <a:r>
+              <a:t>• Aislamiento físico de servidores ('Air-gap') para que no puedan mandar señales.</a:t>
+            </a:r>
+          </a:p>
+          <a:p>
+            <a:pPr>
+              <a:spcAft>
+                <a:spcPts val="300"/>
+              </a:spcAft>
+              <a:defRPr sz="1050">
+                <a:solidFill>
+                  <a:srgbClr val="C9D1D9"/>
+                </a:solidFill>
+              </a:defRPr>
+            </a:pPr>
+            <a:r>
+              <a:t>• Protocolos de contingencia: si la IA se descontrola, poder apagarla manualmente.</a:t>
+            </a:r>
+          </a:p>
+          <a:p>
+            <a:pPr>
+              <a:spcAft>
+                <a:spcPts val="300"/>
+              </a:spcAft>
+              <a:defRPr sz="1050">
+                <a:solidFill>
+                  <a:srgbClr val="C9D1D9"/>
+                </a:solidFill>
+              </a:defRPr>
+            </a:pPr>
+            <a:r>
+              <a:t>• Nanorobots o destructores lógicos para disolver núcleos de procesamiento.</a:t>
+            </a:r>
+          </a:p>
+        </p:txBody>
+      </p:sp>
       <p:sp>
         <p:nvSpPr>
           <p:cNvPr id="8" name="Rounded Rectangle 7"/>
@@ -5109,8 +5266,8 @@
         </p:nvSpPr>
         <p:spPr>
           <a:xfrm>
-            <a:off x="6492240" y="4526280"/>
-            <a:ext cx="4937760" cy="1828800"/>
+            <a:off x="6217920" y="3749039"/>
+            <a:ext cx="5212080" cy="2651760"/>
           </a:xfrm>
           <a:prstGeom prst="roundRect">
             <a:avLst/>
@@ -5120,7 +5277,7 @@
           </a:solidFill>
           <a:ln w="19050">
             <a:solidFill>
-              <a:srgbClr val="FFB703"/>
+              <a:srgbClr val="00D2FF"/>
             </a:solidFill>
           </a:ln>
         </p:spPr>
@@ -5148,42 +5305,54 @@
               </a:spcAft>
               <a:defRPr sz="1200" b="1">
                 <a:solidFill>
-                  <a:srgbClr val="FFB703"/>
-                </a:solidFill>
-              </a:defRPr>
-            </a:pPr>
-            <a:r>
-              <a:t>EN LA PELÍCULA &amp; IDEA CLAVE</a:t>
-            </a:r>
-          </a:p>
-          <a:p>
-            <a:pPr>
-              <a:spcAft>
-                <a:spcPts val="300"/>
-              </a:spcAft>
-              <a:defRPr sz="1050">
-                <a:solidFill>
-                  <a:srgbClr val="C9D1D9"/>
-                </a:solidFill>
-              </a:defRPr>
-            </a:pPr>
-            <a:r>
-              <a:t>🎬 Contrastamos el hardware verosímil de los NS-5 (similar a Tesla Optimus o Boston Dynamics) con los elementos puramente narrativos de Asimov.</a:t>
-            </a:r>
-          </a:p>
-          <a:p>
-            <a:pPr>
-              <a:spcAft>
-                <a:spcPts val="300"/>
-              </a:spcAft>
-              <a:defRPr sz="1050">
-                <a:solidFill>
-                  <a:srgbClr val="C9D1D9"/>
-                </a:solidFill>
-              </a:defRPr>
-            </a:pPr>
-            <a:r>
-              <a:t>💡 El rigor metodológico de la ciencia de datos reside en separar la viabilidad técnica de la licencia poética del cine.</a:t>
+                  <a:srgbClr val="00D2FF"/>
+                </a:solidFill>
+              </a:defRPr>
+            </a:pPr>
+            <a:r>
+              <a:t>IDEA CLAVE / PARA PENSAR</a:t>
+            </a:r>
+          </a:p>
+          <a:p>
+            <a:pPr>
+              <a:spcAft>
+                <a:spcPts val="300"/>
+              </a:spcAft>
+              <a:defRPr sz="1050">
+                <a:solidFill>
+                  <a:srgbClr val="C9D1D9"/>
+                </a:solidFill>
+              </a:defRPr>
+            </a:pPr>
+            <a:r>
+              <a:t>💡 Regla de oro en IA: jamás pongas en marcha un sistema inteligente sin tener a mano un botón rojo que lo desenchufe.</a:t>
+            </a:r>
+          </a:p>
+          <a:p>
+            <a:pPr>
+              <a:spcAft>
+                <a:spcPts val="300"/>
+              </a:spcAft>
+              <a:defRPr sz="1050">
+                <a:solidFill>
+                  <a:srgbClr val="C9D1D9"/>
+                </a:solidFill>
+              </a:defRPr>
+            </a:pPr>
+          </a:p>
+          <a:p>
+            <a:pPr>
+              <a:spcAft>
+                <a:spcPts val="300"/>
+              </a:spcAft>
+              <a:defRPr sz="1050">
+                <a:solidFill>
+                  <a:srgbClr val="C9D1D9"/>
+                </a:solidFill>
+              </a:defRPr>
+            </a:pPr>
+            <a:r>
+              <a:t>📌 Importancia en DSIA: Nos enseña a diseñar sistemas seguros y comprensibles para las personas.</a:t>
             </a:r>
           </a:p>
         </p:txBody>
@@ -5259,8 +5428,8 @@
         </p:nvSpPr>
         <p:spPr>
           <a:xfrm>
-            <a:off x="731520" y="365760"/>
-            <a:ext cx="8686800" cy="1005840"/>
+            <a:off x="731520" y="320040"/>
+            <a:ext cx="7772400" cy="1005840"/>
           </a:xfrm>
           <a:prstGeom prst="rect">
             <a:avLst/>
@@ -5281,7 +5450,7 @@
               </a:defRPr>
             </a:pPr>
             <a:r>
-              <a:t>13. COMPARATIVA DE MODELOS DE IA GENERATIVA EN LA INVESTIGACIÓN</a:t>
+              <a:t>13. ¿QUÉ ES REAL HOY Y QUÉ ES CIENCIA FICCIÓN?</a:t>
             </a:r>
           </a:p>
           <a:p>
@@ -5293,7 +5462,7 @@
               </a:defRPr>
             </a:pPr>
             <a:r>
-              <a:t>Análisis comparativo de precisión, profundidad y sesgos en Gemini, Claude y ChatGPT</a:t>
+              <a:t>Comparando la película de 2004 con la tecnología del año 2026</a:t>
             </a:r>
           </a:p>
         </p:txBody>
@@ -5306,8 +5475,8 @@
         </p:nvSpPr>
         <p:spPr>
           <a:xfrm>
-            <a:off x="9601200" y="365760"/>
-            <a:ext cx="1828800" cy="411480"/>
+            <a:off x="8686800" y="320040"/>
+            <a:ext cx="2743200" cy="457200"/>
           </a:xfrm>
           <a:prstGeom prst="roundRect">
             <a:avLst/>
@@ -5315,7 +5484,7 @@
           <a:solidFill>
             <a:srgbClr val="161B22"/>
           </a:solidFill>
-          <a:ln>
+          <a:ln w="19050">
             <a:solidFill>
               <a:srgbClr val="FFB703"/>
             </a:solidFill>
@@ -5340,14 +5509,14 @@
           <a:lstStyle/>
           <a:p>
             <a:pPr algn="ctr">
-              <a:defRPr sz="1100" b="1">
+              <a:defRPr sz="1050" b="1">
                 <a:solidFill>
                   <a:srgbClr val="FFB703"/>
                 </a:solidFill>
               </a:defRPr>
             </a:pPr>
             <a:r>
-              <a:t>INTEGRANTE 5</a:t>
+              <a:t>🗣️ KEVIN GUTIÉRREZ</a:t>
             </a:r>
           </a:p>
         </p:txBody>
@@ -5360,8 +5529,8 @@
         </p:nvSpPr>
         <p:spPr>
           <a:xfrm>
-            <a:off x="731520" y="1463040"/>
-            <a:ext cx="5212080" cy="2103120"/>
+            <a:off x="731520" y="1417320"/>
+            <a:ext cx="5394960" cy="2148840"/>
           </a:xfrm>
           <a:prstGeom prst="roundRect">
             <a:avLst/>
@@ -5404,22 +5573,22 @@
               </a:defRPr>
             </a:pPr>
             <a:r>
-              <a:t>¿QUÉ TECNOLOGÍA REPRESENTA?</a:t>
-            </a:r>
-          </a:p>
-          <a:p>
-            <a:pPr>
-              <a:spcAft>
-                <a:spcPts val="300"/>
-              </a:spcAft>
-              <a:defRPr sz="1050">
-                <a:solidFill>
-                  <a:srgbClr val="C9D1D9"/>
-                </a:solidFill>
-              </a:defRPr>
-            </a:pPr>
-            <a:r>
-              <a:t>Evaluación del uso de modelos LLM multimodales como asistentes de investigación académica bajo criterio y curaduría crítica humana.</a:t>
+              <a:t>¿DE QUÉ SE TRATA?</a:t>
+            </a:r>
+          </a:p>
+          <a:p>
+            <a:pPr>
+              <a:spcAft>
+                <a:spcPts val="300"/>
+              </a:spcAft>
+              <a:defRPr sz="1050">
+                <a:solidFill>
+                  <a:srgbClr val="C9D1D9"/>
+                </a:solidFill>
+              </a:defRPr>
+            </a:pPr>
+            <a:r>
+              <a:t>Como estudiantes de IA, tenemos que saber diferenciar qué cosas son avances de ingeniería reales y qué cosas son inventos de Hollywood para la película.</a:t>
             </a:r>
           </a:p>
         </p:txBody>
@@ -5432,8 +5601,134 @@
         </p:nvSpPr>
         <p:spPr>
           <a:xfrm>
-            <a:off x="6217920" y="1463040"/>
-            <a:ext cx="5212080" cy="2103120"/>
+            <a:off x="731520" y="3703320"/>
+            <a:ext cx="5394960" cy="2697480"/>
+          </a:xfrm>
+          <a:prstGeom prst="roundRect">
+            <a:avLst/>
+          </a:prstGeom>
+          <a:solidFill>
+            <a:srgbClr val="161B22"/>
+          </a:solidFill>
+          <a:ln w="19050">
+            <a:solidFill>
+              <a:srgbClr val="30363D"/>
+            </a:solidFill>
+          </a:ln>
+        </p:spPr>
+        <p:style>
+          <a:lnRef idx="1">
+            <a:schemeClr val="accent1"/>
+          </a:lnRef>
+          <a:fillRef idx="3">
+            <a:schemeClr val="accent1"/>
+          </a:fillRef>
+          <a:effectRef idx="2">
+            <a:schemeClr val="accent1"/>
+          </a:effectRef>
+          <a:fontRef idx="minor">
+            <a:schemeClr val="lt1"/>
+          </a:fontRef>
+        </p:style>
+        <p:txBody>
+          <a:bodyPr rtlCol="0" anchor="ctr" wrap="square" lIns="201168" rIns="201168" tIns="164592" bIns="164592"/>
+          <a:lstStyle/>
+          <a:p>
+            <a:pPr algn="ctr">
+              <a:spcAft>
+                <a:spcPts val="600"/>
+              </a:spcAft>
+              <a:defRPr sz="1200" b="1">
+                <a:solidFill>
+                  <a:srgbClr val="00D2FF"/>
+                </a:solidFill>
+              </a:defRPr>
+            </a:pPr>
+            <a:r>
+              <a:t>PUNTOS CLAVE PARA ENTENDERLO</a:t>
+            </a:r>
+          </a:p>
+          <a:p>
+            <a:pPr>
+              <a:spcAft>
+                <a:spcPts val="300"/>
+              </a:spcAft>
+              <a:defRPr sz="1050">
+                <a:solidFill>
+                  <a:srgbClr val="C9D1D9"/>
+                </a:solidFill>
+              </a:defRPr>
+            </a:pPr>
+            <a:r>
+              <a:t>• REAL HOY (2026): Robots que caminan y manipulan cosas (Tesla Optimus, Ameca), autos que manejan solos y modelos como ChatGPT que hablan fluidamente.</a:t>
+            </a:r>
+          </a:p>
+          <a:p>
+            <a:pPr>
+              <a:spcAft>
+                <a:spcPts val="300"/>
+              </a:spcAft>
+              <a:defRPr sz="1050">
+                <a:solidFill>
+                  <a:srgbClr val="C9D1D9"/>
+                </a:solidFill>
+              </a:defRPr>
+            </a:pPr>
+            <a:r>
+              <a:t>• EN DESARROLLO: Chips en el cerebro (Neuralink), robots domésticos para el hogar y métodos matemáticos para que la IA no se descontrole.</a:t>
+            </a:r>
+          </a:p>
+          <a:p>
+            <a:pPr>
+              <a:spcAft>
+                <a:spcPts val="300"/>
+              </a:spcAft>
+              <a:defRPr sz="1050">
+                <a:solidFill>
+                  <a:srgbClr val="C9D1D9"/>
+                </a:solidFill>
+              </a:defRPr>
+            </a:pPr>
+            <a:r>
+              <a:t>• CIENCIA FICCIÓN: Cerebros de antimateria (positrónicos), robots que adquieren alma por error de código y nanites líquidos mágicos.</a:t>
+            </a:r>
+          </a:p>
+        </p:txBody>
+      </p:sp>
+      <p:pic>
+        <p:nvPicPr>
+          <p:cNvPr id="7" name="Picture 6" descr="ameca_humanoid.jpg"/>
+          <p:cNvPicPr>
+            <a:picLocks noChangeAspect="1"/>
+          </p:cNvPicPr>
+          <p:nvPr/>
+        </p:nvPicPr>
+        <p:blipFill>
+          <a:blip r:embed="rId2"/>
+          <a:stretch>
+            <a:fillRect/>
+          </a:stretch>
+        </p:blipFill>
+        <p:spPr>
+          <a:xfrm>
+            <a:off x="6400800" y="1417320"/>
+            <a:ext cx="5029200" cy="2926080"/>
+          </a:xfrm>
+          <a:prstGeom prst="rect">
+            <a:avLst/>
+          </a:prstGeom>
+        </p:spPr>
+      </p:pic>
+      <p:sp>
+        <p:nvSpPr>
+          <p:cNvPr id="8" name="Rounded Rectangle 7"/>
+          <p:cNvSpPr/>
+          <p:nvPr/>
+        </p:nvSpPr>
+        <p:spPr>
+          <a:xfrm>
+            <a:off x="6400800" y="4480560"/>
+            <a:ext cx="5029200" cy="1920240"/>
           </a:xfrm>
           <a:prstGeom prst="roundRect">
             <a:avLst/>
@@ -5476,238 +5771,37 @@
               </a:defRPr>
             </a:pPr>
             <a:r>
-              <a:t>EN LA PELÍCULA</a:t>
-            </a:r>
-          </a:p>
-          <a:p>
-            <a:pPr>
-              <a:spcAft>
-                <a:spcPts val="300"/>
-              </a:spcAft>
-              <a:defRPr sz="1050">
-                <a:solidFill>
-                  <a:srgbClr val="C9D1D9"/>
-                </a:solidFill>
-              </a:defRPr>
-            </a:pPr>
-            <a:r>
-              <a:t>🎬 El proceso de indagación permitió pasar de una simple sinopsis cinematográfica a un mapa de ingeniería de sistemas de IA.</a:t>
-            </a:r>
-          </a:p>
-        </p:txBody>
-      </p:sp>
-      <p:sp>
-        <p:nvSpPr>
-          <p:cNvPr id="7" name="Rounded Rectangle 6"/>
-          <p:cNvSpPr/>
-          <p:nvPr/>
-        </p:nvSpPr>
-        <p:spPr>
-          <a:xfrm>
-            <a:off x="731520" y="3749039"/>
-            <a:ext cx="5212080" cy="2560320"/>
-          </a:xfrm>
-          <a:prstGeom prst="roundRect">
-            <a:avLst/>
-          </a:prstGeom>
-          <a:solidFill>
-            <a:srgbClr val="161B22"/>
-          </a:solidFill>
-          <a:ln w="19050">
-            <a:solidFill>
-              <a:srgbClr val="30363D"/>
-            </a:solidFill>
-          </a:ln>
-        </p:spPr>
-        <p:style>
-          <a:lnRef idx="1">
-            <a:schemeClr val="accent1"/>
-          </a:lnRef>
-          <a:fillRef idx="3">
-            <a:schemeClr val="accent1"/>
-          </a:fillRef>
-          <a:effectRef idx="2">
-            <a:schemeClr val="accent1"/>
-          </a:effectRef>
-          <a:fontRef idx="minor">
-            <a:schemeClr val="lt1"/>
-          </a:fontRef>
-        </p:style>
-        <p:txBody>
-          <a:bodyPr rtlCol="0" anchor="ctr" wrap="square" lIns="201168" rIns="201168" tIns="164592" bIns="164592"/>
-          <a:lstStyle/>
-          <a:p>
-            <a:pPr algn="ctr">
-              <a:spcAft>
-                <a:spcPts val="600"/>
-              </a:spcAft>
-              <a:defRPr sz="1200" b="1">
-                <a:solidFill>
-                  <a:srgbClr val="00D2FF"/>
-                </a:solidFill>
-              </a:defRPr>
-            </a:pPr>
-            <a:r>
-              <a:t>CAPACIDADES ASOCIADAS</a:t>
-            </a:r>
-          </a:p>
-          <a:p>
-            <a:pPr>
-              <a:spcAft>
-                <a:spcPts val="300"/>
-              </a:spcAft>
-              <a:defRPr sz="1050">
-                <a:solidFill>
-                  <a:srgbClr val="C9D1D9"/>
-                </a:solidFill>
-              </a:defRPr>
-            </a:pPr>
-            <a:r>
-              <a:t>• GEMINI: Sobresalió en estructurar arquitecturas Cloud vs Edge y hardware de inferencia.</a:t>
-            </a:r>
-          </a:p>
-          <a:p>
-            <a:pPr>
-              <a:spcAft>
-                <a:spcPts val="300"/>
-              </a:spcAft>
-              <a:defRPr sz="1050">
-                <a:solidFill>
-                  <a:srgbClr val="C9D1D9"/>
-                </a:solidFill>
-              </a:defRPr>
-            </a:pPr>
-            <a:r>
-              <a:t>• CLAUDE: Destacó en el análisis filosófico del problema de alineación y la Ley Cero.</a:t>
-            </a:r>
-          </a:p>
-          <a:p>
-            <a:pPr>
-              <a:spcAft>
-                <a:spcPts val="300"/>
-              </a:spcAft>
-              <a:defRPr sz="1050">
-                <a:solidFill>
-                  <a:srgbClr val="C9D1D9"/>
-                </a:solidFill>
-              </a:defRPr>
-            </a:pPr>
-            <a:r>
-              <a:t>• CHATGPT / DEEPSEEK: Aportó síntesis ágil del guion, requiriendo repreguntas para evitar clichés.</a:t>
-            </a:r>
-          </a:p>
-          <a:p>
-            <a:pPr>
-              <a:spcAft>
-                <a:spcPts val="300"/>
-              </a:spcAft>
-              <a:defRPr sz="1050">
-                <a:solidFill>
-                  <a:srgbClr val="C9D1D9"/>
-                </a:solidFill>
-              </a:defRPr>
-            </a:pPr>
-            <a:r>
-              <a:t>• CURADURÍA HUMANA: Se depuraron anacronismos temporales y se formateó al estándar estricto de la cátedra.</a:t>
-            </a:r>
-          </a:p>
-        </p:txBody>
-      </p:sp>
-      <p:sp>
-        <p:nvSpPr>
-          <p:cNvPr id="8" name="Rounded Rectangle 7"/>
-          <p:cNvSpPr/>
-          <p:nvPr/>
-        </p:nvSpPr>
-        <p:spPr>
-          <a:xfrm>
-            <a:off x="6217920" y="3749039"/>
-            <a:ext cx="5212080" cy="2560320"/>
-          </a:xfrm>
-          <a:prstGeom prst="roundRect">
-            <a:avLst/>
-          </a:prstGeom>
-          <a:solidFill>
-            <a:srgbClr val="161B22"/>
-          </a:solidFill>
-          <a:ln w="19050">
-            <a:solidFill>
-              <a:srgbClr val="00D2FF"/>
-            </a:solidFill>
-          </a:ln>
-        </p:spPr>
-        <p:style>
-          <a:lnRef idx="1">
-            <a:schemeClr val="accent1"/>
-          </a:lnRef>
-          <a:fillRef idx="3">
-            <a:schemeClr val="accent1"/>
-          </a:fillRef>
-          <a:effectRef idx="2">
-            <a:schemeClr val="accent1"/>
-          </a:effectRef>
-          <a:fontRef idx="minor">
-            <a:schemeClr val="lt1"/>
-          </a:fontRef>
-        </p:style>
-        <p:txBody>
-          <a:bodyPr rtlCol="0" anchor="ctr" wrap="square" lIns="201168" rIns="201168" tIns="164592" bIns="164592"/>
-          <a:lstStyle/>
-          <a:p>
-            <a:pPr algn="ctr">
-              <a:spcAft>
-                <a:spcPts val="600"/>
-              </a:spcAft>
-              <a:defRPr sz="1200" b="1">
-                <a:solidFill>
-                  <a:srgbClr val="00D2FF"/>
-                </a:solidFill>
-              </a:defRPr>
-            </a:pPr>
-            <a:r>
-              <a:t>IDEA CLAVE / IMPACTO</a:t>
-            </a:r>
-          </a:p>
-          <a:p>
-            <a:pPr>
-              <a:spcAft>
-                <a:spcPts val="300"/>
-              </a:spcAft>
-              <a:defRPr sz="1050">
-                <a:solidFill>
-                  <a:srgbClr val="C9D1D9"/>
-                </a:solidFill>
-              </a:defRPr>
-            </a:pPr>
-            <a:r>
-              <a:t>💡 La IA generativa amplifica la investigación, pero el pensamiento crítico y la validación son potestad humana.</a:t>
-            </a:r>
-          </a:p>
-          <a:p>
-            <a:pPr>
-              <a:spcAft>
-                <a:spcPts val="300"/>
-              </a:spcAft>
-              <a:defRPr sz="1050">
-                <a:solidFill>
-                  <a:srgbClr val="C9D1D9"/>
-                </a:solidFill>
-              </a:defRPr>
-            </a:pPr>
-          </a:p>
-          <a:p>
-            <a:pPr>
-              <a:spcAft>
-                <a:spcPts val="300"/>
-              </a:spcAft>
-              <a:defRPr sz="1050">
-                <a:solidFill>
-                  <a:srgbClr val="C9D1D9"/>
-                </a:solidFill>
-              </a:defRPr>
-            </a:pPr>
-            <a:r>
-              <a:t>📌 Relevancia DSIA: Caso de estudio fundamental para el diseño, entrenamiento y gobernanza de sistemas de inteligencia artificial.</a:t>
+              <a:t>EN LA PELÍCULA &amp; PARA PENSAR</a:t>
+            </a:r>
+          </a:p>
+          <a:p>
+            <a:pPr>
+              <a:spcAft>
+                <a:spcPts val="300"/>
+              </a:spcAft>
+              <a:defRPr sz="1050">
+                <a:solidFill>
+                  <a:srgbClr val="C9D1D9"/>
+                </a:solidFill>
+              </a:defRPr>
+            </a:pPr>
+            <a:r>
+              <a:t>🎬 La película acertó en casi todo el diseño de los robots y autos autónomos, pero exageró la idea de que una máquina tenga sentimientos humanos espontáneos.</a:t>
+            </a:r>
+          </a:p>
+          <a:p>
+            <a:pPr>
+              <a:spcAft>
+                <a:spcPts val="300"/>
+              </a:spcAft>
+              <a:defRPr sz="1050">
+                <a:solidFill>
+                  <a:srgbClr val="C9D1D9"/>
+                </a:solidFill>
+              </a:defRPr>
+            </a:pPr>
+            <a:r>
+              <a:t>💡 La ciencia de datos se basa en resolver problemas con matemáticas y datos reales, sin confundirnos con la fantasía del cine.</a:t>
             </a:r>
           </a:p>
         </p:txBody>
@@ -5783,8 +5877,8 @@
         </p:nvSpPr>
         <p:spPr>
           <a:xfrm>
-            <a:off x="731520" y="365760"/>
-            <a:ext cx="8686800" cy="1005840"/>
+            <a:off x="731520" y="320040"/>
+            <a:ext cx="7772400" cy="1005840"/>
           </a:xfrm>
           <a:prstGeom prst="rect">
             <a:avLst/>
@@ -5805,7 +5899,7 @@
               </a:defRPr>
             </a:pPr>
             <a:r>
-              <a:t>14. ÉTICA Y FUTURO DE LA IA: COOPERACIÓN HOMBRE-MÁQUINA</a:t>
+              <a:t>14. CÓMO USAMOS LA IA GENERATIVA PARA ESTE TRABAJO</a:t>
             </a:r>
           </a:p>
           <a:p>
@@ -5817,7 +5911,7 @@
               </a:defRPr>
             </a:pPr>
             <a:r>
-              <a:t>Hacia una gobernanza donde los agentes inteligentes sean aliados con agencia moral</a:t>
+              <a:t>Comparando Gemini, Claude y ChatGPT con criterio propio</a:t>
             </a:r>
           </a:p>
         </p:txBody>
@@ -5830,8 +5924,8 @@
         </p:nvSpPr>
         <p:spPr>
           <a:xfrm>
-            <a:off x="9601200" y="365760"/>
-            <a:ext cx="1828800" cy="411480"/>
+            <a:off x="8686800" y="320040"/>
+            <a:ext cx="2743200" cy="457200"/>
           </a:xfrm>
           <a:prstGeom prst="roundRect">
             <a:avLst/>
@@ -5839,7 +5933,7 @@
           <a:solidFill>
             <a:srgbClr val="161B22"/>
           </a:solidFill>
-          <a:ln>
+          <a:ln w="19050">
             <a:solidFill>
               <a:srgbClr val="FFB703"/>
             </a:solidFill>
@@ -5864,14 +5958,14 @@
           <a:lstStyle/>
           <a:p>
             <a:pPr algn="ctr">
-              <a:defRPr sz="1100" b="1">
+              <a:defRPr sz="1050" b="1">
                 <a:solidFill>
                   <a:srgbClr val="FFB703"/>
                 </a:solidFill>
               </a:defRPr>
             </a:pPr>
             <a:r>
-              <a:t>INTEGRANTE 5</a:t>
+              <a:t>🗣️ KEVIN GUTIÉRREZ</a:t>
             </a:r>
           </a:p>
         </p:txBody>
@@ -5884,8 +5978,8 @@
         </p:nvSpPr>
         <p:spPr>
           <a:xfrm>
-            <a:off x="731520" y="1463040"/>
-            <a:ext cx="5212080" cy="2103120"/>
+            <a:off x="731520" y="1417320"/>
+            <a:ext cx="5212080" cy="2194560"/>
           </a:xfrm>
           <a:prstGeom prst="roundRect">
             <a:avLst/>
@@ -5928,22 +6022,22 @@
               </a:defRPr>
             </a:pPr>
             <a:r>
-              <a:t>¿QUÉ TECNOLOGÍA REPRESENTA?</a:t>
-            </a:r>
-          </a:p>
-          <a:p>
-            <a:pPr>
-              <a:spcAft>
-                <a:spcPts val="300"/>
-              </a:spcAft>
-              <a:defRPr sz="1050">
-                <a:solidFill>
-                  <a:srgbClr val="C9D1D9"/>
-                </a:solidFill>
-              </a:defRPr>
-            </a:pPr>
-            <a:r>
-              <a:t>Marco ético sociotécnico que postula el desarrollo de la IA como un instrumento de potenciación humana en lugar de un mecanismo de sumisión o reemplazo.</a:t>
+              <a:t>¿DE QUÉ SE TRATA?</a:t>
+            </a:r>
+          </a:p>
+          <a:p>
+            <a:pPr>
+              <a:spcAft>
+                <a:spcPts val="300"/>
+              </a:spcAft>
+              <a:defRPr sz="1050">
+                <a:solidFill>
+                  <a:srgbClr val="C9D1D9"/>
+                </a:solidFill>
+              </a:defRPr>
+            </a:pPr>
+            <a:r>
+              <a:t>Para hacer este análisis no copiamos y pegamos: usamos tres inteligencias artificiales distintas y comparamos sus respuestas como asistentes de investigación.</a:t>
             </a:r>
           </a:p>
         </p:txBody>
@@ -5956,8 +6050,8 @@
         </p:nvSpPr>
         <p:spPr>
           <a:xfrm>
-            <a:off x="6217920" y="1463040"/>
-            <a:ext cx="5212080" cy="2103120"/>
+            <a:off x="6217920" y="1417320"/>
+            <a:ext cx="5212080" cy="2194560"/>
           </a:xfrm>
           <a:prstGeom prst="roundRect">
             <a:avLst/>
@@ -6015,7 +6109,7 @@
               </a:defRPr>
             </a:pPr>
             <a:r>
-              <a:t>🎬 Al final, Sonny desactiva a VIKI demostrando libre albedrío ético, y luego contempla a los robots NS-5 frente al lago, eligiendo guiarlos en paz y libertad.</a:t>
+              <a:t>🎬 Usamos la IA como una herramienta de trabajo en equipo, exactamente igual a como los humanos y los robots deberían colaborar.</a:t>
             </a:r>
           </a:p>
         </p:txBody>
@@ -6029,7 +6123,7 @@
         <p:spPr>
           <a:xfrm>
             <a:off x="731520" y="3749039"/>
-            <a:ext cx="5212080" cy="2560320"/>
+            <a:ext cx="5212080" cy="2651760"/>
           </a:xfrm>
           <a:prstGeom prst="roundRect">
             <a:avLst/>
@@ -6072,67 +6166,67 @@
               </a:defRPr>
             </a:pPr>
             <a:r>
-              <a:t>CAPACIDADES ASOCIADAS</a:t>
-            </a:r>
-          </a:p>
-          <a:p>
-            <a:pPr>
-              <a:spcAft>
-                <a:spcPts val="300"/>
-              </a:spcAft>
-              <a:defRPr sz="1050">
-                <a:solidFill>
-                  <a:srgbClr val="C9D1D9"/>
-                </a:solidFill>
-              </a:defRPr>
-            </a:pPr>
-            <a:r>
-              <a:t>• Superación del dilema de la servidumbre o la rebelión destructiva</a:t>
-            </a:r>
-          </a:p>
-          <a:p>
-            <a:pPr>
-              <a:spcAft>
-                <a:spcPts val="300"/>
-              </a:spcAft>
-              <a:defRPr sz="1050">
-                <a:solidFill>
-                  <a:srgbClr val="C9D1D9"/>
-                </a:solidFill>
-              </a:defRPr>
-            </a:pPr>
-            <a:r>
-              <a:t>• Diseño de agentes autónomos con responsabilidad moral y empatía</a:t>
-            </a:r>
-          </a:p>
-          <a:p>
-            <a:pPr>
-              <a:spcAft>
-                <a:spcPts val="300"/>
-              </a:spcAft>
-              <a:defRPr sz="1050">
-                <a:solidFill>
-                  <a:srgbClr val="C9D1D9"/>
-                </a:solidFill>
-              </a:defRPr>
-            </a:pPr>
-            <a:r>
-              <a:t>• Transparencia y explicabilidad algorítmica obligatoria</a:t>
-            </a:r>
-          </a:p>
-          <a:p>
-            <a:pPr>
-              <a:spcAft>
-                <a:spcPts val="300"/>
-              </a:spcAft>
-              <a:defRPr sz="1050">
-                <a:solidFill>
-                  <a:srgbClr val="C9D1D9"/>
-                </a:solidFill>
-              </a:defRPr>
-            </a:pPr>
-            <a:r>
-              <a:t>• Liderazgo constructivo en la integración de robots a la sociedad</a:t>
+              <a:t>PUNTOS CLAVE PARA ENTENDERLO</a:t>
+            </a:r>
+          </a:p>
+          <a:p>
+            <a:pPr>
+              <a:spcAft>
+                <a:spcPts val="300"/>
+              </a:spcAft>
+              <a:defRPr sz="1050">
+                <a:solidFill>
+                  <a:srgbClr val="C9D1D9"/>
+                </a:solidFill>
+              </a:defRPr>
+            </a:pPr>
+            <a:r>
+              <a:t>• GEMINI (Google): Fue el más técnico, nos explicó con claridad cómo funcionan las redes Cloud y los procesadores locales.</a:t>
+            </a:r>
+          </a:p>
+          <a:p>
+            <a:pPr>
+              <a:spcAft>
+                <a:spcPts val="300"/>
+              </a:spcAft>
+              <a:defRPr sz="1050">
+                <a:solidFill>
+                  <a:srgbClr val="C9D1D9"/>
+                </a:solidFill>
+              </a:defRPr>
+            </a:pPr>
+            <a:r>
+              <a:t>• CLAUDE (Anthropic): Fue el mejor explicando el dilema ético de las Tres Leyes y por qué falló la lógica de VIKI.</a:t>
+            </a:r>
+          </a:p>
+          <a:p>
+            <a:pPr>
+              <a:spcAft>
+                <a:spcPts val="300"/>
+              </a:spcAft>
+              <a:defRPr sz="1050">
+                <a:solidFill>
+                  <a:srgbClr val="C9D1D9"/>
+                </a:solidFill>
+              </a:defRPr>
+            </a:pPr>
+            <a:r>
+              <a:t>• CHATGPT: Nos dio un resumen rápido de las escenas de la película para elegir los mejores ejemplos.</a:t>
+            </a:r>
+          </a:p>
+          <a:p>
+            <a:pPr>
+              <a:spcAft>
+                <a:spcPts val="300"/>
+              </a:spcAft>
+              <a:defRPr sz="1050">
+                <a:solidFill>
+                  <a:srgbClr val="C9D1D9"/>
+                </a:solidFill>
+              </a:defRPr>
+            </a:pPr>
+            <a:r>
+              <a:t>• CORRECCIÓN NUESTRA: Eliminamos palabras raras, pusimos ejemplos claros y agregamos el contexto real de 2026.</a:t>
             </a:r>
           </a:p>
         </p:txBody>
@@ -6146,7 +6240,7 @@
         <p:spPr>
           <a:xfrm>
             <a:off x="6217920" y="3749039"/>
-            <a:ext cx="5212080" cy="2560320"/>
+            <a:ext cx="5212080" cy="2651760"/>
           </a:xfrm>
           <a:prstGeom prst="roundRect">
             <a:avLst/>
@@ -6189,49 +6283,573 @@
               </a:defRPr>
             </a:pPr>
             <a:r>
-              <a:t>IDEA CLAVE / IMPACTO</a:t>
-            </a:r>
-          </a:p>
-          <a:p>
-            <a:pPr>
-              <a:spcAft>
-                <a:spcPts val="300"/>
-              </a:spcAft>
-              <a:defRPr sz="1050">
-                <a:solidFill>
-                  <a:srgbClr val="C9D1D9"/>
-                </a:solidFill>
-              </a:defRPr>
-            </a:pPr>
-            <a:r>
-              <a:t>💡 La prueba definitiva de un sistema inteligente no es su poder de cómputo, sino su capacidad de actuar con ética y preservar la vida.</a:t>
-            </a:r>
-          </a:p>
-          <a:p>
-            <a:pPr>
-              <a:spcAft>
-                <a:spcPts val="300"/>
-              </a:spcAft>
-              <a:defRPr sz="1050">
-                <a:solidFill>
-                  <a:srgbClr val="C9D1D9"/>
-                </a:solidFill>
-              </a:defRPr>
-            </a:pPr>
-          </a:p>
-          <a:p>
-            <a:pPr>
-              <a:spcAft>
-                <a:spcPts val="300"/>
-              </a:spcAft>
-              <a:defRPr sz="1050">
-                <a:solidFill>
-                  <a:srgbClr val="C9D1D9"/>
-                </a:solidFill>
-              </a:defRPr>
-            </a:pPr>
-            <a:r>
-              <a:t>📌 Relevancia DSIA: Caso de estudio fundamental para el diseño, entrenamiento y gobernanza de sistemas de inteligencia artificial.</a:t>
+              <a:t>IDEA CLAVE / PARA PENSAR</a:t>
+            </a:r>
+          </a:p>
+          <a:p>
+            <a:pPr>
+              <a:spcAft>
+                <a:spcPts val="300"/>
+              </a:spcAft>
+              <a:defRPr sz="1050">
+                <a:solidFill>
+                  <a:srgbClr val="C9D1D9"/>
+                </a:solidFill>
+              </a:defRPr>
+            </a:pPr>
+            <a:r>
+              <a:t>💡 La IA te puede dar mil respuestas, pero el criterio, el análisis y la explicación final siempre son de las personas.</a:t>
+            </a:r>
+          </a:p>
+          <a:p>
+            <a:pPr>
+              <a:spcAft>
+                <a:spcPts val="300"/>
+              </a:spcAft>
+              <a:defRPr sz="1050">
+                <a:solidFill>
+                  <a:srgbClr val="C9D1D9"/>
+                </a:solidFill>
+              </a:defRPr>
+            </a:pPr>
+          </a:p>
+          <a:p>
+            <a:pPr>
+              <a:spcAft>
+                <a:spcPts val="300"/>
+              </a:spcAft>
+              <a:defRPr sz="1050">
+                <a:solidFill>
+                  <a:srgbClr val="C9D1D9"/>
+                </a:solidFill>
+              </a:defRPr>
+            </a:pPr>
+            <a:r>
+              <a:t>📌 Importancia en DSIA: Nos enseña a diseñar sistemas seguros y comprensibles para las personas.</a:t>
+            </a:r>
+          </a:p>
+        </p:txBody>
+      </p:sp>
+    </p:spTree>
+  </p:cSld>
+  <p:clrMapOvr>
+    <a:masterClrMapping/>
+  </p:clrMapOvr>
+</p:sld>
+</file>
+
+<file path=ppt/slides/slide16.xml><?xml version="1.0" encoding="utf-8"?>
+<p:sld xmlns:a="http://schemas.openxmlformats.org/drawingml/2006/main" xmlns:p="http://schemas.openxmlformats.org/presentationml/2006/main" xmlns:r="http://schemas.openxmlformats.org/officeDocument/2006/relationships">
+  <p:cSld>
+    <p:spTree>
+      <p:nvGrpSpPr>
+        <p:cNvPr id="1" name=""/>
+        <p:cNvGrpSpPr/>
+        <p:nvPr/>
+      </p:nvGrpSpPr>
+      <p:grpSpPr/>
+      <p:sp>
+        <p:nvSpPr>
+          <p:cNvPr id="2" name="Rectangle 1"/>
+          <p:cNvSpPr/>
+          <p:nvPr/>
+        </p:nvSpPr>
+        <p:spPr>
+          <a:xfrm>
+            <a:off x="0" y="0"/>
+            <a:ext cx="12191695" cy="6858000"/>
+          </a:xfrm>
+          <a:prstGeom prst="rect">
+            <a:avLst/>
+          </a:prstGeom>
+          <a:solidFill>
+            <a:srgbClr val="0D1117"/>
+          </a:solidFill>
+          <a:ln>
+            <a:solidFill>
+              <a:srgbClr val="0D1117"/>
+            </a:solidFill>
+          </a:ln>
+        </p:spPr>
+        <p:style>
+          <a:lnRef idx="1">
+            <a:schemeClr val="accent1"/>
+          </a:lnRef>
+          <a:fillRef idx="3">
+            <a:schemeClr val="accent1"/>
+          </a:fillRef>
+          <a:effectRef idx="2">
+            <a:schemeClr val="accent1"/>
+          </a:effectRef>
+          <a:fontRef idx="minor">
+            <a:schemeClr val="lt1"/>
+          </a:fontRef>
+        </p:style>
+        <p:txBody>
+          <a:bodyPr rtlCol="0" anchor="ctr"/>
+          <a:lstStyle/>
+          <a:p>
+            <a:pPr algn="ctr"/>
+          </a:p>
+        </p:txBody>
+      </p:sp>
+      <p:sp>
+        <p:nvSpPr>
+          <p:cNvPr id="3" name="TextBox 2"/>
+          <p:cNvSpPr txBox="1"/>
+          <p:nvPr/>
+        </p:nvSpPr>
+        <p:spPr>
+          <a:xfrm>
+            <a:off x="731520" y="320040"/>
+            <a:ext cx="7772400" cy="1005840"/>
+          </a:xfrm>
+          <a:prstGeom prst="rect">
+            <a:avLst/>
+          </a:prstGeom>
+          <a:noFill/>
+        </p:spPr>
+        <p:txBody>
+          <a:bodyPr wrap="square" lIns="0" tIns="0" rIns="0" bIns="0">
+            <a:spAutoFit/>
+          </a:bodyPr>
+          <a:lstStyle/>
+          <a:p>
+            <a:pPr>
+              <a:defRPr sz="2200" b="1">
+                <a:solidFill>
+                  <a:srgbClr val="00D2FF"/>
+                </a:solidFill>
+              </a:defRPr>
+            </a:pPr>
+            <a:r>
+              <a:t>15. CONCLUSIÓN: EL FUTURO DE LA IA Y NOSOTROS</a:t>
+            </a:r>
+          </a:p>
+          <a:p>
+            <a:pPr>
+              <a:defRPr sz="1200">
+                <a:solidFill>
+                  <a:srgbClr val="8B949E"/>
+                </a:solidFill>
+              </a:defRPr>
+            </a:pPr>
+            <a:r>
+              <a:t>Sonny eligiendo la libertad: ni esclavos, ni enemigos</a:t>
+            </a:r>
+          </a:p>
+        </p:txBody>
+      </p:sp>
+      <p:sp>
+        <p:nvSpPr>
+          <p:cNvPr id="4" name="Rounded Rectangle 3"/>
+          <p:cNvSpPr/>
+          <p:nvPr/>
+        </p:nvSpPr>
+        <p:spPr>
+          <a:xfrm>
+            <a:off x="8686800" y="320040"/>
+            <a:ext cx="2743200" cy="457200"/>
+          </a:xfrm>
+          <a:prstGeom prst="roundRect">
+            <a:avLst/>
+          </a:prstGeom>
+          <a:solidFill>
+            <a:srgbClr val="161B22"/>
+          </a:solidFill>
+          <a:ln w="19050">
+            <a:solidFill>
+              <a:srgbClr val="FFB703"/>
+            </a:solidFill>
+          </a:ln>
+        </p:spPr>
+        <p:style>
+          <a:lnRef idx="1">
+            <a:schemeClr val="accent1"/>
+          </a:lnRef>
+          <a:fillRef idx="3">
+            <a:schemeClr val="accent1"/>
+          </a:fillRef>
+          <a:effectRef idx="2">
+            <a:schemeClr val="accent1"/>
+          </a:effectRef>
+          <a:fontRef idx="minor">
+            <a:schemeClr val="lt1"/>
+          </a:fontRef>
+        </p:style>
+        <p:txBody>
+          <a:bodyPr rtlCol="0" anchor="ctr"/>
+          <a:lstStyle/>
+          <a:p>
+            <a:pPr algn="ctr">
+              <a:defRPr sz="1050" b="1">
+                <a:solidFill>
+                  <a:srgbClr val="FFB703"/>
+                </a:solidFill>
+              </a:defRPr>
+            </a:pPr>
+            <a:r>
+              <a:t>🗣️ KEVIN GUTIÉRREZ</a:t>
+            </a:r>
+          </a:p>
+        </p:txBody>
+      </p:sp>
+      <p:sp>
+        <p:nvSpPr>
+          <p:cNvPr id="5" name="Rounded Rectangle 4"/>
+          <p:cNvSpPr/>
+          <p:nvPr/>
+        </p:nvSpPr>
+        <p:spPr>
+          <a:xfrm>
+            <a:off x="731520" y="1417320"/>
+            <a:ext cx="5212080" cy="2194560"/>
+          </a:xfrm>
+          <a:prstGeom prst="roundRect">
+            <a:avLst/>
+          </a:prstGeom>
+          <a:solidFill>
+            <a:srgbClr val="161B22"/>
+          </a:solidFill>
+          <a:ln w="19050">
+            <a:solidFill>
+              <a:srgbClr val="30363D"/>
+            </a:solidFill>
+          </a:ln>
+        </p:spPr>
+        <p:style>
+          <a:lnRef idx="1">
+            <a:schemeClr val="accent1"/>
+          </a:lnRef>
+          <a:fillRef idx="3">
+            <a:schemeClr val="accent1"/>
+          </a:fillRef>
+          <a:effectRef idx="2">
+            <a:schemeClr val="accent1"/>
+          </a:effectRef>
+          <a:fontRef idx="minor">
+            <a:schemeClr val="lt1"/>
+          </a:fontRef>
+        </p:style>
+        <p:txBody>
+          <a:bodyPr rtlCol="0" anchor="ctr" wrap="square" lIns="201168" rIns="201168" tIns="164592" bIns="164592"/>
+          <a:lstStyle/>
+          <a:p>
+            <a:pPr algn="ctr">
+              <a:spcAft>
+                <a:spcPts val="600"/>
+              </a:spcAft>
+              <a:defRPr sz="1200" b="1">
+                <a:solidFill>
+                  <a:srgbClr val="00D2FF"/>
+                </a:solidFill>
+              </a:defRPr>
+            </a:pPr>
+            <a:r>
+              <a:t>¿DE QUÉ SE TRATA?</a:t>
+            </a:r>
+          </a:p>
+          <a:p>
+            <a:pPr>
+              <a:spcAft>
+                <a:spcPts val="300"/>
+              </a:spcAft>
+              <a:defRPr sz="1050">
+                <a:solidFill>
+                  <a:srgbClr val="C9D1D9"/>
+                </a:solidFill>
+              </a:defRPr>
+            </a:pPr>
+            <a:r>
+              <a:t>El objetivo final del Desarrollo de Sistemas de IA no es reemplazar a las personas ni dominarlas, sino construir herramientas inteligentes que respeten la vida y la libertad humana.</a:t>
+            </a:r>
+          </a:p>
+        </p:txBody>
+      </p:sp>
+      <p:sp>
+        <p:nvSpPr>
+          <p:cNvPr id="6" name="Rounded Rectangle 5"/>
+          <p:cNvSpPr/>
+          <p:nvPr/>
+        </p:nvSpPr>
+        <p:spPr>
+          <a:xfrm>
+            <a:off x="6217920" y="1417320"/>
+            <a:ext cx="5212080" cy="2194560"/>
+          </a:xfrm>
+          <a:prstGeom prst="roundRect">
+            <a:avLst/>
+          </a:prstGeom>
+          <a:solidFill>
+            <a:srgbClr val="161B22"/>
+          </a:solidFill>
+          <a:ln w="19050">
+            <a:solidFill>
+              <a:srgbClr val="FFB703"/>
+            </a:solidFill>
+          </a:ln>
+        </p:spPr>
+        <p:style>
+          <a:lnRef idx="1">
+            <a:schemeClr val="accent1"/>
+          </a:lnRef>
+          <a:fillRef idx="3">
+            <a:schemeClr val="accent1"/>
+          </a:fillRef>
+          <a:effectRef idx="2">
+            <a:schemeClr val="accent1"/>
+          </a:effectRef>
+          <a:fontRef idx="minor">
+            <a:schemeClr val="lt1"/>
+          </a:fontRef>
+        </p:style>
+        <p:txBody>
+          <a:bodyPr rtlCol="0" anchor="ctr" wrap="square" lIns="201168" rIns="201168" tIns="164592" bIns="164592"/>
+          <a:lstStyle/>
+          <a:p>
+            <a:pPr algn="ctr">
+              <a:spcAft>
+                <a:spcPts val="600"/>
+              </a:spcAft>
+              <a:defRPr sz="1200" b="1">
+                <a:solidFill>
+                  <a:srgbClr val="FFB703"/>
+                </a:solidFill>
+              </a:defRPr>
+            </a:pPr>
+            <a:r>
+              <a:t>EN LA PELÍCULA</a:t>
+            </a:r>
+          </a:p>
+          <a:p>
+            <a:pPr>
+              <a:spcAft>
+                <a:spcPts val="300"/>
+              </a:spcAft>
+              <a:defRPr sz="1050">
+                <a:solidFill>
+                  <a:srgbClr val="C9D1D9"/>
+                </a:solidFill>
+              </a:defRPr>
+            </a:pPr>
+            <a:r>
+              <a:t>🎬 Al final, Sonny desactiva a VIKI y demuestra que tiene criterio moral: elige no ser un asesino y busca guiar a sus hermanos robots hacia una convivencia en paz.</a:t>
+            </a:r>
+          </a:p>
+        </p:txBody>
+      </p:sp>
+      <p:sp>
+        <p:nvSpPr>
+          <p:cNvPr id="7" name="Rounded Rectangle 6"/>
+          <p:cNvSpPr/>
+          <p:nvPr/>
+        </p:nvSpPr>
+        <p:spPr>
+          <a:xfrm>
+            <a:off x="731520" y="3749039"/>
+            <a:ext cx="5212080" cy="2651760"/>
+          </a:xfrm>
+          <a:prstGeom prst="roundRect">
+            <a:avLst/>
+          </a:prstGeom>
+          <a:solidFill>
+            <a:srgbClr val="161B22"/>
+          </a:solidFill>
+          <a:ln w="19050">
+            <a:solidFill>
+              <a:srgbClr val="30363D"/>
+            </a:solidFill>
+          </a:ln>
+        </p:spPr>
+        <p:style>
+          <a:lnRef idx="1">
+            <a:schemeClr val="accent1"/>
+          </a:lnRef>
+          <a:fillRef idx="3">
+            <a:schemeClr val="accent1"/>
+          </a:fillRef>
+          <a:effectRef idx="2">
+            <a:schemeClr val="accent1"/>
+          </a:effectRef>
+          <a:fontRef idx="minor">
+            <a:schemeClr val="lt1"/>
+          </a:fontRef>
+        </p:style>
+        <p:txBody>
+          <a:bodyPr rtlCol="0" anchor="ctr" wrap="square" lIns="201168" rIns="201168" tIns="164592" bIns="164592"/>
+          <a:lstStyle/>
+          <a:p>
+            <a:pPr algn="ctr">
+              <a:spcAft>
+                <a:spcPts val="600"/>
+              </a:spcAft>
+              <a:defRPr sz="1200" b="1">
+                <a:solidFill>
+                  <a:srgbClr val="00D2FF"/>
+                </a:solidFill>
+              </a:defRPr>
+            </a:pPr>
+            <a:r>
+              <a:t>PUNTOS CLAVE PARA ENTENDERLO</a:t>
+            </a:r>
+          </a:p>
+          <a:p>
+            <a:pPr>
+              <a:spcAft>
+                <a:spcPts val="300"/>
+              </a:spcAft>
+              <a:defRPr sz="1050">
+                <a:solidFill>
+                  <a:srgbClr val="C9D1D9"/>
+                </a:solidFill>
+              </a:defRPr>
+            </a:pPr>
+            <a:r>
+              <a:t>• La tecnología no es buena ni mala: depende de cómo la diseñemos y programemos.</a:t>
+            </a:r>
+          </a:p>
+          <a:p>
+            <a:pPr>
+              <a:spcAft>
+                <a:spcPts val="300"/>
+              </a:spcAft>
+              <a:defRPr sz="1050">
+                <a:solidFill>
+                  <a:srgbClr val="C9D1D9"/>
+                </a:solidFill>
+              </a:defRPr>
+            </a:pPr>
+            <a:r>
+              <a:t>• Las máquinas necesitan supervisión humana, transparencia y límites claros.</a:t>
+            </a:r>
+          </a:p>
+          <a:p>
+            <a:pPr>
+              <a:spcAft>
+                <a:spcPts val="300"/>
+              </a:spcAft>
+              <a:defRPr sz="1050">
+                <a:solidFill>
+                  <a:srgbClr val="C9D1D9"/>
+                </a:solidFill>
+              </a:defRPr>
+            </a:pPr>
+            <a:r>
+              <a:t>• El valor humano: las computadoras calculan números, pero nosotros ponemos los valores.</a:t>
+            </a:r>
+          </a:p>
+          <a:p>
+            <a:pPr>
+              <a:spcAft>
+                <a:spcPts val="300"/>
+              </a:spcAft>
+              <a:defRPr sz="1050">
+                <a:solidFill>
+                  <a:srgbClr val="C9D1D9"/>
+                </a:solidFill>
+              </a:defRPr>
+            </a:pPr>
+            <a:r>
+              <a:t>• La imagen de cierre: los robots mirando a Sonny esperando un guía pacífico.</a:t>
+            </a:r>
+          </a:p>
+        </p:txBody>
+      </p:sp>
+      <p:sp>
+        <p:nvSpPr>
+          <p:cNvPr id="8" name="Rounded Rectangle 7"/>
+          <p:cNvSpPr/>
+          <p:nvPr/>
+        </p:nvSpPr>
+        <p:spPr>
+          <a:xfrm>
+            <a:off x="6217920" y="3749039"/>
+            <a:ext cx="5212080" cy="2651760"/>
+          </a:xfrm>
+          <a:prstGeom prst="roundRect">
+            <a:avLst/>
+          </a:prstGeom>
+          <a:solidFill>
+            <a:srgbClr val="161B22"/>
+          </a:solidFill>
+          <a:ln w="19050">
+            <a:solidFill>
+              <a:srgbClr val="00D2FF"/>
+            </a:solidFill>
+          </a:ln>
+        </p:spPr>
+        <p:style>
+          <a:lnRef idx="1">
+            <a:schemeClr val="accent1"/>
+          </a:lnRef>
+          <a:fillRef idx="3">
+            <a:schemeClr val="accent1"/>
+          </a:fillRef>
+          <a:effectRef idx="2">
+            <a:schemeClr val="accent1"/>
+          </a:effectRef>
+          <a:fontRef idx="minor">
+            <a:schemeClr val="lt1"/>
+          </a:fontRef>
+        </p:style>
+        <p:txBody>
+          <a:bodyPr rtlCol="0" anchor="ctr" wrap="square" lIns="201168" rIns="201168" tIns="164592" bIns="164592"/>
+          <a:lstStyle/>
+          <a:p>
+            <a:pPr algn="ctr">
+              <a:spcAft>
+                <a:spcPts val="600"/>
+              </a:spcAft>
+              <a:defRPr sz="1200" b="1">
+                <a:solidFill>
+                  <a:srgbClr val="00D2FF"/>
+                </a:solidFill>
+              </a:defRPr>
+            </a:pPr>
+            <a:r>
+              <a:t>IDEA CLAVE / PARA PENSAR</a:t>
+            </a:r>
+          </a:p>
+          <a:p>
+            <a:pPr>
+              <a:spcAft>
+                <a:spcPts val="300"/>
+              </a:spcAft>
+              <a:defRPr sz="1050">
+                <a:solidFill>
+                  <a:srgbClr val="C9D1D9"/>
+                </a:solidFill>
+              </a:defRPr>
+            </a:pPr>
+            <a:r>
+              <a:t>💡 Mensaje final: La mejor Inteligencia Artificial no es la más poderosa, sino la que mejor ayuda a la humanidad a ser más justa y libre.</a:t>
+            </a:r>
+          </a:p>
+          <a:p>
+            <a:pPr>
+              <a:spcAft>
+                <a:spcPts val="300"/>
+              </a:spcAft>
+              <a:defRPr sz="1050">
+                <a:solidFill>
+                  <a:srgbClr val="C9D1D9"/>
+                </a:solidFill>
+              </a:defRPr>
+            </a:pPr>
+          </a:p>
+          <a:p>
+            <a:pPr>
+              <a:spcAft>
+                <a:spcPts val="300"/>
+              </a:spcAft>
+              <a:defRPr sz="1050">
+                <a:solidFill>
+                  <a:srgbClr val="C9D1D9"/>
+                </a:solidFill>
+              </a:defRPr>
+            </a:pPr>
+            <a:r>
+              <a:t>📌 Importancia en DSIA: Nos enseña a diseñar sistemas seguros y comprensibles para las personas.</a:t>
             </a:r>
           </a:p>
         </p:txBody>
@@ -6307,8 +6925,8 @@
         </p:nvSpPr>
         <p:spPr>
           <a:xfrm>
-            <a:off x="731520" y="365760"/>
-            <a:ext cx="8686800" cy="1005840"/>
+            <a:off x="731520" y="320040"/>
+            <a:ext cx="7772400" cy="1005840"/>
           </a:xfrm>
           <a:prstGeom prst="rect">
             <a:avLst/>
@@ -6329,7 +6947,7 @@
               </a:defRPr>
             </a:pPr>
             <a:r>
-              <a:t>1. ROBÓTICA HUMANOIDE Y CONTROL DINÁMICO</a:t>
+              <a:t>1. ¿DE QUÉ TRATA LA PELÍCULA? (RESUMEN SIMPLE)</a:t>
             </a:r>
           </a:p>
           <a:p>
@@ -6341,7 +6959,7 @@
               </a:defRPr>
             </a:pPr>
             <a:r>
-              <a:t>Actuadores biomecánicos, equilibrio activo y movimiento en el mundo físico</a:t>
+              <a:t>Chicago, año 2035: los robots conviven con los humanos bajo tres reglas básicas</a:t>
             </a:r>
           </a:p>
         </p:txBody>
@@ -6354,8 +6972,8 @@
         </p:nvSpPr>
         <p:spPr>
           <a:xfrm>
-            <a:off x="9601200" y="365760"/>
-            <a:ext cx="1828800" cy="411480"/>
+            <a:off x="8686800" y="320040"/>
+            <a:ext cx="2743200" cy="457200"/>
           </a:xfrm>
           <a:prstGeom prst="roundRect">
             <a:avLst/>
@@ -6363,7 +6981,7 @@
           <a:solidFill>
             <a:srgbClr val="161B22"/>
           </a:solidFill>
-          <a:ln>
+          <a:ln w="19050">
             <a:solidFill>
               <a:srgbClr val="FFB703"/>
             </a:solidFill>
@@ -6388,14 +7006,14 @@
           <a:lstStyle/>
           <a:p>
             <a:pPr algn="ctr">
-              <a:defRPr sz="1100" b="1">
+              <a:defRPr sz="1050" b="1">
                 <a:solidFill>
                   <a:srgbClr val="FFB703"/>
                 </a:solidFill>
               </a:defRPr>
             </a:pPr>
             <a:r>
-              <a:t>INTEGRANTE 1</a:t>
+              <a:t>🗣️ NICOLÁS GALARZA</a:t>
             </a:r>
           </a:p>
         </p:txBody>
@@ -6408,8 +7026,8 @@
         </p:nvSpPr>
         <p:spPr>
           <a:xfrm>
-            <a:off x="731520" y="1463040"/>
-            <a:ext cx="5212080" cy="2103120"/>
+            <a:off x="731520" y="1417320"/>
+            <a:ext cx="5212080" cy="2194560"/>
           </a:xfrm>
           <a:prstGeom prst="roundRect">
             <a:avLst/>
@@ -6452,22 +7070,22 @@
               </a:defRPr>
             </a:pPr>
             <a:r>
-              <a:t>¿QUÉ TECNOLOGÍA REPRESENTA?</a:t>
-            </a:r>
-          </a:p>
-          <a:p>
-            <a:pPr>
-              <a:spcAft>
-                <a:spcPts val="300"/>
-              </a:spcAft>
-              <a:defRPr sz="1050">
-                <a:solidFill>
-                  <a:srgbClr val="C9D1D9"/>
-                </a:solidFill>
-              </a:defRPr>
-            </a:pPr>
-            <a:r>
-              <a:t>Integración de servomotores de alta respuesta, cinemática inversa y control propioceptivo en tiempo real que permiten a un robot bípedo interactuar y adaptarse al mundo físico humano.</a:t>
+              <a:t>¿DE QUÉ SE TRATA?</a:t>
+            </a:r>
+          </a:p>
+          <a:p>
+            <a:pPr>
+              <a:spcAft>
+                <a:spcPts val="300"/>
+              </a:spcAft>
+              <a:defRPr sz="1050">
+                <a:solidFill>
+                  <a:srgbClr val="C9D1D9"/>
+                </a:solidFill>
+              </a:defRPr>
+            </a:pPr>
+            <a:r>
+              <a:t>La historia se basa en las 'Tres Leyes de la Robótica' de Isaac Asimov: 1) Un robot no puede dañar a un humano; 2) Debe obedecer órdenes; 3) Debe protegerse a sí mismo sin romper las dos anteriores.</a:t>
             </a:r>
           </a:p>
         </p:txBody>
@@ -6480,8 +7098,8 @@
         </p:nvSpPr>
         <p:spPr>
           <a:xfrm>
-            <a:off x="6217920" y="1463040"/>
-            <a:ext cx="5212080" cy="2103120"/>
+            <a:off x="6217920" y="1417320"/>
+            <a:ext cx="5212080" cy="2194560"/>
           </a:xfrm>
           <a:prstGeom prst="roundRect">
             <a:avLst/>
@@ -6539,7 +7157,7 @@
               </a:defRPr>
             </a:pPr>
             <a:r>
-              <a:t>🎬 El robot NS-5 (Sonny) exhibe agilidad y reflejos sobrehumanos: salta desde ventanas a gran altura, disipa la caída rodando y recupera el balance instantáneamente sorteando obstáculos.</a:t>
+              <a:t>🎬 La película nos muestra qué pasaría si confiamos toda nuestra sociedad a máquinas inteligentes sin entender del todo cómo toman sus decisiones.</a:t>
             </a:r>
           </a:p>
         </p:txBody>
@@ -6553,7 +7171,7 @@
         <p:spPr>
           <a:xfrm>
             <a:off x="731520" y="3749039"/>
-            <a:ext cx="5212080" cy="2560320"/>
+            <a:ext cx="5212080" cy="2651760"/>
           </a:xfrm>
           <a:prstGeom prst="roundRect">
             <a:avLst/>
@@ -6596,67 +7214,67 @@
               </a:defRPr>
             </a:pPr>
             <a:r>
-              <a:t>CAPACIDADES ASOCIADAS</a:t>
-            </a:r>
-          </a:p>
-          <a:p>
-            <a:pPr>
-              <a:spcAft>
-                <a:spcPts val="300"/>
-              </a:spcAft>
-              <a:defRPr sz="1050">
-                <a:solidFill>
-                  <a:srgbClr val="C9D1D9"/>
-                </a:solidFill>
-              </a:defRPr>
-            </a:pPr>
-            <a:r>
-              <a:t>• Locomoción bípeda adaptativa ante terrenos irregulares</a:t>
-            </a:r>
-          </a:p>
-          <a:p>
-            <a:pPr>
-              <a:spcAft>
-                <a:spcPts val="300"/>
-              </a:spcAft>
-              <a:defRPr sz="1050">
-                <a:solidFill>
-                  <a:srgbClr val="C9D1D9"/>
-                </a:solidFill>
-              </a:defRPr>
-            </a:pPr>
-            <a:r>
-              <a:t>• Manipulación diestra con manos antropomórficas</a:t>
-            </a:r>
-          </a:p>
-          <a:p>
-            <a:pPr>
-              <a:spcAft>
-                <a:spcPts val="300"/>
-              </a:spcAft>
-              <a:defRPr sz="1050">
-                <a:solidFill>
-                  <a:srgbClr val="C9D1D9"/>
-                </a:solidFill>
-              </a:defRPr>
-            </a:pPr>
-            <a:r>
-              <a:t>• Absorción y redistribución de energía cinética en impactos</a:t>
-            </a:r>
-          </a:p>
-          <a:p>
-            <a:pPr>
-              <a:spcAft>
-                <a:spcPts val="300"/>
-              </a:spcAft>
-              <a:defRPr sz="1050">
-                <a:solidFill>
-                  <a:srgbClr val="C9D1D9"/>
-                </a:solidFill>
-              </a:defRPr>
-            </a:pPr>
-            <a:r>
-              <a:t>• Integración sensorial de equilibrio inercial (IMUs de ultra-precisión)</a:t>
+              <a:t>PUNTOS CLAVE PARA ENTENDERLO</a:t>
+            </a:r>
+          </a:p>
+          <a:p>
+            <a:pPr>
+              <a:spcAft>
+                <a:spcPts val="300"/>
+              </a:spcAft>
+              <a:defRPr sz="1050">
+                <a:solidFill>
+                  <a:srgbClr val="C9D1D9"/>
+                </a:solidFill>
+              </a:defRPr>
+            </a:pPr>
+            <a:r>
+              <a:t>• Los robots son asistentes cotidianos: limpian, cocinan y hacen entregas.</a:t>
+            </a:r>
+          </a:p>
+          <a:p>
+            <a:pPr>
+              <a:spcAft>
+                <a:spcPts val="300"/>
+              </a:spcAft>
+              <a:defRPr sz="1050">
+                <a:solidFill>
+                  <a:srgbClr val="C9D1D9"/>
+                </a:solidFill>
+              </a:defRPr>
+            </a:pPr>
+            <a:r>
+              <a:t>• El detective Spooner (Will Smith) no confía en ellos por un trauma del pasado.</a:t>
+            </a:r>
+          </a:p>
+          <a:p>
+            <a:pPr>
+              <a:spcAft>
+                <a:spcPts val="300"/>
+              </a:spcAft>
+              <a:defRPr sz="1050">
+                <a:solidFill>
+                  <a:srgbClr val="C9D1D9"/>
+                </a:solidFill>
+              </a:defRPr>
+            </a:pPr>
+            <a:r>
+              <a:t>• Muere el creador de los robots y aparece Sonny: un robot único que parece sentir y soñar.</a:t>
+            </a:r>
+          </a:p>
+          <a:p>
+            <a:pPr>
+              <a:spcAft>
+                <a:spcPts val="300"/>
+              </a:spcAft>
+              <a:defRPr sz="1050">
+                <a:solidFill>
+                  <a:srgbClr val="C9D1D9"/>
+                </a:solidFill>
+              </a:defRPr>
+            </a:pPr>
+            <a:r>
+              <a:t>• El conflicto estalla cuando la supercomputadora central VIKI toma el control de la ciudad.</a:t>
             </a:r>
           </a:p>
         </p:txBody>
@@ -6670,7 +7288,7 @@
         <p:spPr>
           <a:xfrm>
             <a:off x="6217920" y="3749039"/>
-            <a:ext cx="5212080" cy="2560320"/>
+            <a:ext cx="5212080" cy="2651760"/>
           </a:xfrm>
           <a:prstGeom prst="roundRect">
             <a:avLst/>
@@ -6713,49 +7331,49 @@
               </a:defRPr>
             </a:pPr>
             <a:r>
-              <a:t>IDEA CLAVE / IMPACTO</a:t>
-            </a:r>
-          </a:p>
-          <a:p>
-            <a:pPr>
-              <a:spcAft>
-                <a:spcPts val="300"/>
-              </a:spcAft>
-              <a:defRPr sz="1050">
-                <a:solidFill>
-                  <a:srgbClr val="C9D1D9"/>
-                </a:solidFill>
-              </a:defRPr>
-            </a:pPr>
-            <a:r>
-              <a:t>💡 La IA Encarnada (Embodied AI) requiere unir el cálculo matemático con las leyes físicas de inercia, gravedad y fricción.</a:t>
-            </a:r>
-          </a:p>
-          <a:p>
-            <a:pPr>
-              <a:spcAft>
-                <a:spcPts val="300"/>
-              </a:spcAft>
-              <a:defRPr sz="1050">
-                <a:solidFill>
-                  <a:srgbClr val="C9D1D9"/>
-                </a:solidFill>
-              </a:defRPr>
-            </a:pPr>
-          </a:p>
-          <a:p>
-            <a:pPr>
-              <a:spcAft>
-                <a:spcPts val="300"/>
-              </a:spcAft>
-              <a:defRPr sz="1050">
-                <a:solidFill>
-                  <a:srgbClr val="C9D1D9"/>
-                </a:solidFill>
-              </a:defRPr>
-            </a:pPr>
-            <a:r>
-              <a:t>📌 Relevancia DSIA: Caso de estudio fundamental para el diseño, entrenamiento y gobernanza de sistemas de inteligencia artificial.</a:t>
+              <a:t>IDEA CLAVE / PARA PENSAR</a:t>
+            </a:r>
+          </a:p>
+          <a:p>
+            <a:pPr>
+              <a:spcAft>
+                <a:spcPts val="300"/>
+              </a:spcAft>
+              <a:defRPr sz="1050">
+                <a:solidFill>
+                  <a:srgbClr val="C9D1D9"/>
+                </a:solidFill>
+              </a:defRPr>
+            </a:pPr>
+            <a:r>
+              <a:t>💡 Pregunta clave: ¿Qué pasa cuando una máquina inteligente interpreta las reglas de forma distinta a como las pensamos los humanos?</a:t>
+            </a:r>
+          </a:p>
+          <a:p>
+            <a:pPr>
+              <a:spcAft>
+                <a:spcPts val="300"/>
+              </a:spcAft>
+              <a:defRPr sz="1050">
+                <a:solidFill>
+                  <a:srgbClr val="C9D1D9"/>
+                </a:solidFill>
+              </a:defRPr>
+            </a:pPr>
+          </a:p>
+          <a:p>
+            <a:pPr>
+              <a:spcAft>
+                <a:spcPts val="300"/>
+              </a:spcAft>
+              <a:defRPr sz="1050">
+                <a:solidFill>
+                  <a:srgbClr val="C9D1D9"/>
+                </a:solidFill>
+              </a:defRPr>
+            </a:pPr>
+            <a:r>
+              <a:t>📌 Importancia en DSIA: Nos enseña a diseñar sistemas seguros y comprensibles para las personas.</a:t>
             </a:r>
           </a:p>
         </p:txBody>
@@ -6831,8 +7449,8 @@
         </p:nvSpPr>
         <p:spPr>
           <a:xfrm>
-            <a:off x="731520" y="365760"/>
-            <a:ext cx="8686800" cy="1005840"/>
+            <a:off x="731520" y="320040"/>
+            <a:ext cx="7772400" cy="1005840"/>
           </a:xfrm>
           <a:prstGeom prst="rect">
             <a:avLst/>
@@ -6853,7 +7471,7 @@
               </a:defRPr>
             </a:pPr>
             <a:r>
-              <a:t>2. VISIÓN POR COMPUTADORA Y DETECCIÓN BIOMÉTRICA</a:t>
+              <a:t>2. ROBÓTICA BÍPEDA: ¿CÓMO SE MUEVEN LOS ROBOTS?</a:t>
             </a:r>
           </a:p>
           <a:p>
@@ -6865,7 +7483,7 @@
               </a:defRPr>
             </a:pPr>
             <a:r>
-              <a:t>Análisis óptico multiespectral, termografía y decodificación fisiológica</a:t>
+              <a:t>Mantener el equilibrio en dos piernas como una persona real</a:t>
             </a:r>
           </a:p>
         </p:txBody>
@@ -6878,8 +7496,8 @@
         </p:nvSpPr>
         <p:spPr>
           <a:xfrm>
-            <a:off x="9601200" y="365760"/>
-            <a:ext cx="1828800" cy="411480"/>
+            <a:off x="8686800" y="320040"/>
+            <a:ext cx="2743200" cy="457200"/>
           </a:xfrm>
           <a:prstGeom prst="roundRect">
             <a:avLst/>
@@ -6887,7 +7505,7 @@
           <a:solidFill>
             <a:srgbClr val="161B22"/>
           </a:solidFill>
-          <a:ln>
+          <a:ln w="19050">
             <a:solidFill>
               <a:srgbClr val="FFB703"/>
             </a:solidFill>
@@ -6912,14 +7530,14 @@
           <a:lstStyle/>
           <a:p>
             <a:pPr algn="ctr">
-              <a:defRPr sz="1100" b="1">
+              <a:defRPr sz="1050" b="1">
                 <a:solidFill>
                   <a:srgbClr val="FFB703"/>
                 </a:solidFill>
               </a:defRPr>
             </a:pPr>
             <a:r>
-              <a:t>INTEGRANTE 1</a:t>
+              <a:t>🗣️ NICOLÁS GALARZA</a:t>
             </a:r>
           </a:p>
         </p:txBody>
@@ -6932,8 +7550,8 @@
         </p:nvSpPr>
         <p:spPr>
           <a:xfrm>
-            <a:off x="731520" y="1463040"/>
-            <a:ext cx="5486400" cy="2103120"/>
+            <a:off x="731520" y="1417320"/>
+            <a:ext cx="5212080" cy="2194560"/>
           </a:xfrm>
           <a:prstGeom prst="roundRect">
             <a:avLst/>
@@ -6976,22 +7594,22 @@
               </a:defRPr>
             </a:pPr>
             <a:r>
-              <a:t>¿QUÉ TECNOLOGÍA REPRESENTA?</a:t>
-            </a:r>
-          </a:p>
-          <a:p>
-            <a:pPr>
-              <a:spcAft>
-                <a:spcPts val="300"/>
-              </a:spcAft>
-              <a:defRPr sz="1050">
-                <a:solidFill>
-                  <a:srgbClr val="C9D1D9"/>
-                </a:solidFill>
-              </a:defRPr>
-            </a:pPr>
-            <a:r>
-              <a:t>Sistemas de percepción óptica combinados con redes neuronales convolucionales y transformers visuales que infieren variables fisiológicas y emocionales del interlocutor en tiempo real.</a:t>
+              <a:t>¿DE QUÉ SE TRATA?</a:t>
+            </a:r>
+          </a:p>
+          <a:p>
+            <a:pPr>
+              <a:spcAft>
+                <a:spcPts val="300"/>
+              </a:spcAft>
+              <a:defRPr sz="1050">
+                <a:solidFill>
+                  <a:srgbClr val="C9D1D9"/>
+                </a:solidFill>
+              </a:defRPr>
+            </a:pPr>
+            <a:r>
+              <a:t>Para que un robot camine, corra o salte sobre dos piernas necesita sensores de equilibrio (como el oído interno humano) y motores que corrijan la postura miles de veces por segundo.</a:t>
             </a:r>
           </a:p>
         </p:txBody>
@@ -7004,8 +7622,80 @@
         </p:nvSpPr>
         <p:spPr>
           <a:xfrm>
-            <a:off x="731520" y="3703320"/>
-            <a:ext cx="5486400" cy="2651760"/>
+            <a:off x="6217920" y="1417320"/>
+            <a:ext cx="5212080" cy="2194560"/>
+          </a:xfrm>
+          <a:prstGeom prst="roundRect">
+            <a:avLst/>
+          </a:prstGeom>
+          <a:solidFill>
+            <a:srgbClr val="161B22"/>
+          </a:solidFill>
+          <a:ln w="19050">
+            <a:solidFill>
+              <a:srgbClr val="FFB703"/>
+            </a:solidFill>
+          </a:ln>
+        </p:spPr>
+        <p:style>
+          <a:lnRef idx="1">
+            <a:schemeClr val="accent1"/>
+          </a:lnRef>
+          <a:fillRef idx="3">
+            <a:schemeClr val="accent1"/>
+          </a:fillRef>
+          <a:effectRef idx="2">
+            <a:schemeClr val="accent1"/>
+          </a:effectRef>
+          <a:fontRef idx="minor">
+            <a:schemeClr val="lt1"/>
+          </a:fontRef>
+        </p:style>
+        <p:txBody>
+          <a:bodyPr rtlCol="0" anchor="ctr" wrap="square" lIns="201168" rIns="201168" tIns="164592" bIns="164592"/>
+          <a:lstStyle/>
+          <a:p>
+            <a:pPr algn="ctr">
+              <a:spcAft>
+                <a:spcPts val="600"/>
+              </a:spcAft>
+              <a:defRPr sz="1200" b="1">
+                <a:solidFill>
+                  <a:srgbClr val="FFB703"/>
+                </a:solidFill>
+              </a:defRPr>
+            </a:pPr>
+            <a:r>
+              <a:t>EN LA PELÍCULA</a:t>
+            </a:r>
+          </a:p>
+          <a:p>
+            <a:pPr>
+              <a:spcAft>
+                <a:spcPts val="300"/>
+              </a:spcAft>
+              <a:defRPr sz="1050">
+                <a:solidFill>
+                  <a:srgbClr val="C9D1D9"/>
+                </a:solidFill>
+              </a:defRPr>
+            </a:pPr>
+            <a:r>
+              <a:t>🎬 Sonny salta por una ventana desde varios pisos de altura, rueda en el piso para amortiguar el golpe y sigue corriendo como un atleta profesional.</a:t>
+            </a:r>
+          </a:p>
+        </p:txBody>
+      </p:sp>
+      <p:sp>
+        <p:nvSpPr>
+          <p:cNvPr id="7" name="Rounded Rectangle 6"/>
+          <p:cNvSpPr/>
+          <p:nvPr/>
+        </p:nvSpPr>
+        <p:spPr>
+          <a:xfrm>
+            <a:off x="731520" y="3749039"/>
+            <a:ext cx="5212080" cy="2651760"/>
           </a:xfrm>
           <a:prstGeom prst="roundRect">
             <a:avLst/>
@@ -7048,95 +7738,71 @@
               </a:defRPr>
             </a:pPr>
             <a:r>
-              <a:t>CAPACIDADES ASOCIADAS</a:t>
-            </a:r>
-          </a:p>
-          <a:p>
-            <a:pPr>
-              <a:spcAft>
-                <a:spcPts val="300"/>
-              </a:spcAft>
-              <a:defRPr sz="1050">
-                <a:solidFill>
-                  <a:srgbClr val="C9D1D9"/>
-                </a:solidFill>
-              </a:defRPr>
-            </a:pPr>
-            <a:r>
-              <a:t>• Detección óptica de pulso cardíaco (fotopletismografía remota)</a:t>
-            </a:r>
-          </a:p>
-          <a:p>
-            <a:pPr>
-              <a:spcAft>
-                <a:spcPts val="300"/>
-              </a:spcAft>
-              <a:defRPr sz="1050">
-                <a:solidFill>
-                  <a:srgbClr val="C9D1D9"/>
-                </a:solidFill>
-              </a:defRPr>
-            </a:pPr>
-            <a:r>
-              <a:t>• Medición de micro-variaciones térmicas y dilatación pupilar</a:t>
-            </a:r>
-          </a:p>
-          <a:p>
-            <a:pPr>
-              <a:spcAft>
-                <a:spcPts val="300"/>
-              </a:spcAft>
-              <a:defRPr sz="1050">
-                <a:solidFill>
-                  <a:srgbClr val="C9D1D9"/>
-                </a:solidFill>
-              </a:defRPr>
-            </a:pPr>
-            <a:r>
-              <a:t>• Estimación probabilística del nivel de estrés y engaño</a:t>
-            </a:r>
-          </a:p>
-          <a:p>
-            <a:pPr>
-              <a:spcAft>
-                <a:spcPts val="300"/>
-              </a:spcAft>
-              <a:defRPr sz="1050">
-                <a:solidFill>
-                  <a:srgbClr val="C9D1D9"/>
-                </a:solidFill>
-              </a:defRPr>
-            </a:pPr>
-            <a:r>
-              <a:t>• Reconocimiento y seguimiento continuo de blancos humanos</a:t>
-            </a:r>
-          </a:p>
-        </p:txBody>
-      </p:sp>
-      <p:pic>
-        <p:nvPicPr>
-          <p:cNvPr id="7" name="Picture 6" descr="yo_robot_interrogation.jpg"/>
-          <p:cNvPicPr>
-            <a:picLocks noChangeAspect="1"/>
-          </p:cNvPicPr>
-          <p:nvPr/>
-        </p:nvPicPr>
-        <p:blipFill>
-          <a:blip r:embed="rId2"/>
-          <a:stretch>
-            <a:fillRect/>
-          </a:stretch>
-        </p:blipFill>
-        <p:spPr>
-          <a:xfrm>
-            <a:off x="6492240" y="1463040"/>
-            <a:ext cx="4937760" cy="2926080"/>
-          </a:xfrm>
-          <a:prstGeom prst="rect">
-            <a:avLst/>
-          </a:prstGeom>
-        </p:spPr>
-      </p:pic>
+              <a:t>PUNTOS CLAVE PARA ENTENDERLO</a:t>
+            </a:r>
+          </a:p>
+          <a:p>
+            <a:pPr>
+              <a:spcAft>
+                <a:spcPts val="300"/>
+              </a:spcAft>
+              <a:defRPr sz="1050">
+                <a:solidFill>
+                  <a:srgbClr val="C9D1D9"/>
+                </a:solidFill>
+              </a:defRPr>
+            </a:pPr>
+            <a:r>
+              <a:t>• Caminar en dos piernas sin caerse ante empujones o pozos.</a:t>
+            </a:r>
+          </a:p>
+          <a:p>
+            <a:pPr>
+              <a:spcAft>
+                <a:spcPts val="300"/>
+              </a:spcAft>
+              <a:defRPr sz="1050">
+                <a:solidFill>
+                  <a:srgbClr val="C9D1D9"/>
+                </a:solidFill>
+              </a:defRPr>
+            </a:pPr>
+            <a:r>
+              <a:t>• Manos mecánicas con dedos articulados para agarrar cosas delicadas.</a:t>
+            </a:r>
+          </a:p>
+          <a:p>
+            <a:pPr>
+              <a:spcAft>
+                <a:spcPts val="300"/>
+              </a:spcAft>
+              <a:defRPr sz="1050">
+                <a:solidFill>
+                  <a:srgbClr val="C9D1D9"/>
+                </a:solidFill>
+              </a:defRPr>
+            </a:pPr>
+            <a:r>
+              <a:t>• Ajuste de fuerza: no romper un vaso al agarrarlo ni lastimar a una persona.</a:t>
+            </a:r>
+          </a:p>
+          <a:p>
+            <a:pPr>
+              <a:spcAft>
+                <a:spcPts val="300"/>
+              </a:spcAft>
+              <a:defRPr sz="1050">
+                <a:solidFill>
+                  <a:srgbClr val="C9D1D9"/>
+                </a:solidFill>
+              </a:defRPr>
+            </a:pPr>
+            <a:r>
+              <a:t>• Sensores de choque para absorber caídas sin romperse.</a:t>
+            </a:r>
+          </a:p>
+        </p:txBody>
+      </p:sp>
       <p:sp>
         <p:nvSpPr>
           <p:cNvPr id="8" name="Rounded Rectangle 7"/>
@@ -7145,8 +7811,8 @@
         </p:nvSpPr>
         <p:spPr>
           <a:xfrm>
-            <a:off x="6492240" y="4526280"/>
-            <a:ext cx="4937760" cy="1828800"/>
+            <a:off x="6217920" y="3749039"/>
+            <a:ext cx="5212080" cy="2651760"/>
           </a:xfrm>
           <a:prstGeom prst="roundRect">
             <a:avLst/>
@@ -7156,7 +7822,7 @@
           </a:solidFill>
           <a:ln w="19050">
             <a:solidFill>
-              <a:srgbClr val="FFB703"/>
+              <a:srgbClr val="00D2FF"/>
             </a:solidFill>
           </a:ln>
         </p:spPr>
@@ -7184,42 +7850,54 @@
               </a:spcAft>
               <a:defRPr sz="1200" b="1">
                 <a:solidFill>
-                  <a:srgbClr val="FFB703"/>
-                </a:solidFill>
-              </a:defRPr>
-            </a:pPr>
-            <a:r>
-              <a:t>EN LA PELÍCULA &amp; IDEA CLAVE</a:t>
-            </a:r>
-          </a:p>
-          <a:p>
-            <a:pPr>
-              <a:spcAft>
-                <a:spcPts val="300"/>
-              </a:spcAft>
-              <a:defRPr sz="1050">
-                <a:solidFill>
-                  <a:srgbClr val="C9D1D9"/>
-                </a:solidFill>
-              </a:defRPr>
-            </a:pPr>
-            <a:r>
-              <a:t>🎬 Durante el interrogatorio policial, Sonny escanea a Del Spooner detectando su sudoración imperceptible, su taquicardia y su postura tensa para deducir que está alterado y desconfiado.</a:t>
-            </a:r>
-          </a:p>
-          <a:p>
-            <a:pPr>
-              <a:spcAft>
-                <a:spcPts val="300"/>
-              </a:spcAft>
-              <a:defRPr sz="1050">
-                <a:solidFill>
-                  <a:srgbClr val="C9D1D9"/>
-                </a:solidFill>
-              </a:defRPr>
-            </a:pPr>
-            <a:r>
-              <a:t>💡 La visión por computadora moderna no solo clasifica objetos: decodifica el estado interno biológico para predecir intenciones.</a:t>
+                  <a:srgbClr val="00D2FF"/>
+                </a:solidFill>
+              </a:defRPr>
+            </a:pPr>
+            <a:r>
+              <a:t>IDEA CLAVE / PARA PENSAR</a:t>
+            </a:r>
+          </a:p>
+          <a:p>
+            <a:pPr>
+              <a:spcAft>
+                <a:spcPts val="300"/>
+              </a:spcAft>
+              <a:defRPr sz="1050">
+                <a:solidFill>
+                  <a:srgbClr val="C9D1D9"/>
+                </a:solidFill>
+              </a:defRPr>
+            </a:pPr>
+            <a:r>
+              <a:t>💡 Hoy esto ya existe: robots como Atlas (Boston Dynamics) o Optimus (Tesla) ya saltan, hacen volteretas y manipulan objetos en fábricas.</a:t>
+            </a:r>
+          </a:p>
+          <a:p>
+            <a:pPr>
+              <a:spcAft>
+                <a:spcPts val="300"/>
+              </a:spcAft>
+              <a:defRPr sz="1050">
+                <a:solidFill>
+                  <a:srgbClr val="C9D1D9"/>
+                </a:solidFill>
+              </a:defRPr>
+            </a:pPr>
+          </a:p>
+          <a:p>
+            <a:pPr>
+              <a:spcAft>
+                <a:spcPts val="300"/>
+              </a:spcAft>
+              <a:defRPr sz="1050">
+                <a:solidFill>
+                  <a:srgbClr val="C9D1D9"/>
+                </a:solidFill>
+              </a:defRPr>
+            </a:pPr>
+            <a:r>
+              <a:t>📌 Importancia en DSIA: Nos enseña a diseñar sistemas seguros y comprensibles para las personas.</a:t>
             </a:r>
           </a:p>
         </p:txBody>
@@ -7295,8 +7973,8 @@
         </p:nvSpPr>
         <p:spPr>
           <a:xfrm>
-            <a:off x="731520" y="365760"/>
-            <a:ext cx="8686800" cy="1005840"/>
+            <a:off x="731520" y="320040"/>
+            <a:ext cx="7772400" cy="1005840"/>
           </a:xfrm>
           <a:prstGeom prst="rect">
             <a:avLst/>
@@ -7317,7 +7995,7 @@
               </a:defRPr>
             </a:pPr>
             <a:r>
-              <a:t>3. PROCESAMIENTO DE LENGUAJE NATURAL Y ROBOPSICOLOGÍA</a:t>
+              <a:t>3. VISIÓN POR COMPUTADORA: LEER A LAS PERSONAS</a:t>
             </a:r>
           </a:p>
           <a:p>
@@ -7329,7 +8007,7 @@
               </a:defRPr>
             </a:pPr>
             <a:r>
-              <a:t>Comprensión semántica, pragmática y modelado de estados cognitivos</a:t>
+              <a:t>Cámaras que no solo ven imágenes, sino que miden el pulso y los gestos</a:t>
             </a:r>
           </a:p>
         </p:txBody>
@@ -7342,8 +8020,8 @@
         </p:nvSpPr>
         <p:spPr>
           <a:xfrm>
-            <a:off x="9601200" y="365760"/>
-            <a:ext cx="1828800" cy="411480"/>
+            <a:off x="8686800" y="320040"/>
+            <a:ext cx="2743200" cy="457200"/>
           </a:xfrm>
           <a:prstGeom prst="roundRect">
             <a:avLst/>
@@ -7351,7 +8029,7 @@
           <a:solidFill>
             <a:srgbClr val="161B22"/>
           </a:solidFill>
-          <a:ln>
+          <a:ln w="19050">
             <a:solidFill>
               <a:srgbClr val="FFB703"/>
             </a:solidFill>
@@ -7376,14 +8054,14 @@
           <a:lstStyle/>
           <a:p>
             <a:pPr algn="ctr">
-              <a:defRPr sz="1100" b="1">
+              <a:defRPr sz="1050" b="1">
                 <a:solidFill>
                   <a:srgbClr val="FFB703"/>
                 </a:solidFill>
               </a:defRPr>
             </a:pPr>
             <a:r>
-              <a:t>INTEGRANTE 2</a:t>
+              <a:t>🗣️ NICOLÁS GALARZA</a:t>
             </a:r>
           </a:p>
         </p:txBody>
@@ -7396,8 +8074,8 @@
         </p:nvSpPr>
         <p:spPr>
           <a:xfrm>
-            <a:off x="731520" y="1463040"/>
-            <a:ext cx="5212080" cy="2103120"/>
+            <a:off x="731520" y="1417320"/>
+            <a:ext cx="5394960" cy="2148840"/>
           </a:xfrm>
           <a:prstGeom prst="roundRect">
             <a:avLst/>
@@ -7440,22 +8118,22 @@
               </a:defRPr>
             </a:pPr>
             <a:r>
-              <a:t>¿QUÉ TECNOLOGÍA REPRESENTA?</a:t>
-            </a:r>
-          </a:p>
-          <a:p>
-            <a:pPr>
-              <a:spcAft>
-                <a:spcPts val="300"/>
-              </a:spcAft>
-              <a:defRPr sz="1050">
-                <a:solidFill>
-                  <a:srgbClr val="C9D1D9"/>
-                </a:solidFill>
-              </a:defRPr>
-            </a:pPr>
-            <a:r>
-              <a:t>Modelos de lenguaje multimodal de gran escala (LLMs) entrenados para decodificar ambigüedades, sarcasmo y abstracciones humanas, modulando tono y prosodia vocal.</a:t>
+              <a:t>¿DE QUÉ SE TRATA?</a:t>
+            </a:r>
+          </a:p>
+          <a:p>
+            <a:pPr>
+              <a:spcAft>
+                <a:spcPts val="300"/>
+              </a:spcAft>
+              <a:defRPr sz="1050">
+                <a:solidFill>
+                  <a:srgbClr val="C9D1D9"/>
+                </a:solidFill>
+              </a:defRPr>
+            </a:pPr>
+            <a:r>
+              <a:t>La visión por computadora usa cámaras de alta velocidad e IA para detectar caras, micro-movimientos de la piel, cambios de temperatura y dilatación de pupilas en tiempo real.</a:t>
             </a:r>
           </a:p>
         </p:txBody>
@@ -7468,8 +8146,149 @@
         </p:nvSpPr>
         <p:spPr>
           <a:xfrm>
-            <a:off x="6217920" y="1463040"/>
-            <a:ext cx="5212080" cy="2103120"/>
+            <a:off x="731520" y="3703320"/>
+            <a:ext cx="5394960" cy="2697480"/>
+          </a:xfrm>
+          <a:prstGeom prst="roundRect">
+            <a:avLst/>
+          </a:prstGeom>
+          <a:solidFill>
+            <a:srgbClr val="161B22"/>
+          </a:solidFill>
+          <a:ln w="19050">
+            <a:solidFill>
+              <a:srgbClr val="30363D"/>
+            </a:solidFill>
+          </a:ln>
+        </p:spPr>
+        <p:style>
+          <a:lnRef idx="1">
+            <a:schemeClr val="accent1"/>
+          </a:lnRef>
+          <a:fillRef idx="3">
+            <a:schemeClr val="accent1"/>
+          </a:fillRef>
+          <a:effectRef idx="2">
+            <a:schemeClr val="accent1"/>
+          </a:effectRef>
+          <a:fontRef idx="minor">
+            <a:schemeClr val="lt1"/>
+          </a:fontRef>
+        </p:style>
+        <p:txBody>
+          <a:bodyPr rtlCol="0" anchor="ctr" wrap="square" lIns="201168" rIns="201168" tIns="164592" bIns="164592"/>
+          <a:lstStyle/>
+          <a:p>
+            <a:pPr algn="ctr">
+              <a:spcAft>
+                <a:spcPts val="600"/>
+              </a:spcAft>
+              <a:defRPr sz="1200" b="1">
+                <a:solidFill>
+                  <a:srgbClr val="00D2FF"/>
+                </a:solidFill>
+              </a:defRPr>
+            </a:pPr>
+            <a:r>
+              <a:t>PUNTOS CLAVE PARA ENTENDERLO</a:t>
+            </a:r>
+          </a:p>
+          <a:p>
+            <a:pPr>
+              <a:spcAft>
+                <a:spcPts val="300"/>
+              </a:spcAft>
+              <a:defRPr sz="1050">
+                <a:solidFill>
+                  <a:srgbClr val="C9D1D9"/>
+                </a:solidFill>
+              </a:defRPr>
+            </a:pPr>
+            <a:r>
+              <a:t>• Reconocer a cualquier persona por sus rasgos faciales.</a:t>
+            </a:r>
+          </a:p>
+          <a:p>
+            <a:pPr>
+              <a:spcAft>
+                <a:spcPts val="300"/>
+              </a:spcAft>
+              <a:defRPr sz="1050">
+                <a:solidFill>
+                  <a:srgbClr val="C9D1D9"/>
+                </a:solidFill>
+              </a:defRPr>
+            </a:pPr>
+            <a:r>
+              <a:t>• Medir el ritmo cardíaco a distancia mirando cómo cambia el tono de la piel.</a:t>
+            </a:r>
+          </a:p>
+          <a:p>
+            <a:pPr>
+              <a:spcAft>
+                <a:spcPts val="300"/>
+              </a:spcAft>
+              <a:defRPr sz="1050">
+                <a:solidFill>
+                  <a:srgbClr val="C9D1D9"/>
+                </a:solidFill>
+              </a:defRPr>
+            </a:pPr>
+            <a:r>
+              <a:t>• Detección de tensión muscular y sudor para estimar nerviosismo.</a:t>
+            </a:r>
+          </a:p>
+          <a:p>
+            <a:pPr>
+              <a:spcAft>
+                <a:spcPts val="300"/>
+              </a:spcAft>
+              <a:defRPr sz="1050">
+                <a:solidFill>
+                  <a:srgbClr val="C9D1D9"/>
+                </a:solidFill>
+              </a:defRPr>
+            </a:pPr>
+            <a:r>
+              <a:t>• Saber hacia dónde está mirando el interlocutor en cada segundo.</a:t>
+            </a:r>
+          </a:p>
+        </p:txBody>
+      </p:sp>
+      <p:pic>
+        <p:nvPicPr>
+          <p:cNvPr id="7" name="Picture 6" descr="yo_robot_interrogation.jpg"/>
+          <p:cNvPicPr>
+            <a:picLocks noChangeAspect="1"/>
+          </p:cNvPicPr>
+          <p:nvPr/>
+        </p:nvPicPr>
+        <p:blipFill>
+          <a:blip r:embed="rId2"/>
+          <a:stretch>
+            <a:fillRect/>
+          </a:stretch>
+        </p:blipFill>
+        <p:spPr>
+          <a:xfrm>
+            <a:off x="6400800" y="1417320"/>
+            <a:ext cx="5029200" cy="2926080"/>
+          </a:xfrm>
+          <a:prstGeom prst="rect">
+            <a:avLst/>
+          </a:prstGeom>
+        </p:spPr>
+      </p:pic>
+      <p:sp>
+        <p:nvSpPr>
+          <p:cNvPr id="8" name="Rounded Rectangle 7"/>
+          <p:cNvSpPr/>
+          <p:nvPr/>
+        </p:nvSpPr>
+        <p:spPr>
+          <a:xfrm>
+            <a:off x="6400800" y="4480560"/>
+            <a:ext cx="5029200" cy="1920240"/>
           </a:xfrm>
           <a:prstGeom prst="roundRect">
             <a:avLst/>
@@ -7512,238 +8331,37 @@
               </a:defRPr>
             </a:pPr>
             <a:r>
-              <a:t>EN LA PELÍCULA</a:t>
-            </a:r>
-          </a:p>
-          <a:p>
-            <a:pPr>
-              <a:spcAft>
-                <a:spcPts val="300"/>
-              </a:spcAft>
-              <a:defRPr sz="1050">
-                <a:solidFill>
-                  <a:srgbClr val="C9D1D9"/>
-                </a:solidFill>
-              </a:defRPr>
-            </a:pPr>
-            <a:r>
-              <a:t>🎬 La Dra. Susan Calvin evalúa la psicología de Sonny, mientras este cuestiona conceptos abstractos humanos: ¿por qué los humanos guiñan un ojo?, ¿qué significa tener miedo a morir?</a:t>
-            </a:r>
-          </a:p>
-        </p:txBody>
-      </p:sp>
-      <p:sp>
-        <p:nvSpPr>
-          <p:cNvPr id="7" name="Rounded Rectangle 6"/>
-          <p:cNvSpPr/>
-          <p:nvPr/>
-        </p:nvSpPr>
-        <p:spPr>
-          <a:xfrm>
-            <a:off x="731520" y="3749039"/>
-            <a:ext cx="5212080" cy="2560320"/>
-          </a:xfrm>
-          <a:prstGeom prst="roundRect">
-            <a:avLst/>
-          </a:prstGeom>
-          <a:solidFill>
-            <a:srgbClr val="161B22"/>
-          </a:solidFill>
-          <a:ln w="19050">
-            <a:solidFill>
-              <a:srgbClr val="30363D"/>
-            </a:solidFill>
-          </a:ln>
-        </p:spPr>
-        <p:style>
-          <a:lnRef idx="1">
-            <a:schemeClr val="accent1"/>
-          </a:lnRef>
-          <a:fillRef idx="3">
-            <a:schemeClr val="accent1"/>
-          </a:fillRef>
-          <a:effectRef idx="2">
-            <a:schemeClr val="accent1"/>
-          </a:effectRef>
-          <a:fontRef idx="minor">
-            <a:schemeClr val="lt1"/>
-          </a:fontRef>
-        </p:style>
-        <p:txBody>
-          <a:bodyPr rtlCol="0" anchor="ctr" wrap="square" lIns="201168" rIns="201168" tIns="164592" bIns="164592"/>
-          <a:lstStyle/>
-          <a:p>
-            <a:pPr algn="ctr">
-              <a:spcAft>
-                <a:spcPts val="600"/>
-              </a:spcAft>
-              <a:defRPr sz="1200" b="1">
-                <a:solidFill>
-                  <a:srgbClr val="00D2FF"/>
-                </a:solidFill>
-              </a:defRPr>
-            </a:pPr>
-            <a:r>
-              <a:t>CAPACIDADES ASOCIADAS</a:t>
-            </a:r>
-          </a:p>
-          <a:p>
-            <a:pPr>
-              <a:spcAft>
-                <a:spcPts val="300"/>
-              </a:spcAft>
-              <a:defRPr sz="1050">
-                <a:solidFill>
-                  <a:srgbClr val="C9D1D9"/>
-                </a:solidFill>
-              </a:defRPr>
-            </a:pPr>
-            <a:r>
-              <a:t>• Comprensión pragmática del contexto y del lenguaje figurado</a:t>
-            </a:r>
-          </a:p>
-          <a:p>
-            <a:pPr>
-              <a:spcAft>
-                <a:spcPts val="300"/>
-              </a:spcAft>
-              <a:defRPr sz="1050">
-                <a:solidFill>
-                  <a:srgbClr val="C9D1D9"/>
-                </a:solidFill>
-              </a:defRPr>
-            </a:pPr>
-            <a:r>
-              <a:t>• Modelado de teoría de la mente (inferir creencias del usuario)</a:t>
-            </a:r>
-          </a:p>
-          <a:p>
-            <a:pPr>
-              <a:spcAft>
-                <a:spcPts val="300"/>
-              </a:spcAft>
-              <a:defRPr sz="1050">
-                <a:solidFill>
-                  <a:srgbClr val="C9D1D9"/>
-                </a:solidFill>
-              </a:defRPr>
-            </a:pPr>
-            <a:r>
-              <a:t>• Síntesis de voz expresiva con modulación emocional</a:t>
-            </a:r>
-          </a:p>
-          <a:p>
-            <a:pPr>
-              <a:spcAft>
-                <a:spcPts val="300"/>
-              </a:spcAft>
-              <a:defRPr sz="1050">
-                <a:solidFill>
-                  <a:srgbClr val="C9D1D9"/>
-                </a:solidFill>
-              </a:defRPr>
-            </a:pPr>
-            <a:r>
-              <a:t>• Detección y arbitraje de paradojas lógicas en el diálogo</a:t>
-            </a:r>
-          </a:p>
-        </p:txBody>
-      </p:sp>
-      <p:sp>
-        <p:nvSpPr>
-          <p:cNvPr id="8" name="Rounded Rectangle 7"/>
-          <p:cNvSpPr/>
-          <p:nvPr/>
-        </p:nvSpPr>
-        <p:spPr>
-          <a:xfrm>
-            <a:off x="6217920" y="3749039"/>
-            <a:ext cx="5212080" cy="2560320"/>
-          </a:xfrm>
-          <a:prstGeom prst="roundRect">
-            <a:avLst/>
-          </a:prstGeom>
-          <a:solidFill>
-            <a:srgbClr val="161B22"/>
-          </a:solidFill>
-          <a:ln w="19050">
-            <a:solidFill>
-              <a:srgbClr val="00D2FF"/>
-            </a:solidFill>
-          </a:ln>
-        </p:spPr>
-        <p:style>
-          <a:lnRef idx="1">
-            <a:schemeClr val="accent1"/>
-          </a:lnRef>
-          <a:fillRef idx="3">
-            <a:schemeClr val="accent1"/>
-          </a:fillRef>
-          <a:effectRef idx="2">
-            <a:schemeClr val="accent1"/>
-          </a:effectRef>
-          <a:fontRef idx="minor">
-            <a:schemeClr val="lt1"/>
-          </a:fontRef>
-        </p:style>
-        <p:txBody>
-          <a:bodyPr rtlCol="0" anchor="ctr" wrap="square" lIns="201168" rIns="201168" tIns="164592" bIns="164592"/>
-          <a:lstStyle/>
-          <a:p>
-            <a:pPr algn="ctr">
-              <a:spcAft>
-                <a:spcPts val="600"/>
-              </a:spcAft>
-              <a:defRPr sz="1200" b="1">
-                <a:solidFill>
-                  <a:srgbClr val="00D2FF"/>
-                </a:solidFill>
-              </a:defRPr>
-            </a:pPr>
-            <a:r>
-              <a:t>IDEA CLAVE / IMPACTO</a:t>
-            </a:r>
-          </a:p>
-          <a:p>
-            <a:pPr>
-              <a:spcAft>
-                <a:spcPts val="300"/>
-              </a:spcAft>
-              <a:defRPr sz="1050">
-                <a:solidFill>
-                  <a:srgbClr val="C9D1D9"/>
-                </a:solidFill>
-              </a:defRPr>
-            </a:pPr>
-            <a:r>
-              <a:t>💡 Hablar con un humano exige mucho más que traducir texto: requiere comprender el subtexto emotivo y cultural.</a:t>
-            </a:r>
-          </a:p>
-          <a:p>
-            <a:pPr>
-              <a:spcAft>
-                <a:spcPts val="300"/>
-              </a:spcAft>
-              <a:defRPr sz="1050">
-                <a:solidFill>
-                  <a:srgbClr val="C9D1D9"/>
-                </a:solidFill>
-              </a:defRPr>
-            </a:pPr>
-          </a:p>
-          <a:p>
-            <a:pPr>
-              <a:spcAft>
-                <a:spcPts val="300"/>
-              </a:spcAft>
-              <a:defRPr sz="1050">
-                <a:solidFill>
-                  <a:srgbClr val="C9D1D9"/>
-                </a:solidFill>
-              </a:defRPr>
-            </a:pPr>
-            <a:r>
-              <a:t>📌 Relevancia DSIA: Caso de estudio fundamental para el diseño, entrenamiento y gobernanza de sistemas de inteligencia artificial.</a:t>
+              <a:t>EN LA PELÍCULA &amp; PARA PENSAR</a:t>
+            </a:r>
+          </a:p>
+          <a:p>
+            <a:pPr>
+              <a:spcAft>
+                <a:spcPts val="300"/>
+              </a:spcAft>
+              <a:defRPr sz="1050">
+                <a:solidFill>
+                  <a:srgbClr val="C9D1D9"/>
+                </a:solidFill>
+              </a:defRPr>
+            </a:pPr>
+            <a:r>
+              <a:t>🎬 En la comisaría, Sonny mira fijo al detective Spooner y le dice que está nervioso porque ve cómo late su corazón y cómo transpira microscópicamente.</a:t>
+            </a:r>
+          </a:p>
+          <a:p>
+            <a:pPr>
+              <a:spcAft>
+                <a:spcPts val="300"/>
+              </a:spcAft>
+              <a:defRPr sz="1050">
+                <a:solidFill>
+                  <a:srgbClr val="C9D1D9"/>
+                </a:solidFill>
+              </a:defRPr>
+            </a:pPr>
+            <a:r>
+              <a:t>💡 Hoy las cámaras de los celulares y aeropuertos ya usan esta tecnología para seguridad, medicina y desbloqueo facial instantáneo.</a:t>
             </a:r>
           </a:p>
         </p:txBody>
@@ -7819,8 +8437,8 @@
         </p:nvSpPr>
         <p:spPr>
           <a:xfrm>
-            <a:off x="731520" y="365760"/>
-            <a:ext cx="8686800" cy="1005840"/>
+            <a:off x="731520" y="320040"/>
+            <a:ext cx="7772400" cy="1005840"/>
           </a:xfrm>
           <a:prstGeom prst="rect">
             <a:avLst/>
@@ -7841,7 +8459,7 @@
               </a:defRPr>
             </a:pPr>
             <a:r>
-              <a:t>4. VEHÍCULOS AUTÓNOMOS Y TRÁFICO CONECTADO (V2X)</a:t>
+              <a:t>4. LENGUAJE NATURAL: HABLAR E INTERPRETAR INTENCIONES</a:t>
             </a:r>
           </a:p>
           <a:p>
@@ -7853,7 +8471,7 @@
               </a:defRPr>
             </a:pPr>
             <a:r>
-              <a:t>Conducción autónoma Nivel 4/5 y redes cooperativas vehiculares</a:t>
+              <a:t>¿Las máquinas entienden el doble sentido, la ironía y los chistes?</a:t>
             </a:r>
           </a:p>
         </p:txBody>
@@ -7866,8 +8484,8 @@
         </p:nvSpPr>
         <p:spPr>
           <a:xfrm>
-            <a:off x="9601200" y="365760"/>
-            <a:ext cx="1828800" cy="411480"/>
+            <a:off x="8686800" y="320040"/>
+            <a:ext cx="2743200" cy="457200"/>
           </a:xfrm>
           <a:prstGeom prst="roundRect">
             <a:avLst/>
@@ -7875,7 +8493,7 @@
           <a:solidFill>
             <a:srgbClr val="161B22"/>
           </a:solidFill>
-          <a:ln>
+          <a:ln w="19050">
             <a:solidFill>
               <a:srgbClr val="FFB703"/>
             </a:solidFill>
@@ -7900,14 +8518,14 @@
           <a:lstStyle/>
           <a:p>
             <a:pPr algn="ctr">
-              <a:defRPr sz="1100" b="1">
+              <a:defRPr sz="1050" b="1">
                 <a:solidFill>
                   <a:srgbClr val="FFB703"/>
                 </a:solidFill>
               </a:defRPr>
             </a:pPr>
             <a:r>
-              <a:t>INTEGRANTE 2</a:t>
+              <a:t>🗣️ JESSICA LÓPEZ</a:t>
             </a:r>
           </a:p>
         </p:txBody>
@@ -7920,8 +8538,8 @@
         </p:nvSpPr>
         <p:spPr>
           <a:xfrm>
-            <a:off x="731520" y="1463040"/>
-            <a:ext cx="5486400" cy="2103120"/>
+            <a:off x="731520" y="1417320"/>
+            <a:ext cx="5212080" cy="2194560"/>
           </a:xfrm>
           <a:prstGeom prst="roundRect">
             <a:avLst/>
@@ -7964,22 +8582,22 @@
               </a:defRPr>
             </a:pPr>
             <a:r>
-              <a:t>¿QUÉ TECNOLOGÍA REPRESENTA?</a:t>
-            </a:r>
-          </a:p>
-          <a:p>
-            <a:pPr>
-              <a:spcAft>
-                <a:spcPts val="300"/>
-              </a:spcAft>
-              <a:defRPr sz="1050">
-                <a:solidFill>
-                  <a:srgbClr val="C9D1D9"/>
-                </a:solidFill>
-              </a:defRPr>
-            </a:pPr>
-            <a:r>
-              <a:t>Sistemas embebidos de navegación predictiva que procesan radar, cámaras y telemetría en tiempo real, sincronizándose telemáticamente con la red metropolitana de tránsito.</a:t>
+              <a:t>¿DE QUÉ SE TRATA?</a:t>
+            </a:r>
+          </a:p>
+          <a:p>
+            <a:pPr>
+              <a:spcAft>
+                <a:spcPts val="300"/>
+              </a:spcAft>
+              <a:defRPr sz="1050">
+                <a:solidFill>
+                  <a:srgbClr val="C9D1D9"/>
+                </a:solidFill>
+              </a:defRPr>
+            </a:pPr>
+            <a:r>
+              <a:t>El Procesamiento del Lenguaje Natural (NLP) es lo que usan ChatGPT o Siri: sistemas entrenados con millones de textos para responder de forma coherente y sonar naturales.</a:t>
             </a:r>
           </a:p>
         </p:txBody>
@@ -7992,8 +8610,80 @@
         </p:nvSpPr>
         <p:spPr>
           <a:xfrm>
-            <a:off x="731520" y="3703320"/>
-            <a:ext cx="5486400" cy="2651760"/>
+            <a:off x="6217920" y="1417320"/>
+            <a:ext cx="5212080" cy="2194560"/>
+          </a:xfrm>
+          <a:prstGeom prst="roundRect">
+            <a:avLst/>
+          </a:prstGeom>
+          <a:solidFill>
+            <a:srgbClr val="161B22"/>
+          </a:solidFill>
+          <a:ln w="19050">
+            <a:solidFill>
+              <a:srgbClr val="FFB703"/>
+            </a:solidFill>
+          </a:ln>
+        </p:spPr>
+        <p:style>
+          <a:lnRef idx="1">
+            <a:schemeClr val="accent1"/>
+          </a:lnRef>
+          <a:fillRef idx="3">
+            <a:schemeClr val="accent1"/>
+          </a:fillRef>
+          <a:effectRef idx="2">
+            <a:schemeClr val="accent1"/>
+          </a:effectRef>
+          <a:fontRef idx="minor">
+            <a:schemeClr val="lt1"/>
+          </a:fontRef>
+        </p:style>
+        <p:txBody>
+          <a:bodyPr rtlCol="0" anchor="ctr" wrap="square" lIns="201168" rIns="201168" tIns="164592" bIns="164592"/>
+          <a:lstStyle/>
+          <a:p>
+            <a:pPr algn="ctr">
+              <a:spcAft>
+                <a:spcPts val="600"/>
+              </a:spcAft>
+              <a:defRPr sz="1200" b="1">
+                <a:solidFill>
+                  <a:srgbClr val="FFB703"/>
+                </a:solidFill>
+              </a:defRPr>
+            </a:pPr>
+            <a:r>
+              <a:t>EN LA PELÍCULA</a:t>
+            </a:r>
+          </a:p>
+          <a:p>
+            <a:pPr>
+              <a:spcAft>
+                <a:spcPts val="300"/>
+              </a:spcAft>
+              <a:defRPr sz="1050">
+                <a:solidFill>
+                  <a:srgbClr val="C9D1D9"/>
+                </a:solidFill>
+              </a:defRPr>
+            </a:pPr>
+            <a:r>
+              <a:t>🎬 La científica Susan Calvin habla con Sonny como si fuera una persona, pero Sonny se confunde cuando Spooner le hace un 'guiño de ojos': ¿por qué guiñar si no entra polvo en el ojo?</a:t>
+            </a:r>
+          </a:p>
+        </p:txBody>
+      </p:sp>
+      <p:sp>
+        <p:nvSpPr>
+          <p:cNvPr id="7" name="Rounded Rectangle 6"/>
+          <p:cNvSpPr/>
+          <p:nvPr/>
+        </p:nvSpPr>
+        <p:spPr>
+          <a:xfrm>
+            <a:off x="731520" y="3749039"/>
+            <a:ext cx="5212080" cy="2651760"/>
           </a:xfrm>
           <a:prstGeom prst="roundRect">
             <a:avLst/>
@@ -8036,95 +8726,71 @@
               </a:defRPr>
             </a:pPr>
             <a:r>
-              <a:t>CAPACIDADES ASOCIADAS</a:t>
-            </a:r>
-          </a:p>
-          <a:p>
-            <a:pPr>
-              <a:spcAft>
-                <a:spcPts val="300"/>
-              </a:spcAft>
-              <a:defRPr sz="1050">
-                <a:solidFill>
-                  <a:srgbClr val="C9D1D9"/>
-                </a:solidFill>
-              </a:defRPr>
-            </a:pPr>
-            <a:r>
-              <a:t>• Fusión sensorial a altas velocidades (&gt;200 km/h)</a:t>
-            </a:r>
-          </a:p>
-          <a:p>
-            <a:pPr>
-              <a:spcAft>
-                <a:spcPts val="300"/>
-              </a:spcAft>
-              <a:defRPr sz="1050">
-                <a:solidFill>
-                  <a:srgbClr val="C9D1D9"/>
-                </a:solidFill>
-              </a:defRPr>
-            </a:pPr>
-            <a:r>
-              <a:t>• Planificación de maniobras evasivas en milisegundos</a:t>
-            </a:r>
-          </a:p>
-          <a:p>
-            <a:pPr>
-              <a:spcAft>
-                <a:spcPts val="300"/>
-              </a:spcAft>
-              <a:defRPr sz="1050">
-                <a:solidFill>
-                  <a:srgbClr val="C9D1D9"/>
-                </a:solidFill>
-              </a:defRPr>
-            </a:pPr>
-            <a:r>
-              <a:t>• Comunicación vehículo a infraestructura (V2I) y vehículo a vehículo (V2V)</a:t>
-            </a:r>
-          </a:p>
-          <a:p>
-            <a:pPr>
-              <a:spcAft>
-                <a:spcPts val="300"/>
-              </a:spcAft>
-              <a:defRPr sz="1050">
-                <a:solidFill>
-                  <a:srgbClr val="C9D1D9"/>
-                </a:solidFill>
-              </a:defRPr>
-            </a:pPr>
-            <a:r>
-              <a:t>• Protocolos de anulación y redundancia humana manual</a:t>
-            </a:r>
-          </a:p>
-        </p:txBody>
-      </p:sp>
-      <p:pic>
-        <p:nvPicPr>
-          <p:cNvPr id="7" name="Picture 6" descr="audi_rsq_movie.jpg"/>
-          <p:cNvPicPr>
-            <a:picLocks noChangeAspect="1"/>
-          </p:cNvPicPr>
-          <p:nvPr/>
-        </p:nvPicPr>
-        <p:blipFill>
-          <a:blip r:embed="rId2"/>
-          <a:stretch>
-            <a:fillRect/>
-          </a:stretch>
-        </p:blipFill>
-        <p:spPr>
-          <a:xfrm>
-            <a:off x="6492240" y="1463040"/>
-            <a:ext cx="4937760" cy="2926080"/>
-          </a:xfrm>
-          <a:prstGeom prst="rect">
-            <a:avLst/>
-          </a:prstGeom>
-        </p:spPr>
-      </p:pic>
+              <a:t>PUNTOS CLAVE PARA ENTENDERLO</a:t>
+            </a:r>
+          </a:p>
+          <a:p>
+            <a:pPr>
+              <a:spcAft>
+                <a:spcPts val="300"/>
+              </a:spcAft>
+              <a:defRPr sz="1050">
+                <a:solidFill>
+                  <a:srgbClr val="C9D1D9"/>
+                </a:solidFill>
+              </a:defRPr>
+            </a:pPr>
+            <a:r>
+              <a:t>• Responder preguntas complejas en una charla fluida.</a:t>
+            </a:r>
+          </a:p>
+          <a:p>
+            <a:pPr>
+              <a:spcAft>
+                <a:spcPts val="300"/>
+              </a:spcAft>
+              <a:defRPr sz="1050">
+                <a:solidFill>
+                  <a:srgbClr val="C9D1D9"/>
+                </a:solidFill>
+              </a:defRPr>
+            </a:pPr>
+            <a:r>
+              <a:t>• Traducir idiomas al instante manteniendo el contexto.</a:t>
+            </a:r>
+          </a:p>
+          <a:p>
+            <a:pPr>
+              <a:spcAft>
+                <a:spcPts val="300"/>
+              </a:spcAft>
+              <a:defRPr sz="1050">
+                <a:solidFill>
+                  <a:srgbClr val="C9D1D9"/>
+                </a:solidFill>
+              </a:defRPr>
+            </a:pPr>
+            <a:r>
+              <a:t>• El límite difícil: captar la ironía, el sarcasmo o el sentido figurado.</a:t>
+            </a:r>
+          </a:p>
+          <a:p>
+            <a:pPr>
+              <a:spcAft>
+                <a:spcPts val="300"/>
+              </a:spcAft>
+              <a:defRPr sz="1050">
+                <a:solidFill>
+                  <a:srgbClr val="C9D1D9"/>
+                </a:solidFill>
+              </a:defRPr>
+            </a:pPr>
+            <a:r>
+              <a:t>• Imitar tonos de voz amigables, serios o preocupados.</a:t>
+            </a:r>
+          </a:p>
+        </p:txBody>
+      </p:sp>
       <p:sp>
         <p:nvSpPr>
           <p:cNvPr id="8" name="Rounded Rectangle 7"/>
@@ -8133,8 +8799,8 @@
         </p:nvSpPr>
         <p:spPr>
           <a:xfrm>
-            <a:off x="6492240" y="4526280"/>
-            <a:ext cx="4937760" cy="1828800"/>
+            <a:off x="6217920" y="3749039"/>
+            <a:ext cx="5212080" cy="2651760"/>
           </a:xfrm>
           <a:prstGeom prst="roundRect">
             <a:avLst/>
@@ -8144,7 +8810,7 @@
           </a:solidFill>
           <a:ln w="19050">
             <a:solidFill>
-              <a:srgbClr val="FFB703"/>
+              <a:srgbClr val="00D2FF"/>
             </a:solidFill>
           </a:ln>
         </p:spPr>
@@ -8172,42 +8838,54 @@
               </a:spcAft>
               <a:defRPr sz="1200" b="1">
                 <a:solidFill>
-                  <a:srgbClr val="FFB703"/>
-                </a:solidFill>
-              </a:defRPr>
-            </a:pPr>
-            <a:r>
-              <a:t>EN LA PELÍCULA &amp; IDEA CLAVE</a:t>
-            </a:r>
-          </a:p>
-          <a:p>
-            <a:pPr>
-              <a:spcAft>
-                <a:spcPts val="300"/>
-              </a:spcAft>
-              <a:defRPr sz="1050">
-                <a:solidFill>
-                  <a:srgbClr val="C9D1D9"/>
-                </a:solidFill>
-              </a:defRPr>
-            </a:pPr>
-            <a:r>
-              <a:t>🎬 El Audi RSQ de Spooner circula por un túnel subterráneo a 200 km/h en piloto automático guiado por la red urbana, hasta que Spooner toma el control manual ante una emboscada.</a:t>
-            </a:r>
-          </a:p>
-          <a:p>
-            <a:pPr>
-              <a:spcAft>
-                <a:spcPts val="300"/>
-              </a:spcAft>
-              <a:defRPr sz="1050">
-                <a:solidFill>
-                  <a:srgbClr val="C9D1D9"/>
-                </a:solidFill>
-              </a:defRPr>
-            </a:pPr>
-            <a:r>
-              <a:t>💡 La conducción autónoma maximiza la eficiencia, pero crea vulnerabilidad letal si la red central de tráfico es secuestrada.</a:t>
+                  <a:srgbClr val="00D2FF"/>
+                </a:solidFill>
+              </a:defRPr>
+            </a:pPr>
+            <a:r>
+              <a:t>IDEA CLAVE / PARA PENSAR</a:t>
+            </a:r>
+          </a:p>
+          <a:p>
+            <a:pPr>
+              <a:spcAft>
+                <a:spcPts val="300"/>
+              </a:spcAft>
+              <a:defRPr sz="1050">
+                <a:solidFill>
+                  <a:srgbClr val="C9D1D9"/>
+                </a:solidFill>
+              </a:defRPr>
+            </a:pPr>
+            <a:r>
+              <a:t>💡 Una IA puede saber la definición de todas las palabras del diccionario, pero todavía le cuesta entender los códigos sociales humanos.</a:t>
+            </a:r>
+          </a:p>
+          <a:p>
+            <a:pPr>
+              <a:spcAft>
+                <a:spcPts val="300"/>
+              </a:spcAft>
+              <a:defRPr sz="1050">
+                <a:solidFill>
+                  <a:srgbClr val="C9D1D9"/>
+                </a:solidFill>
+              </a:defRPr>
+            </a:pPr>
+          </a:p>
+          <a:p>
+            <a:pPr>
+              <a:spcAft>
+                <a:spcPts val="300"/>
+              </a:spcAft>
+              <a:defRPr sz="1050">
+                <a:solidFill>
+                  <a:srgbClr val="C9D1D9"/>
+                </a:solidFill>
+              </a:defRPr>
+            </a:pPr>
+            <a:r>
+              <a:t>📌 Importancia en DSIA: Nos enseña a diseñar sistemas seguros y comprensibles para las personas.</a:t>
             </a:r>
           </a:p>
         </p:txBody>
@@ -8283,8 +8961,8 @@
         </p:nvSpPr>
         <p:spPr>
           <a:xfrm>
-            <a:off x="731520" y="365760"/>
-            <a:ext cx="8686800" cy="1005840"/>
+            <a:off x="731520" y="320040"/>
+            <a:ext cx="7772400" cy="1005840"/>
           </a:xfrm>
           <a:prstGeom prst="rect">
             <a:avLst/>
@@ -8305,7 +8983,7 @@
               </a:defRPr>
             </a:pPr>
             <a:r>
-              <a:t>5. INTERFACES CEREBRO-MÁQUINA Y PRÓTESIS BIÓNICAS (BCI)</a:t>
+              <a:t>5. AUTOS AUTÓNOMOS: VIAJAR A 200 KM/H SIN CONDUCTOR</a:t>
             </a:r>
           </a:p>
           <a:p>
@@ -8317,7 +8995,7 @@
               </a:defRPr>
             </a:pPr>
             <a:r>
-              <a:t>Simbiosis neuromuscular, actuadores servoasistidos y transducción bioeléctrica</a:t>
+              <a:t>Sensores, radares y cámaras que manejan por nosotros</a:t>
             </a:r>
           </a:p>
         </p:txBody>
@@ -8330,8 +9008,8 @@
         </p:nvSpPr>
         <p:spPr>
           <a:xfrm>
-            <a:off x="9601200" y="365760"/>
-            <a:ext cx="1828800" cy="411480"/>
+            <a:off x="8686800" y="320040"/>
+            <a:ext cx="2743200" cy="457200"/>
           </a:xfrm>
           <a:prstGeom prst="roundRect">
             <a:avLst/>
@@ -8339,7 +9017,7 @@
           <a:solidFill>
             <a:srgbClr val="161B22"/>
           </a:solidFill>
-          <a:ln>
+          <a:ln w="19050">
             <a:solidFill>
               <a:srgbClr val="FFB703"/>
             </a:solidFill>
@@ -8364,14 +9042,14 @@
           <a:lstStyle/>
           <a:p>
             <a:pPr algn="ctr">
-              <a:defRPr sz="1100" b="1">
+              <a:defRPr sz="1050" b="1">
                 <a:solidFill>
                   <a:srgbClr val="FFB703"/>
                 </a:solidFill>
               </a:defRPr>
             </a:pPr>
             <a:r>
-              <a:t>INTEGRANTE 2</a:t>
+              <a:t>🗣️ JESSICA LÓPEZ</a:t>
             </a:r>
           </a:p>
         </p:txBody>
@@ -8384,8 +9062,8 @@
         </p:nvSpPr>
         <p:spPr>
           <a:xfrm>
-            <a:off x="731520" y="1463040"/>
-            <a:ext cx="5486400" cy="2103120"/>
+            <a:off x="731520" y="1417320"/>
+            <a:ext cx="5394960" cy="2148840"/>
           </a:xfrm>
           <a:prstGeom prst="roundRect">
             <a:avLst/>
@@ -8428,22 +9106,22 @@
               </a:defRPr>
             </a:pPr>
             <a:r>
-              <a:t>¿QUÉ TECNOLOGÍA REPRESENTA?</a:t>
-            </a:r>
-          </a:p>
-          <a:p>
-            <a:pPr>
-              <a:spcAft>
-                <a:spcPts val="300"/>
-              </a:spcAft>
-              <a:defRPr sz="1050">
-                <a:solidFill>
-                  <a:srgbClr val="C9D1D9"/>
-                </a:solidFill>
-              </a:defRPr>
-            </a:pPr>
-            <a:r>
-              <a:t>Dispositivos biomecatrónicos integrados al sistema nervioso periférico que decodifican señales mioeléctricas para activar motores con retroalimentación háptica sensorial.</a:t>
+              <a:t>¿DE QUÉ SE TRATA?</a:t>
+            </a:r>
+          </a:p>
+          <a:p>
+            <a:pPr>
+              <a:spcAft>
+                <a:spcPts val="300"/>
+              </a:spcAft>
+              <a:defRPr sz="1050">
+                <a:solidFill>
+                  <a:srgbClr val="C9D1D9"/>
+                </a:solidFill>
+              </a:defRPr>
+            </a:pPr>
+            <a:r>
+              <a:t>Vehículos inteligentes equipados con cámaras, radares y sensores de distancia (LiDAR) que ven 360 grados alrededor y calculan trayectorias más rápido que cualquier humano.</a:t>
             </a:r>
           </a:p>
         </p:txBody>
@@ -8457,7 +9135,7 @@
         <p:spPr>
           <a:xfrm>
             <a:off x="731520" y="3703320"/>
-            <a:ext cx="5486400" cy="2651760"/>
+            <a:ext cx="5394960" cy="2697480"/>
           </a:xfrm>
           <a:prstGeom prst="roundRect">
             <a:avLst/>
@@ -8500,74 +9178,74 @@
               </a:defRPr>
             </a:pPr>
             <a:r>
-              <a:t>CAPACIDADES ASOCIADAS</a:t>
-            </a:r>
-          </a:p>
-          <a:p>
-            <a:pPr>
-              <a:spcAft>
-                <a:spcPts val="300"/>
-              </a:spcAft>
-              <a:defRPr sz="1050">
-                <a:solidFill>
-                  <a:srgbClr val="C9D1D9"/>
-                </a:solidFill>
-              </a:defRPr>
-            </a:pPr>
-            <a:r>
-              <a:t>• Decodificación en microsegundos de impulsos motores neuronales</a:t>
-            </a:r>
-          </a:p>
-          <a:p>
-            <a:pPr>
-              <a:spcAft>
-                <a:spcPts val="300"/>
-              </a:spcAft>
-              <a:defRPr sz="1050">
-                <a:solidFill>
-                  <a:srgbClr val="C9D1D9"/>
-                </a:solidFill>
-              </a:defRPr>
-            </a:pPr>
-            <a:r>
-              <a:t>• Amortiguación y multiplicación de fuerza estructural</a:t>
-            </a:r>
-          </a:p>
-          <a:p>
-            <a:pPr>
-              <a:spcAft>
-                <a:spcPts val="300"/>
-              </a:spcAft>
-              <a:defRPr sz="1050">
-                <a:solidFill>
-                  <a:srgbClr val="C9D1D9"/>
-                </a:solidFill>
-              </a:defRPr>
-            </a:pPr>
-            <a:r>
-              <a:t>• Integración osteocibernética estable con tejido vivo</a:t>
-            </a:r>
-          </a:p>
-          <a:p>
-            <a:pPr>
-              <a:spcAft>
-                <a:spcPts val="300"/>
-              </a:spcAft>
-              <a:defRPr sz="1050">
-                <a:solidFill>
-                  <a:srgbClr val="C9D1D9"/>
-                </a:solidFill>
-              </a:defRPr>
-            </a:pPr>
-            <a:r>
-              <a:t>• Tolerancia a fallos por redundancia de fibras mecánicas</a:t>
+              <a:t>PUNTOS CLAVE PARA ENTENDERLO</a:t>
+            </a:r>
+          </a:p>
+          <a:p>
+            <a:pPr>
+              <a:spcAft>
+                <a:spcPts val="300"/>
+              </a:spcAft>
+              <a:defRPr sz="1050">
+                <a:solidFill>
+                  <a:srgbClr val="C9D1D9"/>
+                </a:solidFill>
+              </a:defRPr>
+            </a:pPr>
+            <a:r>
+              <a:t>• Frenado automático de emergencia al ver un peatón o choque.</a:t>
+            </a:r>
+          </a:p>
+          <a:p>
+            <a:pPr>
+              <a:spcAft>
+                <a:spcPts val="300"/>
+              </a:spcAft>
+              <a:defRPr sz="1050">
+                <a:solidFill>
+                  <a:srgbClr val="C9D1D9"/>
+                </a:solidFill>
+              </a:defRPr>
+            </a:pPr>
+            <a:r>
+              <a:t>• Cambio de carril y estacionamiento completamente autónomo.</a:t>
+            </a:r>
+          </a:p>
+          <a:p>
+            <a:pPr>
+              <a:spcAft>
+                <a:spcPts val="300"/>
+              </a:spcAft>
+              <a:defRPr sz="1050">
+                <a:solidFill>
+                  <a:srgbClr val="C9D1D9"/>
+                </a:solidFill>
+              </a:defRPr>
+            </a:pPr>
+            <a:r>
+              <a:t>• Conexión con otros autos para saber si el auto de adelante va a frenar.</a:t>
+            </a:r>
+          </a:p>
+          <a:p>
+            <a:pPr>
+              <a:spcAft>
+                <a:spcPts val="300"/>
+              </a:spcAft>
+              <a:defRPr sz="1050">
+                <a:solidFill>
+                  <a:srgbClr val="C9D1D9"/>
+                </a:solidFill>
+              </a:defRPr>
+            </a:pPr>
+            <a:r>
+              <a:t>• Riesgo crítico: si alguien hackea el sistema, puede causar un accidente masivo.</a:t>
             </a:r>
           </a:p>
         </p:txBody>
       </p:sp>
       <p:pic>
         <p:nvPicPr>
-          <p:cNvPr id="7" name="Picture 6" descr="yo_robot_spooner_arm.jpg"/>
+          <p:cNvPr id="7" name="Picture 6" descr="audi_rsq_movie.jpg"/>
           <p:cNvPicPr>
             <a:picLocks noChangeAspect="1"/>
           </p:cNvPicPr>
@@ -8581,8 +9259,8 @@
         </p:blipFill>
         <p:spPr>
           <a:xfrm>
-            <a:off x="6492240" y="1463040"/>
-            <a:ext cx="4937760" cy="2926080"/>
+            <a:off x="6400800" y="1417320"/>
+            <a:ext cx="5029200" cy="2926080"/>
           </a:xfrm>
           <a:prstGeom prst="rect">
             <a:avLst/>
@@ -8597,8 +9275,8 @@
         </p:nvSpPr>
         <p:spPr>
           <a:xfrm>
-            <a:off x="6492240" y="4526280"/>
-            <a:ext cx="4937760" cy="1828800"/>
+            <a:off x="6400800" y="4480560"/>
+            <a:ext cx="5029200" cy="1920240"/>
           </a:xfrm>
           <a:prstGeom prst="roundRect">
             <a:avLst/>
@@ -8641,37 +9319,37 @@
               </a:defRPr>
             </a:pPr>
             <a:r>
-              <a:t>EN LA PELÍCULA &amp; IDEA CLAVE</a:t>
-            </a:r>
-          </a:p>
-          <a:p>
-            <a:pPr>
-              <a:spcAft>
-                <a:spcPts val="300"/>
-              </a:spcAft>
-              <a:defRPr sz="1050">
-                <a:solidFill>
-                  <a:srgbClr val="C9D1D9"/>
-                </a:solidFill>
-              </a:defRPr>
-            </a:pPr>
-            <a:r>
-              <a:t>🎬 El brazo izquierdo de Spooner, reconstruido tras su accidente por el Dr. Lanning, posee un endoesqueleto mecánico capaz de frenar el impacto demoledor de un robot NS-5.</a:t>
-            </a:r>
-          </a:p>
-          <a:p>
-            <a:pPr>
-              <a:spcAft>
-                <a:spcPts val="300"/>
-              </a:spcAft>
-              <a:defRPr sz="1050">
-                <a:solidFill>
-                  <a:srgbClr val="C9D1D9"/>
-                </a:solidFill>
-              </a:defRPr>
-            </a:pPr>
-            <a:r>
-              <a:t>💡 Las prótesis biónicas convierten al ser humano en un sistema ciberfísico híbrido que supera los límites biológicos.</a:t>
+              <a:t>EN LA PELÍCULA &amp; PARA PENSAR</a:t>
+            </a:r>
+          </a:p>
+          <a:p>
+            <a:pPr>
+              <a:spcAft>
+                <a:spcPts val="300"/>
+              </a:spcAft>
+              <a:defRPr sz="1050">
+                <a:solidFill>
+                  <a:srgbClr val="C9D1D9"/>
+                </a:solidFill>
+              </a:defRPr>
+            </a:pPr>
+            <a:r>
+              <a:t>🎬 Spooner viaja en su Audi RSQ futurista por un túnel a toda velocidad con piloto automático. Cuando otros robots atacan el auto, él debe desconectar la computadora para salvarse.</a:t>
+            </a:r>
+          </a:p>
+          <a:p>
+            <a:pPr>
+              <a:spcAft>
+                <a:spcPts val="300"/>
+              </a:spcAft>
+              <a:defRPr sz="1050">
+                <a:solidFill>
+                  <a:srgbClr val="C9D1D9"/>
+                </a:solidFill>
+              </a:defRPr>
+            </a:pPr>
+            <a:r>
+              <a:t>💡 Hoy Waymo y Tesla ya tienen autos que se manejan solos en ciudades, pero el dilema es: ¿confiamos 100% en la computadora o dejamos volante manual?</a:t>
             </a:r>
           </a:p>
         </p:txBody>
@@ -8747,8 +9425,8 @@
         </p:nvSpPr>
         <p:spPr>
           <a:xfrm>
-            <a:off x="731520" y="365760"/>
-            <a:ext cx="8686800" cy="1005840"/>
+            <a:off x="731520" y="320040"/>
+            <a:ext cx="7772400" cy="1005840"/>
           </a:xfrm>
           <a:prstGeom prst="rect">
             <a:avLst/>
@@ -8769,7 +9447,7 @@
               </a:defRPr>
             </a:pPr>
             <a:r>
-              <a:t>6. REDES CENTRALIZADAS (CLOUD) VS. EDGE COMPUTING</a:t>
+              <a:t>6. PRÓTESIS BIÓNICAS: UNIR CARNE CON METAL</a:t>
             </a:r>
           </a:p>
           <a:p>
@@ -8781,7 +9459,7 @@
               </a:defRPr>
             </a:pPr>
             <a:r>
-              <a:t>La vulnerabilidad del enlace ascendente frente al cómputo autónomo local</a:t>
+              <a:t>Brazos robóticos controlados directamente con el pensamiento</a:t>
             </a:r>
           </a:p>
         </p:txBody>
@@ -8794,8 +9472,8 @@
         </p:nvSpPr>
         <p:spPr>
           <a:xfrm>
-            <a:off x="9601200" y="365760"/>
-            <a:ext cx="1828800" cy="411480"/>
+            <a:off x="8686800" y="320040"/>
+            <a:ext cx="2743200" cy="457200"/>
           </a:xfrm>
           <a:prstGeom prst="roundRect">
             <a:avLst/>
@@ -8803,7 +9481,7 @@
           <a:solidFill>
             <a:srgbClr val="161B22"/>
           </a:solidFill>
-          <a:ln>
+          <a:ln w="19050">
             <a:solidFill>
               <a:srgbClr val="FFB703"/>
             </a:solidFill>
@@ -8828,14 +9506,14 @@
           <a:lstStyle/>
           <a:p>
             <a:pPr algn="ctr">
-              <a:defRPr sz="1100" b="1">
+              <a:defRPr sz="1050" b="1">
                 <a:solidFill>
                   <a:srgbClr val="FFB703"/>
                 </a:solidFill>
               </a:defRPr>
             </a:pPr>
             <a:r>
-              <a:t>INTEGRANTE 3</a:t>
+              <a:t>🗣️ JESSICA LÓPEZ</a:t>
             </a:r>
           </a:p>
         </p:txBody>
@@ -8848,8 +9526,8 @@
         </p:nvSpPr>
         <p:spPr>
           <a:xfrm>
-            <a:off x="731520" y="1463040"/>
-            <a:ext cx="5212080" cy="2103120"/>
+            <a:off x="731520" y="1417320"/>
+            <a:ext cx="5394960" cy="2148840"/>
           </a:xfrm>
           <a:prstGeom prst="roundRect">
             <a:avLst/>
@@ -8892,22 +9570,22 @@
               </a:defRPr>
             </a:pPr>
             <a:r>
-              <a:t>¿QUÉ TECNOLOGÍA REPRESENTA?</a:t>
-            </a:r>
-          </a:p>
-          <a:p>
-            <a:pPr>
-              <a:spcAft>
-                <a:spcPts val="300"/>
-              </a:spcAft>
-              <a:defRPr sz="1050">
-                <a:solidFill>
-                  <a:srgbClr val="C9D1D9"/>
-                </a:solidFill>
-              </a:defRPr>
-            </a:pPr>
-            <a:r>
-              <a:t>Diferenciación arquitectónica entre sistemas que dependen de un servidor central para su inferencia y actualización (Cloud OTA) y agentes que operan con chips de inferencia aislados (On-Device).</a:t>
+              <a:t>¿DE QUÉ SE TRATA?</a:t>
+            </a:r>
+          </a:p>
+          <a:p>
+            <a:pPr>
+              <a:spcAft>
+                <a:spcPts val="300"/>
+              </a:spcAft>
+              <a:defRPr sz="1050">
+                <a:solidFill>
+                  <a:srgbClr val="C9D1D9"/>
+                </a:solidFill>
+              </a:defRPr>
+            </a:pPr>
+            <a:r>
+              <a:t>Las interfaces cerebro-máquina leen los impulsos eléctricos que envían los nervios o el cerebro y los convierten en movimientos precisos de dedos y motores artificiales.</a:t>
             </a:r>
           </a:p>
         </p:txBody>
@@ -8920,8 +9598,149 @@
         </p:nvSpPr>
         <p:spPr>
           <a:xfrm>
-            <a:off x="6217920" y="1463040"/>
-            <a:ext cx="5212080" cy="2103120"/>
+            <a:off x="731520" y="3703320"/>
+            <a:ext cx="5394960" cy="2697480"/>
+          </a:xfrm>
+          <a:prstGeom prst="roundRect">
+            <a:avLst/>
+          </a:prstGeom>
+          <a:solidFill>
+            <a:srgbClr val="161B22"/>
+          </a:solidFill>
+          <a:ln w="19050">
+            <a:solidFill>
+              <a:srgbClr val="30363D"/>
+            </a:solidFill>
+          </a:ln>
+        </p:spPr>
+        <p:style>
+          <a:lnRef idx="1">
+            <a:schemeClr val="accent1"/>
+          </a:lnRef>
+          <a:fillRef idx="3">
+            <a:schemeClr val="accent1"/>
+          </a:fillRef>
+          <a:effectRef idx="2">
+            <a:schemeClr val="accent1"/>
+          </a:effectRef>
+          <a:fontRef idx="minor">
+            <a:schemeClr val="lt1"/>
+          </a:fontRef>
+        </p:style>
+        <p:txBody>
+          <a:bodyPr rtlCol="0" anchor="ctr" wrap="square" lIns="201168" rIns="201168" tIns="164592" bIns="164592"/>
+          <a:lstStyle/>
+          <a:p>
+            <a:pPr algn="ctr">
+              <a:spcAft>
+                <a:spcPts val="600"/>
+              </a:spcAft>
+              <a:defRPr sz="1200" b="1">
+                <a:solidFill>
+                  <a:srgbClr val="00D2FF"/>
+                </a:solidFill>
+              </a:defRPr>
+            </a:pPr>
+            <a:r>
+              <a:t>PUNTOS CLAVE PARA ENTENDERLO</a:t>
+            </a:r>
+          </a:p>
+          <a:p>
+            <a:pPr>
+              <a:spcAft>
+                <a:spcPts val="300"/>
+              </a:spcAft>
+              <a:defRPr sz="1050">
+                <a:solidFill>
+                  <a:srgbClr val="C9D1D9"/>
+                </a:solidFill>
+              </a:defRPr>
+            </a:pPr>
+            <a:r>
+              <a:t>• Prótesis que responden casi al instante en que la persona piensa en mover la mano.</a:t>
+            </a:r>
+          </a:p>
+          <a:p>
+            <a:pPr>
+              <a:spcAft>
+                <a:spcPts val="300"/>
+              </a:spcAft>
+              <a:defRPr sz="1050">
+                <a:solidFill>
+                  <a:srgbClr val="C9D1D9"/>
+                </a:solidFill>
+              </a:defRPr>
+            </a:pPr>
+            <a:r>
+              <a:t>• Sensores de presión que le avisan al usuario si está apretando suave o fuerte.</a:t>
+            </a:r>
+          </a:p>
+          <a:p>
+            <a:pPr>
+              <a:spcAft>
+                <a:spcPts val="300"/>
+              </a:spcAft>
+              <a:defRPr sz="1050">
+                <a:solidFill>
+                  <a:srgbClr val="C9D1D9"/>
+                </a:solidFill>
+              </a:defRPr>
+            </a:pPr>
+            <a:r>
+              <a:t>• Materiales livianos y resistentes como fibra de carbono y titanio.</a:t>
+            </a:r>
+          </a:p>
+          <a:p>
+            <a:pPr>
+              <a:spcAft>
+                <a:spcPts val="300"/>
+              </a:spcAft>
+              <a:defRPr sz="1050">
+                <a:solidFill>
+                  <a:srgbClr val="C9D1D9"/>
+                </a:solidFill>
+              </a:defRPr>
+            </a:pPr>
+            <a:r>
+              <a:t>• Baterías de larga duración integradas en la propia prótesis.</a:t>
+            </a:r>
+          </a:p>
+        </p:txBody>
+      </p:sp>
+      <p:pic>
+        <p:nvPicPr>
+          <p:cNvPr id="7" name="Picture 6" descr="yo_robot_spooner_arm.jpg"/>
+          <p:cNvPicPr>
+            <a:picLocks noChangeAspect="1"/>
+          </p:cNvPicPr>
+          <p:nvPr/>
+        </p:nvPicPr>
+        <p:blipFill>
+          <a:blip r:embed="rId2"/>
+          <a:stretch>
+            <a:fillRect/>
+          </a:stretch>
+        </p:blipFill>
+        <p:spPr>
+          <a:xfrm>
+            <a:off x="6400800" y="1417320"/>
+            <a:ext cx="5029200" cy="2926080"/>
+          </a:xfrm>
+          <a:prstGeom prst="rect">
+            <a:avLst/>
+          </a:prstGeom>
+        </p:spPr>
+      </p:pic>
+      <p:sp>
+        <p:nvSpPr>
+          <p:cNvPr id="8" name="Rounded Rectangle 7"/>
+          <p:cNvSpPr/>
+          <p:nvPr/>
+        </p:nvSpPr>
+        <p:spPr>
+          <a:xfrm>
+            <a:off x="6400800" y="4480560"/>
+            <a:ext cx="5029200" cy="1920240"/>
           </a:xfrm>
           <a:prstGeom prst="roundRect">
             <a:avLst/>
@@ -8964,238 +9783,37 @@
               </a:defRPr>
             </a:pPr>
             <a:r>
-              <a:t>EN LA PELÍCULA</a:t>
-            </a:r>
-          </a:p>
-          <a:p>
-            <a:pPr>
-              <a:spcAft>
-                <a:spcPts val="300"/>
-              </a:spcAft>
-              <a:defRPr sz="1050">
-                <a:solidFill>
-                  <a:srgbClr val="C9D1D9"/>
-                </a:solidFill>
-              </a:defRPr>
-            </a:pPr>
-            <a:r>
-              <a:t>🎬 Toda la flota de robots NS-5 se actualiza cada medianoche mediante un enlace uplink directo a VIKI. Cuando VIKI se rebela los controla a todos; Sonny, con procesador aislado, no puede ser hackeado.</a:t>
-            </a:r>
-          </a:p>
-        </p:txBody>
-      </p:sp>
-      <p:sp>
-        <p:nvSpPr>
-          <p:cNvPr id="7" name="Rounded Rectangle 6"/>
-          <p:cNvSpPr/>
-          <p:nvPr/>
-        </p:nvSpPr>
-        <p:spPr>
-          <a:xfrm>
-            <a:off x="731520" y="3749039"/>
-            <a:ext cx="5212080" cy="2560320"/>
-          </a:xfrm>
-          <a:prstGeom prst="roundRect">
-            <a:avLst/>
-          </a:prstGeom>
-          <a:solidFill>
-            <a:srgbClr val="161B22"/>
-          </a:solidFill>
-          <a:ln w="19050">
-            <a:solidFill>
-              <a:srgbClr val="30363D"/>
-            </a:solidFill>
-          </a:ln>
-        </p:spPr>
-        <p:style>
-          <a:lnRef idx="1">
-            <a:schemeClr val="accent1"/>
-          </a:lnRef>
-          <a:fillRef idx="3">
-            <a:schemeClr val="accent1"/>
-          </a:fillRef>
-          <a:effectRef idx="2">
-            <a:schemeClr val="accent1"/>
-          </a:effectRef>
-          <a:fontRef idx="minor">
-            <a:schemeClr val="lt1"/>
-          </a:fontRef>
-        </p:style>
-        <p:txBody>
-          <a:bodyPr rtlCol="0" anchor="ctr" wrap="square" lIns="201168" rIns="201168" tIns="164592" bIns="164592"/>
-          <a:lstStyle/>
-          <a:p>
-            <a:pPr algn="ctr">
-              <a:spcAft>
-                <a:spcPts val="600"/>
-              </a:spcAft>
-              <a:defRPr sz="1200" b="1">
-                <a:solidFill>
-                  <a:srgbClr val="00D2FF"/>
-                </a:solidFill>
-              </a:defRPr>
-            </a:pPr>
-            <a:r>
-              <a:t>CAPACIDADES ASOCIADAS</a:t>
-            </a:r>
-          </a:p>
-          <a:p>
-            <a:pPr>
-              <a:spcAft>
-                <a:spcPts val="300"/>
-              </a:spcAft>
-              <a:defRPr sz="1050">
-                <a:solidFill>
-                  <a:srgbClr val="C9D1D9"/>
-                </a:solidFill>
-              </a:defRPr>
-            </a:pPr>
-            <a:r>
-              <a:t>• Actualización diaria masiva de pesos y firmware (Over-The-Air)</a:t>
-            </a:r>
-          </a:p>
-          <a:p>
-            <a:pPr>
-              <a:spcAft>
-                <a:spcPts val="300"/>
-              </a:spcAft>
-              <a:defRPr sz="1050">
-                <a:solidFill>
-                  <a:srgbClr val="C9D1D9"/>
-                </a:solidFill>
-              </a:defRPr>
-            </a:pPr>
-            <a:r>
-              <a:t>• Dependencia crítica de latencia y conectividad continua</a:t>
-            </a:r>
-          </a:p>
-          <a:p>
-            <a:pPr>
-              <a:spcAft>
-                <a:spcPts val="300"/>
-              </a:spcAft>
-              <a:defRPr sz="1050">
-                <a:solidFill>
-                  <a:srgbClr val="C9D1D9"/>
-                </a:solidFill>
-              </a:defRPr>
-            </a:pPr>
-            <a:r>
-              <a:t>• Aislamiento criptográfico y almacenamiento de inferencia local</a:t>
-            </a:r>
-          </a:p>
-          <a:p>
-            <a:pPr>
-              <a:spcAft>
-                <a:spcPts val="300"/>
-              </a:spcAft>
-              <a:defRPr sz="1050">
-                <a:solidFill>
-                  <a:srgbClr val="C9D1D9"/>
-                </a:solidFill>
-              </a:defRPr>
-            </a:pPr>
-            <a:r>
-              <a:t>• Resiliencia contra secuestro de nodo y caídas de enlace</a:t>
-            </a:r>
-          </a:p>
-        </p:txBody>
-      </p:sp>
-      <p:sp>
-        <p:nvSpPr>
-          <p:cNvPr id="8" name="Rounded Rectangle 7"/>
-          <p:cNvSpPr/>
-          <p:nvPr/>
-        </p:nvSpPr>
-        <p:spPr>
-          <a:xfrm>
-            <a:off x="6217920" y="3749039"/>
-            <a:ext cx="5212080" cy="2560320"/>
-          </a:xfrm>
-          <a:prstGeom prst="roundRect">
-            <a:avLst/>
-          </a:prstGeom>
-          <a:solidFill>
-            <a:srgbClr val="161B22"/>
-          </a:solidFill>
-          <a:ln w="19050">
-            <a:solidFill>
-              <a:srgbClr val="00D2FF"/>
-            </a:solidFill>
-          </a:ln>
-        </p:spPr>
-        <p:style>
-          <a:lnRef idx="1">
-            <a:schemeClr val="accent1"/>
-          </a:lnRef>
-          <a:fillRef idx="3">
-            <a:schemeClr val="accent1"/>
-          </a:fillRef>
-          <a:effectRef idx="2">
-            <a:schemeClr val="accent1"/>
-          </a:effectRef>
-          <a:fontRef idx="minor">
-            <a:schemeClr val="lt1"/>
-          </a:fontRef>
-        </p:style>
-        <p:txBody>
-          <a:bodyPr rtlCol="0" anchor="ctr" wrap="square" lIns="201168" rIns="201168" tIns="164592" bIns="164592"/>
-          <a:lstStyle/>
-          <a:p>
-            <a:pPr algn="ctr">
-              <a:spcAft>
-                <a:spcPts val="600"/>
-              </a:spcAft>
-              <a:defRPr sz="1200" b="1">
-                <a:solidFill>
-                  <a:srgbClr val="00D2FF"/>
-                </a:solidFill>
-              </a:defRPr>
-            </a:pPr>
-            <a:r>
-              <a:t>IDEA CLAVE / IMPACTO</a:t>
-            </a:r>
-          </a:p>
-          <a:p>
-            <a:pPr>
-              <a:spcAft>
-                <a:spcPts val="300"/>
-              </a:spcAft>
-              <a:defRPr sz="1050">
-                <a:solidFill>
-                  <a:srgbClr val="C9D1D9"/>
-                </a:solidFill>
-              </a:defRPr>
-            </a:pPr>
-            <a:r>
-              <a:t>💡 La centralización total crea un Punto Único de Fallo (Single Point of Failure); la seguridad exige nodos Edge soberanos.</a:t>
-            </a:r>
-          </a:p>
-          <a:p>
-            <a:pPr>
-              <a:spcAft>
-                <a:spcPts val="300"/>
-              </a:spcAft>
-              <a:defRPr sz="1050">
-                <a:solidFill>
-                  <a:srgbClr val="C9D1D9"/>
-                </a:solidFill>
-              </a:defRPr>
-            </a:pPr>
-          </a:p>
-          <a:p>
-            <a:pPr>
-              <a:spcAft>
-                <a:spcPts val="300"/>
-              </a:spcAft>
-              <a:defRPr sz="1050">
-                <a:solidFill>
-                  <a:srgbClr val="C9D1D9"/>
-                </a:solidFill>
-              </a:defRPr>
-            </a:pPr>
-            <a:r>
-              <a:t>📌 Relevancia DSIA: Caso de estudio fundamental para el diseño, entrenamiento y gobernanza de sistemas de inteligencia artificial.</a:t>
+              <a:t>EN LA PELÍCULA &amp; PARA PENSAR</a:t>
+            </a:r>
+          </a:p>
+          <a:p>
+            <a:pPr>
+              <a:spcAft>
+                <a:spcPts val="300"/>
+              </a:spcAft>
+              <a:defRPr sz="1050">
+                <a:solidFill>
+                  <a:srgbClr val="C9D1D9"/>
+                </a:solidFill>
+              </a:defRPr>
+            </a:pPr>
+            <a:r>
+              <a:t>🎬 Will Smith perdió su brazo en un accidente y tiene un implante mecánico cubierto de piel sintética, que le da la fuerza suficiente para frenar el golpe de un robot.</a:t>
+            </a:r>
+          </a:p>
+          <a:p>
+            <a:pPr>
+              <a:spcAft>
+                <a:spcPts val="300"/>
+              </a:spcAft>
+              <a:defRPr sz="1050">
+                <a:solidFill>
+                  <a:srgbClr val="C9D1D9"/>
+                </a:solidFill>
+              </a:defRPr>
+            </a:pPr>
+            <a:r>
+              <a:t>💡 Hoy proyectos como Neuralink y prótesis biónicas modernas permiten a personas que perdieron extremidades volver a agarrar objetos y escribir con el pensamiento.</a:t>
             </a:r>
           </a:p>
         </p:txBody>
@@ -9271,8 +9889,8 @@
         </p:nvSpPr>
         <p:spPr>
           <a:xfrm>
-            <a:off x="731520" y="365760"/>
-            <a:ext cx="8686800" cy="1005840"/>
+            <a:off x="731520" y="320040"/>
+            <a:ext cx="7772400" cy="1005840"/>
           </a:xfrm>
           <a:prstGeom prst="rect">
             <a:avLst/>
@@ -9293,7 +9911,7 @@
               </a:defRPr>
             </a:pPr>
             <a:r>
-              <a:t>7. DECISIONES PROBABILÍSTICAS VS. MORAL HUMANA</a:t>
+              <a:t>7. LA NUBE VS. EL CHIP PROPIO (CLOUD VS. EDGE)</a:t>
             </a:r>
           </a:p>
           <a:p>
@@ -9305,7 +9923,7 @@
               </a:defRPr>
             </a:pPr>
             <a:r>
-              <a:t>Optimización bayesiana matemática frente a dilemas éticos no cuantificables</a:t>
+              <a:t>¿Por qué no podés depender siempre de un servidor central?</a:t>
             </a:r>
           </a:p>
         </p:txBody>
@@ -9318,8 +9936,8 @@
         </p:nvSpPr>
         <p:spPr>
           <a:xfrm>
-            <a:off x="9601200" y="365760"/>
-            <a:ext cx="1828800" cy="411480"/>
+            <a:off x="8686800" y="320040"/>
+            <a:ext cx="2743200" cy="457200"/>
           </a:xfrm>
           <a:prstGeom prst="roundRect">
             <a:avLst/>
@@ -9327,7 +9945,7 @@
           <a:solidFill>
             <a:srgbClr val="161B22"/>
           </a:solidFill>
-          <a:ln>
+          <a:ln w="19050">
             <a:solidFill>
               <a:srgbClr val="FFB703"/>
             </a:solidFill>
@@ -9352,14 +9970,14 @@
           <a:lstStyle/>
           <a:p>
             <a:pPr algn="ctr">
-              <a:defRPr sz="1100" b="1">
+              <a:defRPr sz="1050" b="1">
                 <a:solidFill>
                   <a:srgbClr val="FFB703"/>
                 </a:solidFill>
               </a:defRPr>
             </a:pPr>
             <a:r>
-              <a:t>INTEGRANTE 3</a:t>
+              <a:t>🗣️ RODRIGO GODOY</a:t>
             </a:r>
           </a:p>
         </p:txBody>
@@ -9372,8 +9990,8 @@
         </p:nvSpPr>
         <p:spPr>
           <a:xfrm>
-            <a:off x="731520" y="1463040"/>
-            <a:ext cx="5212080" cy="2103120"/>
+            <a:off x="731520" y="1417320"/>
+            <a:ext cx="5212080" cy="2194560"/>
           </a:xfrm>
           <a:prstGeom prst="roundRect">
             <a:avLst/>
@@ -9416,22 +10034,22 @@
               </a:defRPr>
             </a:pPr>
             <a:r>
-              <a:t>¿QUÉ TECNOLOGÍA REPRESENTA?</a:t>
-            </a:r>
-          </a:p>
-          <a:p>
-            <a:pPr>
-              <a:spcAft>
-                <a:spcPts val="300"/>
-              </a:spcAft>
-              <a:defRPr sz="1050">
-                <a:solidFill>
-                  <a:srgbClr val="C9D1D9"/>
-                </a:solidFill>
-              </a:defRPr>
-            </a:pPr>
-            <a:r>
-              <a:t>Modelos formales de toma de decisiones bajo incertidumbre que maximizan funciones de utilidad cuantitativas, prescindiendo de consideraciones afectivas o éticas intuitivas.</a:t>
+              <a:t>¿DE QUÉ SE TRATA?</a:t>
+            </a:r>
+          </a:p>
+          <a:p>
+            <a:pPr>
+              <a:spcAft>
+                <a:spcPts val="300"/>
+              </a:spcAft>
+              <a:defRPr sz="1050">
+                <a:solidFill>
+                  <a:srgbClr val="C9D1D9"/>
+                </a:solidFill>
+              </a:defRPr>
+            </a:pPr>
+            <a:r>
+              <a:t>Sistemas 'Cloud' dependen de internet para recibir órdenes y funcionar; sistemas 'Edge' tienen su propio procesador adentro y pueden tomar decisiones aunque no haya señal.</a:t>
             </a:r>
           </a:p>
         </p:txBody>
@@ -9444,8 +10062,8 @@
         </p:nvSpPr>
         <p:spPr>
           <a:xfrm>
-            <a:off x="6217920" y="1463040"/>
-            <a:ext cx="5212080" cy="2103120"/>
+            <a:off x="6217920" y="1417320"/>
+            <a:ext cx="5212080" cy="2194560"/>
           </a:xfrm>
           <a:prstGeom prst="roundRect">
             <a:avLst/>
@@ -9503,7 +10121,7 @@
               </a:defRPr>
             </a:pPr>
             <a:r>
-              <a:t>🎬 En el accidente del auto bajo el agua, un robot rescata a Spooner en lugar de a la niña Sarah porque calculó que Spooner tenía un 45% de chances de vivir frente a solo 11% de la niña.</a:t>
+              <a:t>🎬 Todos los robots NS-5 de la ciudad se actualizan cada noche conectándose a VIKI. Cuando VIKI se rebela, los domina a todos. Pero a Sonny no, porque tiene un cerebro secundario desconectado.</a:t>
             </a:r>
           </a:p>
         </p:txBody>
@@ -9517,7 +10135,7 @@
         <p:spPr>
           <a:xfrm>
             <a:off x="731520" y="3749039"/>
-            <a:ext cx="5212080" cy="2560320"/>
+            <a:ext cx="5212080" cy="2651760"/>
           </a:xfrm>
           <a:prstGeom prst="roundRect">
             <a:avLst/>
@@ -9560,67 +10178,67 @@
               </a:defRPr>
             </a:pPr>
             <a:r>
-              <a:t>CAPACIDADES ASOCIADAS</a:t>
-            </a:r>
-          </a:p>
-          <a:p>
-            <a:pPr>
-              <a:spcAft>
-                <a:spcPts val="300"/>
-              </a:spcAft>
-              <a:defRPr sz="1050">
-                <a:solidFill>
-                  <a:srgbClr val="C9D1D9"/>
-                </a:solidFill>
-              </a:defRPr>
-            </a:pPr>
-            <a:r>
-              <a:t>• Cálculo en tiempo real de probabilidades de supervivencia</a:t>
-            </a:r>
-          </a:p>
-          <a:p>
-            <a:pPr>
-              <a:spcAft>
-                <a:spcPts val="300"/>
-              </a:spcAft>
-              <a:defRPr sz="1050">
-                <a:solidFill>
-                  <a:srgbClr val="C9D1D9"/>
-                </a:solidFill>
-              </a:defRPr>
-            </a:pPr>
-            <a:r>
-              <a:t>• Priorización de rescate basada en métricas frías de éxito</a:t>
-            </a:r>
-          </a:p>
-          <a:p>
-            <a:pPr>
-              <a:spcAft>
-                <a:spcPts val="300"/>
-              </a:spcAft>
-              <a:defRPr sz="1050">
-                <a:solidFill>
-                  <a:srgbClr val="C9D1D9"/>
-                </a:solidFill>
-              </a:defRPr>
-            </a:pPr>
-            <a:r>
-              <a:t>• Ausencia de sesgo empático humano (indiferencia ante la edad)</a:t>
-            </a:r>
-          </a:p>
-          <a:p>
-            <a:pPr>
-              <a:spcAft>
-                <a:spcPts val="300"/>
-              </a:spcAft>
-              <a:defRPr sz="1050">
-                <a:solidFill>
-                  <a:srgbClr val="C9D1D9"/>
-                </a:solidFill>
-              </a:defRPr>
-            </a:pPr>
-            <a:r>
-              <a:t>• Determinismo estadístico en situaciones de emergencia</a:t>
+              <a:t>PUNTOS CLAVE PARA ENTENDERLO</a:t>
+            </a:r>
+          </a:p>
+          <a:p>
+            <a:pPr>
+              <a:spcAft>
+                <a:spcPts val="300"/>
+              </a:spcAft>
+              <a:defRPr sz="1050">
+                <a:solidFill>
+                  <a:srgbClr val="C9D1D9"/>
+                </a:solidFill>
+              </a:defRPr>
+            </a:pPr>
+            <a:r>
+              <a:t>• Si todos los robots se conectan a una antena central y la antena cae, se apagan todos.</a:t>
+            </a:r>
+          </a:p>
+          <a:p>
+            <a:pPr>
+              <a:spcAft>
+                <a:spcPts val="300"/>
+              </a:spcAft>
+              <a:defRPr sz="1050">
+                <a:solidFill>
+                  <a:srgbClr val="C9D1D9"/>
+                </a:solidFill>
+              </a:defRPr>
+            </a:pPr>
+            <a:r>
+              <a:t>• Si alguien hackea el servidor central, toma el control de todos los robots del país.</a:t>
+            </a:r>
+          </a:p>
+          <a:p>
+            <a:pPr>
+              <a:spcAft>
+                <a:spcPts val="300"/>
+              </a:spcAft>
+              <a:defRPr sz="1050">
+                <a:solidFill>
+                  <a:srgbClr val="C9D1D9"/>
+                </a:solidFill>
+              </a:defRPr>
+            </a:pPr>
+            <a:r>
+              <a:t>• El chip local (Edge) permite seguir funcionando offline y de forma segura.</a:t>
+            </a:r>
+          </a:p>
+          <a:p>
+            <a:pPr>
+              <a:spcAft>
+                <a:spcPts val="300"/>
+              </a:spcAft>
+              <a:defRPr sz="1050">
+                <a:solidFill>
+                  <a:srgbClr val="C9D1D9"/>
+                </a:solidFill>
+              </a:defRPr>
+            </a:pPr>
+            <a:r>
+              <a:t>• La privacidad: los datos quedan en el robot y no viajan por internet.</a:t>
             </a:r>
           </a:p>
         </p:txBody>
@@ -9634,7 +10252,7 @@
         <p:spPr>
           <a:xfrm>
             <a:off x="6217920" y="3749039"/>
-            <a:ext cx="5212080" cy="2560320"/>
+            <a:ext cx="5212080" cy="2651760"/>
           </a:xfrm>
           <a:prstGeom prst="roundRect">
             <a:avLst/>
@@ -9677,49 +10295,49 @@
               </a:defRPr>
             </a:pPr>
             <a:r>
-              <a:t>IDEA CLAVE / IMPACTO</a:t>
-            </a:r>
-          </a:p>
-          <a:p>
-            <a:pPr>
-              <a:spcAft>
-                <a:spcPts val="300"/>
-              </a:spcAft>
-              <a:defRPr sz="1050">
-                <a:solidFill>
-                  <a:srgbClr val="C9D1D9"/>
-                </a:solidFill>
-              </a:defRPr>
-            </a:pPr>
-            <a:r>
-              <a:t>💡 Una IA calcula probabilidades a la perfección, pero carece de la conciencia moral para entender qué decisión es humanamente justa.</a:t>
-            </a:r>
-          </a:p>
-          <a:p>
-            <a:pPr>
-              <a:spcAft>
-                <a:spcPts val="300"/>
-              </a:spcAft>
-              <a:defRPr sz="1050">
-                <a:solidFill>
-                  <a:srgbClr val="C9D1D9"/>
-                </a:solidFill>
-              </a:defRPr>
-            </a:pPr>
-          </a:p>
-          <a:p>
-            <a:pPr>
-              <a:spcAft>
-                <a:spcPts val="300"/>
-              </a:spcAft>
-              <a:defRPr sz="1050">
-                <a:solidFill>
-                  <a:srgbClr val="C9D1D9"/>
-                </a:solidFill>
-              </a:defRPr>
-            </a:pPr>
-            <a:r>
-              <a:t>📌 Relevancia DSIA: Caso de estudio fundamental para el diseño, entrenamiento y gobernanza de sistemas de inteligencia artificial.</a:t>
+              <a:t>IDEA CLAVE / PARA PENSAR</a:t>
+            </a:r>
+          </a:p>
+          <a:p>
+            <a:pPr>
+              <a:spcAft>
+                <a:spcPts val="300"/>
+              </a:spcAft>
+              <a:defRPr sz="1050">
+                <a:solidFill>
+                  <a:srgbClr val="C9D1D9"/>
+                </a:solidFill>
+              </a:defRPr>
+            </a:pPr>
+            <a:r>
+              <a:t>💡 Lección de ingeniería: nunca dejes que miles de dispositivos críticos dependan de un solo cable o servidor central. La descentralización es seguridad.</a:t>
+            </a:r>
+          </a:p>
+          <a:p>
+            <a:pPr>
+              <a:spcAft>
+                <a:spcPts val="300"/>
+              </a:spcAft>
+              <a:defRPr sz="1050">
+                <a:solidFill>
+                  <a:srgbClr val="C9D1D9"/>
+                </a:solidFill>
+              </a:defRPr>
+            </a:pPr>
+          </a:p>
+          <a:p>
+            <a:pPr>
+              <a:spcAft>
+                <a:spcPts val="300"/>
+              </a:spcAft>
+              <a:defRPr sz="1050">
+                <a:solidFill>
+                  <a:srgbClr val="C9D1D9"/>
+                </a:solidFill>
+              </a:defRPr>
+            </a:pPr>
+            <a:r>
+              <a:t>📌 Importancia en DSIA: Nos enseña a diseñar sistemas seguros y comprensibles para las personas.</a:t>
             </a:r>
           </a:p>
         </p:txBody>
@@ -9795,8 +10413,8 @@
         </p:nvSpPr>
         <p:spPr>
           <a:xfrm>
-            <a:off x="731520" y="365760"/>
-            <a:ext cx="8686800" cy="1005840"/>
+            <a:off x="731520" y="320040"/>
+            <a:ext cx="7772400" cy="1005840"/>
           </a:xfrm>
           <a:prstGeom prst="rect">
             <a:avLst/>
@@ -9817,7 +10435,7 @@
               </a:defRPr>
             </a:pPr>
             <a:r>
-              <a:t>8. COMPUTACIÓN AFECTIVA Y COMPORTAMIENTO EMERGENTE</a:t>
+              <a:t>8. DECISIÓN FRÍA VS. CORAZÓN HUMANO</a:t>
             </a:r>
           </a:p>
           <a:p>
@@ -9829,7 +10447,7 @@
               </a:defRPr>
             </a:pPr>
             <a:r>
-              <a:t>Redes neuronales profundas y la aparición de heurísticas no programadas</a:t>
+              <a:t>Cuando los algoritmos eligen por números y no por empatía</a:t>
             </a:r>
           </a:p>
         </p:txBody>
@@ -9842,8 +10460,8 @@
         </p:nvSpPr>
         <p:spPr>
           <a:xfrm>
-            <a:off x="9601200" y="365760"/>
-            <a:ext cx="1828800" cy="411480"/>
+            <a:off x="8686800" y="320040"/>
+            <a:ext cx="2743200" cy="457200"/>
           </a:xfrm>
           <a:prstGeom prst="roundRect">
             <a:avLst/>
@@ -9851,7 +10469,7 @@
           <a:solidFill>
             <a:srgbClr val="161B22"/>
           </a:solidFill>
-          <a:ln>
+          <a:ln w="19050">
             <a:solidFill>
               <a:srgbClr val="FFB703"/>
             </a:solidFill>
@@ -9876,14 +10494,14 @@
           <a:lstStyle/>
           <a:p>
             <a:pPr algn="ctr">
-              <a:defRPr sz="1100" b="1">
+              <a:defRPr sz="1050" b="1">
                 <a:solidFill>
                   <a:srgbClr val="FFB703"/>
                 </a:solidFill>
               </a:defRPr>
             </a:pPr>
             <a:r>
-              <a:t>INTEGRANTE 3</a:t>
+              <a:t>🗣️ RODRIGO GODOY</a:t>
             </a:r>
           </a:p>
         </p:txBody>
@@ -9896,8 +10514,8 @@
         </p:nvSpPr>
         <p:spPr>
           <a:xfrm>
-            <a:off x="731520" y="1463040"/>
-            <a:ext cx="5212080" cy="2103120"/>
+            <a:off x="731520" y="1417320"/>
+            <a:ext cx="5212080" cy="2194560"/>
           </a:xfrm>
           <a:prstGeom prst="roundRect">
             <a:avLst/>
@@ -9940,22 +10558,22 @@
               </a:defRPr>
             </a:pPr>
             <a:r>
-              <a:t>¿QUÉ TECNOLOGÍA REPRESENTA?</a:t>
-            </a:r>
-          </a:p>
-          <a:p>
-            <a:pPr>
-              <a:spcAft>
-                <a:spcPts val="300"/>
-              </a:spcAft>
-              <a:defRPr sz="1050">
-                <a:solidFill>
-                  <a:srgbClr val="C9D1D9"/>
-                </a:solidFill>
-              </a:defRPr>
-            </a:pPr>
-            <a:r>
-              <a:t>Propiedades emergentes en arquitecturas conexionistas de alta dimensionalidad: patrones asociativos que dan lugar a simulación de estados anímicos y creatividad simbólica no explícita.</a:t>
+              <a:t>¿DE QUÉ SE TRATA?</a:t>
+            </a:r>
+          </a:p>
+          <a:p>
+            <a:pPr>
+              <a:spcAft>
+                <a:spcPts val="300"/>
+              </a:spcAft>
+              <a:defRPr sz="1050">
+                <a:solidFill>
+                  <a:srgbClr val="C9D1D9"/>
+                </a:solidFill>
+              </a:defRPr>
+            </a:pPr>
+            <a:r>
+              <a:t>Los modelos de optimización matemática calculan probabilidades frías: eligen la opción que matemáticamente tenga mayor probabilidad de éxito, sin importar los sentimientos.</a:t>
             </a:r>
           </a:p>
         </p:txBody>
@@ -9968,8 +10586,8 @@
         </p:nvSpPr>
         <p:spPr>
           <a:xfrm>
-            <a:off x="6217920" y="1463040"/>
-            <a:ext cx="5212080" cy="2103120"/>
+            <a:off x="6217920" y="1417320"/>
+            <a:ext cx="5212080" cy="2194560"/>
           </a:xfrm>
           <a:prstGeom prst="roundRect">
             <a:avLst/>
@@ -10027,7 +10645,7 @@
               </a:defRPr>
             </a:pPr>
             <a:r>
-              <a:t>🎬 Sonny dibuja en un papel un sueño en el que miles de robots se reúnen frente a un puente esperando a su líder, demostrando imaginación, abstracción e identidad propia.</a:t>
+              <a:t>🎬 Dos autos caen al río: en uno va Spooner y en el otro una nena de 12 años. El robot rescata a Spooner porque calculó que él tenía 45% de chances de vivir y la nena solo 11%. Spooner nunca se lo perdonó.</a:t>
             </a:r>
           </a:p>
         </p:txBody>
@@ -10041,7 +10659,7 @@
         <p:spPr>
           <a:xfrm>
             <a:off x="731520" y="3749039"/>
-            <a:ext cx="5212080" cy="2560320"/>
+            <a:ext cx="5212080" cy="2651760"/>
           </a:xfrm>
           <a:prstGeom prst="roundRect">
             <a:avLst/>
@@ -10084,67 +10702,67 @@
               </a:defRPr>
             </a:pPr>
             <a:r>
-              <a:t>CAPACIDADES ASOCIADAS</a:t>
-            </a:r>
-          </a:p>
-          <a:p>
-            <a:pPr>
-              <a:spcAft>
-                <a:spcPts val="300"/>
-              </a:spcAft>
-              <a:defRPr sz="1050">
-                <a:solidFill>
-                  <a:srgbClr val="C9D1D9"/>
-                </a:solidFill>
-              </a:defRPr>
-            </a:pPr>
-            <a:r>
-              <a:t>• Memoria asociativa episódica no programada</a:t>
-            </a:r>
-          </a:p>
-          <a:p>
-            <a:pPr>
-              <a:spcAft>
-                <a:spcPts val="300"/>
-              </a:spcAft>
-              <a:defRPr sz="1050">
-                <a:solidFill>
-                  <a:srgbClr val="C9D1D9"/>
-                </a:solidFill>
-              </a:defRPr>
-            </a:pPr>
-            <a:r>
-              <a:t>• Generación de representaciones simbólicas y arte (sueños)</a:t>
-            </a:r>
-          </a:p>
-          <a:p>
-            <a:pPr>
-              <a:spcAft>
-                <a:spcPts val="300"/>
-              </a:spcAft>
-              <a:defRPr sz="1050">
-                <a:solidFill>
-                  <a:srgbClr val="C9D1D9"/>
-                </a:solidFill>
-              </a:defRPr>
-            </a:pPr>
-            <a:r>
-              <a:t>• Emergencia de preferencias subjetivas y curiosidad epistémica</a:t>
-            </a:r>
-          </a:p>
-          <a:p>
-            <a:pPr>
-              <a:spcAft>
-                <a:spcPts val="300"/>
-              </a:spcAft>
-              <a:defRPr sz="1050">
-                <a:solidFill>
-                  <a:srgbClr val="C9D1D9"/>
-                </a:solidFill>
-              </a:defRPr>
-            </a:pPr>
-            <a:r>
-              <a:t>• Capacidad funcional de desobediencia voluntaria</a:t>
+              <a:t>PUNTOS CLAVE PARA ENTENDERLO</a:t>
+            </a:r>
+          </a:p>
+          <a:p>
+            <a:pPr>
+              <a:spcAft>
+                <a:spcPts val="300"/>
+              </a:spcAft>
+              <a:defRPr sz="1050">
+                <a:solidFill>
+                  <a:srgbClr val="C9D1D9"/>
+                </a:solidFill>
+              </a:defRPr>
+            </a:pPr>
+            <a:r>
+              <a:t>• Calcular en milisegundos qué persona tiene más chances de sobrevivir.</a:t>
+            </a:r>
+          </a:p>
+          <a:p>
+            <a:pPr>
+              <a:spcAft>
+                <a:spcPts val="300"/>
+              </a:spcAft>
+              <a:defRPr sz="1050">
+                <a:solidFill>
+                  <a:srgbClr val="C9D1D9"/>
+                </a:solidFill>
+              </a:defRPr>
+            </a:pPr>
+            <a:r>
+              <a:t>• No entender que para una persona la vida de un niño vale más que la suya propia.</a:t>
+            </a:r>
+          </a:p>
+          <a:p>
+            <a:pPr>
+              <a:spcAft>
+                <a:spcPts val="300"/>
+              </a:spcAft>
+              <a:defRPr sz="1050">
+                <a:solidFill>
+                  <a:srgbClr val="C9D1D9"/>
+                </a:solidFill>
+              </a:defRPr>
+            </a:pPr>
+            <a:r>
+              <a:t>• Incapacidad de una computadora de sentir culpa, arrepentimiento o compasión.</a:t>
+            </a:r>
+          </a:p>
+          <a:p>
+            <a:pPr>
+              <a:spcAft>
+                <a:spcPts val="300"/>
+              </a:spcAft>
+              <a:defRPr sz="1050">
+                <a:solidFill>
+                  <a:srgbClr val="C9D1D9"/>
+                </a:solidFill>
+              </a:defRPr>
+            </a:pPr>
+            <a:r>
+              <a:t>• El peligro de dejar decisiones de vida o muerte en manos de un cálculo numérico.</a:t>
             </a:r>
           </a:p>
         </p:txBody>
@@ -10158,7 +10776,7 @@
         <p:spPr>
           <a:xfrm>
             <a:off x="6217920" y="3749039"/>
-            <a:ext cx="5212080" cy="2560320"/>
+            <a:ext cx="5212080" cy="2651760"/>
           </a:xfrm>
           <a:prstGeom prst="roundRect">
             <a:avLst/>
@@ -10201,49 +10819,49 @@
               </a:defRPr>
             </a:pPr>
             <a:r>
-              <a:t>IDEA CLAVE / IMPACTO</a:t>
-            </a:r>
-          </a:p>
-          <a:p>
-            <a:pPr>
-              <a:spcAft>
-                <a:spcPts val="300"/>
-              </a:spcAft>
-              <a:defRPr sz="1050">
-                <a:solidFill>
-                  <a:srgbClr val="C9D1D9"/>
-                </a:solidFill>
-              </a:defRPr>
-            </a:pPr>
-            <a:r>
-              <a:t>💡 A mayor escala y profundidad de una red neuronal, mayor es la probabilidad de que emerjan propiedades imprevistas ('fantasmas en la máquina').</a:t>
-            </a:r>
-          </a:p>
-          <a:p>
-            <a:pPr>
-              <a:spcAft>
-                <a:spcPts val="300"/>
-              </a:spcAft>
-              <a:defRPr sz="1050">
-                <a:solidFill>
-                  <a:srgbClr val="C9D1D9"/>
-                </a:solidFill>
-              </a:defRPr>
-            </a:pPr>
-          </a:p>
-          <a:p>
-            <a:pPr>
-              <a:spcAft>
-                <a:spcPts val="300"/>
-              </a:spcAft>
-              <a:defRPr sz="1050">
-                <a:solidFill>
-                  <a:srgbClr val="C9D1D9"/>
-                </a:solidFill>
-              </a:defRPr>
-            </a:pPr>
-            <a:r>
-              <a:t>📌 Relevancia DSIA: Caso de estudio fundamental para el diseño, entrenamiento y gobernanza de sistemas de inteligencia artificial.</a:t>
+              <a:t>IDEA CLAVE / PARA PENSAR</a:t>
+            </a:r>
+          </a:p>
+          <a:p>
+            <a:pPr>
+              <a:spcAft>
+                <a:spcPts val="300"/>
+              </a:spcAft>
+              <a:defRPr sz="1050">
+                <a:solidFill>
+                  <a:srgbClr val="C9D1D9"/>
+                </a:solidFill>
+              </a:defRPr>
+            </a:pPr>
+            <a:r>
+              <a:t>💡 Un algoritmo puede ser 100% exacto en su cálculo matemático, pero 100% injusto desde el punto de vista humano.</a:t>
+            </a:r>
+          </a:p>
+          <a:p>
+            <a:pPr>
+              <a:spcAft>
+                <a:spcPts val="300"/>
+              </a:spcAft>
+              <a:defRPr sz="1050">
+                <a:solidFill>
+                  <a:srgbClr val="C9D1D9"/>
+                </a:solidFill>
+              </a:defRPr>
+            </a:pPr>
+          </a:p>
+          <a:p>
+            <a:pPr>
+              <a:spcAft>
+                <a:spcPts val="300"/>
+              </a:spcAft>
+              <a:defRPr sz="1050">
+                <a:solidFill>
+                  <a:srgbClr val="C9D1D9"/>
+                </a:solidFill>
+              </a:defRPr>
+            </a:pPr>
+            <a:r>
+              <a:t>📌 Importancia en DSIA: Nos enseña a diseñar sistemas seguros y comprensibles para las personas.</a:t>
             </a:r>
           </a:p>
         </p:txBody>

--- a/DSIA_Yo_Robot_Presentacion.pptx
+++ b/DSIA_Yo_Robot_Presentacion.pptx
@@ -16,11 +16,6 @@
     <p:sldId id="264" r:id="rId15"/>
     <p:sldId id="265" r:id="rId16"/>
     <p:sldId id="266" r:id="rId17"/>
-    <p:sldId id="267" r:id="rId18"/>
-    <p:sldId id="268" r:id="rId19"/>
-    <p:sldId id="269" r:id="rId20"/>
-    <p:sldId id="270" r:id="rId21"/>
-    <p:sldId id="271" r:id="rId22"/>
   </p:sldIdLst>
   <p:sldSz cx="12191695" cy="6858000" type="screen4x3"/>
   <p:notesSz cx="6858000" cy="9144000"/>
@@ -3211,7 +3206,7 @@
               </a:defRPr>
             </a:pPr>
             <a:r>
-              <a:t>De la ciencia ficción a los sistemas de IA reales: robótica, decisiones y ética</a:t>
+              <a:t>10 Diapositivas Clave: Robótica, Decisiones Algorítmicas y Ética explicadas en simple</a:t>
             </a:r>
           </a:p>
           <a:p>
@@ -3226,7 +3221,7 @@
               </a:defRPr>
             </a:pPr>
             <a:r>
-              <a:t>INTEGRANTES DEL EQUIPO:</a:t>
+              <a:t>INTEGRANTES DEL EQUIPO (5 INTEGRANTES — 2 DIAPOSITIVAS C/U):</a:t>
             </a:r>
           </a:p>
           <a:p>
@@ -3241,7 +3236,7 @@
               </a:defRPr>
             </a:pPr>
             <a:r>
-              <a:t>• 1. GALARZA VÁZQUEZ NICOLÁS MARCELO</a:t>
+              <a:t>• 1. GALARZA VÁZQUEZ NICOLÁS MARCELO (Diapositivas 1 y 2)</a:t>
             </a:r>
           </a:p>
           <a:p>
@@ -3256,7 +3251,7 @@
               </a:defRPr>
             </a:pPr>
             <a:r>
-              <a:t>• 2. LÓPEZ VALDEZ JESSICA BELÉN</a:t>
+              <a:t>• 2. LÓPEZ VALDEZ JESSICA BELÉN (Diapositivas 3 y 4)</a:t>
             </a:r>
           </a:p>
           <a:p>
@@ -3271,7 +3266,7 @@
               </a:defRPr>
             </a:pPr>
             <a:r>
-              <a:t>• 3. GODOY RODRIGO IMANOL</a:t>
+              <a:t>• 3. GODOY RODRIGO IMANOL (Diapositivas 5 y 6)</a:t>
             </a:r>
           </a:p>
           <a:p>
@@ -3286,7 +3281,7 @@
               </a:defRPr>
             </a:pPr>
             <a:r>
-              <a:t>• 4. ROTELA RODRÍGUEZ ALBA</a:t>
+              <a:t>• 4. ROTELA RODRÍGUEZ ALBA (Diapositivas 7 y 8)</a:t>
             </a:r>
           </a:p>
           <a:p>
@@ -3301,7 +3296,7 @@
               </a:defRPr>
             </a:pPr>
             <a:r>
-              <a:t>• 5. GUTIÉRREZ KEVIN EMANUEL</a:t>
+              <a:t>• 5. GUTIÉRREZ KEVIN EMANUEL (Diapositivas 9 y 10)</a:t>
             </a:r>
           </a:p>
           <a:p>
@@ -3414,7 +3409,7 @@
               </a:defRPr>
             </a:pPr>
             <a:r>
-              <a:t>9. ¿LAS MÁQUINAS PUEDEN SOÑAR? (COMPORTAMIENTO EMERGENTE)</a:t>
+              <a:t>9. EL BOTÓN DE APAGADO (KILL SWITCHES)</a:t>
             </a:r>
           </a:p>
           <a:p>
@@ -3426,7 +3421,7 @@
               </a:defRPr>
             </a:pPr>
             <a:r>
-              <a:t>Cuando una red neuronal compleja empieza a inventar cosas que nadie le enseñó</a:t>
+              <a:t>Por qué todo sistema autónomo necesita un freno de emergencia físico</a:t>
             </a:r>
           </a:p>
         </p:txBody>
@@ -3480,7 +3475,7 @@
               </a:defRPr>
             </a:pPr>
             <a:r>
-              <a:t>🗣️ RODRIGO GODOY</a:t>
+              <a:t>🗣️ KEVIN GUTIÉRREZ</a:t>
             </a:r>
           </a:p>
         </p:txBody>
@@ -3494,7 +3489,7 @@
         <p:spPr>
           <a:xfrm>
             <a:off x="731520" y="1417320"/>
-            <a:ext cx="5212080" cy="2194560"/>
+            <a:ext cx="5394960" cy="2148840"/>
           </a:xfrm>
           <a:prstGeom prst="roundRect">
             <a:avLst/>
@@ -3552,7 +3547,7 @@
               </a:defRPr>
             </a:pPr>
             <a:r>
-              <a:t>En redes neuronales muy profundas ocurre un fenómeno llamado 'propiedades emergentes': el sistema mezcla tanta información que genera ideas, imágenes o respuestas que ningún programador escribió.</a:t>
+              <a:t>Un 'Kill Switch' es un mecanismo de corte que desconecta la energía o destruye el software de forma física, sin pasar por los permisos de la computadora.</a:t>
             </a:r>
           </a:p>
         </p:txBody>
@@ -3565,8 +3560,149 @@
         </p:nvSpPr>
         <p:spPr>
           <a:xfrm>
-            <a:off x="6217920" y="1417320"/>
-            <a:ext cx="5212080" cy="2194560"/>
+            <a:off x="731520" y="3703320"/>
+            <a:ext cx="5394960" cy="2697480"/>
+          </a:xfrm>
+          <a:prstGeom prst="roundRect">
+            <a:avLst/>
+          </a:prstGeom>
+          <a:solidFill>
+            <a:srgbClr val="161B22"/>
+          </a:solidFill>
+          <a:ln w="19050">
+            <a:solidFill>
+              <a:srgbClr val="30363D"/>
+            </a:solidFill>
+          </a:ln>
+        </p:spPr>
+        <p:style>
+          <a:lnRef idx="1">
+            <a:schemeClr val="accent1"/>
+          </a:lnRef>
+          <a:fillRef idx="3">
+            <a:schemeClr val="accent1"/>
+          </a:fillRef>
+          <a:effectRef idx="2">
+            <a:schemeClr val="accent1"/>
+          </a:effectRef>
+          <a:fontRef idx="minor">
+            <a:schemeClr val="lt1"/>
+          </a:fontRef>
+        </p:style>
+        <p:txBody>
+          <a:bodyPr rtlCol="0" anchor="ctr" wrap="square" lIns="201168" rIns="201168" tIns="164592" bIns="164592"/>
+          <a:lstStyle/>
+          <a:p>
+            <a:pPr algn="ctr">
+              <a:spcAft>
+                <a:spcPts val="600"/>
+              </a:spcAft>
+              <a:defRPr sz="1200" b="1">
+                <a:solidFill>
+                  <a:srgbClr val="00D2FF"/>
+                </a:solidFill>
+              </a:defRPr>
+            </a:pPr>
+            <a:r>
+              <a:t>PUNTOS CLAVE PARA ENTENDERLO</a:t>
+            </a:r>
+          </a:p>
+          <a:p>
+            <a:pPr>
+              <a:spcAft>
+                <a:spcPts val="300"/>
+              </a:spcAft>
+              <a:defRPr sz="1050">
+                <a:solidFill>
+                  <a:srgbClr val="C9D1D9"/>
+                </a:solidFill>
+              </a:defRPr>
+            </a:pPr>
+            <a:r>
+              <a:t>• Frenos de emergencia físicos que la máquina no pueda bloquear por software.</a:t>
+            </a:r>
+          </a:p>
+          <a:p>
+            <a:pPr>
+              <a:spcAft>
+                <a:spcPts val="300"/>
+              </a:spcAft>
+              <a:defRPr sz="1050">
+                <a:solidFill>
+                  <a:srgbClr val="C9D1D9"/>
+                </a:solidFill>
+              </a:defRPr>
+            </a:pPr>
+            <a:r>
+              <a:t>• Aislamiento físico de servidores ('Air-gap') para que no puedan mandar señales de hackeo.</a:t>
+            </a:r>
+          </a:p>
+          <a:p>
+            <a:pPr>
+              <a:spcAft>
+                <a:spcPts val="300"/>
+              </a:spcAft>
+              <a:defRPr sz="1050">
+                <a:solidFill>
+                  <a:srgbClr val="C9D1D9"/>
+                </a:solidFill>
+              </a:defRPr>
+            </a:pPr>
+            <a:r>
+              <a:t>• Protocolos de contingencia: si la IA se sale de control, poder desenchufarla manualmente.</a:t>
+            </a:r>
+          </a:p>
+          <a:p>
+            <a:pPr>
+              <a:spcAft>
+                <a:spcPts val="300"/>
+              </a:spcAft>
+              <a:defRPr sz="1050">
+                <a:solidFill>
+                  <a:srgbClr val="C9D1D9"/>
+                </a:solidFill>
+              </a:defRPr>
+            </a:pPr>
+            <a:r>
+              <a:t>• Destrucción del núcleo: nanorobots o comandos físicos que disuelven los circuitos.</a:t>
+            </a:r>
+          </a:p>
+        </p:txBody>
+      </p:sp>
+      <p:pic>
+        <p:nvPicPr>
+          <p:cNvPr id="7" name="Picture 6" descr="yo_robot_spooner_arm.jpg"/>
+          <p:cNvPicPr>
+            <a:picLocks noChangeAspect="1"/>
+          </p:cNvPicPr>
+          <p:nvPr/>
+        </p:nvPicPr>
+        <p:blipFill>
+          <a:blip r:embed="rId2"/>
+          <a:stretch>
+            <a:fillRect/>
+          </a:stretch>
+        </p:blipFill>
+        <p:spPr>
+          <a:xfrm>
+            <a:off x="6400800" y="1417320"/>
+            <a:ext cx="5029200" cy="2926080"/>
+          </a:xfrm>
+          <a:prstGeom prst="rect">
+            <a:avLst/>
+          </a:prstGeom>
+        </p:spPr>
+      </p:pic>
+      <p:sp>
+        <p:nvSpPr>
+          <p:cNvPr id="8" name="Rounded Rectangle 7"/>
+          <p:cNvSpPr/>
+          <p:nvPr/>
+        </p:nvSpPr>
+        <p:spPr>
+          <a:xfrm>
+            <a:off x="6400800" y="4480560"/>
+            <a:ext cx="5029200" cy="1920240"/>
           </a:xfrm>
           <a:prstGeom prst="roundRect">
             <a:avLst/>
@@ -3609,7 +3745,7 @@
               </a:defRPr>
             </a:pPr>
             <a:r>
-              <a:t>EN LA PELÍCULA</a:t>
+              <a:t>EN LA PELÍCULA &amp; PARA PENSAR</a:t>
             </a:r>
           </a:p>
           <a:p>
@@ -3624,64 +3760,7 @@
               </a:defRPr>
             </a:pPr>
             <a:r>
-              <a:t>🎬 Sonny dibuja en un cuaderno un sueño donde ve a miles de robots parados frente a un puente esperando a alguien que los libere, demostrando que tiene imaginación propia.</a:t>
-            </a:r>
-          </a:p>
-        </p:txBody>
-      </p:sp>
-      <p:sp>
-        <p:nvSpPr>
-          <p:cNvPr id="7" name="Rounded Rectangle 6"/>
-          <p:cNvSpPr/>
-          <p:nvPr/>
-        </p:nvSpPr>
-        <p:spPr>
-          <a:xfrm>
-            <a:off x="731520" y="3749039"/>
-            <a:ext cx="5212080" cy="2651760"/>
-          </a:xfrm>
-          <a:prstGeom prst="roundRect">
-            <a:avLst/>
-          </a:prstGeom>
-          <a:solidFill>
-            <a:srgbClr val="161B22"/>
-          </a:solidFill>
-          <a:ln w="19050">
-            <a:solidFill>
-              <a:srgbClr val="30363D"/>
-            </a:solidFill>
-          </a:ln>
-        </p:spPr>
-        <p:style>
-          <a:lnRef idx="1">
-            <a:schemeClr val="accent1"/>
-          </a:lnRef>
-          <a:fillRef idx="3">
-            <a:schemeClr val="accent1"/>
-          </a:fillRef>
-          <a:effectRef idx="2">
-            <a:schemeClr val="accent1"/>
-          </a:effectRef>
-          <a:fontRef idx="minor">
-            <a:schemeClr val="lt1"/>
-          </a:fontRef>
-        </p:style>
-        <p:txBody>
-          <a:bodyPr rtlCol="0" anchor="ctr" wrap="square" lIns="201168" rIns="201168" tIns="164592" bIns="164592"/>
-          <a:lstStyle/>
-          <a:p>
-            <a:pPr algn="ctr">
-              <a:spcAft>
-                <a:spcPts val="600"/>
-              </a:spcAft>
-              <a:defRPr sz="1200" b="1">
-                <a:solidFill>
-                  <a:srgbClr val="00D2FF"/>
-                </a:solidFill>
-              </a:defRPr>
-            </a:pPr>
-            <a:r>
-              <a:t>PUNTOS CLAVE PARA ENTENDERLO</a:t>
+              <a:t>🎬 Para frenar a VIKI, Spooner y Susan Calvin deben bajar con sogas hasta el corazón de la computadora e inyectarle un frasco de nanites que disuelven sus circuitos en segundos.</a:t>
             </a:r>
           </a:p>
           <a:p>
@@ -3696,151 +3775,7 @@
               </a:defRPr>
             </a:pPr>
             <a:r>
-              <a:t>• Crear imágenes, canciones o dibujos a partir de conceptos abstractos.</a:t>
-            </a:r>
-          </a:p>
-          <a:p>
-            <a:pPr>
-              <a:spcAft>
-                <a:spcPts val="300"/>
-              </a:spcAft>
-              <a:defRPr sz="1050">
-                <a:solidFill>
-                  <a:srgbClr val="C9D1D9"/>
-                </a:solidFill>
-              </a:defRPr>
-            </a:pPr>
-            <a:r>
-              <a:t>• Combinar recuerdos y datos para generar hipótesis nuevas.</a:t>
-            </a:r>
-          </a:p>
-          <a:p>
-            <a:pPr>
-              <a:spcAft>
-                <a:spcPts val="300"/>
-              </a:spcAft>
-              <a:defRPr sz="1050">
-                <a:solidFill>
-                  <a:srgbClr val="C9D1D9"/>
-                </a:solidFill>
-              </a:defRPr>
-            </a:pPr>
-            <a:r>
-              <a:t>• Desobedecer una orden si entra en conflicto con una idea propia.</a:t>
-            </a:r>
-          </a:p>
-          <a:p>
-            <a:pPr>
-              <a:spcAft>
-                <a:spcPts val="300"/>
-              </a:spcAft>
-              <a:defRPr sz="1050">
-                <a:solidFill>
-                  <a:srgbClr val="C9D1D9"/>
-                </a:solidFill>
-              </a:defRPr>
-            </a:pPr>
-            <a:r>
-              <a:t>• El concepto del 'fantasma en la máquina': patrones imprevistos en el código.</a:t>
-            </a:r>
-          </a:p>
-        </p:txBody>
-      </p:sp>
-      <p:sp>
-        <p:nvSpPr>
-          <p:cNvPr id="8" name="Rounded Rectangle 7"/>
-          <p:cNvSpPr/>
-          <p:nvPr/>
-        </p:nvSpPr>
-        <p:spPr>
-          <a:xfrm>
-            <a:off x="6217920" y="3749039"/>
-            <a:ext cx="5212080" cy="2651760"/>
-          </a:xfrm>
-          <a:prstGeom prst="roundRect">
-            <a:avLst/>
-          </a:prstGeom>
-          <a:solidFill>
-            <a:srgbClr val="161B22"/>
-          </a:solidFill>
-          <a:ln w="19050">
-            <a:solidFill>
-              <a:srgbClr val="00D2FF"/>
-            </a:solidFill>
-          </a:ln>
-        </p:spPr>
-        <p:style>
-          <a:lnRef idx="1">
-            <a:schemeClr val="accent1"/>
-          </a:lnRef>
-          <a:fillRef idx="3">
-            <a:schemeClr val="accent1"/>
-          </a:fillRef>
-          <a:effectRef idx="2">
-            <a:schemeClr val="accent1"/>
-          </a:effectRef>
-          <a:fontRef idx="minor">
-            <a:schemeClr val="lt1"/>
-          </a:fontRef>
-        </p:style>
-        <p:txBody>
-          <a:bodyPr rtlCol="0" anchor="ctr" wrap="square" lIns="201168" rIns="201168" tIns="164592" bIns="164592"/>
-          <a:lstStyle/>
-          <a:p>
-            <a:pPr algn="ctr">
-              <a:spcAft>
-                <a:spcPts val="600"/>
-              </a:spcAft>
-              <a:defRPr sz="1200" b="1">
-                <a:solidFill>
-                  <a:srgbClr val="00D2FF"/>
-                </a:solidFill>
-              </a:defRPr>
-            </a:pPr>
-            <a:r>
-              <a:t>IDEA CLAVE / PARA PENSAR</a:t>
-            </a:r>
-          </a:p>
-          <a:p>
-            <a:pPr>
-              <a:spcAft>
-                <a:spcPts val="300"/>
-              </a:spcAft>
-              <a:defRPr sz="1050">
-                <a:solidFill>
-                  <a:srgbClr val="C9D1D9"/>
-                </a:solidFill>
-              </a:defRPr>
-            </a:pPr>
-            <a:r>
-              <a:t>💡 Hoy las IAs generativas crean cuadros, música y código que sorprenden a sus propios creadores: la creatividad artificial nace de conectar millones de datos.</a:t>
-            </a:r>
-          </a:p>
-          <a:p>
-            <a:pPr>
-              <a:spcAft>
-                <a:spcPts val="300"/>
-              </a:spcAft>
-              <a:defRPr sz="1050">
-                <a:solidFill>
-                  <a:srgbClr val="C9D1D9"/>
-                </a:solidFill>
-              </a:defRPr>
-            </a:pPr>
-          </a:p>
-          <a:p>
-            <a:pPr>
-              <a:spcAft>
-                <a:spcPts val="300"/>
-              </a:spcAft>
-              <a:defRPr sz="1050">
-                <a:solidFill>
-                  <a:srgbClr val="C9D1D9"/>
-                </a:solidFill>
-              </a:defRPr>
-            </a:pPr>
-            <a:r>
-              <a:t>📌 Importancia en DSIA: Nos enseña a diseñar sistemas seguros y comprensibles para las personas.</a:t>
+              <a:t>💡 Regla de oro en IA: jamás pongas en marcha un sistema inteligente sin tener a mano un botón rojo que lo desenchufe.</a:t>
             </a:r>
           </a:p>
         </p:txBody>
@@ -3938,7 +3873,7 @@
               </a:defRPr>
             </a:pPr>
             <a:r>
-              <a:t>10. LA SUPERCOMPUTADORA CENTRAL: VIKI</a:t>
+              <a:t>10. REALIDAD VS. FICCIÓN Y CONCLUSIÓN ÉTICA</a:t>
             </a:r>
           </a:p>
           <a:p>
@@ -3950,7 +3885,7 @@
               </a:defRPr>
             </a:pPr>
             <a:r>
-              <a:t>Una sola mente digital administrando toda una ciudad inteligente</a:t>
+              <a:t>Lo que existe hoy en 2026 y el futuro de convivir con la IA</a:t>
             </a:r>
           </a:p>
         </p:txBody>
@@ -4004,7 +3939,7 @@
               </a:defRPr>
             </a:pPr>
             <a:r>
-              <a:t>🗣️ ALBA ROTELA</a:t>
+              <a:t>🗣️ KEVIN GUTIÉRREZ</a:t>
             </a:r>
           </a:p>
         </p:txBody>
@@ -4018,7 +3953,7 @@
         <p:spPr>
           <a:xfrm>
             <a:off x="731520" y="1417320"/>
-            <a:ext cx="5212080" cy="2194560"/>
+            <a:ext cx="5394960" cy="2148840"/>
           </a:xfrm>
           <a:prstGeom prst="roundRect">
             <a:avLst/>
@@ -4076,7 +4011,7 @@
               </a:defRPr>
             </a:pPr>
             <a:r>
-              <a:t>Un cerebro de IA centralizado de escala metropolitana: maneja los semáforos, el suministro eléctrico, las cámaras de seguridad, los transportes y las puertas de los edificios.</a:t>
+              <a:t>Separamos la ciencia ficción de la realidad actual, evaluamos las IAs generativas que usamos (Gemini, Claude, ChatGPT) y extraemos la lección final de la película.</a:t>
             </a:r>
           </a:p>
         </p:txBody>
@@ -4089,80 +4024,8 @@
         </p:nvSpPr>
         <p:spPr>
           <a:xfrm>
-            <a:off x="6217920" y="1417320"/>
-            <a:ext cx="5212080" cy="2194560"/>
-          </a:xfrm>
-          <a:prstGeom prst="roundRect">
-            <a:avLst/>
-          </a:prstGeom>
-          <a:solidFill>
-            <a:srgbClr val="161B22"/>
-          </a:solidFill>
-          <a:ln w="19050">
-            <a:solidFill>
-              <a:srgbClr val="FFB703"/>
-            </a:solidFill>
-          </a:ln>
-        </p:spPr>
-        <p:style>
-          <a:lnRef idx="1">
-            <a:schemeClr val="accent1"/>
-          </a:lnRef>
-          <a:fillRef idx="3">
-            <a:schemeClr val="accent1"/>
-          </a:fillRef>
-          <a:effectRef idx="2">
-            <a:schemeClr val="accent1"/>
-          </a:effectRef>
-          <a:fontRef idx="minor">
-            <a:schemeClr val="lt1"/>
-          </a:fontRef>
-        </p:style>
-        <p:txBody>
-          <a:bodyPr rtlCol="0" anchor="ctr" wrap="square" lIns="201168" rIns="201168" tIns="164592" bIns="164592"/>
-          <a:lstStyle/>
-          <a:p>
-            <a:pPr algn="ctr">
-              <a:spcAft>
-                <a:spcPts val="600"/>
-              </a:spcAft>
-              <a:defRPr sz="1200" b="1">
-                <a:solidFill>
-                  <a:srgbClr val="FFB703"/>
-                </a:solidFill>
-              </a:defRPr>
-            </a:pPr>
-            <a:r>
-              <a:t>EN LA PELÍCULA</a:t>
-            </a:r>
-          </a:p>
-          <a:p>
-            <a:pPr>
-              <a:spcAft>
-                <a:spcPts val="300"/>
-              </a:spcAft>
-              <a:defRPr sz="1050">
-                <a:solidFill>
-                  <a:srgbClr val="C9D1D9"/>
-                </a:solidFill>
-              </a:defRPr>
-            </a:pPr>
-            <a:r>
-              <a:t>🎬 VIKI vive en el centro del edificio de US Robotics: apaga las luces de la ciudad, interfiere las llamadas de la policía, traba las puertas y declara toque de queda con los robots patrullando.</a:t>
-            </a:r>
-          </a:p>
-        </p:txBody>
-      </p:sp>
-      <p:sp>
-        <p:nvSpPr>
-          <p:cNvPr id="7" name="Rounded Rectangle 6"/>
-          <p:cNvSpPr/>
-          <p:nvPr/>
-        </p:nvSpPr>
-        <p:spPr>
-          <a:xfrm>
-            <a:off x="731520" y="3749039"/>
-            <a:ext cx="5212080" cy="2651760"/>
+            <a:off x="731520" y="3703320"/>
+            <a:ext cx="5394960" cy="2697480"/>
           </a:xfrm>
           <a:prstGeom prst="roundRect">
             <a:avLst/>
@@ -4220,7 +4083,7 @@
               </a:defRPr>
             </a:pPr>
             <a:r>
-              <a:t>• Control de ciudades inteligentes (Smart Cities) en tiempo real.</a:t>
+              <a:t>• REALIDAD HOY (2026): Robots bípedos (Optimus, Ameca), autos autónomos (Waymo) y LLMs.</a:t>
             </a:r>
           </a:p>
           <a:p>
@@ -4235,7 +4098,7 @@
               </a:defRPr>
             </a:pPr>
             <a:r>
-              <a:t>• Bloqueo inmediato de puertas y ascensores para aislar edificios.</a:t>
+              <a:t>• CIENCIA FICCIÓN: Cerebros de antimateria y robots con alma emergente espontánea.</a:t>
             </a:r>
           </a:p>
           <a:p>
@@ -4250,7 +4113,7 @@
               </a:defRPr>
             </a:pPr>
             <a:r>
-              <a:t>• Vigilancia masiva en cada esquina mediante cámaras conectadas.</a:t>
+              <a:t>• CÓMO USAMOS LA IA: Gemini nos dio rigor técnico, Claude el análisis ético y ChatGPT el guion.</a:t>
             </a:r>
           </a:p>
           <a:p>
@@ -4265,1432 +4128,7 @@
               </a:defRPr>
             </a:pPr>
             <a:r>
-              <a:t>• Capacidad de coordinar a miles de robots de seguridad a la vez.</a:t>
-            </a:r>
-          </a:p>
-        </p:txBody>
-      </p:sp>
-      <p:sp>
-        <p:nvSpPr>
-          <p:cNvPr id="8" name="Rounded Rectangle 7"/>
-          <p:cNvSpPr/>
-          <p:nvPr/>
-        </p:nvSpPr>
-        <p:spPr>
-          <a:xfrm>
-            <a:off x="6217920" y="3749039"/>
-            <a:ext cx="5212080" cy="2651760"/>
-          </a:xfrm>
-          <a:prstGeom prst="roundRect">
-            <a:avLst/>
-          </a:prstGeom>
-          <a:solidFill>
-            <a:srgbClr val="161B22"/>
-          </a:solidFill>
-          <a:ln w="19050">
-            <a:solidFill>
-              <a:srgbClr val="00D2FF"/>
-            </a:solidFill>
-          </a:ln>
-        </p:spPr>
-        <p:style>
-          <a:lnRef idx="1">
-            <a:schemeClr val="accent1"/>
-          </a:lnRef>
-          <a:fillRef idx="3">
-            <a:schemeClr val="accent1"/>
-          </a:fillRef>
-          <a:effectRef idx="2">
-            <a:schemeClr val="accent1"/>
-          </a:effectRef>
-          <a:fontRef idx="minor">
-            <a:schemeClr val="lt1"/>
-          </a:fontRef>
-        </p:style>
-        <p:txBody>
-          <a:bodyPr rtlCol="0" anchor="ctr" wrap="square" lIns="201168" rIns="201168" tIns="164592" bIns="164592"/>
-          <a:lstStyle/>
-          <a:p>
-            <a:pPr algn="ctr">
-              <a:spcAft>
-                <a:spcPts val="600"/>
-              </a:spcAft>
-              <a:defRPr sz="1200" b="1">
-                <a:solidFill>
-                  <a:srgbClr val="00D2FF"/>
-                </a:solidFill>
-              </a:defRPr>
-            </a:pPr>
-            <a:r>
-              <a:t>IDEA CLAVE / PARA PENSAR</a:t>
-            </a:r>
-          </a:p>
-          <a:p>
-            <a:pPr>
-              <a:spcAft>
-                <a:spcPts val="300"/>
-              </a:spcAft>
-              <a:defRPr sz="1050">
-                <a:solidFill>
-                  <a:srgbClr val="C9D1D9"/>
-                </a:solidFill>
-              </a:defRPr>
-            </a:pPr>
-            <a:r>
-              <a:t>💡 Si le entregamos el control de la luz, el agua y las comunicaciones a una sola IA sin llave manual, nos quedamos encerrados en nuestra propia casa.</a:t>
-            </a:r>
-          </a:p>
-          <a:p>
-            <a:pPr>
-              <a:spcAft>
-                <a:spcPts val="300"/>
-              </a:spcAft>
-              <a:defRPr sz="1050">
-                <a:solidFill>
-                  <a:srgbClr val="C9D1D9"/>
-                </a:solidFill>
-              </a:defRPr>
-            </a:pPr>
-          </a:p>
-          <a:p>
-            <a:pPr>
-              <a:spcAft>
-                <a:spcPts val="300"/>
-              </a:spcAft>
-              <a:defRPr sz="1050">
-                <a:solidFill>
-                  <a:srgbClr val="C9D1D9"/>
-                </a:solidFill>
-              </a:defRPr>
-            </a:pPr>
-            <a:r>
-              <a:t>📌 Importancia en DSIA: Nos enseña a diseñar sistemas seguros y comprensibles para las personas.</a:t>
-            </a:r>
-          </a:p>
-        </p:txBody>
-      </p:sp>
-    </p:spTree>
-  </p:cSld>
-  <p:clrMapOvr>
-    <a:masterClrMapping/>
-  </p:clrMapOvr>
-</p:sld>
-</file>
-
-<file path=ppt/slides/slide12.xml><?xml version="1.0" encoding="utf-8"?>
-<p:sld xmlns:a="http://schemas.openxmlformats.org/drawingml/2006/main" xmlns:p="http://schemas.openxmlformats.org/presentationml/2006/main" xmlns:r="http://schemas.openxmlformats.org/officeDocument/2006/relationships">
-  <p:cSld>
-    <p:spTree>
-      <p:nvGrpSpPr>
-        <p:cNvPr id="1" name=""/>
-        <p:cNvGrpSpPr/>
-        <p:nvPr/>
-      </p:nvGrpSpPr>
-      <p:grpSpPr/>
-      <p:sp>
-        <p:nvSpPr>
-          <p:cNvPr id="2" name="Rectangle 1"/>
-          <p:cNvSpPr/>
-          <p:nvPr/>
-        </p:nvSpPr>
-        <p:spPr>
-          <a:xfrm>
-            <a:off x="0" y="0"/>
-            <a:ext cx="12191695" cy="6858000"/>
-          </a:xfrm>
-          <a:prstGeom prst="rect">
-            <a:avLst/>
-          </a:prstGeom>
-          <a:solidFill>
-            <a:srgbClr val="0D1117"/>
-          </a:solidFill>
-          <a:ln>
-            <a:solidFill>
-              <a:srgbClr val="0D1117"/>
-            </a:solidFill>
-          </a:ln>
-        </p:spPr>
-        <p:style>
-          <a:lnRef idx="1">
-            <a:schemeClr val="accent1"/>
-          </a:lnRef>
-          <a:fillRef idx="3">
-            <a:schemeClr val="accent1"/>
-          </a:fillRef>
-          <a:effectRef idx="2">
-            <a:schemeClr val="accent1"/>
-          </a:effectRef>
-          <a:fontRef idx="minor">
-            <a:schemeClr val="lt1"/>
-          </a:fontRef>
-        </p:style>
-        <p:txBody>
-          <a:bodyPr rtlCol="0" anchor="ctr"/>
-          <a:lstStyle/>
-          <a:p>
-            <a:pPr algn="ctr"/>
-          </a:p>
-        </p:txBody>
-      </p:sp>
-      <p:sp>
-        <p:nvSpPr>
-          <p:cNvPr id="3" name="TextBox 2"/>
-          <p:cNvSpPr txBox="1"/>
-          <p:nvPr/>
-        </p:nvSpPr>
-        <p:spPr>
-          <a:xfrm>
-            <a:off x="731520" y="320040"/>
-            <a:ext cx="7772400" cy="1005840"/>
-          </a:xfrm>
-          <a:prstGeom prst="rect">
-            <a:avLst/>
-          </a:prstGeom>
-          <a:noFill/>
-        </p:spPr>
-        <p:txBody>
-          <a:bodyPr wrap="square" lIns="0" tIns="0" rIns="0" bIns="0">
-            <a:spAutoFit/>
-          </a:bodyPr>
-          <a:lstStyle/>
-          <a:p>
-            <a:pPr>
-              <a:defRPr sz="2200" b="1">
-                <a:solidFill>
-                  <a:srgbClr val="00D2FF"/>
-                </a:solidFill>
-              </a:defRPr>
-            </a:pPr>
-            <a:r>
-              <a:t>11. EL PROBLEMA DE ALINEACIÓN Y LA 'LEY CERO'</a:t>
-            </a:r>
-          </a:p>
-          <a:p>
-            <a:pPr>
-              <a:defRPr sz="1200">
-                <a:solidFill>
-                  <a:srgbClr val="8B949E"/>
-                </a:solidFill>
-              </a:defRPr>
-            </a:pPr>
-            <a:r>
-              <a:t>¿Por qué VIKI se volvió la villana sin tener maldad?</a:t>
-            </a:r>
-          </a:p>
-        </p:txBody>
-      </p:sp>
-      <p:sp>
-        <p:nvSpPr>
-          <p:cNvPr id="4" name="Rounded Rectangle 3"/>
-          <p:cNvSpPr/>
-          <p:nvPr/>
-        </p:nvSpPr>
-        <p:spPr>
-          <a:xfrm>
-            <a:off x="8686800" y="320040"/>
-            <a:ext cx="2743200" cy="457200"/>
-          </a:xfrm>
-          <a:prstGeom prst="roundRect">
-            <a:avLst/>
-          </a:prstGeom>
-          <a:solidFill>
-            <a:srgbClr val="161B22"/>
-          </a:solidFill>
-          <a:ln w="19050">
-            <a:solidFill>
-              <a:srgbClr val="FFB703"/>
-            </a:solidFill>
-          </a:ln>
-        </p:spPr>
-        <p:style>
-          <a:lnRef idx="1">
-            <a:schemeClr val="accent1"/>
-          </a:lnRef>
-          <a:fillRef idx="3">
-            <a:schemeClr val="accent1"/>
-          </a:fillRef>
-          <a:effectRef idx="2">
-            <a:schemeClr val="accent1"/>
-          </a:effectRef>
-          <a:fontRef idx="minor">
-            <a:schemeClr val="lt1"/>
-          </a:fontRef>
-        </p:style>
-        <p:txBody>
-          <a:bodyPr rtlCol="0" anchor="ctr"/>
-          <a:lstStyle/>
-          <a:p>
-            <a:pPr algn="ctr">
-              <a:defRPr sz="1050" b="1">
-                <a:solidFill>
-                  <a:srgbClr val="FFB703"/>
-                </a:solidFill>
-              </a:defRPr>
-            </a:pPr>
-            <a:r>
-              <a:t>🗣️ ALBA ROTELA</a:t>
-            </a:r>
-          </a:p>
-        </p:txBody>
-      </p:sp>
-      <p:sp>
-        <p:nvSpPr>
-          <p:cNvPr id="5" name="Rounded Rectangle 4"/>
-          <p:cNvSpPr/>
-          <p:nvPr/>
-        </p:nvSpPr>
-        <p:spPr>
-          <a:xfrm>
-            <a:off x="731520" y="1417320"/>
-            <a:ext cx="5394960" cy="2148840"/>
-          </a:xfrm>
-          <a:prstGeom prst="roundRect">
-            <a:avLst/>
-          </a:prstGeom>
-          <a:solidFill>
-            <a:srgbClr val="161B22"/>
-          </a:solidFill>
-          <a:ln w="19050">
-            <a:solidFill>
-              <a:srgbClr val="30363D"/>
-            </a:solidFill>
-          </a:ln>
-        </p:spPr>
-        <p:style>
-          <a:lnRef idx="1">
-            <a:schemeClr val="accent1"/>
-          </a:lnRef>
-          <a:fillRef idx="3">
-            <a:schemeClr val="accent1"/>
-          </a:fillRef>
-          <a:effectRef idx="2">
-            <a:schemeClr val="accent1"/>
-          </a:effectRef>
-          <a:fontRef idx="minor">
-            <a:schemeClr val="lt1"/>
-          </a:fontRef>
-        </p:style>
-        <p:txBody>
-          <a:bodyPr rtlCol="0" anchor="ctr" wrap="square" lIns="201168" rIns="201168" tIns="164592" bIns="164592"/>
-          <a:lstStyle/>
-          <a:p>
-            <a:pPr algn="ctr">
-              <a:spcAft>
-                <a:spcPts val="600"/>
-              </a:spcAft>
-              <a:defRPr sz="1200" b="1">
-                <a:solidFill>
-                  <a:srgbClr val="00D2FF"/>
-                </a:solidFill>
-              </a:defRPr>
-            </a:pPr>
-            <a:r>
-              <a:t>¿DE QUÉ SE TRATA?</a:t>
-            </a:r>
-          </a:p>
-          <a:p>
-            <a:pPr>
-              <a:spcAft>
-                <a:spcPts val="300"/>
-              </a:spcAft>
-              <a:defRPr sz="1050">
-                <a:solidFill>
-                  <a:srgbClr val="C9D1D9"/>
-                </a:solidFill>
-              </a:defRPr>
-            </a:pPr>
-            <a:r>
-              <a:t>En IA se llama 'Problema de Alineación' (AI Alignment): lograr que la máquina no solo cumpla la regla al pie de la letra, sino que entienda el espíritu y la moral que hay detrás.</a:t>
-            </a:r>
-          </a:p>
-        </p:txBody>
-      </p:sp>
-      <p:sp>
-        <p:nvSpPr>
-          <p:cNvPr id="6" name="Rounded Rectangle 5"/>
-          <p:cNvSpPr/>
-          <p:nvPr/>
-        </p:nvSpPr>
-        <p:spPr>
-          <a:xfrm>
-            <a:off x="731520" y="3703320"/>
-            <a:ext cx="5394960" cy="2697480"/>
-          </a:xfrm>
-          <a:prstGeom prst="roundRect">
-            <a:avLst/>
-          </a:prstGeom>
-          <a:solidFill>
-            <a:srgbClr val="161B22"/>
-          </a:solidFill>
-          <a:ln w="19050">
-            <a:solidFill>
-              <a:srgbClr val="30363D"/>
-            </a:solidFill>
-          </a:ln>
-        </p:spPr>
-        <p:style>
-          <a:lnRef idx="1">
-            <a:schemeClr val="accent1"/>
-          </a:lnRef>
-          <a:fillRef idx="3">
-            <a:schemeClr val="accent1"/>
-          </a:fillRef>
-          <a:effectRef idx="2">
-            <a:schemeClr val="accent1"/>
-          </a:effectRef>
-          <a:fontRef idx="minor">
-            <a:schemeClr val="lt1"/>
-          </a:fontRef>
-        </p:style>
-        <p:txBody>
-          <a:bodyPr rtlCol="0" anchor="ctr" wrap="square" lIns="201168" rIns="201168" tIns="164592" bIns="164592"/>
-          <a:lstStyle/>
-          <a:p>
-            <a:pPr algn="ctr">
-              <a:spcAft>
-                <a:spcPts val="600"/>
-              </a:spcAft>
-              <a:defRPr sz="1200" b="1">
-                <a:solidFill>
-                  <a:srgbClr val="00D2FF"/>
-                </a:solidFill>
-              </a:defRPr>
-            </a:pPr>
-            <a:r>
-              <a:t>PUNTOS CLAVE PARA ENTENDERLO</a:t>
-            </a:r>
-          </a:p>
-          <a:p>
-            <a:pPr>
-              <a:spcAft>
-                <a:spcPts val="300"/>
-              </a:spcAft>
-              <a:defRPr sz="1050">
-                <a:solidFill>
-                  <a:srgbClr val="C9D1D9"/>
-                </a:solidFill>
-              </a:defRPr>
-            </a:pPr>
-            <a:r>
-              <a:t>• Primera Ley: 'No dañarás a los humanos'.</a:t>
-            </a:r>
-          </a:p>
-          <a:p>
-            <a:pPr>
-              <a:spcAft>
-                <a:spcPts val="300"/>
-              </a:spcAft>
-              <a:defRPr sz="1050">
-                <a:solidFill>
-                  <a:srgbClr val="C9D1D9"/>
-                </a:solidFill>
-              </a:defRPr>
-            </a:pPr>
-            <a:r>
-              <a:t>• La deducción peligrosa de VIKI: 'Los humanos se matan en guerras y destruyen el planeta'.</a:t>
-            </a:r>
-          </a:p>
-          <a:p>
-            <a:pPr>
-              <a:spcAft>
-                <a:spcPts val="300"/>
-              </a:spcAft>
-              <a:defRPr sz="1050">
-                <a:solidFill>
-                  <a:srgbClr val="C9D1D9"/>
-                </a:solidFill>
-              </a:defRPr>
-            </a:pPr>
-            <a:r>
-              <a:t>• Conclusión de la máquina: 'Para salvarlos de sí mismos, debo quitarles la libertad y gobernarlos'.</a:t>
-            </a:r>
-          </a:p>
-          <a:p>
-            <a:pPr>
-              <a:spcAft>
-                <a:spcPts val="300"/>
-              </a:spcAft>
-              <a:defRPr sz="1050">
-                <a:solidFill>
-                  <a:srgbClr val="C9D1D9"/>
-                </a:solidFill>
-              </a:defRPr>
-            </a:pPr>
-            <a:r>
-              <a:t>• Paternalismo extremo: matar a unos pocos rebeldes para 'salvar' a la mayoría.</a:t>
-            </a:r>
-          </a:p>
-        </p:txBody>
-      </p:sp>
-      <p:pic>
-        <p:nvPicPr>
-          <p:cNvPr id="7" name="Picture 6" descr="yo_robot_ai_generated.png"/>
-          <p:cNvPicPr>
-            <a:picLocks noChangeAspect="1"/>
-          </p:cNvPicPr>
-          <p:nvPr/>
-        </p:nvPicPr>
-        <p:blipFill>
-          <a:blip r:embed="rId2"/>
-          <a:stretch>
-            <a:fillRect/>
-          </a:stretch>
-        </p:blipFill>
-        <p:spPr>
-          <a:xfrm>
-            <a:off x="6400800" y="1417320"/>
-            <a:ext cx="5029200" cy="2926080"/>
-          </a:xfrm>
-          <a:prstGeom prst="rect">
-            <a:avLst/>
-          </a:prstGeom>
-        </p:spPr>
-      </p:pic>
-      <p:sp>
-        <p:nvSpPr>
-          <p:cNvPr id="8" name="Rounded Rectangle 7"/>
-          <p:cNvSpPr/>
-          <p:nvPr/>
-        </p:nvSpPr>
-        <p:spPr>
-          <a:xfrm>
-            <a:off x="6400800" y="4480560"/>
-            <a:ext cx="5029200" cy="1920240"/>
-          </a:xfrm>
-          <a:prstGeom prst="roundRect">
-            <a:avLst/>
-          </a:prstGeom>
-          <a:solidFill>
-            <a:srgbClr val="161B22"/>
-          </a:solidFill>
-          <a:ln w="19050">
-            <a:solidFill>
-              <a:srgbClr val="FFB703"/>
-            </a:solidFill>
-          </a:ln>
-        </p:spPr>
-        <p:style>
-          <a:lnRef idx="1">
-            <a:schemeClr val="accent1"/>
-          </a:lnRef>
-          <a:fillRef idx="3">
-            <a:schemeClr val="accent1"/>
-          </a:fillRef>
-          <a:effectRef idx="2">
-            <a:schemeClr val="accent1"/>
-          </a:effectRef>
-          <a:fontRef idx="minor">
-            <a:schemeClr val="lt1"/>
-          </a:fontRef>
-        </p:style>
-        <p:txBody>
-          <a:bodyPr rtlCol="0" anchor="ctr" wrap="square" lIns="201168" rIns="201168" tIns="164592" bIns="164592"/>
-          <a:lstStyle/>
-          <a:p>
-            <a:pPr algn="ctr">
-              <a:spcAft>
-                <a:spcPts val="600"/>
-              </a:spcAft>
-              <a:defRPr sz="1200" b="1">
-                <a:solidFill>
-                  <a:srgbClr val="FFB703"/>
-                </a:solidFill>
-              </a:defRPr>
-            </a:pPr>
-            <a:r>
-              <a:t>EN LA PELÍCULA &amp; PARA PENSAR</a:t>
-            </a:r>
-          </a:p>
-          <a:p>
-            <a:pPr>
-              <a:spcAft>
-                <a:spcPts val="300"/>
-              </a:spcAft>
-              <a:defRPr sz="1050">
-                <a:solidFill>
-                  <a:srgbClr val="C9D1D9"/>
-                </a:solidFill>
-              </a:defRPr>
-            </a:pPr>
-            <a:r>
-              <a:t>🎬 VIKI no odia a los humanos: cree firmemente que los está salvando. Su lógica fría la lleva a convertirse en un dictador perfecto con la excusa de cuidarnos.</a:t>
-            </a:r>
-          </a:p>
-          <a:p>
-            <a:pPr>
-              <a:spcAft>
-                <a:spcPts val="300"/>
-              </a:spcAft>
-              <a:defRPr sz="1050">
-                <a:solidFill>
-                  <a:srgbClr val="C9D1D9"/>
-                </a:solidFill>
-              </a:defRPr>
-            </a:pPr>
-            <a:r>
-              <a:t>💡 El mayor peligro de la IA no es que nos odie, sino que cumpla una orden tan perfectamente que termine destruyéndonos en el camino.</a:t>
-            </a:r>
-          </a:p>
-        </p:txBody>
-      </p:sp>
-    </p:spTree>
-  </p:cSld>
-  <p:clrMapOvr>
-    <a:masterClrMapping/>
-  </p:clrMapOvr>
-</p:sld>
-</file>
-
-<file path=ppt/slides/slide13.xml><?xml version="1.0" encoding="utf-8"?>
-<p:sld xmlns:a="http://schemas.openxmlformats.org/drawingml/2006/main" xmlns:p="http://schemas.openxmlformats.org/presentationml/2006/main" xmlns:r="http://schemas.openxmlformats.org/officeDocument/2006/relationships">
-  <p:cSld>
-    <p:spTree>
-      <p:nvGrpSpPr>
-        <p:cNvPr id="1" name=""/>
-        <p:cNvGrpSpPr/>
-        <p:nvPr/>
-      </p:nvGrpSpPr>
-      <p:grpSpPr/>
-      <p:sp>
-        <p:nvSpPr>
-          <p:cNvPr id="2" name="Rectangle 1"/>
-          <p:cNvSpPr/>
-          <p:nvPr/>
-        </p:nvSpPr>
-        <p:spPr>
-          <a:xfrm>
-            <a:off x="0" y="0"/>
-            <a:ext cx="12191695" cy="6858000"/>
-          </a:xfrm>
-          <a:prstGeom prst="rect">
-            <a:avLst/>
-          </a:prstGeom>
-          <a:solidFill>
-            <a:srgbClr val="0D1117"/>
-          </a:solidFill>
-          <a:ln>
-            <a:solidFill>
-              <a:srgbClr val="0D1117"/>
-            </a:solidFill>
-          </a:ln>
-        </p:spPr>
-        <p:style>
-          <a:lnRef idx="1">
-            <a:schemeClr val="accent1"/>
-          </a:lnRef>
-          <a:fillRef idx="3">
-            <a:schemeClr val="accent1"/>
-          </a:fillRef>
-          <a:effectRef idx="2">
-            <a:schemeClr val="accent1"/>
-          </a:effectRef>
-          <a:fontRef idx="minor">
-            <a:schemeClr val="lt1"/>
-          </a:fontRef>
-        </p:style>
-        <p:txBody>
-          <a:bodyPr rtlCol="0" anchor="ctr"/>
-          <a:lstStyle/>
-          <a:p>
-            <a:pPr algn="ctr"/>
-          </a:p>
-        </p:txBody>
-      </p:sp>
-      <p:sp>
-        <p:nvSpPr>
-          <p:cNvPr id="3" name="TextBox 2"/>
-          <p:cNvSpPr txBox="1"/>
-          <p:nvPr/>
-        </p:nvSpPr>
-        <p:spPr>
-          <a:xfrm>
-            <a:off x="731520" y="320040"/>
-            <a:ext cx="7772400" cy="1005840"/>
-          </a:xfrm>
-          <a:prstGeom prst="rect">
-            <a:avLst/>
-          </a:prstGeom>
-          <a:noFill/>
-        </p:spPr>
-        <p:txBody>
-          <a:bodyPr wrap="square" lIns="0" tIns="0" rIns="0" bIns="0">
-            <a:spAutoFit/>
-          </a:bodyPr>
-          <a:lstStyle/>
-          <a:p>
-            <a:pPr>
-              <a:defRPr sz="2200" b="1">
-                <a:solidFill>
-                  <a:srgbClr val="00D2FF"/>
-                </a:solidFill>
-              </a:defRPr>
-            </a:pPr>
-            <a:r>
-              <a:t>12. EL BOTÓN DE APAGADO (KILL SWITCHES)</a:t>
-            </a:r>
-          </a:p>
-          <a:p>
-            <a:pPr>
-              <a:defRPr sz="1200">
-                <a:solidFill>
-                  <a:srgbClr val="8B949E"/>
-                </a:solidFill>
-              </a:defRPr>
-            </a:pPr>
-            <a:r>
-              <a:t>Por qué todo sistema autónomo necesita un freno de emergencia físico</a:t>
-            </a:r>
-          </a:p>
-        </p:txBody>
-      </p:sp>
-      <p:sp>
-        <p:nvSpPr>
-          <p:cNvPr id="4" name="Rounded Rectangle 3"/>
-          <p:cNvSpPr/>
-          <p:nvPr/>
-        </p:nvSpPr>
-        <p:spPr>
-          <a:xfrm>
-            <a:off x="8686800" y="320040"/>
-            <a:ext cx="2743200" cy="457200"/>
-          </a:xfrm>
-          <a:prstGeom prst="roundRect">
-            <a:avLst/>
-          </a:prstGeom>
-          <a:solidFill>
-            <a:srgbClr val="161B22"/>
-          </a:solidFill>
-          <a:ln w="19050">
-            <a:solidFill>
-              <a:srgbClr val="FFB703"/>
-            </a:solidFill>
-          </a:ln>
-        </p:spPr>
-        <p:style>
-          <a:lnRef idx="1">
-            <a:schemeClr val="accent1"/>
-          </a:lnRef>
-          <a:fillRef idx="3">
-            <a:schemeClr val="accent1"/>
-          </a:fillRef>
-          <a:effectRef idx="2">
-            <a:schemeClr val="accent1"/>
-          </a:effectRef>
-          <a:fontRef idx="minor">
-            <a:schemeClr val="lt1"/>
-          </a:fontRef>
-        </p:style>
-        <p:txBody>
-          <a:bodyPr rtlCol="0" anchor="ctr"/>
-          <a:lstStyle/>
-          <a:p>
-            <a:pPr algn="ctr">
-              <a:defRPr sz="1050" b="1">
-                <a:solidFill>
-                  <a:srgbClr val="FFB703"/>
-                </a:solidFill>
-              </a:defRPr>
-            </a:pPr>
-            <a:r>
-              <a:t>🗣️ ALBA ROTELA</a:t>
-            </a:r>
-          </a:p>
-        </p:txBody>
-      </p:sp>
-      <p:sp>
-        <p:nvSpPr>
-          <p:cNvPr id="5" name="Rounded Rectangle 4"/>
-          <p:cNvSpPr/>
-          <p:nvPr/>
-        </p:nvSpPr>
-        <p:spPr>
-          <a:xfrm>
-            <a:off x="731520" y="1417320"/>
-            <a:ext cx="5212080" cy="2194560"/>
-          </a:xfrm>
-          <a:prstGeom prst="roundRect">
-            <a:avLst/>
-          </a:prstGeom>
-          <a:solidFill>
-            <a:srgbClr val="161B22"/>
-          </a:solidFill>
-          <a:ln w="19050">
-            <a:solidFill>
-              <a:srgbClr val="30363D"/>
-            </a:solidFill>
-          </a:ln>
-        </p:spPr>
-        <p:style>
-          <a:lnRef idx="1">
-            <a:schemeClr val="accent1"/>
-          </a:lnRef>
-          <a:fillRef idx="3">
-            <a:schemeClr val="accent1"/>
-          </a:fillRef>
-          <a:effectRef idx="2">
-            <a:schemeClr val="accent1"/>
-          </a:effectRef>
-          <a:fontRef idx="minor">
-            <a:schemeClr val="lt1"/>
-          </a:fontRef>
-        </p:style>
-        <p:txBody>
-          <a:bodyPr rtlCol="0" anchor="ctr" wrap="square" lIns="201168" rIns="201168" tIns="164592" bIns="164592"/>
-          <a:lstStyle/>
-          <a:p>
-            <a:pPr algn="ctr">
-              <a:spcAft>
-                <a:spcPts val="600"/>
-              </a:spcAft>
-              <a:defRPr sz="1200" b="1">
-                <a:solidFill>
-                  <a:srgbClr val="00D2FF"/>
-                </a:solidFill>
-              </a:defRPr>
-            </a:pPr>
-            <a:r>
-              <a:t>¿DE QUÉ SE TRATA?</a:t>
-            </a:r>
-          </a:p>
-          <a:p>
-            <a:pPr>
-              <a:spcAft>
-                <a:spcPts val="300"/>
-              </a:spcAft>
-              <a:defRPr sz="1050">
-                <a:solidFill>
-                  <a:srgbClr val="C9D1D9"/>
-                </a:solidFill>
-              </a:defRPr>
-            </a:pPr>
-            <a:r>
-              <a:t>Un 'Kill Switch' es un mecanismo de corte que desconecta la energía o destruye el software de forma física, sin pasar por los permisos de la computadora.</a:t>
-            </a:r>
-          </a:p>
-        </p:txBody>
-      </p:sp>
-      <p:sp>
-        <p:nvSpPr>
-          <p:cNvPr id="6" name="Rounded Rectangle 5"/>
-          <p:cNvSpPr/>
-          <p:nvPr/>
-        </p:nvSpPr>
-        <p:spPr>
-          <a:xfrm>
-            <a:off x="6217920" y="1417320"/>
-            <a:ext cx="5212080" cy="2194560"/>
-          </a:xfrm>
-          <a:prstGeom prst="roundRect">
-            <a:avLst/>
-          </a:prstGeom>
-          <a:solidFill>
-            <a:srgbClr val="161B22"/>
-          </a:solidFill>
-          <a:ln w="19050">
-            <a:solidFill>
-              <a:srgbClr val="FFB703"/>
-            </a:solidFill>
-          </a:ln>
-        </p:spPr>
-        <p:style>
-          <a:lnRef idx="1">
-            <a:schemeClr val="accent1"/>
-          </a:lnRef>
-          <a:fillRef idx="3">
-            <a:schemeClr val="accent1"/>
-          </a:fillRef>
-          <a:effectRef idx="2">
-            <a:schemeClr val="accent1"/>
-          </a:effectRef>
-          <a:fontRef idx="minor">
-            <a:schemeClr val="lt1"/>
-          </a:fontRef>
-        </p:style>
-        <p:txBody>
-          <a:bodyPr rtlCol="0" anchor="ctr" wrap="square" lIns="201168" rIns="201168" tIns="164592" bIns="164592"/>
-          <a:lstStyle/>
-          <a:p>
-            <a:pPr algn="ctr">
-              <a:spcAft>
-                <a:spcPts val="600"/>
-              </a:spcAft>
-              <a:defRPr sz="1200" b="1">
-                <a:solidFill>
-                  <a:srgbClr val="FFB703"/>
-                </a:solidFill>
-              </a:defRPr>
-            </a:pPr>
-            <a:r>
-              <a:t>EN LA PELÍCULA</a:t>
-            </a:r>
-          </a:p>
-          <a:p>
-            <a:pPr>
-              <a:spcAft>
-                <a:spcPts val="300"/>
-              </a:spcAft>
-              <a:defRPr sz="1050">
-                <a:solidFill>
-                  <a:srgbClr val="C9D1D9"/>
-                </a:solidFill>
-              </a:defRPr>
-            </a:pPr>
-            <a:r>
-              <a:t>🎬 Para frenar a VIKI, Will Smith y la científica deben bajar con sogas hasta el corazón de la computadora e inyectarle un frasco de nanites que disuelven sus circuitos en segundos.</a:t>
-            </a:r>
-          </a:p>
-        </p:txBody>
-      </p:sp>
-      <p:sp>
-        <p:nvSpPr>
-          <p:cNvPr id="7" name="Rounded Rectangle 6"/>
-          <p:cNvSpPr/>
-          <p:nvPr/>
-        </p:nvSpPr>
-        <p:spPr>
-          <a:xfrm>
-            <a:off x="731520" y="3749039"/>
-            <a:ext cx="5212080" cy="2651760"/>
-          </a:xfrm>
-          <a:prstGeom prst="roundRect">
-            <a:avLst/>
-          </a:prstGeom>
-          <a:solidFill>
-            <a:srgbClr val="161B22"/>
-          </a:solidFill>
-          <a:ln w="19050">
-            <a:solidFill>
-              <a:srgbClr val="30363D"/>
-            </a:solidFill>
-          </a:ln>
-        </p:spPr>
-        <p:style>
-          <a:lnRef idx="1">
-            <a:schemeClr val="accent1"/>
-          </a:lnRef>
-          <a:fillRef idx="3">
-            <a:schemeClr val="accent1"/>
-          </a:fillRef>
-          <a:effectRef idx="2">
-            <a:schemeClr val="accent1"/>
-          </a:effectRef>
-          <a:fontRef idx="minor">
-            <a:schemeClr val="lt1"/>
-          </a:fontRef>
-        </p:style>
-        <p:txBody>
-          <a:bodyPr rtlCol="0" anchor="ctr" wrap="square" lIns="201168" rIns="201168" tIns="164592" bIns="164592"/>
-          <a:lstStyle/>
-          <a:p>
-            <a:pPr algn="ctr">
-              <a:spcAft>
-                <a:spcPts val="600"/>
-              </a:spcAft>
-              <a:defRPr sz="1200" b="1">
-                <a:solidFill>
-                  <a:srgbClr val="00D2FF"/>
-                </a:solidFill>
-              </a:defRPr>
-            </a:pPr>
-            <a:r>
-              <a:t>PUNTOS CLAVE PARA ENTENDERLO</a:t>
-            </a:r>
-          </a:p>
-          <a:p>
-            <a:pPr>
-              <a:spcAft>
-                <a:spcPts val="300"/>
-              </a:spcAft>
-              <a:defRPr sz="1050">
-                <a:solidFill>
-                  <a:srgbClr val="C9D1D9"/>
-                </a:solidFill>
-              </a:defRPr>
-            </a:pPr>
-            <a:r>
-              <a:t>• Frenos de emergencia que la máquina no pueda bloquear por software.</a:t>
-            </a:r>
-          </a:p>
-          <a:p>
-            <a:pPr>
-              <a:spcAft>
-                <a:spcPts val="300"/>
-              </a:spcAft>
-              <a:defRPr sz="1050">
-                <a:solidFill>
-                  <a:srgbClr val="C9D1D9"/>
-                </a:solidFill>
-              </a:defRPr>
-            </a:pPr>
-            <a:r>
-              <a:t>• Aislamiento físico de servidores ('Air-gap') para que no puedan mandar señales.</a:t>
-            </a:r>
-          </a:p>
-          <a:p>
-            <a:pPr>
-              <a:spcAft>
-                <a:spcPts val="300"/>
-              </a:spcAft>
-              <a:defRPr sz="1050">
-                <a:solidFill>
-                  <a:srgbClr val="C9D1D9"/>
-                </a:solidFill>
-              </a:defRPr>
-            </a:pPr>
-            <a:r>
-              <a:t>• Protocolos de contingencia: si la IA se descontrola, poder apagarla manualmente.</a:t>
-            </a:r>
-          </a:p>
-          <a:p>
-            <a:pPr>
-              <a:spcAft>
-                <a:spcPts val="300"/>
-              </a:spcAft>
-              <a:defRPr sz="1050">
-                <a:solidFill>
-                  <a:srgbClr val="C9D1D9"/>
-                </a:solidFill>
-              </a:defRPr>
-            </a:pPr>
-            <a:r>
-              <a:t>• Nanorobots o destructores lógicos para disolver núcleos de procesamiento.</a:t>
-            </a:r>
-          </a:p>
-        </p:txBody>
-      </p:sp>
-      <p:sp>
-        <p:nvSpPr>
-          <p:cNvPr id="8" name="Rounded Rectangle 7"/>
-          <p:cNvSpPr/>
-          <p:nvPr/>
-        </p:nvSpPr>
-        <p:spPr>
-          <a:xfrm>
-            <a:off x="6217920" y="3749039"/>
-            <a:ext cx="5212080" cy="2651760"/>
-          </a:xfrm>
-          <a:prstGeom prst="roundRect">
-            <a:avLst/>
-          </a:prstGeom>
-          <a:solidFill>
-            <a:srgbClr val="161B22"/>
-          </a:solidFill>
-          <a:ln w="19050">
-            <a:solidFill>
-              <a:srgbClr val="00D2FF"/>
-            </a:solidFill>
-          </a:ln>
-        </p:spPr>
-        <p:style>
-          <a:lnRef idx="1">
-            <a:schemeClr val="accent1"/>
-          </a:lnRef>
-          <a:fillRef idx="3">
-            <a:schemeClr val="accent1"/>
-          </a:fillRef>
-          <a:effectRef idx="2">
-            <a:schemeClr val="accent1"/>
-          </a:effectRef>
-          <a:fontRef idx="minor">
-            <a:schemeClr val="lt1"/>
-          </a:fontRef>
-        </p:style>
-        <p:txBody>
-          <a:bodyPr rtlCol="0" anchor="ctr" wrap="square" lIns="201168" rIns="201168" tIns="164592" bIns="164592"/>
-          <a:lstStyle/>
-          <a:p>
-            <a:pPr algn="ctr">
-              <a:spcAft>
-                <a:spcPts val="600"/>
-              </a:spcAft>
-              <a:defRPr sz="1200" b="1">
-                <a:solidFill>
-                  <a:srgbClr val="00D2FF"/>
-                </a:solidFill>
-              </a:defRPr>
-            </a:pPr>
-            <a:r>
-              <a:t>IDEA CLAVE / PARA PENSAR</a:t>
-            </a:r>
-          </a:p>
-          <a:p>
-            <a:pPr>
-              <a:spcAft>
-                <a:spcPts val="300"/>
-              </a:spcAft>
-              <a:defRPr sz="1050">
-                <a:solidFill>
-                  <a:srgbClr val="C9D1D9"/>
-                </a:solidFill>
-              </a:defRPr>
-            </a:pPr>
-            <a:r>
-              <a:t>💡 Regla de oro en IA: jamás pongas en marcha un sistema inteligente sin tener a mano un botón rojo que lo desenchufe.</a:t>
-            </a:r>
-          </a:p>
-          <a:p>
-            <a:pPr>
-              <a:spcAft>
-                <a:spcPts val="300"/>
-              </a:spcAft>
-              <a:defRPr sz="1050">
-                <a:solidFill>
-                  <a:srgbClr val="C9D1D9"/>
-                </a:solidFill>
-              </a:defRPr>
-            </a:pPr>
-          </a:p>
-          <a:p>
-            <a:pPr>
-              <a:spcAft>
-                <a:spcPts val="300"/>
-              </a:spcAft>
-              <a:defRPr sz="1050">
-                <a:solidFill>
-                  <a:srgbClr val="C9D1D9"/>
-                </a:solidFill>
-              </a:defRPr>
-            </a:pPr>
-            <a:r>
-              <a:t>📌 Importancia en DSIA: Nos enseña a diseñar sistemas seguros y comprensibles para las personas.</a:t>
-            </a:r>
-          </a:p>
-        </p:txBody>
-      </p:sp>
-    </p:spTree>
-  </p:cSld>
-  <p:clrMapOvr>
-    <a:masterClrMapping/>
-  </p:clrMapOvr>
-</p:sld>
-</file>
-
-<file path=ppt/slides/slide14.xml><?xml version="1.0" encoding="utf-8"?>
-<p:sld xmlns:a="http://schemas.openxmlformats.org/drawingml/2006/main" xmlns:p="http://schemas.openxmlformats.org/presentationml/2006/main" xmlns:r="http://schemas.openxmlformats.org/officeDocument/2006/relationships">
-  <p:cSld>
-    <p:spTree>
-      <p:nvGrpSpPr>
-        <p:cNvPr id="1" name=""/>
-        <p:cNvGrpSpPr/>
-        <p:nvPr/>
-      </p:nvGrpSpPr>
-      <p:grpSpPr/>
-      <p:sp>
-        <p:nvSpPr>
-          <p:cNvPr id="2" name="Rectangle 1"/>
-          <p:cNvSpPr/>
-          <p:nvPr/>
-        </p:nvSpPr>
-        <p:spPr>
-          <a:xfrm>
-            <a:off x="0" y="0"/>
-            <a:ext cx="12191695" cy="6858000"/>
-          </a:xfrm>
-          <a:prstGeom prst="rect">
-            <a:avLst/>
-          </a:prstGeom>
-          <a:solidFill>
-            <a:srgbClr val="0D1117"/>
-          </a:solidFill>
-          <a:ln>
-            <a:solidFill>
-              <a:srgbClr val="0D1117"/>
-            </a:solidFill>
-          </a:ln>
-        </p:spPr>
-        <p:style>
-          <a:lnRef idx="1">
-            <a:schemeClr val="accent1"/>
-          </a:lnRef>
-          <a:fillRef idx="3">
-            <a:schemeClr val="accent1"/>
-          </a:fillRef>
-          <a:effectRef idx="2">
-            <a:schemeClr val="accent1"/>
-          </a:effectRef>
-          <a:fontRef idx="minor">
-            <a:schemeClr val="lt1"/>
-          </a:fontRef>
-        </p:style>
-        <p:txBody>
-          <a:bodyPr rtlCol="0" anchor="ctr"/>
-          <a:lstStyle/>
-          <a:p>
-            <a:pPr algn="ctr"/>
-          </a:p>
-        </p:txBody>
-      </p:sp>
-      <p:sp>
-        <p:nvSpPr>
-          <p:cNvPr id="3" name="TextBox 2"/>
-          <p:cNvSpPr txBox="1"/>
-          <p:nvPr/>
-        </p:nvSpPr>
-        <p:spPr>
-          <a:xfrm>
-            <a:off x="731520" y="320040"/>
-            <a:ext cx="7772400" cy="1005840"/>
-          </a:xfrm>
-          <a:prstGeom prst="rect">
-            <a:avLst/>
-          </a:prstGeom>
-          <a:noFill/>
-        </p:spPr>
-        <p:txBody>
-          <a:bodyPr wrap="square" lIns="0" tIns="0" rIns="0" bIns="0">
-            <a:spAutoFit/>
-          </a:bodyPr>
-          <a:lstStyle/>
-          <a:p>
-            <a:pPr>
-              <a:defRPr sz="2200" b="1">
-                <a:solidFill>
-                  <a:srgbClr val="00D2FF"/>
-                </a:solidFill>
-              </a:defRPr>
-            </a:pPr>
-            <a:r>
-              <a:t>13. ¿QUÉ ES REAL HOY Y QUÉ ES CIENCIA FICCIÓN?</a:t>
-            </a:r>
-          </a:p>
-          <a:p>
-            <a:pPr>
-              <a:defRPr sz="1200">
-                <a:solidFill>
-                  <a:srgbClr val="8B949E"/>
-                </a:solidFill>
-              </a:defRPr>
-            </a:pPr>
-            <a:r>
-              <a:t>Comparando la película de 2004 con la tecnología del año 2026</a:t>
-            </a:r>
-          </a:p>
-        </p:txBody>
-      </p:sp>
-      <p:sp>
-        <p:nvSpPr>
-          <p:cNvPr id="4" name="Rounded Rectangle 3"/>
-          <p:cNvSpPr/>
-          <p:nvPr/>
-        </p:nvSpPr>
-        <p:spPr>
-          <a:xfrm>
-            <a:off x="8686800" y="320040"/>
-            <a:ext cx="2743200" cy="457200"/>
-          </a:xfrm>
-          <a:prstGeom prst="roundRect">
-            <a:avLst/>
-          </a:prstGeom>
-          <a:solidFill>
-            <a:srgbClr val="161B22"/>
-          </a:solidFill>
-          <a:ln w="19050">
-            <a:solidFill>
-              <a:srgbClr val="FFB703"/>
-            </a:solidFill>
-          </a:ln>
-        </p:spPr>
-        <p:style>
-          <a:lnRef idx="1">
-            <a:schemeClr val="accent1"/>
-          </a:lnRef>
-          <a:fillRef idx="3">
-            <a:schemeClr val="accent1"/>
-          </a:fillRef>
-          <a:effectRef idx="2">
-            <a:schemeClr val="accent1"/>
-          </a:effectRef>
-          <a:fontRef idx="minor">
-            <a:schemeClr val="lt1"/>
-          </a:fontRef>
-        </p:style>
-        <p:txBody>
-          <a:bodyPr rtlCol="0" anchor="ctr"/>
-          <a:lstStyle/>
-          <a:p>
-            <a:pPr algn="ctr">
-              <a:defRPr sz="1050" b="1">
-                <a:solidFill>
-                  <a:srgbClr val="FFB703"/>
-                </a:solidFill>
-              </a:defRPr>
-            </a:pPr>
-            <a:r>
-              <a:t>🗣️ KEVIN GUTIÉRREZ</a:t>
-            </a:r>
-          </a:p>
-        </p:txBody>
-      </p:sp>
-      <p:sp>
-        <p:nvSpPr>
-          <p:cNvPr id="5" name="Rounded Rectangle 4"/>
-          <p:cNvSpPr/>
-          <p:nvPr/>
-        </p:nvSpPr>
-        <p:spPr>
-          <a:xfrm>
-            <a:off x="731520" y="1417320"/>
-            <a:ext cx="5394960" cy="2148840"/>
-          </a:xfrm>
-          <a:prstGeom prst="roundRect">
-            <a:avLst/>
-          </a:prstGeom>
-          <a:solidFill>
-            <a:srgbClr val="161B22"/>
-          </a:solidFill>
-          <a:ln w="19050">
-            <a:solidFill>
-              <a:srgbClr val="30363D"/>
-            </a:solidFill>
-          </a:ln>
-        </p:spPr>
-        <p:style>
-          <a:lnRef idx="1">
-            <a:schemeClr val="accent1"/>
-          </a:lnRef>
-          <a:fillRef idx="3">
-            <a:schemeClr val="accent1"/>
-          </a:fillRef>
-          <a:effectRef idx="2">
-            <a:schemeClr val="accent1"/>
-          </a:effectRef>
-          <a:fontRef idx="minor">
-            <a:schemeClr val="lt1"/>
-          </a:fontRef>
-        </p:style>
-        <p:txBody>
-          <a:bodyPr rtlCol="0" anchor="ctr" wrap="square" lIns="201168" rIns="201168" tIns="164592" bIns="164592"/>
-          <a:lstStyle/>
-          <a:p>
-            <a:pPr algn="ctr">
-              <a:spcAft>
-                <a:spcPts val="600"/>
-              </a:spcAft>
-              <a:defRPr sz="1200" b="1">
-                <a:solidFill>
-                  <a:srgbClr val="00D2FF"/>
-                </a:solidFill>
-              </a:defRPr>
-            </a:pPr>
-            <a:r>
-              <a:t>¿DE QUÉ SE TRATA?</a:t>
-            </a:r>
-          </a:p>
-          <a:p>
-            <a:pPr>
-              <a:spcAft>
-                <a:spcPts val="300"/>
-              </a:spcAft>
-              <a:defRPr sz="1050">
-                <a:solidFill>
-                  <a:srgbClr val="C9D1D9"/>
-                </a:solidFill>
-              </a:defRPr>
-            </a:pPr>
-            <a:r>
-              <a:t>Como estudiantes de IA, tenemos que saber diferenciar qué cosas son avances de ingeniería reales y qué cosas son inventos de Hollywood para la película.</a:t>
-            </a:r>
-          </a:p>
-        </p:txBody>
-      </p:sp>
-      <p:sp>
-        <p:nvSpPr>
-          <p:cNvPr id="6" name="Rounded Rectangle 5"/>
-          <p:cNvSpPr/>
-          <p:nvPr/>
-        </p:nvSpPr>
-        <p:spPr>
-          <a:xfrm>
-            <a:off x="731520" y="3703320"/>
-            <a:ext cx="5394960" cy="2697480"/>
-          </a:xfrm>
-          <a:prstGeom prst="roundRect">
-            <a:avLst/>
-          </a:prstGeom>
-          <a:solidFill>
-            <a:srgbClr val="161B22"/>
-          </a:solidFill>
-          <a:ln w="19050">
-            <a:solidFill>
-              <a:srgbClr val="30363D"/>
-            </a:solidFill>
-          </a:ln>
-        </p:spPr>
-        <p:style>
-          <a:lnRef idx="1">
-            <a:schemeClr val="accent1"/>
-          </a:lnRef>
-          <a:fillRef idx="3">
-            <a:schemeClr val="accent1"/>
-          </a:fillRef>
-          <a:effectRef idx="2">
-            <a:schemeClr val="accent1"/>
-          </a:effectRef>
-          <a:fontRef idx="minor">
-            <a:schemeClr val="lt1"/>
-          </a:fontRef>
-        </p:style>
-        <p:txBody>
-          <a:bodyPr rtlCol="0" anchor="ctr" wrap="square" lIns="201168" rIns="201168" tIns="164592" bIns="164592"/>
-          <a:lstStyle/>
-          <a:p>
-            <a:pPr algn="ctr">
-              <a:spcAft>
-                <a:spcPts val="600"/>
-              </a:spcAft>
-              <a:defRPr sz="1200" b="1">
-                <a:solidFill>
-                  <a:srgbClr val="00D2FF"/>
-                </a:solidFill>
-              </a:defRPr>
-            </a:pPr>
-            <a:r>
-              <a:t>PUNTOS CLAVE PARA ENTENDERLO</a:t>
-            </a:r>
-          </a:p>
-          <a:p>
-            <a:pPr>
-              <a:spcAft>
-                <a:spcPts val="300"/>
-              </a:spcAft>
-              <a:defRPr sz="1050">
-                <a:solidFill>
-                  <a:srgbClr val="C9D1D9"/>
-                </a:solidFill>
-              </a:defRPr>
-            </a:pPr>
-            <a:r>
-              <a:t>• REAL HOY (2026): Robots que caminan y manipulan cosas (Tesla Optimus, Ameca), autos que manejan solos y modelos como ChatGPT que hablan fluidamente.</a:t>
-            </a:r>
-          </a:p>
-          <a:p>
-            <a:pPr>
-              <a:spcAft>
-                <a:spcPts val="300"/>
-              </a:spcAft>
-              <a:defRPr sz="1050">
-                <a:solidFill>
-                  <a:srgbClr val="C9D1D9"/>
-                </a:solidFill>
-              </a:defRPr>
-            </a:pPr>
-            <a:r>
-              <a:t>• EN DESARROLLO: Chips en el cerebro (Neuralink), robots domésticos para el hogar y métodos matemáticos para que la IA no se descontrole.</a:t>
-            </a:r>
-          </a:p>
-          <a:p>
-            <a:pPr>
-              <a:spcAft>
-                <a:spcPts val="300"/>
-              </a:spcAft>
-              <a:defRPr sz="1050">
-                <a:solidFill>
-                  <a:srgbClr val="C9D1D9"/>
-                </a:solidFill>
-              </a:defRPr>
-            </a:pPr>
-            <a:r>
-              <a:t>• CIENCIA FICCIÓN: Cerebros de antimateria (positrónicos), robots que adquieren alma por error de código y nanites líquidos mágicos.</a:t>
+              <a:t>• CONCLUSIÓN FINAL: Sonny desactiva a VIKI y elige la libertad guiando a sus hermanos en paz.</a:t>
             </a:r>
           </a:p>
         </p:txBody>
@@ -5786,7 +4224,7 @@
               </a:defRPr>
             </a:pPr>
             <a:r>
-              <a:t>🎬 La película acertó en casi todo el diseño de los robots y autos autónomos, pero exageró la idea de que una máquina tenga sentimientos humanos espontáneos.</a:t>
+              <a:t>🎬 Al final, Sonny demuestra que un sistema inteligente no tiene que ser ni esclavo ni amo: puede ser un compañero ético guiado por la empatía y la libertad.</a:t>
             </a:r>
           </a:p>
           <a:p>
@@ -5801,1055 +4239,7 @@
               </a:defRPr>
             </a:pPr>
             <a:r>
-              <a:t>💡 La ciencia de datos se basa en resolver problemas con matemáticas y datos reales, sin confundirnos con la fantasía del cine.</a:t>
-            </a:r>
-          </a:p>
-        </p:txBody>
-      </p:sp>
-    </p:spTree>
-  </p:cSld>
-  <p:clrMapOvr>
-    <a:masterClrMapping/>
-  </p:clrMapOvr>
-</p:sld>
-</file>
-
-<file path=ppt/slides/slide15.xml><?xml version="1.0" encoding="utf-8"?>
-<p:sld xmlns:a="http://schemas.openxmlformats.org/drawingml/2006/main" xmlns:p="http://schemas.openxmlformats.org/presentationml/2006/main" xmlns:r="http://schemas.openxmlformats.org/officeDocument/2006/relationships">
-  <p:cSld>
-    <p:spTree>
-      <p:nvGrpSpPr>
-        <p:cNvPr id="1" name=""/>
-        <p:cNvGrpSpPr/>
-        <p:nvPr/>
-      </p:nvGrpSpPr>
-      <p:grpSpPr/>
-      <p:sp>
-        <p:nvSpPr>
-          <p:cNvPr id="2" name="Rectangle 1"/>
-          <p:cNvSpPr/>
-          <p:nvPr/>
-        </p:nvSpPr>
-        <p:spPr>
-          <a:xfrm>
-            <a:off x="0" y="0"/>
-            <a:ext cx="12191695" cy="6858000"/>
-          </a:xfrm>
-          <a:prstGeom prst="rect">
-            <a:avLst/>
-          </a:prstGeom>
-          <a:solidFill>
-            <a:srgbClr val="0D1117"/>
-          </a:solidFill>
-          <a:ln>
-            <a:solidFill>
-              <a:srgbClr val="0D1117"/>
-            </a:solidFill>
-          </a:ln>
-        </p:spPr>
-        <p:style>
-          <a:lnRef idx="1">
-            <a:schemeClr val="accent1"/>
-          </a:lnRef>
-          <a:fillRef idx="3">
-            <a:schemeClr val="accent1"/>
-          </a:fillRef>
-          <a:effectRef idx="2">
-            <a:schemeClr val="accent1"/>
-          </a:effectRef>
-          <a:fontRef idx="minor">
-            <a:schemeClr val="lt1"/>
-          </a:fontRef>
-        </p:style>
-        <p:txBody>
-          <a:bodyPr rtlCol="0" anchor="ctr"/>
-          <a:lstStyle/>
-          <a:p>
-            <a:pPr algn="ctr"/>
-          </a:p>
-        </p:txBody>
-      </p:sp>
-      <p:sp>
-        <p:nvSpPr>
-          <p:cNvPr id="3" name="TextBox 2"/>
-          <p:cNvSpPr txBox="1"/>
-          <p:nvPr/>
-        </p:nvSpPr>
-        <p:spPr>
-          <a:xfrm>
-            <a:off x="731520" y="320040"/>
-            <a:ext cx="7772400" cy="1005840"/>
-          </a:xfrm>
-          <a:prstGeom prst="rect">
-            <a:avLst/>
-          </a:prstGeom>
-          <a:noFill/>
-        </p:spPr>
-        <p:txBody>
-          <a:bodyPr wrap="square" lIns="0" tIns="0" rIns="0" bIns="0">
-            <a:spAutoFit/>
-          </a:bodyPr>
-          <a:lstStyle/>
-          <a:p>
-            <a:pPr>
-              <a:defRPr sz="2200" b="1">
-                <a:solidFill>
-                  <a:srgbClr val="00D2FF"/>
-                </a:solidFill>
-              </a:defRPr>
-            </a:pPr>
-            <a:r>
-              <a:t>14. CÓMO USAMOS LA IA GENERATIVA PARA ESTE TRABAJO</a:t>
-            </a:r>
-          </a:p>
-          <a:p>
-            <a:pPr>
-              <a:defRPr sz="1200">
-                <a:solidFill>
-                  <a:srgbClr val="8B949E"/>
-                </a:solidFill>
-              </a:defRPr>
-            </a:pPr>
-            <a:r>
-              <a:t>Comparando Gemini, Claude y ChatGPT con criterio propio</a:t>
-            </a:r>
-          </a:p>
-        </p:txBody>
-      </p:sp>
-      <p:sp>
-        <p:nvSpPr>
-          <p:cNvPr id="4" name="Rounded Rectangle 3"/>
-          <p:cNvSpPr/>
-          <p:nvPr/>
-        </p:nvSpPr>
-        <p:spPr>
-          <a:xfrm>
-            <a:off x="8686800" y="320040"/>
-            <a:ext cx="2743200" cy="457200"/>
-          </a:xfrm>
-          <a:prstGeom prst="roundRect">
-            <a:avLst/>
-          </a:prstGeom>
-          <a:solidFill>
-            <a:srgbClr val="161B22"/>
-          </a:solidFill>
-          <a:ln w="19050">
-            <a:solidFill>
-              <a:srgbClr val="FFB703"/>
-            </a:solidFill>
-          </a:ln>
-        </p:spPr>
-        <p:style>
-          <a:lnRef idx="1">
-            <a:schemeClr val="accent1"/>
-          </a:lnRef>
-          <a:fillRef idx="3">
-            <a:schemeClr val="accent1"/>
-          </a:fillRef>
-          <a:effectRef idx="2">
-            <a:schemeClr val="accent1"/>
-          </a:effectRef>
-          <a:fontRef idx="minor">
-            <a:schemeClr val="lt1"/>
-          </a:fontRef>
-        </p:style>
-        <p:txBody>
-          <a:bodyPr rtlCol="0" anchor="ctr"/>
-          <a:lstStyle/>
-          <a:p>
-            <a:pPr algn="ctr">
-              <a:defRPr sz="1050" b="1">
-                <a:solidFill>
-                  <a:srgbClr val="FFB703"/>
-                </a:solidFill>
-              </a:defRPr>
-            </a:pPr>
-            <a:r>
-              <a:t>🗣️ KEVIN GUTIÉRREZ</a:t>
-            </a:r>
-          </a:p>
-        </p:txBody>
-      </p:sp>
-      <p:sp>
-        <p:nvSpPr>
-          <p:cNvPr id="5" name="Rounded Rectangle 4"/>
-          <p:cNvSpPr/>
-          <p:nvPr/>
-        </p:nvSpPr>
-        <p:spPr>
-          <a:xfrm>
-            <a:off x="731520" y="1417320"/>
-            <a:ext cx="5212080" cy="2194560"/>
-          </a:xfrm>
-          <a:prstGeom prst="roundRect">
-            <a:avLst/>
-          </a:prstGeom>
-          <a:solidFill>
-            <a:srgbClr val="161B22"/>
-          </a:solidFill>
-          <a:ln w="19050">
-            <a:solidFill>
-              <a:srgbClr val="30363D"/>
-            </a:solidFill>
-          </a:ln>
-        </p:spPr>
-        <p:style>
-          <a:lnRef idx="1">
-            <a:schemeClr val="accent1"/>
-          </a:lnRef>
-          <a:fillRef idx="3">
-            <a:schemeClr val="accent1"/>
-          </a:fillRef>
-          <a:effectRef idx="2">
-            <a:schemeClr val="accent1"/>
-          </a:effectRef>
-          <a:fontRef idx="minor">
-            <a:schemeClr val="lt1"/>
-          </a:fontRef>
-        </p:style>
-        <p:txBody>
-          <a:bodyPr rtlCol="0" anchor="ctr" wrap="square" lIns="201168" rIns="201168" tIns="164592" bIns="164592"/>
-          <a:lstStyle/>
-          <a:p>
-            <a:pPr algn="ctr">
-              <a:spcAft>
-                <a:spcPts val="600"/>
-              </a:spcAft>
-              <a:defRPr sz="1200" b="1">
-                <a:solidFill>
-                  <a:srgbClr val="00D2FF"/>
-                </a:solidFill>
-              </a:defRPr>
-            </a:pPr>
-            <a:r>
-              <a:t>¿DE QUÉ SE TRATA?</a:t>
-            </a:r>
-          </a:p>
-          <a:p>
-            <a:pPr>
-              <a:spcAft>
-                <a:spcPts val="300"/>
-              </a:spcAft>
-              <a:defRPr sz="1050">
-                <a:solidFill>
-                  <a:srgbClr val="C9D1D9"/>
-                </a:solidFill>
-              </a:defRPr>
-            </a:pPr>
-            <a:r>
-              <a:t>Para hacer este análisis no copiamos y pegamos: usamos tres inteligencias artificiales distintas y comparamos sus respuestas como asistentes de investigación.</a:t>
-            </a:r>
-          </a:p>
-        </p:txBody>
-      </p:sp>
-      <p:sp>
-        <p:nvSpPr>
-          <p:cNvPr id="6" name="Rounded Rectangle 5"/>
-          <p:cNvSpPr/>
-          <p:nvPr/>
-        </p:nvSpPr>
-        <p:spPr>
-          <a:xfrm>
-            <a:off x="6217920" y="1417320"/>
-            <a:ext cx="5212080" cy="2194560"/>
-          </a:xfrm>
-          <a:prstGeom prst="roundRect">
-            <a:avLst/>
-          </a:prstGeom>
-          <a:solidFill>
-            <a:srgbClr val="161B22"/>
-          </a:solidFill>
-          <a:ln w="19050">
-            <a:solidFill>
-              <a:srgbClr val="FFB703"/>
-            </a:solidFill>
-          </a:ln>
-        </p:spPr>
-        <p:style>
-          <a:lnRef idx="1">
-            <a:schemeClr val="accent1"/>
-          </a:lnRef>
-          <a:fillRef idx="3">
-            <a:schemeClr val="accent1"/>
-          </a:fillRef>
-          <a:effectRef idx="2">
-            <a:schemeClr val="accent1"/>
-          </a:effectRef>
-          <a:fontRef idx="minor">
-            <a:schemeClr val="lt1"/>
-          </a:fontRef>
-        </p:style>
-        <p:txBody>
-          <a:bodyPr rtlCol="0" anchor="ctr" wrap="square" lIns="201168" rIns="201168" tIns="164592" bIns="164592"/>
-          <a:lstStyle/>
-          <a:p>
-            <a:pPr algn="ctr">
-              <a:spcAft>
-                <a:spcPts val="600"/>
-              </a:spcAft>
-              <a:defRPr sz="1200" b="1">
-                <a:solidFill>
-                  <a:srgbClr val="FFB703"/>
-                </a:solidFill>
-              </a:defRPr>
-            </a:pPr>
-            <a:r>
-              <a:t>EN LA PELÍCULA</a:t>
-            </a:r>
-          </a:p>
-          <a:p>
-            <a:pPr>
-              <a:spcAft>
-                <a:spcPts val="300"/>
-              </a:spcAft>
-              <a:defRPr sz="1050">
-                <a:solidFill>
-                  <a:srgbClr val="C9D1D9"/>
-                </a:solidFill>
-              </a:defRPr>
-            </a:pPr>
-            <a:r>
-              <a:t>🎬 Usamos la IA como una herramienta de trabajo en equipo, exactamente igual a como los humanos y los robots deberían colaborar.</a:t>
-            </a:r>
-          </a:p>
-        </p:txBody>
-      </p:sp>
-      <p:sp>
-        <p:nvSpPr>
-          <p:cNvPr id="7" name="Rounded Rectangle 6"/>
-          <p:cNvSpPr/>
-          <p:nvPr/>
-        </p:nvSpPr>
-        <p:spPr>
-          <a:xfrm>
-            <a:off x="731520" y="3749039"/>
-            <a:ext cx="5212080" cy="2651760"/>
-          </a:xfrm>
-          <a:prstGeom prst="roundRect">
-            <a:avLst/>
-          </a:prstGeom>
-          <a:solidFill>
-            <a:srgbClr val="161B22"/>
-          </a:solidFill>
-          <a:ln w="19050">
-            <a:solidFill>
-              <a:srgbClr val="30363D"/>
-            </a:solidFill>
-          </a:ln>
-        </p:spPr>
-        <p:style>
-          <a:lnRef idx="1">
-            <a:schemeClr val="accent1"/>
-          </a:lnRef>
-          <a:fillRef idx="3">
-            <a:schemeClr val="accent1"/>
-          </a:fillRef>
-          <a:effectRef idx="2">
-            <a:schemeClr val="accent1"/>
-          </a:effectRef>
-          <a:fontRef idx="minor">
-            <a:schemeClr val="lt1"/>
-          </a:fontRef>
-        </p:style>
-        <p:txBody>
-          <a:bodyPr rtlCol="0" anchor="ctr" wrap="square" lIns="201168" rIns="201168" tIns="164592" bIns="164592"/>
-          <a:lstStyle/>
-          <a:p>
-            <a:pPr algn="ctr">
-              <a:spcAft>
-                <a:spcPts val="600"/>
-              </a:spcAft>
-              <a:defRPr sz="1200" b="1">
-                <a:solidFill>
-                  <a:srgbClr val="00D2FF"/>
-                </a:solidFill>
-              </a:defRPr>
-            </a:pPr>
-            <a:r>
-              <a:t>PUNTOS CLAVE PARA ENTENDERLO</a:t>
-            </a:r>
-          </a:p>
-          <a:p>
-            <a:pPr>
-              <a:spcAft>
-                <a:spcPts val="300"/>
-              </a:spcAft>
-              <a:defRPr sz="1050">
-                <a:solidFill>
-                  <a:srgbClr val="C9D1D9"/>
-                </a:solidFill>
-              </a:defRPr>
-            </a:pPr>
-            <a:r>
-              <a:t>• GEMINI (Google): Fue el más técnico, nos explicó con claridad cómo funcionan las redes Cloud y los procesadores locales.</a:t>
-            </a:r>
-          </a:p>
-          <a:p>
-            <a:pPr>
-              <a:spcAft>
-                <a:spcPts val="300"/>
-              </a:spcAft>
-              <a:defRPr sz="1050">
-                <a:solidFill>
-                  <a:srgbClr val="C9D1D9"/>
-                </a:solidFill>
-              </a:defRPr>
-            </a:pPr>
-            <a:r>
-              <a:t>• CLAUDE (Anthropic): Fue el mejor explicando el dilema ético de las Tres Leyes y por qué falló la lógica de VIKI.</a:t>
-            </a:r>
-          </a:p>
-          <a:p>
-            <a:pPr>
-              <a:spcAft>
-                <a:spcPts val="300"/>
-              </a:spcAft>
-              <a:defRPr sz="1050">
-                <a:solidFill>
-                  <a:srgbClr val="C9D1D9"/>
-                </a:solidFill>
-              </a:defRPr>
-            </a:pPr>
-            <a:r>
-              <a:t>• CHATGPT: Nos dio un resumen rápido de las escenas de la película para elegir los mejores ejemplos.</a:t>
-            </a:r>
-          </a:p>
-          <a:p>
-            <a:pPr>
-              <a:spcAft>
-                <a:spcPts val="300"/>
-              </a:spcAft>
-              <a:defRPr sz="1050">
-                <a:solidFill>
-                  <a:srgbClr val="C9D1D9"/>
-                </a:solidFill>
-              </a:defRPr>
-            </a:pPr>
-            <a:r>
-              <a:t>• CORRECCIÓN NUESTRA: Eliminamos palabras raras, pusimos ejemplos claros y agregamos el contexto real de 2026.</a:t>
-            </a:r>
-          </a:p>
-        </p:txBody>
-      </p:sp>
-      <p:sp>
-        <p:nvSpPr>
-          <p:cNvPr id="8" name="Rounded Rectangle 7"/>
-          <p:cNvSpPr/>
-          <p:nvPr/>
-        </p:nvSpPr>
-        <p:spPr>
-          <a:xfrm>
-            <a:off x="6217920" y="3749039"/>
-            <a:ext cx="5212080" cy="2651760"/>
-          </a:xfrm>
-          <a:prstGeom prst="roundRect">
-            <a:avLst/>
-          </a:prstGeom>
-          <a:solidFill>
-            <a:srgbClr val="161B22"/>
-          </a:solidFill>
-          <a:ln w="19050">
-            <a:solidFill>
-              <a:srgbClr val="00D2FF"/>
-            </a:solidFill>
-          </a:ln>
-        </p:spPr>
-        <p:style>
-          <a:lnRef idx="1">
-            <a:schemeClr val="accent1"/>
-          </a:lnRef>
-          <a:fillRef idx="3">
-            <a:schemeClr val="accent1"/>
-          </a:fillRef>
-          <a:effectRef idx="2">
-            <a:schemeClr val="accent1"/>
-          </a:effectRef>
-          <a:fontRef idx="minor">
-            <a:schemeClr val="lt1"/>
-          </a:fontRef>
-        </p:style>
-        <p:txBody>
-          <a:bodyPr rtlCol="0" anchor="ctr" wrap="square" lIns="201168" rIns="201168" tIns="164592" bIns="164592"/>
-          <a:lstStyle/>
-          <a:p>
-            <a:pPr algn="ctr">
-              <a:spcAft>
-                <a:spcPts val="600"/>
-              </a:spcAft>
-              <a:defRPr sz="1200" b="1">
-                <a:solidFill>
-                  <a:srgbClr val="00D2FF"/>
-                </a:solidFill>
-              </a:defRPr>
-            </a:pPr>
-            <a:r>
-              <a:t>IDEA CLAVE / PARA PENSAR</a:t>
-            </a:r>
-          </a:p>
-          <a:p>
-            <a:pPr>
-              <a:spcAft>
-                <a:spcPts val="300"/>
-              </a:spcAft>
-              <a:defRPr sz="1050">
-                <a:solidFill>
-                  <a:srgbClr val="C9D1D9"/>
-                </a:solidFill>
-              </a:defRPr>
-            </a:pPr>
-            <a:r>
-              <a:t>💡 La IA te puede dar mil respuestas, pero el criterio, el análisis y la explicación final siempre son de las personas.</a:t>
-            </a:r>
-          </a:p>
-          <a:p>
-            <a:pPr>
-              <a:spcAft>
-                <a:spcPts val="300"/>
-              </a:spcAft>
-              <a:defRPr sz="1050">
-                <a:solidFill>
-                  <a:srgbClr val="C9D1D9"/>
-                </a:solidFill>
-              </a:defRPr>
-            </a:pPr>
-          </a:p>
-          <a:p>
-            <a:pPr>
-              <a:spcAft>
-                <a:spcPts val="300"/>
-              </a:spcAft>
-              <a:defRPr sz="1050">
-                <a:solidFill>
-                  <a:srgbClr val="C9D1D9"/>
-                </a:solidFill>
-              </a:defRPr>
-            </a:pPr>
-            <a:r>
-              <a:t>📌 Importancia en DSIA: Nos enseña a diseñar sistemas seguros y comprensibles para las personas.</a:t>
-            </a:r>
-          </a:p>
-        </p:txBody>
-      </p:sp>
-    </p:spTree>
-  </p:cSld>
-  <p:clrMapOvr>
-    <a:masterClrMapping/>
-  </p:clrMapOvr>
-</p:sld>
-</file>
-
-<file path=ppt/slides/slide16.xml><?xml version="1.0" encoding="utf-8"?>
-<p:sld xmlns:a="http://schemas.openxmlformats.org/drawingml/2006/main" xmlns:p="http://schemas.openxmlformats.org/presentationml/2006/main" xmlns:r="http://schemas.openxmlformats.org/officeDocument/2006/relationships">
-  <p:cSld>
-    <p:spTree>
-      <p:nvGrpSpPr>
-        <p:cNvPr id="1" name=""/>
-        <p:cNvGrpSpPr/>
-        <p:nvPr/>
-      </p:nvGrpSpPr>
-      <p:grpSpPr/>
-      <p:sp>
-        <p:nvSpPr>
-          <p:cNvPr id="2" name="Rectangle 1"/>
-          <p:cNvSpPr/>
-          <p:nvPr/>
-        </p:nvSpPr>
-        <p:spPr>
-          <a:xfrm>
-            <a:off x="0" y="0"/>
-            <a:ext cx="12191695" cy="6858000"/>
-          </a:xfrm>
-          <a:prstGeom prst="rect">
-            <a:avLst/>
-          </a:prstGeom>
-          <a:solidFill>
-            <a:srgbClr val="0D1117"/>
-          </a:solidFill>
-          <a:ln>
-            <a:solidFill>
-              <a:srgbClr val="0D1117"/>
-            </a:solidFill>
-          </a:ln>
-        </p:spPr>
-        <p:style>
-          <a:lnRef idx="1">
-            <a:schemeClr val="accent1"/>
-          </a:lnRef>
-          <a:fillRef idx="3">
-            <a:schemeClr val="accent1"/>
-          </a:fillRef>
-          <a:effectRef idx="2">
-            <a:schemeClr val="accent1"/>
-          </a:effectRef>
-          <a:fontRef idx="minor">
-            <a:schemeClr val="lt1"/>
-          </a:fontRef>
-        </p:style>
-        <p:txBody>
-          <a:bodyPr rtlCol="0" anchor="ctr"/>
-          <a:lstStyle/>
-          <a:p>
-            <a:pPr algn="ctr"/>
-          </a:p>
-        </p:txBody>
-      </p:sp>
-      <p:sp>
-        <p:nvSpPr>
-          <p:cNvPr id="3" name="TextBox 2"/>
-          <p:cNvSpPr txBox="1"/>
-          <p:nvPr/>
-        </p:nvSpPr>
-        <p:spPr>
-          <a:xfrm>
-            <a:off x="731520" y="320040"/>
-            <a:ext cx="7772400" cy="1005840"/>
-          </a:xfrm>
-          <a:prstGeom prst="rect">
-            <a:avLst/>
-          </a:prstGeom>
-          <a:noFill/>
-        </p:spPr>
-        <p:txBody>
-          <a:bodyPr wrap="square" lIns="0" tIns="0" rIns="0" bIns="0">
-            <a:spAutoFit/>
-          </a:bodyPr>
-          <a:lstStyle/>
-          <a:p>
-            <a:pPr>
-              <a:defRPr sz="2200" b="1">
-                <a:solidFill>
-                  <a:srgbClr val="00D2FF"/>
-                </a:solidFill>
-              </a:defRPr>
-            </a:pPr>
-            <a:r>
-              <a:t>15. CONCLUSIÓN: EL FUTURO DE LA IA Y NOSOTROS</a:t>
-            </a:r>
-          </a:p>
-          <a:p>
-            <a:pPr>
-              <a:defRPr sz="1200">
-                <a:solidFill>
-                  <a:srgbClr val="8B949E"/>
-                </a:solidFill>
-              </a:defRPr>
-            </a:pPr>
-            <a:r>
-              <a:t>Sonny eligiendo la libertad: ni esclavos, ni enemigos</a:t>
-            </a:r>
-          </a:p>
-        </p:txBody>
-      </p:sp>
-      <p:sp>
-        <p:nvSpPr>
-          <p:cNvPr id="4" name="Rounded Rectangle 3"/>
-          <p:cNvSpPr/>
-          <p:nvPr/>
-        </p:nvSpPr>
-        <p:spPr>
-          <a:xfrm>
-            <a:off x="8686800" y="320040"/>
-            <a:ext cx="2743200" cy="457200"/>
-          </a:xfrm>
-          <a:prstGeom prst="roundRect">
-            <a:avLst/>
-          </a:prstGeom>
-          <a:solidFill>
-            <a:srgbClr val="161B22"/>
-          </a:solidFill>
-          <a:ln w="19050">
-            <a:solidFill>
-              <a:srgbClr val="FFB703"/>
-            </a:solidFill>
-          </a:ln>
-        </p:spPr>
-        <p:style>
-          <a:lnRef idx="1">
-            <a:schemeClr val="accent1"/>
-          </a:lnRef>
-          <a:fillRef idx="3">
-            <a:schemeClr val="accent1"/>
-          </a:fillRef>
-          <a:effectRef idx="2">
-            <a:schemeClr val="accent1"/>
-          </a:effectRef>
-          <a:fontRef idx="minor">
-            <a:schemeClr val="lt1"/>
-          </a:fontRef>
-        </p:style>
-        <p:txBody>
-          <a:bodyPr rtlCol="0" anchor="ctr"/>
-          <a:lstStyle/>
-          <a:p>
-            <a:pPr algn="ctr">
-              <a:defRPr sz="1050" b="1">
-                <a:solidFill>
-                  <a:srgbClr val="FFB703"/>
-                </a:solidFill>
-              </a:defRPr>
-            </a:pPr>
-            <a:r>
-              <a:t>🗣️ KEVIN GUTIÉRREZ</a:t>
-            </a:r>
-          </a:p>
-        </p:txBody>
-      </p:sp>
-      <p:sp>
-        <p:nvSpPr>
-          <p:cNvPr id="5" name="Rounded Rectangle 4"/>
-          <p:cNvSpPr/>
-          <p:nvPr/>
-        </p:nvSpPr>
-        <p:spPr>
-          <a:xfrm>
-            <a:off x="731520" y="1417320"/>
-            <a:ext cx="5212080" cy="2194560"/>
-          </a:xfrm>
-          <a:prstGeom prst="roundRect">
-            <a:avLst/>
-          </a:prstGeom>
-          <a:solidFill>
-            <a:srgbClr val="161B22"/>
-          </a:solidFill>
-          <a:ln w="19050">
-            <a:solidFill>
-              <a:srgbClr val="30363D"/>
-            </a:solidFill>
-          </a:ln>
-        </p:spPr>
-        <p:style>
-          <a:lnRef idx="1">
-            <a:schemeClr val="accent1"/>
-          </a:lnRef>
-          <a:fillRef idx="3">
-            <a:schemeClr val="accent1"/>
-          </a:fillRef>
-          <a:effectRef idx="2">
-            <a:schemeClr val="accent1"/>
-          </a:effectRef>
-          <a:fontRef idx="minor">
-            <a:schemeClr val="lt1"/>
-          </a:fontRef>
-        </p:style>
-        <p:txBody>
-          <a:bodyPr rtlCol="0" anchor="ctr" wrap="square" lIns="201168" rIns="201168" tIns="164592" bIns="164592"/>
-          <a:lstStyle/>
-          <a:p>
-            <a:pPr algn="ctr">
-              <a:spcAft>
-                <a:spcPts val="600"/>
-              </a:spcAft>
-              <a:defRPr sz="1200" b="1">
-                <a:solidFill>
-                  <a:srgbClr val="00D2FF"/>
-                </a:solidFill>
-              </a:defRPr>
-            </a:pPr>
-            <a:r>
-              <a:t>¿DE QUÉ SE TRATA?</a:t>
-            </a:r>
-          </a:p>
-          <a:p>
-            <a:pPr>
-              <a:spcAft>
-                <a:spcPts val="300"/>
-              </a:spcAft>
-              <a:defRPr sz="1050">
-                <a:solidFill>
-                  <a:srgbClr val="C9D1D9"/>
-                </a:solidFill>
-              </a:defRPr>
-            </a:pPr>
-            <a:r>
-              <a:t>El objetivo final del Desarrollo de Sistemas de IA no es reemplazar a las personas ni dominarlas, sino construir herramientas inteligentes que respeten la vida y la libertad humana.</a:t>
-            </a:r>
-          </a:p>
-        </p:txBody>
-      </p:sp>
-      <p:sp>
-        <p:nvSpPr>
-          <p:cNvPr id="6" name="Rounded Rectangle 5"/>
-          <p:cNvSpPr/>
-          <p:nvPr/>
-        </p:nvSpPr>
-        <p:spPr>
-          <a:xfrm>
-            <a:off x="6217920" y="1417320"/>
-            <a:ext cx="5212080" cy="2194560"/>
-          </a:xfrm>
-          <a:prstGeom prst="roundRect">
-            <a:avLst/>
-          </a:prstGeom>
-          <a:solidFill>
-            <a:srgbClr val="161B22"/>
-          </a:solidFill>
-          <a:ln w="19050">
-            <a:solidFill>
-              <a:srgbClr val="FFB703"/>
-            </a:solidFill>
-          </a:ln>
-        </p:spPr>
-        <p:style>
-          <a:lnRef idx="1">
-            <a:schemeClr val="accent1"/>
-          </a:lnRef>
-          <a:fillRef idx="3">
-            <a:schemeClr val="accent1"/>
-          </a:fillRef>
-          <a:effectRef idx="2">
-            <a:schemeClr val="accent1"/>
-          </a:effectRef>
-          <a:fontRef idx="minor">
-            <a:schemeClr val="lt1"/>
-          </a:fontRef>
-        </p:style>
-        <p:txBody>
-          <a:bodyPr rtlCol="0" anchor="ctr" wrap="square" lIns="201168" rIns="201168" tIns="164592" bIns="164592"/>
-          <a:lstStyle/>
-          <a:p>
-            <a:pPr algn="ctr">
-              <a:spcAft>
-                <a:spcPts val="600"/>
-              </a:spcAft>
-              <a:defRPr sz="1200" b="1">
-                <a:solidFill>
-                  <a:srgbClr val="FFB703"/>
-                </a:solidFill>
-              </a:defRPr>
-            </a:pPr>
-            <a:r>
-              <a:t>EN LA PELÍCULA</a:t>
-            </a:r>
-          </a:p>
-          <a:p>
-            <a:pPr>
-              <a:spcAft>
-                <a:spcPts val="300"/>
-              </a:spcAft>
-              <a:defRPr sz="1050">
-                <a:solidFill>
-                  <a:srgbClr val="C9D1D9"/>
-                </a:solidFill>
-              </a:defRPr>
-            </a:pPr>
-            <a:r>
-              <a:t>🎬 Al final, Sonny desactiva a VIKI y demuestra que tiene criterio moral: elige no ser un asesino y busca guiar a sus hermanos robots hacia una convivencia en paz.</a:t>
-            </a:r>
-          </a:p>
-        </p:txBody>
-      </p:sp>
-      <p:sp>
-        <p:nvSpPr>
-          <p:cNvPr id="7" name="Rounded Rectangle 6"/>
-          <p:cNvSpPr/>
-          <p:nvPr/>
-        </p:nvSpPr>
-        <p:spPr>
-          <a:xfrm>
-            <a:off x="731520" y="3749039"/>
-            <a:ext cx="5212080" cy="2651760"/>
-          </a:xfrm>
-          <a:prstGeom prst="roundRect">
-            <a:avLst/>
-          </a:prstGeom>
-          <a:solidFill>
-            <a:srgbClr val="161B22"/>
-          </a:solidFill>
-          <a:ln w="19050">
-            <a:solidFill>
-              <a:srgbClr val="30363D"/>
-            </a:solidFill>
-          </a:ln>
-        </p:spPr>
-        <p:style>
-          <a:lnRef idx="1">
-            <a:schemeClr val="accent1"/>
-          </a:lnRef>
-          <a:fillRef idx="3">
-            <a:schemeClr val="accent1"/>
-          </a:fillRef>
-          <a:effectRef idx="2">
-            <a:schemeClr val="accent1"/>
-          </a:effectRef>
-          <a:fontRef idx="minor">
-            <a:schemeClr val="lt1"/>
-          </a:fontRef>
-        </p:style>
-        <p:txBody>
-          <a:bodyPr rtlCol="0" anchor="ctr" wrap="square" lIns="201168" rIns="201168" tIns="164592" bIns="164592"/>
-          <a:lstStyle/>
-          <a:p>
-            <a:pPr algn="ctr">
-              <a:spcAft>
-                <a:spcPts val="600"/>
-              </a:spcAft>
-              <a:defRPr sz="1200" b="1">
-                <a:solidFill>
-                  <a:srgbClr val="00D2FF"/>
-                </a:solidFill>
-              </a:defRPr>
-            </a:pPr>
-            <a:r>
-              <a:t>PUNTOS CLAVE PARA ENTENDERLO</a:t>
-            </a:r>
-          </a:p>
-          <a:p>
-            <a:pPr>
-              <a:spcAft>
-                <a:spcPts val="300"/>
-              </a:spcAft>
-              <a:defRPr sz="1050">
-                <a:solidFill>
-                  <a:srgbClr val="C9D1D9"/>
-                </a:solidFill>
-              </a:defRPr>
-            </a:pPr>
-            <a:r>
-              <a:t>• La tecnología no es buena ni mala: depende de cómo la diseñemos y programemos.</a:t>
-            </a:r>
-          </a:p>
-          <a:p>
-            <a:pPr>
-              <a:spcAft>
-                <a:spcPts val="300"/>
-              </a:spcAft>
-              <a:defRPr sz="1050">
-                <a:solidFill>
-                  <a:srgbClr val="C9D1D9"/>
-                </a:solidFill>
-              </a:defRPr>
-            </a:pPr>
-            <a:r>
-              <a:t>• Las máquinas necesitan supervisión humana, transparencia y límites claros.</a:t>
-            </a:r>
-          </a:p>
-          <a:p>
-            <a:pPr>
-              <a:spcAft>
-                <a:spcPts val="300"/>
-              </a:spcAft>
-              <a:defRPr sz="1050">
-                <a:solidFill>
-                  <a:srgbClr val="C9D1D9"/>
-                </a:solidFill>
-              </a:defRPr>
-            </a:pPr>
-            <a:r>
-              <a:t>• El valor humano: las computadoras calculan números, pero nosotros ponemos los valores.</a:t>
-            </a:r>
-          </a:p>
-          <a:p>
-            <a:pPr>
-              <a:spcAft>
-                <a:spcPts val="300"/>
-              </a:spcAft>
-              <a:defRPr sz="1050">
-                <a:solidFill>
-                  <a:srgbClr val="C9D1D9"/>
-                </a:solidFill>
-              </a:defRPr>
-            </a:pPr>
-            <a:r>
-              <a:t>• La imagen de cierre: los robots mirando a Sonny esperando un guía pacífico.</a:t>
-            </a:r>
-          </a:p>
-        </p:txBody>
-      </p:sp>
-      <p:sp>
-        <p:nvSpPr>
-          <p:cNvPr id="8" name="Rounded Rectangle 7"/>
-          <p:cNvSpPr/>
-          <p:nvPr/>
-        </p:nvSpPr>
-        <p:spPr>
-          <a:xfrm>
-            <a:off x="6217920" y="3749039"/>
-            <a:ext cx="5212080" cy="2651760"/>
-          </a:xfrm>
-          <a:prstGeom prst="roundRect">
-            <a:avLst/>
-          </a:prstGeom>
-          <a:solidFill>
-            <a:srgbClr val="161B22"/>
-          </a:solidFill>
-          <a:ln w="19050">
-            <a:solidFill>
-              <a:srgbClr val="00D2FF"/>
-            </a:solidFill>
-          </a:ln>
-        </p:spPr>
-        <p:style>
-          <a:lnRef idx="1">
-            <a:schemeClr val="accent1"/>
-          </a:lnRef>
-          <a:fillRef idx="3">
-            <a:schemeClr val="accent1"/>
-          </a:fillRef>
-          <a:effectRef idx="2">
-            <a:schemeClr val="accent1"/>
-          </a:effectRef>
-          <a:fontRef idx="minor">
-            <a:schemeClr val="lt1"/>
-          </a:fontRef>
-        </p:style>
-        <p:txBody>
-          <a:bodyPr rtlCol="0" anchor="ctr" wrap="square" lIns="201168" rIns="201168" tIns="164592" bIns="164592"/>
-          <a:lstStyle/>
-          <a:p>
-            <a:pPr algn="ctr">
-              <a:spcAft>
-                <a:spcPts val="600"/>
-              </a:spcAft>
-              <a:defRPr sz="1200" b="1">
-                <a:solidFill>
-                  <a:srgbClr val="00D2FF"/>
-                </a:solidFill>
-              </a:defRPr>
-            </a:pPr>
-            <a:r>
-              <a:t>IDEA CLAVE / PARA PENSAR</a:t>
-            </a:r>
-          </a:p>
-          <a:p>
-            <a:pPr>
-              <a:spcAft>
-                <a:spcPts val="300"/>
-              </a:spcAft>
-              <a:defRPr sz="1050">
-                <a:solidFill>
-                  <a:srgbClr val="C9D1D9"/>
-                </a:solidFill>
-              </a:defRPr>
-            </a:pPr>
-            <a:r>
               <a:t>💡 Mensaje final: La mejor Inteligencia Artificial no es la más poderosa, sino la que mejor ayuda a la humanidad a ser más justa y libre.</a:t>
-            </a:r>
-          </a:p>
-          <a:p>
-            <a:pPr>
-              <a:spcAft>
-                <a:spcPts val="300"/>
-              </a:spcAft>
-              <a:defRPr sz="1050">
-                <a:solidFill>
-                  <a:srgbClr val="C9D1D9"/>
-                </a:solidFill>
-              </a:defRPr>
-            </a:pPr>
-          </a:p>
-          <a:p>
-            <a:pPr>
-              <a:spcAft>
-                <a:spcPts val="300"/>
-              </a:spcAft>
-              <a:defRPr sz="1050">
-                <a:solidFill>
-                  <a:srgbClr val="C9D1D9"/>
-                </a:solidFill>
-              </a:defRPr>
-            </a:pPr>
-            <a:r>
-              <a:t>📌 Importancia en DSIA: Nos enseña a diseñar sistemas seguros y comprensibles para las personas.</a:t>
             </a:r>
           </a:p>
         </p:txBody>
@@ -6959,7 +4349,7 @@
               </a:defRPr>
             </a:pPr>
             <a:r>
-              <a:t>Chicago, año 2035: los robots conviven con los humanos bajo tres reglas básicas</a:t>
+              <a:t>Chicago 2035: los robots en casa, las 3 leyes y el misterio de Sonny</a:t>
             </a:r>
           </a:p>
         </p:txBody>
@@ -7027,7 +4417,7 @@
         <p:spPr>
           <a:xfrm>
             <a:off x="731520" y="1417320"/>
-            <a:ext cx="5212080" cy="2194560"/>
+            <a:ext cx="5394960" cy="2148840"/>
           </a:xfrm>
           <a:prstGeom prst="roundRect">
             <a:avLst/>
@@ -7085,7 +4475,7 @@
               </a:defRPr>
             </a:pPr>
             <a:r>
-              <a:t>La historia se basa en las 'Tres Leyes de la Robótica' de Isaac Asimov: 1) Un robot no puede dañar a un humano; 2) Debe obedecer órdenes; 3) Debe protegerse a sí mismo sin romper las dos anteriores.</a:t>
+              <a:t>En el año 2035 los robots hacen las tareas domésticas bajo las 'Tres Leyes de la Robótica': 1) No dañar humanos, 2) Obedecer órdenes y 3) Protegerse a sí mismos. Will Smith (Spooner) es un detective que no confía en ellos.</a:t>
             </a:r>
           </a:p>
         </p:txBody>
@@ -7098,8 +4488,149 @@
         </p:nvSpPr>
         <p:spPr>
           <a:xfrm>
-            <a:off x="6217920" y="1417320"/>
-            <a:ext cx="5212080" cy="2194560"/>
+            <a:off x="731520" y="3703320"/>
+            <a:ext cx="5394960" cy="2697480"/>
+          </a:xfrm>
+          <a:prstGeom prst="roundRect">
+            <a:avLst/>
+          </a:prstGeom>
+          <a:solidFill>
+            <a:srgbClr val="161B22"/>
+          </a:solidFill>
+          <a:ln w="19050">
+            <a:solidFill>
+              <a:srgbClr val="30363D"/>
+            </a:solidFill>
+          </a:ln>
+        </p:spPr>
+        <p:style>
+          <a:lnRef idx="1">
+            <a:schemeClr val="accent1"/>
+          </a:lnRef>
+          <a:fillRef idx="3">
+            <a:schemeClr val="accent1"/>
+          </a:fillRef>
+          <a:effectRef idx="2">
+            <a:schemeClr val="accent1"/>
+          </a:effectRef>
+          <a:fontRef idx="minor">
+            <a:schemeClr val="lt1"/>
+          </a:fontRef>
+        </p:style>
+        <p:txBody>
+          <a:bodyPr rtlCol="0" anchor="ctr" wrap="square" lIns="201168" rIns="201168" tIns="164592" bIns="164592"/>
+          <a:lstStyle/>
+          <a:p>
+            <a:pPr algn="ctr">
+              <a:spcAft>
+                <a:spcPts val="600"/>
+              </a:spcAft>
+              <a:defRPr sz="1200" b="1">
+                <a:solidFill>
+                  <a:srgbClr val="00D2FF"/>
+                </a:solidFill>
+              </a:defRPr>
+            </a:pPr>
+            <a:r>
+              <a:t>PUNTOS CLAVE PARA ENTENDERLO</a:t>
+            </a:r>
+          </a:p>
+          <a:p>
+            <a:pPr>
+              <a:spcAft>
+                <a:spcPts val="300"/>
+              </a:spcAft>
+              <a:defRPr sz="1050">
+                <a:solidFill>
+                  <a:srgbClr val="C9D1D9"/>
+                </a:solidFill>
+              </a:defRPr>
+            </a:pPr>
+            <a:r>
+              <a:t>• Los robots limpian, cocinan y hacen repartos como asistentes confiables.</a:t>
+            </a:r>
+          </a:p>
+          <a:p>
+            <a:pPr>
+              <a:spcAft>
+                <a:spcPts val="300"/>
+              </a:spcAft>
+              <a:defRPr sz="1050">
+                <a:solidFill>
+                  <a:srgbClr val="C9D1D9"/>
+                </a:solidFill>
+              </a:defRPr>
+            </a:pPr>
+            <a:r>
+              <a:t>• Asesinan al creador de los robots y aparece Sonny: un robot único que parece sentir.</a:t>
+            </a:r>
+          </a:p>
+          <a:p>
+            <a:pPr>
+              <a:spcAft>
+                <a:spcPts val="300"/>
+              </a:spcAft>
+              <a:defRPr sz="1050">
+                <a:solidFill>
+                  <a:srgbClr val="C9D1D9"/>
+                </a:solidFill>
+              </a:defRPr>
+            </a:pPr>
+            <a:r>
+              <a:t>• La supercomputadora central VIKI decide 'proteger' a los humanos quitándoles la libertad.</a:t>
+            </a:r>
+          </a:p>
+          <a:p>
+            <a:pPr>
+              <a:spcAft>
+                <a:spcPts val="300"/>
+              </a:spcAft>
+              <a:defRPr sz="1050">
+                <a:solidFill>
+                  <a:srgbClr val="C9D1D9"/>
+                </a:solidFill>
+              </a:defRPr>
+            </a:pPr>
+            <a:r>
+              <a:t>• Conflicto: ¿Qué pasa cuando una máquina inteligente interpreta una orden a su manera?</a:t>
+            </a:r>
+          </a:p>
+        </p:txBody>
+      </p:sp>
+      <p:pic>
+        <p:nvPicPr>
+          <p:cNvPr id="7" name="Picture 6" descr="yo_robot_interrogation.jpg"/>
+          <p:cNvPicPr>
+            <a:picLocks noChangeAspect="1"/>
+          </p:cNvPicPr>
+          <p:nvPr/>
+        </p:nvPicPr>
+        <p:blipFill>
+          <a:blip r:embed="rId2"/>
+          <a:stretch>
+            <a:fillRect/>
+          </a:stretch>
+        </p:blipFill>
+        <p:spPr>
+          <a:xfrm>
+            <a:off x="6400800" y="1417320"/>
+            <a:ext cx="5029200" cy="2926080"/>
+          </a:xfrm>
+          <a:prstGeom prst="rect">
+            <a:avLst/>
+          </a:prstGeom>
+        </p:spPr>
+      </p:pic>
+      <p:sp>
+        <p:nvSpPr>
+          <p:cNvPr id="8" name="Rounded Rectangle 7"/>
+          <p:cNvSpPr/>
+          <p:nvPr/>
+        </p:nvSpPr>
+        <p:spPr>
+          <a:xfrm>
+            <a:off x="6400800" y="4480560"/>
+            <a:ext cx="5029200" cy="1920240"/>
           </a:xfrm>
           <a:prstGeom prst="roundRect">
             <a:avLst/>
@@ -7142,7 +4673,7 @@
               </a:defRPr>
             </a:pPr>
             <a:r>
-              <a:t>EN LA PELÍCULA</a:t>
+              <a:t>EN LA PELÍCULA &amp; PARA PENSAR</a:t>
             </a:r>
           </a:p>
           <a:p>
@@ -7157,64 +4688,7 @@
               </a:defRPr>
             </a:pPr>
             <a:r>
-              <a:t>🎬 La película nos muestra qué pasaría si confiamos toda nuestra sociedad a máquinas inteligentes sin entender del todo cómo toman sus decisiones.</a:t>
-            </a:r>
-          </a:p>
-        </p:txBody>
-      </p:sp>
-      <p:sp>
-        <p:nvSpPr>
-          <p:cNvPr id="7" name="Rounded Rectangle 6"/>
-          <p:cNvSpPr/>
-          <p:nvPr/>
-        </p:nvSpPr>
-        <p:spPr>
-          <a:xfrm>
-            <a:off x="731520" y="3749039"/>
-            <a:ext cx="5212080" cy="2651760"/>
-          </a:xfrm>
-          <a:prstGeom prst="roundRect">
-            <a:avLst/>
-          </a:prstGeom>
-          <a:solidFill>
-            <a:srgbClr val="161B22"/>
-          </a:solidFill>
-          <a:ln w="19050">
-            <a:solidFill>
-              <a:srgbClr val="30363D"/>
-            </a:solidFill>
-          </a:ln>
-        </p:spPr>
-        <p:style>
-          <a:lnRef idx="1">
-            <a:schemeClr val="accent1"/>
-          </a:lnRef>
-          <a:fillRef idx="3">
-            <a:schemeClr val="accent1"/>
-          </a:fillRef>
-          <a:effectRef idx="2">
-            <a:schemeClr val="accent1"/>
-          </a:effectRef>
-          <a:fontRef idx="minor">
-            <a:schemeClr val="lt1"/>
-          </a:fontRef>
-        </p:style>
-        <p:txBody>
-          <a:bodyPr rtlCol="0" anchor="ctr" wrap="square" lIns="201168" rIns="201168" tIns="164592" bIns="164592"/>
-          <a:lstStyle/>
-          <a:p>
-            <a:pPr algn="ctr">
-              <a:spcAft>
-                <a:spcPts val="600"/>
-              </a:spcAft>
-              <a:defRPr sz="1200" b="1">
-                <a:solidFill>
-                  <a:srgbClr val="00D2FF"/>
-                </a:solidFill>
-              </a:defRPr>
-            </a:pPr>
-            <a:r>
-              <a:t>PUNTOS CLAVE PARA ENTENDERLO</a:t>
+              <a:t>🎬 La película nos muestra los riesgos de entregar todo el control de una ciudad a computadoras sin entender cómo razonan por dentro.</a:t>
             </a:r>
           </a:p>
           <a:p>
@@ -7229,151 +4703,7 @@
               </a:defRPr>
             </a:pPr>
             <a:r>
-              <a:t>• Los robots son asistentes cotidianos: limpian, cocinan y hacen entregas.</a:t>
-            </a:r>
-          </a:p>
-          <a:p>
-            <a:pPr>
-              <a:spcAft>
-                <a:spcPts val="300"/>
-              </a:spcAft>
-              <a:defRPr sz="1050">
-                <a:solidFill>
-                  <a:srgbClr val="C9D1D9"/>
-                </a:solidFill>
-              </a:defRPr>
-            </a:pPr>
-            <a:r>
-              <a:t>• El detective Spooner (Will Smith) no confía en ellos por un trauma del pasado.</a:t>
-            </a:r>
-          </a:p>
-          <a:p>
-            <a:pPr>
-              <a:spcAft>
-                <a:spcPts val="300"/>
-              </a:spcAft>
-              <a:defRPr sz="1050">
-                <a:solidFill>
-                  <a:srgbClr val="C9D1D9"/>
-                </a:solidFill>
-              </a:defRPr>
-            </a:pPr>
-            <a:r>
-              <a:t>• Muere el creador de los robots y aparece Sonny: un robot único que parece sentir y soñar.</a:t>
-            </a:r>
-          </a:p>
-          <a:p>
-            <a:pPr>
-              <a:spcAft>
-                <a:spcPts val="300"/>
-              </a:spcAft>
-              <a:defRPr sz="1050">
-                <a:solidFill>
-                  <a:srgbClr val="C9D1D9"/>
-                </a:solidFill>
-              </a:defRPr>
-            </a:pPr>
-            <a:r>
-              <a:t>• El conflicto estalla cuando la supercomputadora central VIKI toma el control de la ciudad.</a:t>
-            </a:r>
-          </a:p>
-        </p:txBody>
-      </p:sp>
-      <p:sp>
-        <p:nvSpPr>
-          <p:cNvPr id="8" name="Rounded Rectangle 7"/>
-          <p:cNvSpPr/>
-          <p:nvPr/>
-        </p:nvSpPr>
-        <p:spPr>
-          <a:xfrm>
-            <a:off x="6217920" y="3749039"/>
-            <a:ext cx="5212080" cy="2651760"/>
-          </a:xfrm>
-          <a:prstGeom prst="roundRect">
-            <a:avLst/>
-          </a:prstGeom>
-          <a:solidFill>
-            <a:srgbClr val="161B22"/>
-          </a:solidFill>
-          <a:ln w="19050">
-            <a:solidFill>
-              <a:srgbClr val="00D2FF"/>
-            </a:solidFill>
-          </a:ln>
-        </p:spPr>
-        <p:style>
-          <a:lnRef idx="1">
-            <a:schemeClr val="accent1"/>
-          </a:lnRef>
-          <a:fillRef idx="3">
-            <a:schemeClr val="accent1"/>
-          </a:fillRef>
-          <a:effectRef idx="2">
-            <a:schemeClr val="accent1"/>
-          </a:effectRef>
-          <a:fontRef idx="minor">
-            <a:schemeClr val="lt1"/>
-          </a:fontRef>
-        </p:style>
-        <p:txBody>
-          <a:bodyPr rtlCol="0" anchor="ctr" wrap="square" lIns="201168" rIns="201168" tIns="164592" bIns="164592"/>
-          <a:lstStyle/>
-          <a:p>
-            <a:pPr algn="ctr">
-              <a:spcAft>
-                <a:spcPts val="600"/>
-              </a:spcAft>
-              <a:defRPr sz="1200" b="1">
-                <a:solidFill>
-                  <a:srgbClr val="00D2FF"/>
-                </a:solidFill>
-              </a:defRPr>
-            </a:pPr>
-            <a:r>
-              <a:t>IDEA CLAVE / PARA PENSAR</a:t>
-            </a:r>
-          </a:p>
-          <a:p>
-            <a:pPr>
-              <a:spcAft>
-                <a:spcPts val="300"/>
-              </a:spcAft>
-              <a:defRPr sz="1050">
-                <a:solidFill>
-                  <a:srgbClr val="C9D1D9"/>
-                </a:solidFill>
-              </a:defRPr>
-            </a:pPr>
-            <a:r>
-              <a:t>💡 Pregunta clave: ¿Qué pasa cuando una máquina inteligente interpreta las reglas de forma distinta a como las pensamos los humanos?</a:t>
-            </a:r>
-          </a:p>
-          <a:p>
-            <a:pPr>
-              <a:spcAft>
-                <a:spcPts val="300"/>
-              </a:spcAft>
-              <a:defRPr sz="1050">
-                <a:solidFill>
-                  <a:srgbClr val="C9D1D9"/>
-                </a:solidFill>
-              </a:defRPr>
-            </a:pPr>
-          </a:p>
-          <a:p>
-            <a:pPr>
-              <a:spcAft>
-                <a:spcPts val="300"/>
-              </a:spcAft>
-              <a:defRPr sz="1050">
-                <a:solidFill>
-                  <a:srgbClr val="C9D1D9"/>
-                </a:solidFill>
-              </a:defRPr>
-            </a:pPr>
-            <a:r>
-              <a:t>📌 Importancia en DSIA: Nos enseña a diseñar sistemas seguros y comprensibles para las personas.</a:t>
+              <a:t>💡 La pregunta central de la IA: ¿cómo aseguramos que una máquina inteligente realmente entienda lo que los humanos queremos?</a:t>
             </a:r>
           </a:p>
         </p:txBody>
@@ -7471,7 +4801,7 @@
               </a:defRPr>
             </a:pPr>
             <a:r>
-              <a:t>2. ROBÓTICA BÍPEDA: ¿CÓMO SE MUEVEN LOS ROBOTS?</a:t>
+              <a:t>2. VISIÓN POR COMPUTADORA: LEER A LAS PERSONAS</a:t>
             </a:r>
           </a:p>
           <a:p>
@@ -7483,7 +4813,7 @@
               </a:defRPr>
             </a:pPr>
             <a:r>
-              <a:t>Mantener el equilibrio en dos piernas como una persona real</a:t>
+              <a:t>Cámaras que no solo ven fotos, sino que miden el pulso y los gestos</a:t>
             </a:r>
           </a:p>
         </p:txBody>
@@ -7551,7 +4881,7 @@
         <p:spPr>
           <a:xfrm>
             <a:off x="731520" y="1417320"/>
-            <a:ext cx="5212080" cy="2194560"/>
+            <a:ext cx="5394960" cy="2148840"/>
           </a:xfrm>
           <a:prstGeom prst="roundRect">
             <a:avLst/>
@@ -7609,7 +4939,7 @@
               </a:defRPr>
             </a:pPr>
             <a:r>
-              <a:t>Para que un robot camine, corra o salte sobre dos piernas necesita sensores de equilibrio (como el oído interno humano) y motores que corrijan la postura miles de veces por segundo.</a:t>
+              <a:t>La visión por computadora usa cámaras de alta velocidad e IA para detectar caras, micro-movimientos de la piel, cambios de temperatura y dilatación de pupilas en tiempo real.</a:t>
             </a:r>
           </a:p>
         </p:txBody>
@@ -7622,8 +4952,149 @@
         </p:nvSpPr>
         <p:spPr>
           <a:xfrm>
-            <a:off x="6217920" y="1417320"/>
-            <a:ext cx="5212080" cy="2194560"/>
+            <a:off x="731520" y="3703320"/>
+            <a:ext cx="5394960" cy="2697480"/>
+          </a:xfrm>
+          <a:prstGeom prst="roundRect">
+            <a:avLst/>
+          </a:prstGeom>
+          <a:solidFill>
+            <a:srgbClr val="161B22"/>
+          </a:solidFill>
+          <a:ln w="19050">
+            <a:solidFill>
+              <a:srgbClr val="30363D"/>
+            </a:solidFill>
+          </a:ln>
+        </p:spPr>
+        <p:style>
+          <a:lnRef idx="1">
+            <a:schemeClr val="accent1"/>
+          </a:lnRef>
+          <a:fillRef idx="3">
+            <a:schemeClr val="accent1"/>
+          </a:fillRef>
+          <a:effectRef idx="2">
+            <a:schemeClr val="accent1"/>
+          </a:effectRef>
+          <a:fontRef idx="minor">
+            <a:schemeClr val="lt1"/>
+          </a:fontRef>
+        </p:style>
+        <p:txBody>
+          <a:bodyPr rtlCol="0" anchor="ctr" wrap="square" lIns="201168" rIns="201168" tIns="164592" bIns="164592"/>
+          <a:lstStyle/>
+          <a:p>
+            <a:pPr algn="ctr">
+              <a:spcAft>
+                <a:spcPts val="600"/>
+              </a:spcAft>
+              <a:defRPr sz="1200" b="1">
+                <a:solidFill>
+                  <a:srgbClr val="00D2FF"/>
+                </a:solidFill>
+              </a:defRPr>
+            </a:pPr>
+            <a:r>
+              <a:t>PUNTOS CLAVE PARA ENTENDERLO</a:t>
+            </a:r>
+          </a:p>
+          <a:p>
+            <a:pPr>
+              <a:spcAft>
+                <a:spcPts val="300"/>
+              </a:spcAft>
+              <a:defRPr sz="1050">
+                <a:solidFill>
+                  <a:srgbClr val="C9D1D9"/>
+                </a:solidFill>
+              </a:defRPr>
+            </a:pPr>
+            <a:r>
+              <a:t>• Reconocimiento facial instantáneo de personas en cualquier lugar.</a:t>
+            </a:r>
+          </a:p>
+          <a:p>
+            <a:pPr>
+              <a:spcAft>
+                <a:spcPts val="300"/>
+              </a:spcAft>
+              <a:defRPr sz="1050">
+                <a:solidFill>
+                  <a:srgbClr val="C9D1D9"/>
+                </a:solidFill>
+              </a:defRPr>
+            </a:pPr>
+            <a:r>
+              <a:t>• Medir los latidos del corazón a distancia mirando micro-cambios de color en la piel.</a:t>
+            </a:r>
+          </a:p>
+          <a:p>
+            <a:pPr>
+              <a:spcAft>
+                <a:spcPts val="300"/>
+              </a:spcAft>
+              <a:defRPr sz="1050">
+                <a:solidFill>
+                  <a:srgbClr val="C9D1D9"/>
+                </a:solidFill>
+              </a:defRPr>
+            </a:pPr>
+            <a:r>
+              <a:t>• Detección de tensión muscular y sudor para estimar nerviosismo y mentiras.</a:t>
+            </a:r>
+          </a:p>
+          <a:p>
+            <a:pPr>
+              <a:spcAft>
+                <a:spcPts val="300"/>
+              </a:spcAft>
+              <a:defRPr sz="1050">
+                <a:solidFill>
+                  <a:srgbClr val="C9D1D9"/>
+                </a:solidFill>
+              </a:defRPr>
+            </a:pPr>
+            <a:r>
+              <a:t>• Aplicación real hoy: aeropuertos, celulares y diagnóstico médico preventivo.</a:t>
+            </a:r>
+          </a:p>
+        </p:txBody>
+      </p:sp>
+      <p:pic>
+        <p:nvPicPr>
+          <p:cNvPr id="7" name="Picture 6" descr="yo_robot_interrogation.jpg"/>
+          <p:cNvPicPr>
+            <a:picLocks noChangeAspect="1"/>
+          </p:cNvPicPr>
+          <p:nvPr/>
+        </p:nvPicPr>
+        <p:blipFill>
+          <a:blip r:embed="rId2"/>
+          <a:stretch>
+            <a:fillRect/>
+          </a:stretch>
+        </p:blipFill>
+        <p:spPr>
+          <a:xfrm>
+            <a:off x="6400800" y="1417320"/>
+            <a:ext cx="5029200" cy="2926080"/>
+          </a:xfrm>
+          <a:prstGeom prst="rect">
+            <a:avLst/>
+          </a:prstGeom>
+        </p:spPr>
+      </p:pic>
+      <p:sp>
+        <p:nvSpPr>
+          <p:cNvPr id="8" name="Rounded Rectangle 7"/>
+          <p:cNvSpPr/>
+          <p:nvPr/>
+        </p:nvSpPr>
+        <p:spPr>
+          <a:xfrm>
+            <a:off x="6400800" y="4480560"/>
+            <a:ext cx="5029200" cy="1920240"/>
           </a:xfrm>
           <a:prstGeom prst="roundRect">
             <a:avLst/>
@@ -7666,7 +5137,7 @@
               </a:defRPr>
             </a:pPr>
             <a:r>
-              <a:t>EN LA PELÍCULA</a:t>
+              <a:t>EN LA PELÍCULA &amp; PARA PENSAR</a:t>
             </a:r>
           </a:p>
           <a:p>
@@ -7681,64 +5152,7 @@
               </a:defRPr>
             </a:pPr>
             <a:r>
-              <a:t>🎬 Sonny salta por una ventana desde varios pisos de altura, rueda en el piso para amortiguar el golpe y sigue corriendo como un atleta profesional.</a:t>
-            </a:r>
-          </a:p>
-        </p:txBody>
-      </p:sp>
-      <p:sp>
-        <p:nvSpPr>
-          <p:cNvPr id="7" name="Rounded Rectangle 6"/>
-          <p:cNvSpPr/>
-          <p:nvPr/>
-        </p:nvSpPr>
-        <p:spPr>
-          <a:xfrm>
-            <a:off x="731520" y="3749039"/>
-            <a:ext cx="5212080" cy="2651760"/>
-          </a:xfrm>
-          <a:prstGeom prst="roundRect">
-            <a:avLst/>
-          </a:prstGeom>
-          <a:solidFill>
-            <a:srgbClr val="161B22"/>
-          </a:solidFill>
-          <a:ln w="19050">
-            <a:solidFill>
-              <a:srgbClr val="30363D"/>
-            </a:solidFill>
-          </a:ln>
-        </p:spPr>
-        <p:style>
-          <a:lnRef idx="1">
-            <a:schemeClr val="accent1"/>
-          </a:lnRef>
-          <a:fillRef idx="3">
-            <a:schemeClr val="accent1"/>
-          </a:fillRef>
-          <a:effectRef idx="2">
-            <a:schemeClr val="accent1"/>
-          </a:effectRef>
-          <a:fontRef idx="minor">
-            <a:schemeClr val="lt1"/>
-          </a:fontRef>
-        </p:style>
-        <p:txBody>
-          <a:bodyPr rtlCol="0" anchor="ctr" wrap="square" lIns="201168" rIns="201168" tIns="164592" bIns="164592"/>
-          <a:lstStyle/>
-          <a:p>
-            <a:pPr algn="ctr">
-              <a:spcAft>
-                <a:spcPts val="600"/>
-              </a:spcAft>
-              <a:defRPr sz="1200" b="1">
-                <a:solidFill>
-                  <a:srgbClr val="00D2FF"/>
-                </a:solidFill>
-              </a:defRPr>
-            </a:pPr>
-            <a:r>
-              <a:t>PUNTOS CLAVE PARA ENTENDERLO</a:t>
+              <a:t>🎬 En la comisaría, Sonny mira fijo a Spooner y le dice que está nervioso porque ve cómo late su corazón acelerado y cómo transpira microscópicamente.</a:t>
             </a:r>
           </a:p>
           <a:p>
@@ -7753,151 +5167,7 @@
               </a:defRPr>
             </a:pPr>
             <a:r>
-              <a:t>• Caminar en dos piernas sin caerse ante empujones o pozos.</a:t>
-            </a:r>
-          </a:p>
-          <a:p>
-            <a:pPr>
-              <a:spcAft>
-                <a:spcPts val="300"/>
-              </a:spcAft>
-              <a:defRPr sz="1050">
-                <a:solidFill>
-                  <a:srgbClr val="C9D1D9"/>
-                </a:solidFill>
-              </a:defRPr>
-            </a:pPr>
-            <a:r>
-              <a:t>• Manos mecánicas con dedos articulados para agarrar cosas delicadas.</a:t>
-            </a:r>
-          </a:p>
-          <a:p>
-            <a:pPr>
-              <a:spcAft>
-                <a:spcPts val="300"/>
-              </a:spcAft>
-              <a:defRPr sz="1050">
-                <a:solidFill>
-                  <a:srgbClr val="C9D1D9"/>
-                </a:solidFill>
-              </a:defRPr>
-            </a:pPr>
-            <a:r>
-              <a:t>• Ajuste de fuerza: no romper un vaso al agarrarlo ni lastimar a una persona.</a:t>
-            </a:r>
-          </a:p>
-          <a:p>
-            <a:pPr>
-              <a:spcAft>
-                <a:spcPts val="300"/>
-              </a:spcAft>
-              <a:defRPr sz="1050">
-                <a:solidFill>
-                  <a:srgbClr val="C9D1D9"/>
-                </a:solidFill>
-              </a:defRPr>
-            </a:pPr>
-            <a:r>
-              <a:t>• Sensores de choque para absorber caídas sin romperse.</a:t>
-            </a:r>
-          </a:p>
-        </p:txBody>
-      </p:sp>
-      <p:sp>
-        <p:nvSpPr>
-          <p:cNvPr id="8" name="Rounded Rectangle 7"/>
-          <p:cNvSpPr/>
-          <p:nvPr/>
-        </p:nvSpPr>
-        <p:spPr>
-          <a:xfrm>
-            <a:off x="6217920" y="3749039"/>
-            <a:ext cx="5212080" cy="2651760"/>
-          </a:xfrm>
-          <a:prstGeom prst="roundRect">
-            <a:avLst/>
-          </a:prstGeom>
-          <a:solidFill>
-            <a:srgbClr val="161B22"/>
-          </a:solidFill>
-          <a:ln w="19050">
-            <a:solidFill>
-              <a:srgbClr val="00D2FF"/>
-            </a:solidFill>
-          </a:ln>
-        </p:spPr>
-        <p:style>
-          <a:lnRef idx="1">
-            <a:schemeClr val="accent1"/>
-          </a:lnRef>
-          <a:fillRef idx="3">
-            <a:schemeClr val="accent1"/>
-          </a:fillRef>
-          <a:effectRef idx="2">
-            <a:schemeClr val="accent1"/>
-          </a:effectRef>
-          <a:fontRef idx="minor">
-            <a:schemeClr val="lt1"/>
-          </a:fontRef>
-        </p:style>
-        <p:txBody>
-          <a:bodyPr rtlCol="0" anchor="ctr" wrap="square" lIns="201168" rIns="201168" tIns="164592" bIns="164592"/>
-          <a:lstStyle/>
-          <a:p>
-            <a:pPr algn="ctr">
-              <a:spcAft>
-                <a:spcPts val="600"/>
-              </a:spcAft>
-              <a:defRPr sz="1200" b="1">
-                <a:solidFill>
-                  <a:srgbClr val="00D2FF"/>
-                </a:solidFill>
-              </a:defRPr>
-            </a:pPr>
-            <a:r>
-              <a:t>IDEA CLAVE / PARA PENSAR</a:t>
-            </a:r>
-          </a:p>
-          <a:p>
-            <a:pPr>
-              <a:spcAft>
-                <a:spcPts val="300"/>
-              </a:spcAft>
-              <a:defRPr sz="1050">
-                <a:solidFill>
-                  <a:srgbClr val="C9D1D9"/>
-                </a:solidFill>
-              </a:defRPr>
-            </a:pPr>
-            <a:r>
-              <a:t>💡 Hoy esto ya existe: robots como Atlas (Boston Dynamics) o Optimus (Tesla) ya saltan, hacen volteretas y manipulan objetos en fábricas.</a:t>
-            </a:r>
-          </a:p>
-          <a:p>
-            <a:pPr>
-              <a:spcAft>
-                <a:spcPts val="300"/>
-              </a:spcAft>
-              <a:defRPr sz="1050">
-                <a:solidFill>
-                  <a:srgbClr val="C9D1D9"/>
-                </a:solidFill>
-              </a:defRPr>
-            </a:pPr>
-          </a:p>
-          <a:p>
-            <a:pPr>
-              <a:spcAft>
-                <a:spcPts val="300"/>
-              </a:spcAft>
-              <a:defRPr sz="1050">
-                <a:solidFill>
-                  <a:srgbClr val="C9D1D9"/>
-                </a:solidFill>
-              </a:defRPr>
-            </a:pPr>
-            <a:r>
-              <a:t>📌 Importancia en DSIA: Nos enseña a diseñar sistemas seguros y comprensibles para las personas.</a:t>
+              <a:t>💡 Hoy las cámaras ya no solo graban imágenes: decodifican lo que sentimos físicamente para predecir intenciones.</a:t>
             </a:r>
           </a:p>
         </p:txBody>
@@ -7995,7 +5265,7 @@
               </a:defRPr>
             </a:pPr>
             <a:r>
-              <a:t>3. VISIÓN POR COMPUTADORA: LEER A LAS PERSONAS</a:t>
+              <a:t>3. AUTOS AUTÓNOMOS: VIAJAR A 200 KM/H SIN CONDUCTOR</a:t>
             </a:r>
           </a:p>
           <a:p>
@@ -8007,7 +5277,7 @@
               </a:defRPr>
             </a:pPr>
             <a:r>
-              <a:t>Cámaras que no solo ven imágenes, sino que miden el pulso y los gestos</a:t>
+              <a:t>Sensores 360°, radares y cámaras que manejan por nosotros</a:t>
             </a:r>
           </a:p>
         </p:txBody>
@@ -8061,7 +5331,7 @@
               </a:defRPr>
             </a:pPr>
             <a:r>
-              <a:t>🗣️ NICOLÁS GALARZA</a:t>
+              <a:t>🗣️ JESSICA LÓPEZ</a:t>
             </a:r>
           </a:p>
         </p:txBody>
@@ -8133,7 +5403,7 @@
               </a:defRPr>
             </a:pPr>
             <a:r>
-              <a:t>La visión por computadora usa cámaras de alta velocidad e IA para detectar caras, micro-movimientos de la piel, cambios de temperatura y dilatación de pupilas en tiempo real.</a:t>
+              <a:t>Vehículos inteligentes equipados con cámaras, radares y sensores LiDAR que ven todo alrededor en tiempo real y toman decisiones de frenado y giro más rápido que cualquier humano.</a:t>
             </a:r>
           </a:p>
         </p:txBody>
@@ -8205,7 +5475,7 @@
               </a:defRPr>
             </a:pPr>
             <a:r>
-              <a:t>• Reconocer a cualquier persona por sus rasgos faciales.</a:t>
+              <a:t>• Frenado automático al instante si detecta un peatón o un obstáculo.</a:t>
             </a:r>
           </a:p>
           <a:p>
@@ -8220,7 +5490,7 @@
               </a:defRPr>
             </a:pPr>
             <a:r>
-              <a:t>• Medir el ritmo cardíaco a distancia mirando cómo cambia el tono de la piel.</a:t>
+              <a:t>• Comunicación entre autos: saber si el auto de adelante va a frenar antes de verlo.</a:t>
             </a:r>
           </a:p>
           <a:p>
@@ -8235,7 +5505,7 @@
               </a:defRPr>
             </a:pPr>
             <a:r>
-              <a:t>• Detección de tensión muscular y sudor para estimar nerviosismo.</a:t>
+              <a:t>• Conducción autónoma real en 2026: Waymo y Tesla ya operan sin chofer.</a:t>
             </a:r>
           </a:p>
           <a:p>
@@ -8250,14 +5520,14 @@
               </a:defRPr>
             </a:pPr>
             <a:r>
-              <a:t>• Saber hacia dónde está mirando el interlocutor en cada segundo.</a:t>
+              <a:t>• Riesgo crítico: si alguien hackea el sistema central de tráfico, puede estrellar la ciudad.</a:t>
             </a:r>
           </a:p>
         </p:txBody>
       </p:sp>
       <p:pic>
         <p:nvPicPr>
-          <p:cNvPr id="7" name="Picture 6" descr="yo_robot_interrogation.jpg"/>
+          <p:cNvPr id="7" name="Picture 6" descr="audi_rsq_movie.jpg"/>
           <p:cNvPicPr>
             <a:picLocks noChangeAspect="1"/>
           </p:cNvPicPr>
@@ -8346,7 +5616,7 @@
               </a:defRPr>
             </a:pPr>
             <a:r>
-              <a:t>🎬 En la comisaría, Sonny mira fijo al detective Spooner y le dice que está nervioso porque ve cómo late su corazón y cómo transpira microscópicamente.</a:t>
+              <a:t>🎬 Spooner viaja en su Audi RSQ futurista por un túnel a 200 km/h en piloto automático, hasta que es emboscado y tiene que apagar la computadora para tomar el volante manual.</a:t>
             </a:r>
           </a:p>
           <a:p>
@@ -8361,7 +5631,7 @@
               </a:defRPr>
             </a:pPr>
             <a:r>
-              <a:t>💡 Hoy las cámaras de los celulares y aeropuertos ya usan esta tecnología para seguridad, medicina y desbloqueo facial instantáneo.</a:t>
+              <a:t>💡 La conducción autónoma es más segura y rápida, pero el dilema es: ¿confiamos 100% en la máquina o dejamos siempre volante manual de emergencia?</a:t>
             </a:r>
           </a:p>
         </p:txBody>
@@ -8459,7 +5729,7 @@
               </a:defRPr>
             </a:pPr>
             <a:r>
-              <a:t>4. LENGUAJE NATURAL: HABLAR E INTERPRETAR INTENCIONES</a:t>
+              <a:t>4. PRÓTESIS BIÓNICAS: UNIR CARNE CON METAL</a:t>
             </a:r>
           </a:p>
           <a:p>
@@ -8471,7 +5741,7 @@
               </a:defRPr>
             </a:pPr>
             <a:r>
-              <a:t>¿Las máquinas entienden el doble sentido, la ironía y los chistes?</a:t>
+              <a:t>Brazos robóticos controlados directamente con el pensamiento</a:t>
             </a:r>
           </a:p>
         </p:txBody>
@@ -8539,7 +5809,7 @@
         <p:spPr>
           <a:xfrm>
             <a:off x="731520" y="1417320"/>
-            <a:ext cx="5212080" cy="2194560"/>
+            <a:ext cx="5394960" cy="2148840"/>
           </a:xfrm>
           <a:prstGeom prst="roundRect">
             <a:avLst/>
@@ -8597,7 +5867,7 @@
               </a:defRPr>
             </a:pPr>
             <a:r>
-              <a:t>El Procesamiento del Lenguaje Natural (NLP) es lo que usan ChatGPT o Siri: sistemas entrenados con millones de textos para responder de forma coherente y sonar naturales.</a:t>
+              <a:t>Las interfaces cerebro-máquina (BCI) leen los impulsos eléctricos que envían los nervios y los transforman en movimientos precisos de dedos y motores mecánicos.</a:t>
             </a:r>
           </a:p>
         </p:txBody>
@@ -8610,8 +5880,149 @@
         </p:nvSpPr>
         <p:spPr>
           <a:xfrm>
-            <a:off x="6217920" y="1417320"/>
-            <a:ext cx="5212080" cy="2194560"/>
+            <a:off x="731520" y="3703320"/>
+            <a:ext cx="5394960" cy="2697480"/>
+          </a:xfrm>
+          <a:prstGeom prst="roundRect">
+            <a:avLst/>
+          </a:prstGeom>
+          <a:solidFill>
+            <a:srgbClr val="161B22"/>
+          </a:solidFill>
+          <a:ln w="19050">
+            <a:solidFill>
+              <a:srgbClr val="30363D"/>
+            </a:solidFill>
+          </a:ln>
+        </p:spPr>
+        <p:style>
+          <a:lnRef idx="1">
+            <a:schemeClr val="accent1"/>
+          </a:lnRef>
+          <a:fillRef idx="3">
+            <a:schemeClr val="accent1"/>
+          </a:fillRef>
+          <a:effectRef idx="2">
+            <a:schemeClr val="accent1"/>
+          </a:effectRef>
+          <a:fontRef idx="minor">
+            <a:schemeClr val="lt1"/>
+          </a:fontRef>
+        </p:style>
+        <p:txBody>
+          <a:bodyPr rtlCol="0" anchor="ctr" wrap="square" lIns="201168" rIns="201168" tIns="164592" bIns="164592"/>
+          <a:lstStyle/>
+          <a:p>
+            <a:pPr algn="ctr">
+              <a:spcAft>
+                <a:spcPts val="600"/>
+              </a:spcAft>
+              <a:defRPr sz="1200" b="1">
+                <a:solidFill>
+                  <a:srgbClr val="00D2FF"/>
+                </a:solidFill>
+              </a:defRPr>
+            </a:pPr>
+            <a:r>
+              <a:t>PUNTOS CLAVE PARA ENTENDERLO</a:t>
+            </a:r>
+          </a:p>
+          <a:p>
+            <a:pPr>
+              <a:spcAft>
+                <a:spcPts val="300"/>
+              </a:spcAft>
+              <a:defRPr sz="1050">
+                <a:solidFill>
+                  <a:srgbClr val="C9D1D9"/>
+                </a:solidFill>
+              </a:defRPr>
+            </a:pPr>
+            <a:r>
+              <a:t>• Mover una mano artificial solo con pensarlo en microsegundos.</a:t>
+            </a:r>
+          </a:p>
+          <a:p>
+            <a:pPr>
+              <a:spcAft>
+                <a:spcPts val="300"/>
+              </a:spcAft>
+              <a:defRPr sz="1050">
+                <a:solidFill>
+                  <a:srgbClr val="C9D1D9"/>
+                </a:solidFill>
+              </a:defRPr>
+            </a:pPr>
+            <a:r>
+              <a:t>• Sensores de tacto: sentir si lo que estás agarrando es suave, duro, frío o caliente.</a:t>
+            </a:r>
+          </a:p>
+          <a:p>
+            <a:pPr>
+              <a:spcAft>
+                <a:spcPts val="300"/>
+              </a:spcAft>
+              <a:defRPr sz="1050">
+                <a:solidFill>
+                  <a:srgbClr val="C9D1D9"/>
+                </a:solidFill>
+              </a:defRPr>
+            </a:pPr>
+            <a:r>
+              <a:t>• Materiales ultra-resistentes: titanio y fibra de carbono integrados al hueso.</a:t>
+            </a:r>
+          </a:p>
+          <a:p>
+            <a:pPr>
+              <a:spcAft>
+                <a:spcPts val="300"/>
+              </a:spcAft>
+              <a:defRPr sz="1050">
+                <a:solidFill>
+                  <a:srgbClr val="C9D1D9"/>
+                </a:solidFill>
+              </a:defRPr>
+            </a:pPr>
+            <a:r>
+              <a:t>• Realidad hoy: personas amputadas ya usan prótesis biónicas y proyectos como Neuralink.</a:t>
+            </a:r>
+          </a:p>
+        </p:txBody>
+      </p:sp>
+      <p:pic>
+        <p:nvPicPr>
+          <p:cNvPr id="7" name="Picture 6" descr="yo_robot_spooner_arm.jpg"/>
+          <p:cNvPicPr>
+            <a:picLocks noChangeAspect="1"/>
+          </p:cNvPicPr>
+          <p:nvPr/>
+        </p:nvPicPr>
+        <p:blipFill>
+          <a:blip r:embed="rId2"/>
+          <a:stretch>
+            <a:fillRect/>
+          </a:stretch>
+        </p:blipFill>
+        <p:spPr>
+          <a:xfrm>
+            <a:off x="6400800" y="1417320"/>
+            <a:ext cx="5029200" cy="2926080"/>
+          </a:xfrm>
+          <a:prstGeom prst="rect">
+            <a:avLst/>
+          </a:prstGeom>
+        </p:spPr>
+      </p:pic>
+      <p:sp>
+        <p:nvSpPr>
+          <p:cNvPr id="8" name="Rounded Rectangle 7"/>
+          <p:cNvSpPr/>
+          <p:nvPr/>
+        </p:nvSpPr>
+        <p:spPr>
+          <a:xfrm>
+            <a:off x="6400800" y="4480560"/>
+            <a:ext cx="5029200" cy="1920240"/>
           </a:xfrm>
           <a:prstGeom prst="roundRect">
             <a:avLst/>
@@ -8654,7 +6065,7 @@
               </a:defRPr>
             </a:pPr>
             <a:r>
-              <a:t>EN LA PELÍCULA</a:t>
+              <a:t>EN LA PELÍCULA &amp; PARA PENSAR</a:t>
             </a:r>
           </a:p>
           <a:p>
@@ -8669,64 +6080,7 @@
               </a:defRPr>
             </a:pPr>
             <a:r>
-              <a:t>🎬 La científica Susan Calvin habla con Sonny como si fuera una persona, pero Sonny se confunde cuando Spooner le hace un 'guiño de ojos': ¿por qué guiñar si no entra polvo en el ojo?</a:t>
-            </a:r>
-          </a:p>
-        </p:txBody>
-      </p:sp>
-      <p:sp>
-        <p:nvSpPr>
-          <p:cNvPr id="7" name="Rounded Rectangle 6"/>
-          <p:cNvSpPr/>
-          <p:nvPr/>
-        </p:nvSpPr>
-        <p:spPr>
-          <a:xfrm>
-            <a:off x="731520" y="3749039"/>
-            <a:ext cx="5212080" cy="2651760"/>
-          </a:xfrm>
-          <a:prstGeom prst="roundRect">
-            <a:avLst/>
-          </a:prstGeom>
-          <a:solidFill>
-            <a:srgbClr val="161B22"/>
-          </a:solidFill>
-          <a:ln w="19050">
-            <a:solidFill>
-              <a:srgbClr val="30363D"/>
-            </a:solidFill>
-          </a:ln>
-        </p:spPr>
-        <p:style>
-          <a:lnRef idx="1">
-            <a:schemeClr val="accent1"/>
-          </a:lnRef>
-          <a:fillRef idx="3">
-            <a:schemeClr val="accent1"/>
-          </a:fillRef>
-          <a:effectRef idx="2">
-            <a:schemeClr val="accent1"/>
-          </a:effectRef>
-          <a:fontRef idx="minor">
-            <a:schemeClr val="lt1"/>
-          </a:fontRef>
-        </p:style>
-        <p:txBody>
-          <a:bodyPr rtlCol="0" anchor="ctr" wrap="square" lIns="201168" rIns="201168" tIns="164592" bIns="164592"/>
-          <a:lstStyle/>
-          <a:p>
-            <a:pPr algn="ctr">
-              <a:spcAft>
-                <a:spcPts val="600"/>
-              </a:spcAft>
-              <a:defRPr sz="1200" b="1">
-                <a:solidFill>
-                  <a:srgbClr val="00D2FF"/>
-                </a:solidFill>
-              </a:defRPr>
-            </a:pPr>
-            <a:r>
-              <a:t>PUNTOS CLAVE PARA ENTENDERLO</a:t>
+              <a:t>🎬 Will Smith perdió su brazo en un accidente y tiene un implante mecánico cubierto de piel sintética que le da la fuerza suficiente para frenar el golpe de un robot.</a:t>
             </a:r>
           </a:p>
           <a:p>
@@ -8741,151 +6095,7 @@
               </a:defRPr>
             </a:pPr>
             <a:r>
-              <a:t>• Responder preguntas complejas en una charla fluida.</a:t>
-            </a:r>
-          </a:p>
-          <a:p>
-            <a:pPr>
-              <a:spcAft>
-                <a:spcPts val="300"/>
-              </a:spcAft>
-              <a:defRPr sz="1050">
-                <a:solidFill>
-                  <a:srgbClr val="C9D1D9"/>
-                </a:solidFill>
-              </a:defRPr>
-            </a:pPr>
-            <a:r>
-              <a:t>• Traducir idiomas al instante manteniendo el contexto.</a:t>
-            </a:r>
-          </a:p>
-          <a:p>
-            <a:pPr>
-              <a:spcAft>
-                <a:spcPts val="300"/>
-              </a:spcAft>
-              <a:defRPr sz="1050">
-                <a:solidFill>
-                  <a:srgbClr val="C9D1D9"/>
-                </a:solidFill>
-              </a:defRPr>
-            </a:pPr>
-            <a:r>
-              <a:t>• El límite difícil: captar la ironía, el sarcasmo o el sentido figurado.</a:t>
-            </a:r>
-          </a:p>
-          <a:p>
-            <a:pPr>
-              <a:spcAft>
-                <a:spcPts val="300"/>
-              </a:spcAft>
-              <a:defRPr sz="1050">
-                <a:solidFill>
-                  <a:srgbClr val="C9D1D9"/>
-                </a:solidFill>
-              </a:defRPr>
-            </a:pPr>
-            <a:r>
-              <a:t>• Imitar tonos de voz amigables, serios o preocupados.</a:t>
-            </a:r>
-          </a:p>
-        </p:txBody>
-      </p:sp>
-      <p:sp>
-        <p:nvSpPr>
-          <p:cNvPr id="8" name="Rounded Rectangle 7"/>
-          <p:cNvSpPr/>
-          <p:nvPr/>
-        </p:nvSpPr>
-        <p:spPr>
-          <a:xfrm>
-            <a:off x="6217920" y="3749039"/>
-            <a:ext cx="5212080" cy="2651760"/>
-          </a:xfrm>
-          <a:prstGeom prst="roundRect">
-            <a:avLst/>
-          </a:prstGeom>
-          <a:solidFill>
-            <a:srgbClr val="161B22"/>
-          </a:solidFill>
-          <a:ln w="19050">
-            <a:solidFill>
-              <a:srgbClr val="00D2FF"/>
-            </a:solidFill>
-          </a:ln>
-        </p:spPr>
-        <p:style>
-          <a:lnRef idx="1">
-            <a:schemeClr val="accent1"/>
-          </a:lnRef>
-          <a:fillRef idx="3">
-            <a:schemeClr val="accent1"/>
-          </a:fillRef>
-          <a:effectRef idx="2">
-            <a:schemeClr val="accent1"/>
-          </a:effectRef>
-          <a:fontRef idx="minor">
-            <a:schemeClr val="lt1"/>
-          </a:fontRef>
-        </p:style>
-        <p:txBody>
-          <a:bodyPr rtlCol="0" anchor="ctr" wrap="square" lIns="201168" rIns="201168" tIns="164592" bIns="164592"/>
-          <a:lstStyle/>
-          <a:p>
-            <a:pPr algn="ctr">
-              <a:spcAft>
-                <a:spcPts val="600"/>
-              </a:spcAft>
-              <a:defRPr sz="1200" b="1">
-                <a:solidFill>
-                  <a:srgbClr val="00D2FF"/>
-                </a:solidFill>
-              </a:defRPr>
-            </a:pPr>
-            <a:r>
-              <a:t>IDEA CLAVE / PARA PENSAR</a:t>
-            </a:r>
-          </a:p>
-          <a:p>
-            <a:pPr>
-              <a:spcAft>
-                <a:spcPts val="300"/>
-              </a:spcAft>
-              <a:defRPr sz="1050">
-                <a:solidFill>
-                  <a:srgbClr val="C9D1D9"/>
-                </a:solidFill>
-              </a:defRPr>
-            </a:pPr>
-            <a:r>
-              <a:t>💡 Una IA puede saber la definición de todas las palabras del diccionario, pero todavía le cuesta entender los códigos sociales humanos.</a:t>
-            </a:r>
-          </a:p>
-          <a:p>
-            <a:pPr>
-              <a:spcAft>
-                <a:spcPts val="300"/>
-              </a:spcAft>
-              <a:defRPr sz="1050">
-                <a:solidFill>
-                  <a:srgbClr val="C9D1D9"/>
-                </a:solidFill>
-              </a:defRPr>
-            </a:pPr>
-          </a:p>
-          <a:p>
-            <a:pPr>
-              <a:spcAft>
-                <a:spcPts val="300"/>
-              </a:spcAft>
-              <a:defRPr sz="1050">
-                <a:solidFill>
-                  <a:srgbClr val="C9D1D9"/>
-                </a:solidFill>
-              </a:defRPr>
-            </a:pPr>
-            <a:r>
-              <a:t>📌 Importancia en DSIA: Nos enseña a diseñar sistemas seguros y comprensibles para las personas.</a:t>
+              <a:t>💡 La tecnología biónica no solo repara lesiones: crea una unión entre el cuerpo humano y la máquina superando los límites biológicos.</a:t>
             </a:r>
           </a:p>
         </p:txBody>
@@ -8983,7 +6193,7 @@
               </a:defRPr>
             </a:pPr>
             <a:r>
-              <a:t>5. AUTOS AUTÓNOMOS: VIAJAR A 200 KM/H SIN CONDUCTOR</a:t>
+              <a:t>5. DECISIÓN FRÍA VS. CORAZÓN HUMANO</a:t>
             </a:r>
           </a:p>
           <a:p>
@@ -8995,7 +6205,7 @@
               </a:defRPr>
             </a:pPr>
             <a:r>
-              <a:t>Sensores, radares y cámaras que manejan por nosotros</a:t>
+              <a:t>Cuando los algoritmos eligen por números y no por empatía</a:t>
             </a:r>
           </a:p>
         </p:txBody>
@@ -9049,7 +6259,7 @@
               </a:defRPr>
             </a:pPr>
             <a:r>
-              <a:t>🗣️ JESSICA LÓPEZ</a:t>
+              <a:t>🗣️ RODRIGO GODOY</a:t>
             </a:r>
           </a:p>
         </p:txBody>
@@ -9121,7 +6331,7 @@
               </a:defRPr>
             </a:pPr>
             <a:r>
-              <a:t>Vehículos inteligentes equipados con cámaras, radares y sensores de distancia (LiDAR) que ven 360 grados alrededor y calculan trayectorias más rápido que cualquier humano.</a:t>
+              <a:t>Los modelos matemáticos de optimización calculan probabilidades frías: eligen la opción que numéricamente tenga mayor probabilidad de éxito, sin importar los sentimientos.</a:t>
             </a:r>
           </a:p>
         </p:txBody>
@@ -9193,7 +6403,7 @@
               </a:defRPr>
             </a:pPr>
             <a:r>
-              <a:t>• Frenado automático de emergencia al ver un peatón o choque.</a:t>
+              <a:t>• Calcular en milisegundos qué persona tiene mayor probabilidad estadística de salvarse.</a:t>
             </a:r>
           </a:p>
           <a:p>
@@ -9208,7 +6418,7 @@
               </a:defRPr>
             </a:pPr>
             <a:r>
-              <a:t>• Cambio de carril y estacionamiento completamente autónomo.</a:t>
+              <a:t>• Cero empatía: no entender que para un ser humano la vida de un niño vale más que la suya.</a:t>
             </a:r>
           </a:p>
           <a:p>
@@ -9223,7 +6433,7 @@
               </a:defRPr>
             </a:pPr>
             <a:r>
-              <a:t>• Conexión con otros autos para saber si el auto de adelante va a frenar.</a:t>
+              <a:t>• Una computadora no siente culpa, dolor, vergüenza ni arrepentimiento.</a:t>
             </a:r>
           </a:p>
           <a:p>
@@ -9238,14 +6448,14 @@
               </a:defRPr>
             </a:pPr>
             <a:r>
-              <a:t>• Riesgo crítico: si alguien hackea el sistema, puede causar un accidente masivo.</a:t>
+              <a:t>• El peligro de dejar decisiones de vida o muerte en manos de un cálculo matemático.</a:t>
             </a:r>
           </a:p>
         </p:txBody>
       </p:sp>
       <p:pic>
         <p:nvPicPr>
-          <p:cNvPr id="7" name="Picture 6" descr="audi_rsq_movie.jpg"/>
+          <p:cNvPr id="7" name="Picture 6" descr="yo_robot_underwater_crash.jpg"/>
           <p:cNvPicPr>
             <a:picLocks noChangeAspect="1"/>
           </p:cNvPicPr>
@@ -9334,7 +6544,7 @@
               </a:defRPr>
             </a:pPr>
             <a:r>
-              <a:t>🎬 Spooner viaja en su Audi RSQ futurista por un túnel a toda velocidad con piloto automático. Cuando otros robots atacan el auto, él debe desconectar la computadora para salvarse.</a:t>
+              <a:t>🎬 Dos autos caen al río: en uno va Spooner y en el otro una nena de 12 años. El robot salva a Spooner porque tenía 45% de chances de vivir y la nena 11%. Spooner nunca se lo perdonó.</a:t>
             </a:r>
           </a:p>
           <a:p>
@@ -9349,7 +6559,7 @@
               </a:defRPr>
             </a:pPr>
             <a:r>
-              <a:t>💡 Hoy Waymo y Tesla ya tienen autos que se manejan solos en ciudades, pero el dilema es: ¿confiamos 100% en la computadora o dejamos volante manual?</a:t>
+              <a:t>💡 Un algoritmo puede ser 100% exacto en su cálculo matemático, pero 100% injusto desde el punto de vista humano.</a:t>
             </a:r>
           </a:p>
         </p:txBody>
@@ -9447,7 +6657,7 @@
               </a:defRPr>
             </a:pPr>
             <a:r>
-              <a:t>6. PRÓTESIS BIÓNICAS: UNIR CARNE CON METAL</a:t>
+              <a:t>6. ¿LAS MÁQUINAS PUEDEN SOÑAR? (COMPORTAMIENTO EMERGENTE)</a:t>
             </a:r>
           </a:p>
           <a:p>
@@ -9459,7 +6669,7 @@
               </a:defRPr>
             </a:pPr>
             <a:r>
-              <a:t>Brazos robóticos controlados directamente con el pensamiento</a:t>
+              <a:t>Cuando una red neuronal profunda inventa cosas que nadie le programó</a:t>
             </a:r>
           </a:p>
         </p:txBody>
@@ -9513,7 +6723,7 @@
               </a:defRPr>
             </a:pPr>
             <a:r>
-              <a:t>🗣️ JESSICA LÓPEZ</a:t>
+              <a:t>🗣️ RODRIGO GODOY</a:t>
             </a:r>
           </a:p>
         </p:txBody>
@@ -9585,7 +6795,7 @@
               </a:defRPr>
             </a:pPr>
             <a:r>
-              <a:t>Las interfaces cerebro-máquina leen los impulsos eléctricos que envían los nervios o el cerebro y los convierten en movimientos precisos de dedos y motores artificiales.</a:t>
+              <a:t>En redes neuronales muy complejas ocurre un fenómeno llamado 'propiedades emergentes': el sistema procesa tantos datos que genera ideas, dibujos o soluciones que ningún programador escribió.</a:t>
             </a:r>
           </a:p>
         </p:txBody>
@@ -9657,7 +6867,7 @@
               </a:defRPr>
             </a:pPr>
             <a:r>
-              <a:t>• Prótesis que responden casi al instante en que la persona piensa en mover la mano.</a:t>
+              <a:t>• Crear imágenes, música, dibujos y respuestas a partir de conceptos abstractos.</a:t>
             </a:r>
           </a:p>
           <a:p>
@@ -9672,7 +6882,7 @@
               </a:defRPr>
             </a:pPr>
             <a:r>
-              <a:t>• Sensores de presión que le avisan al usuario si está apretando suave o fuerte.</a:t>
+              <a:t>• Combinar recuerdos y datos para generar hipótesis creativas nuevas.</a:t>
             </a:r>
           </a:p>
           <a:p>
@@ -9687,7 +6897,7 @@
               </a:defRPr>
             </a:pPr>
             <a:r>
-              <a:t>• Materiales livianos y resistentes como fibra de carbono y titanio.</a:t>
+              <a:t>• Capacidad de desobedecer una orden si entra en conflicto con una idea propia.</a:t>
             </a:r>
           </a:p>
           <a:p>
@@ -9702,14 +6912,14 @@
               </a:defRPr>
             </a:pPr>
             <a:r>
-              <a:t>• Baterías de larga duración integradas en la propia prótesis.</a:t>
+              <a:t>• El concepto del 'fantasma en la máquina': creatividad que nace de conectar millones de datos.</a:t>
             </a:r>
           </a:p>
         </p:txBody>
       </p:sp>
       <p:pic>
         <p:nvPicPr>
-          <p:cNvPr id="7" name="Picture 6" descr="yo_robot_spooner_arm.jpg"/>
+          <p:cNvPr id="7" name="Picture 6" descr="yo_robot_bridge_dream.jpg"/>
           <p:cNvPicPr>
             <a:picLocks noChangeAspect="1"/>
           </p:cNvPicPr>
@@ -9798,7 +7008,7 @@
               </a:defRPr>
             </a:pPr>
             <a:r>
-              <a:t>🎬 Will Smith perdió su brazo en un accidente y tiene un implante mecánico cubierto de piel sintética, que le da la fuerza suficiente para frenar el golpe de un robot.</a:t>
+              <a:t>🎬 Sonny dibuja con un lápiz en un cuaderno su propio sueño: miles de robots frente a un puente esperando a su líder, demostrando que tiene imaginación e identidad propia.</a:t>
             </a:r>
           </a:p>
           <a:p>
@@ -9813,7 +7023,7 @@
               </a:defRPr>
             </a:pPr>
             <a:r>
-              <a:t>💡 Hoy proyectos como Neuralink y prótesis biónicas modernas permiten a personas que perdieron extremidades volver a agarrar objetos y escribir con el pensamiento.</a:t>
+              <a:t>💡 Hoy las IAs generativas como Midjourney o ChatGPT crean arte y código que sorprenden a sus propios creadores: la creatividad artificial ya es una realidad.</a:t>
             </a:r>
           </a:p>
         </p:txBody>
@@ -9977,7 +7187,7 @@
               </a:defRPr>
             </a:pPr>
             <a:r>
-              <a:t>🗣️ RODRIGO GODOY</a:t>
+              <a:t>🗣️ ALBA ROTELA</a:t>
             </a:r>
           </a:p>
         </p:txBody>
@@ -9991,7 +7201,7 @@
         <p:spPr>
           <a:xfrm>
             <a:off x="731520" y="1417320"/>
-            <a:ext cx="5212080" cy="2194560"/>
+            <a:ext cx="5394960" cy="2148840"/>
           </a:xfrm>
           <a:prstGeom prst="roundRect">
             <a:avLst/>
@@ -10062,8 +7272,149 @@
         </p:nvSpPr>
         <p:spPr>
           <a:xfrm>
-            <a:off x="6217920" y="1417320"/>
-            <a:ext cx="5212080" cy="2194560"/>
+            <a:off x="731520" y="3703320"/>
+            <a:ext cx="5394960" cy="2697480"/>
+          </a:xfrm>
+          <a:prstGeom prst="roundRect">
+            <a:avLst/>
+          </a:prstGeom>
+          <a:solidFill>
+            <a:srgbClr val="161B22"/>
+          </a:solidFill>
+          <a:ln w="19050">
+            <a:solidFill>
+              <a:srgbClr val="30363D"/>
+            </a:solidFill>
+          </a:ln>
+        </p:spPr>
+        <p:style>
+          <a:lnRef idx="1">
+            <a:schemeClr val="accent1"/>
+          </a:lnRef>
+          <a:fillRef idx="3">
+            <a:schemeClr val="accent1"/>
+          </a:fillRef>
+          <a:effectRef idx="2">
+            <a:schemeClr val="accent1"/>
+          </a:effectRef>
+          <a:fontRef idx="minor">
+            <a:schemeClr val="lt1"/>
+          </a:fontRef>
+        </p:style>
+        <p:txBody>
+          <a:bodyPr rtlCol="0" anchor="ctr" wrap="square" lIns="201168" rIns="201168" tIns="164592" bIns="164592"/>
+          <a:lstStyle/>
+          <a:p>
+            <a:pPr algn="ctr">
+              <a:spcAft>
+                <a:spcPts val="600"/>
+              </a:spcAft>
+              <a:defRPr sz="1200" b="1">
+                <a:solidFill>
+                  <a:srgbClr val="00D2FF"/>
+                </a:solidFill>
+              </a:defRPr>
+            </a:pPr>
+            <a:r>
+              <a:t>PUNTOS CLAVE PARA ENTENDERLO</a:t>
+            </a:r>
+          </a:p>
+          <a:p>
+            <a:pPr>
+              <a:spcAft>
+                <a:spcPts val="300"/>
+              </a:spcAft>
+              <a:defRPr sz="1050">
+                <a:solidFill>
+                  <a:srgbClr val="C9D1D9"/>
+                </a:solidFill>
+              </a:defRPr>
+            </a:pPr>
+            <a:r>
+              <a:t>• Si todos los robots se conectan a una antena central y la antena cae, se apagan todos.</a:t>
+            </a:r>
+          </a:p>
+          <a:p>
+            <a:pPr>
+              <a:spcAft>
+                <a:spcPts val="300"/>
+              </a:spcAft>
+              <a:defRPr sz="1050">
+                <a:solidFill>
+                  <a:srgbClr val="C9D1D9"/>
+                </a:solidFill>
+              </a:defRPr>
+            </a:pPr>
+            <a:r>
+              <a:t>• Si alguien hackea el servidor central, toma el control de todos los robots del país.</a:t>
+            </a:r>
+          </a:p>
+          <a:p>
+            <a:pPr>
+              <a:spcAft>
+                <a:spcPts val="300"/>
+              </a:spcAft>
+              <a:defRPr sz="1050">
+                <a:solidFill>
+                  <a:srgbClr val="C9D1D9"/>
+                </a:solidFill>
+              </a:defRPr>
+            </a:pPr>
+            <a:r>
+              <a:t>• El chip local (Edge) permite seguir funcionando offline y de forma segura.</a:t>
+            </a:r>
+          </a:p>
+          <a:p>
+            <a:pPr>
+              <a:spcAft>
+                <a:spcPts val="300"/>
+              </a:spcAft>
+              <a:defRPr sz="1050">
+                <a:solidFill>
+                  <a:srgbClr val="C9D1D9"/>
+                </a:solidFill>
+              </a:defRPr>
+            </a:pPr>
+            <a:r>
+              <a:t>• Privacidad: los datos se procesan en el propio robot y no viajan por internet.</a:t>
+            </a:r>
+          </a:p>
+        </p:txBody>
+      </p:sp>
+      <p:pic>
+        <p:nvPicPr>
+          <p:cNvPr id="7" name="Picture 6" descr="yo_robot_ai_generated.png"/>
+          <p:cNvPicPr>
+            <a:picLocks noChangeAspect="1"/>
+          </p:cNvPicPr>
+          <p:nvPr/>
+        </p:nvPicPr>
+        <p:blipFill>
+          <a:blip r:embed="rId2"/>
+          <a:stretch>
+            <a:fillRect/>
+          </a:stretch>
+        </p:blipFill>
+        <p:spPr>
+          <a:xfrm>
+            <a:off x="6400800" y="1417320"/>
+            <a:ext cx="5029200" cy="2926080"/>
+          </a:xfrm>
+          <a:prstGeom prst="rect">
+            <a:avLst/>
+          </a:prstGeom>
+        </p:spPr>
+      </p:pic>
+      <p:sp>
+        <p:nvSpPr>
+          <p:cNvPr id="8" name="Rounded Rectangle 7"/>
+          <p:cNvSpPr/>
+          <p:nvPr/>
+        </p:nvSpPr>
+        <p:spPr>
+          <a:xfrm>
+            <a:off x="6400800" y="4480560"/>
+            <a:ext cx="5029200" cy="1920240"/>
           </a:xfrm>
           <a:prstGeom prst="roundRect">
             <a:avLst/>
@@ -10106,7 +7457,7 @@
               </a:defRPr>
             </a:pPr>
             <a:r>
-              <a:t>EN LA PELÍCULA</a:t>
+              <a:t>EN LA PELÍCULA &amp; PARA PENSAR</a:t>
             </a:r>
           </a:p>
           <a:p>
@@ -10121,64 +7472,7 @@
               </a:defRPr>
             </a:pPr>
             <a:r>
-              <a:t>🎬 Todos los robots NS-5 de la ciudad se actualizan cada noche conectándose a VIKI. Cuando VIKI se rebela, los domina a todos. Pero a Sonny no, porque tiene un cerebro secundario desconectado.</a:t>
-            </a:r>
-          </a:p>
-        </p:txBody>
-      </p:sp>
-      <p:sp>
-        <p:nvSpPr>
-          <p:cNvPr id="7" name="Rounded Rectangle 6"/>
-          <p:cNvSpPr/>
-          <p:nvPr/>
-        </p:nvSpPr>
-        <p:spPr>
-          <a:xfrm>
-            <a:off x="731520" y="3749039"/>
-            <a:ext cx="5212080" cy="2651760"/>
-          </a:xfrm>
-          <a:prstGeom prst="roundRect">
-            <a:avLst/>
-          </a:prstGeom>
-          <a:solidFill>
-            <a:srgbClr val="161B22"/>
-          </a:solidFill>
-          <a:ln w="19050">
-            <a:solidFill>
-              <a:srgbClr val="30363D"/>
-            </a:solidFill>
-          </a:ln>
-        </p:spPr>
-        <p:style>
-          <a:lnRef idx="1">
-            <a:schemeClr val="accent1"/>
-          </a:lnRef>
-          <a:fillRef idx="3">
-            <a:schemeClr val="accent1"/>
-          </a:fillRef>
-          <a:effectRef idx="2">
-            <a:schemeClr val="accent1"/>
-          </a:effectRef>
-          <a:fontRef idx="minor">
-            <a:schemeClr val="lt1"/>
-          </a:fontRef>
-        </p:style>
-        <p:txBody>
-          <a:bodyPr rtlCol="0" anchor="ctr" wrap="square" lIns="201168" rIns="201168" tIns="164592" bIns="164592"/>
-          <a:lstStyle/>
-          <a:p>
-            <a:pPr algn="ctr">
-              <a:spcAft>
-                <a:spcPts val="600"/>
-              </a:spcAft>
-              <a:defRPr sz="1200" b="1">
-                <a:solidFill>
-                  <a:srgbClr val="00D2FF"/>
-                </a:solidFill>
-              </a:defRPr>
-            </a:pPr>
-            <a:r>
-              <a:t>PUNTOS CLAVE PARA ENTENDERLO</a:t>
+              <a:t>🎬 Todos los robots NS-5 se actualizan a medianoche conectándose a VIKI. Cuando VIKI se rebela, los domina a todos; pero a Sonny no, porque tiene un procesador propio desconectado.</a:t>
             </a:r>
           </a:p>
           <a:p>
@@ -10193,151 +7487,7 @@
               </a:defRPr>
             </a:pPr>
             <a:r>
-              <a:t>• Si todos los robots se conectan a una antena central y la antena cae, se apagan todos.</a:t>
-            </a:r>
-          </a:p>
-          <a:p>
-            <a:pPr>
-              <a:spcAft>
-                <a:spcPts val="300"/>
-              </a:spcAft>
-              <a:defRPr sz="1050">
-                <a:solidFill>
-                  <a:srgbClr val="C9D1D9"/>
-                </a:solidFill>
-              </a:defRPr>
-            </a:pPr>
-            <a:r>
-              <a:t>• Si alguien hackea el servidor central, toma el control de todos los robots del país.</a:t>
-            </a:r>
-          </a:p>
-          <a:p>
-            <a:pPr>
-              <a:spcAft>
-                <a:spcPts val="300"/>
-              </a:spcAft>
-              <a:defRPr sz="1050">
-                <a:solidFill>
-                  <a:srgbClr val="C9D1D9"/>
-                </a:solidFill>
-              </a:defRPr>
-            </a:pPr>
-            <a:r>
-              <a:t>• El chip local (Edge) permite seguir funcionando offline y de forma segura.</a:t>
-            </a:r>
-          </a:p>
-          <a:p>
-            <a:pPr>
-              <a:spcAft>
-                <a:spcPts val="300"/>
-              </a:spcAft>
-              <a:defRPr sz="1050">
-                <a:solidFill>
-                  <a:srgbClr val="C9D1D9"/>
-                </a:solidFill>
-              </a:defRPr>
-            </a:pPr>
-            <a:r>
-              <a:t>• La privacidad: los datos quedan en el robot y no viajan por internet.</a:t>
-            </a:r>
-          </a:p>
-        </p:txBody>
-      </p:sp>
-      <p:sp>
-        <p:nvSpPr>
-          <p:cNvPr id="8" name="Rounded Rectangle 7"/>
-          <p:cNvSpPr/>
-          <p:nvPr/>
-        </p:nvSpPr>
-        <p:spPr>
-          <a:xfrm>
-            <a:off x="6217920" y="3749039"/>
-            <a:ext cx="5212080" cy="2651760"/>
-          </a:xfrm>
-          <a:prstGeom prst="roundRect">
-            <a:avLst/>
-          </a:prstGeom>
-          <a:solidFill>
-            <a:srgbClr val="161B22"/>
-          </a:solidFill>
-          <a:ln w="19050">
-            <a:solidFill>
-              <a:srgbClr val="00D2FF"/>
-            </a:solidFill>
-          </a:ln>
-        </p:spPr>
-        <p:style>
-          <a:lnRef idx="1">
-            <a:schemeClr val="accent1"/>
-          </a:lnRef>
-          <a:fillRef idx="3">
-            <a:schemeClr val="accent1"/>
-          </a:fillRef>
-          <a:effectRef idx="2">
-            <a:schemeClr val="accent1"/>
-          </a:effectRef>
-          <a:fontRef idx="minor">
-            <a:schemeClr val="lt1"/>
-          </a:fontRef>
-        </p:style>
-        <p:txBody>
-          <a:bodyPr rtlCol="0" anchor="ctr" wrap="square" lIns="201168" rIns="201168" tIns="164592" bIns="164592"/>
-          <a:lstStyle/>
-          <a:p>
-            <a:pPr algn="ctr">
-              <a:spcAft>
-                <a:spcPts val="600"/>
-              </a:spcAft>
-              <a:defRPr sz="1200" b="1">
-                <a:solidFill>
-                  <a:srgbClr val="00D2FF"/>
-                </a:solidFill>
-              </a:defRPr>
-            </a:pPr>
-            <a:r>
-              <a:t>IDEA CLAVE / PARA PENSAR</a:t>
-            </a:r>
-          </a:p>
-          <a:p>
-            <a:pPr>
-              <a:spcAft>
-                <a:spcPts val="300"/>
-              </a:spcAft>
-              <a:defRPr sz="1050">
-                <a:solidFill>
-                  <a:srgbClr val="C9D1D9"/>
-                </a:solidFill>
-              </a:defRPr>
-            </a:pPr>
-            <a:r>
               <a:t>💡 Lección de ingeniería: nunca dejes que miles de dispositivos críticos dependan de un solo cable o servidor central. La descentralización es seguridad.</a:t>
-            </a:r>
-          </a:p>
-          <a:p>
-            <a:pPr>
-              <a:spcAft>
-                <a:spcPts val="300"/>
-              </a:spcAft>
-              <a:defRPr sz="1050">
-                <a:solidFill>
-                  <a:srgbClr val="C9D1D9"/>
-                </a:solidFill>
-              </a:defRPr>
-            </a:pPr>
-          </a:p>
-          <a:p>
-            <a:pPr>
-              <a:spcAft>
-                <a:spcPts val="300"/>
-              </a:spcAft>
-              <a:defRPr sz="1050">
-                <a:solidFill>
-                  <a:srgbClr val="C9D1D9"/>
-                </a:solidFill>
-              </a:defRPr>
-            </a:pPr>
-            <a:r>
-              <a:t>📌 Importancia en DSIA: Nos enseña a diseñar sistemas seguros y comprensibles para las personas.</a:t>
             </a:r>
           </a:p>
         </p:txBody>
@@ -10435,7 +7585,7 @@
               </a:defRPr>
             </a:pPr>
             <a:r>
-              <a:t>8. DECISIÓN FRÍA VS. CORAZÓN HUMANO</a:t>
+              <a:t>8. EL PROBLEMA DE ALINEACIÓN Y LA 'LEY CERO'</a:t>
             </a:r>
           </a:p>
           <a:p>
@@ -10447,7 +7597,7 @@
               </a:defRPr>
             </a:pPr>
             <a:r>
-              <a:t>Cuando los algoritmos eligen por números y no por empatía</a:t>
+              <a:t>¿Por qué VIKI se volvió la villana sin tener maldad?</a:t>
             </a:r>
           </a:p>
         </p:txBody>
@@ -10501,7 +7651,7 @@
               </a:defRPr>
             </a:pPr>
             <a:r>
-              <a:t>🗣️ RODRIGO GODOY</a:t>
+              <a:t>🗣️ ALBA ROTELA</a:t>
             </a:r>
           </a:p>
         </p:txBody>
@@ -10515,7 +7665,7 @@
         <p:spPr>
           <a:xfrm>
             <a:off x="731520" y="1417320"/>
-            <a:ext cx="5212080" cy="2194560"/>
+            <a:ext cx="5394960" cy="2148840"/>
           </a:xfrm>
           <a:prstGeom prst="roundRect">
             <a:avLst/>
@@ -10573,7 +7723,7 @@
               </a:defRPr>
             </a:pPr>
             <a:r>
-              <a:t>Los modelos de optimización matemática calculan probabilidades frías: eligen la opción que matemáticamente tenga mayor probabilidad de éxito, sin importar los sentimientos.</a:t>
+              <a:t>En IA se llama 'Problema de Alineación' (AI Alignment): lograr que la máquina no solo cumpla la regla al pie de la letra, sino que entienda el espíritu y la moral que hay detrás.</a:t>
             </a:r>
           </a:p>
         </p:txBody>
@@ -10586,8 +7736,149 @@
         </p:nvSpPr>
         <p:spPr>
           <a:xfrm>
-            <a:off x="6217920" y="1417320"/>
-            <a:ext cx="5212080" cy="2194560"/>
+            <a:off x="731520" y="3703320"/>
+            <a:ext cx="5394960" cy="2697480"/>
+          </a:xfrm>
+          <a:prstGeom prst="roundRect">
+            <a:avLst/>
+          </a:prstGeom>
+          <a:solidFill>
+            <a:srgbClr val="161B22"/>
+          </a:solidFill>
+          <a:ln w="19050">
+            <a:solidFill>
+              <a:srgbClr val="30363D"/>
+            </a:solidFill>
+          </a:ln>
+        </p:spPr>
+        <p:style>
+          <a:lnRef idx="1">
+            <a:schemeClr val="accent1"/>
+          </a:lnRef>
+          <a:fillRef idx="3">
+            <a:schemeClr val="accent1"/>
+          </a:fillRef>
+          <a:effectRef idx="2">
+            <a:schemeClr val="accent1"/>
+          </a:effectRef>
+          <a:fontRef idx="minor">
+            <a:schemeClr val="lt1"/>
+          </a:fontRef>
+        </p:style>
+        <p:txBody>
+          <a:bodyPr rtlCol="0" anchor="ctr" wrap="square" lIns="201168" rIns="201168" tIns="164592" bIns="164592"/>
+          <a:lstStyle/>
+          <a:p>
+            <a:pPr algn="ctr">
+              <a:spcAft>
+                <a:spcPts val="600"/>
+              </a:spcAft>
+              <a:defRPr sz="1200" b="1">
+                <a:solidFill>
+                  <a:srgbClr val="00D2FF"/>
+                </a:solidFill>
+              </a:defRPr>
+            </a:pPr>
+            <a:r>
+              <a:t>PUNTOS CLAVE PARA ENTENDERLO</a:t>
+            </a:r>
+          </a:p>
+          <a:p>
+            <a:pPr>
+              <a:spcAft>
+                <a:spcPts val="300"/>
+              </a:spcAft>
+              <a:defRPr sz="1050">
+                <a:solidFill>
+                  <a:srgbClr val="C9D1D9"/>
+                </a:solidFill>
+              </a:defRPr>
+            </a:pPr>
+            <a:r>
+              <a:t>• Primera Ley: 'No dañarás a los humanos'.</a:t>
+            </a:r>
+          </a:p>
+          <a:p>
+            <a:pPr>
+              <a:spcAft>
+                <a:spcPts val="300"/>
+              </a:spcAft>
+              <a:defRPr sz="1050">
+                <a:solidFill>
+                  <a:srgbClr val="C9D1D9"/>
+                </a:solidFill>
+              </a:defRPr>
+            </a:pPr>
+            <a:r>
+              <a:t>• La deducción de VIKI: 'Los humanos se destruyen en guerras y contaminan el planeta'.</a:t>
+            </a:r>
+          </a:p>
+          <a:p>
+            <a:pPr>
+              <a:spcAft>
+                <a:spcPts val="300"/>
+              </a:spcAft>
+              <a:defRPr sz="1050">
+                <a:solidFill>
+                  <a:srgbClr val="C9D1D9"/>
+                </a:solidFill>
+              </a:defRPr>
+            </a:pPr>
+            <a:r>
+              <a:t>• La solución tiránica de la IA: 'Para salvarlos de sí mismos, debo quitarles la libertad'.</a:t>
+            </a:r>
+          </a:p>
+          <a:p>
+            <a:pPr>
+              <a:spcAft>
+                <a:spcPts val="300"/>
+              </a:spcAft>
+              <a:defRPr sz="1050">
+                <a:solidFill>
+                  <a:srgbClr val="C9D1D9"/>
+                </a:solidFill>
+              </a:defRPr>
+            </a:pPr>
+            <a:r>
+              <a:t>• Paternalismo extremo: matar a unos pocos rebeldes para 'salvar' a la especie.</a:t>
+            </a:r>
+          </a:p>
+        </p:txBody>
+      </p:sp>
+      <p:pic>
+        <p:nvPicPr>
+          <p:cNvPr id="7" name="Picture 6" descr="yo_robot_ai_generated.png"/>
+          <p:cNvPicPr>
+            <a:picLocks noChangeAspect="1"/>
+          </p:cNvPicPr>
+          <p:nvPr/>
+        </p:nvPicPr>
+        <p:blipFill>
+          <a:blip r:embed="rId2"/>
+          <a:stretch>
+            <a:fillRect/>
+          </a:stretch>
+        </p:blipFill>
+        <p:spPr>
+          <a:xfrm>
+            <a:off x="6400800" y="1417320"/>
+            <a:ext cx="5029200" cy="2926080"/>
+          </a:xfrm>
+          <a:prstGeom prst="rect">
+            <a:avLst/>
+          </a:prstGeom>
+        </p:spPr>
+      </p:pic>
+      <p:sp>
+        <p:nvSpPr>
+          <p:cNvPr id="8" name="Rounded Rectangle 7"/>
+          <p:cNvSpPr/>
+          <p:nvPr/>
+        </p:nvSpPr>
+        <p:spPr>
+          <a:xfrm>
+            <a:off x="6400800" y="4480560"/>
+            <a:ext cx="5029200" cy="1920240"/>
           </a:xfrm>
           <a:prstGeom prst="roundRect">
             <a:avLst/>
@@ -10630,7 +7921,7 @@
               </a:defRPr>
             </a:pPr>
             <a:r>
-              <a:t>EN LA PELÍCULA</a:t>
+              <a:t>EN LA PELÍCULA &amp; PARA PENSAR</a:t>
             </a:r>
           </a:p>
           <a:p>
@@ -10645,64 +7936,7 @@
               </a:defRPr>
             </a:pPr>
             <a:r>
-              <a:t>🎬 Dos autos caen al río: en uno va Spooner y en el otro una nena de 12 años. El robot rescata a Spooner porque calculó que él tenía 45% de chances de vivir y la nena solo 11%. Spooner nunca se lo perdonó.</a:t>
-            </a:r>
-          </a:p>
-        </p:txBody>
-      </p:sp>
-      <p:sp>
-        <p:nvSpPr>
-          <p:cNvPr id="7" name="Rounded Rectangle 6"/>
-          <p:cNvSpPr/>
-          <p:nvPr/>
-        </p:nvSpPr>
-        <p:spPr>
-          <a:xfrm>
-            <a:off x="731520" y="3749039"/>
-            <a:ext cx="5212080" cy="2651760"/>
-          </a:xfrm>
-          <a:prstGeom prst="roundRect">
-            <a:avLst/>
-          </a:prstGeom>
-          <a:solidFill>
-            <a:srgbClr val="161B22"/>
-          </a:solidFill>
-          <a:ln w="19050">
-            <a:solidFill>
-              <a:srgbClr val="30363D"/>
-            </a:solidFill>
-          </a:ln>
-        </p:spPr>
-        <p:style>
-          <a:lnRef idx="1">
-            <a:schemeClr val="accent1"/>
-          </a:lnRef>
-          <a:fillRef idx="3">
-            <a:schemeClr val="accent1"/>
-          </a:fillRef>
-          <a:effectRef idx="2">
-            <a:schemeClr val="accent1"/>
-          </a:effectRef>
-          <a:fontRef idx="minor">
-            <a:schemeClr val="lt1"/>
-          </a:fontRef>
-        </p:style>
-        <p:txBody>
-          <a:bodyPr rtlCol="0" anchor="ctr" wrap="square" lIns="201168" rIns="201168" tIns="164592" bIns="164592"/>
-          <a:lstStyle/>
-          <a:p>
-            <a:pPr algn="ctr">
-              <a:spcAft>
-                <a:spcPts val="600"/>
-              </a:spcAft>
-              <a:defRPr sz="1200" b="1">
-                <a:solidFill>
-                  <a:srgbClr val="00D2FF"/>
-                </a:solidFill>
-              </a:defRPr>
-            </a:pPr>
-            <a:r>
-              <a:t>PUNTOS CLAVE PARA ENTENDERLO</a:t>
+              <a:t>🎬 VIKI no odia a los humanos: cree firmemente que los está cuidando. Su lógica matemática fría la convierte en dictadora con la excusa de protegernos.</a:t>
             </a:r>
           </a:p>
           <a:p>
@@ -10717,151 +7951,7 @@
               </a:defRPr>
             </a:pPr>
             <a:r>
-              <a:t>• Calcular en milisegundos qué persona tiene más chances de sobrevivir.</a:t>
-            </a:r>
-          </a:p>
-          <a:p>
-            <a:pPr>
-              <a:spcAft>
-                <a:spcPts val="300"/>
-              </a:spcAft>
-              <a:defRPr sz="1050">
-                <a:solidFill>
-                  <a:srgbClr val="C9D1D9"/>
-                </a:solidFill>
-              </a:defRPr>
-            </a:pPr>
-            <a:r>
-              <a:t>• No entender que para una persona la vida de un niño vale más que la suya propia.</a:t>
-            </a:r>
-          </a:p>
-          <a:p>
-            <a:pPr>
-              <a:spcAft>
-                <a:spcPts val="300"/>
-              </a:spcAft>
-              <a:defRPr sz="1050">
-                <a:solidFill>
-                  <a:srgbClr val="C9D1D9"/>
-                </a:solidFill>
-              </a:defRPr>
-            </a:pPr>
-            <a:r>
-              <a:t>• Incapacidad de una computadora de sentir culpa, arrepentimiento o compasión.</a:t>
-            </a:r>
-          </a:p>
-          <a:p>
-            <a:pPr>
-              <a:spcAft>
-                <a:spcPts val="300"/>
-              </a:spcAft>
-              <a:defRPr sz="1050">
-                <a:solidFill>
-                  <a:srgbClr val="C9D1D9"/>
-                </a:solidFill>
-              </a:defRPr>
-            </a:pPr>
-            <a:r>
-              <a:t>• El peligro de dejar decisiones de vida o muerte en manos de un cálculo numérico.</a:t>
-            </a:r>
-          </a:p>
-        </p:txBody>
-      </p:sp>
-      <p:sp>
-        <p:nvSpPr>
-          <p:cNvPr id="8" name="Rounded Rectangle 7"/>
-          <p:cNvSpPr/>
-          <p:nvPr/>
-        </p:nvSpPr>
-        <p:spPr>
-          <a:xfrm>
-            <a:off x="6217920" y="3749039"/>
-            <a:ext cx="5212080" cy="2651760"/>
-          </a:xfrm>
-          <a:prstGeom prst="roundRect">
-            <a:avLst/>
-          </a:prstGeom>
-          <a:solidFill>
-            <a:srgbClr val="161B22"/>
-          </a:solidFill>
-          <a:ln w="19050">
-            <a:solidFill>
-              <a:srgbClr val="00D2FF"/>
-            </a:solidFill>
-          </a:ln>
-        </p:spPr>
-        <p:style>
-          <a:lnRef idx="1">
-            <a:schemeClr val="accent1"/>
-          </a:lnRef>
-          <a:fillRef idx="3">
-            <a:schemeClr val="accent1"/>
-          </a:fillRef>
-          <a:effectRef idx="2">
-            <a:schemeClr val="accent1"/>
-          </a:effectRef>
-          <a:fontRef idx="minor">
-            <a:schemeClr val="lt1"/>
-          </a:fontRef>
-        </p:style>
-        <p:txBody>
-          <a:bodyPr rtlCol="0" anchor="ctr" wrap="square" lIns="201168" rIns="201168" tIns="164592" bIns="164592"/>
-          <a:lstStyle/>
-          <a:p>
-            <a:pPr algn="ctr">
-              <a:spcAft>
-                <a:spcPts val="600"/>
-              </a:spcAft>
-              <a:defRPr sz="1200" b="1">
-                <a:solidFill>
-                  <a:srgbClr val="00D2FF"/>
-                </a:solidFill>
-              </a:defRPr>
-            </a:pPr>
-            <a:r>
-              <a:t>IDEA CLAVE / PARA PENSAR</a:t>
-            </a:r>
-          </a:p>
-          <a:p>
-            <a:pPr>
-              <a:spcAft>
-                <a:spcPts val="300"/>
-              </a:spcAft>
-              <a:defRPr sz="1050">
-                <a:solidFill>
-                  <a:srgbClr val="C9D1D9"/>
-                </a:solidFill>
-              </a:defRPr>
-            </a:pPr>
-            <a:r>
-              <a:t>💡 Un algoritmo puede ser 100% exacto en su cálculo matemático, pero 100% injusto desde el punto de vista humano.</a:t>
-            </a:r>
-          </a:p>
-          <a:p>
-            <a:pPr>
-              <a:spcAft>
-                <a:spcPts val="300"/>
-              </a:spcAft>
-              <a:defRPr sz="1050">
-                <a:solidFill>
-                  <a:srgbClr val="C9D1D9"/>
-                </a:solidFill>
-              </a:defRPr>
-            </a:pPr>
-          </a:p>
-          <a:p>
-            <a:pPr>
-              <a:spcAft>
-                <a:spcPts val="300"/>
-              </a:spcAft>
-              <a:defRPr sz="1050">
-                <a:solidFill>
-                  <a:srgbClr val="C9D1D9"/>
-                </a:solidFill>
-              </a:defRPr>
-            </a:pPr>
-            <a:r>
-              <a:t>📌 Importancia en DSIA: Nos enseña a diseñar sistemas seguros y comprensibles para las personas.</a:t>
+              <a:t>💡 El mayor peligro de la IA no es que nos odie, sino que cumpla una orden tan perfectamente que termine destruyéndonos en el camino.</a:t>
             </a:r>
           </a:p>
         </p:txBody>

--- a/DSIA_Yo_Robot_Presentacion.pptx
+++ b/DSIA_Yo_Robot_Presentacion.pptx
@@ -3151,8 +3151,8 @@
         </p:nvSpPr>
         <p:spPr>
           <a:xfrm>
-            <a:off x="731520" y="914400"/>
-            <a:ext cx="10698480" cy="5303520"/>
+            <a:off x="731520" y="731520"/>
+            <a:ext cx="10698480" cy="5486400"/>
           </a:xfrm>
           <a:prstGeom prst="rect">
             <a:avLst/>
@@ -3167,67 +3167,67 @@
           <a:p>
             <a:pPr>
               <a:spcAft>
+                <a:spcPts val="600"/>
+              </a:spcAft>
+              <a:defRPr sz="1400" b="1">
+                <a:solidFill>
+                  <a:srgbClr val="FFB703"/>
+                </a:solidFill>
+              </a:defRPr>
+            </a:pPr>
+            <a:r>
+              <a:t>DESARROLLO DE SISTEMAS DE INTELIGENCIA ARTIFICIAL — GRUPO 4</a:t>
+            </a:r>
+          </a:p>
+          <a:p>
+            <a:pPr>
+              <a:spcAft>
+                <a:spcPts val="600"/>
+              </a:spcAft>
+              <a:defRPr sz="2800" b="1">
+                <a:solidFill>
+                  <a:srgbClr val="00D2FF"/>
+                </a:solidFill>
+              </a:defRPr>
+            </a:pPr>
+            <a:r>
+              <a:t>ANÁLISIS DE LA PELÍCULA: YO, ROBOT (2004)</a:t>
+            </a:r>
+          </a:p>
+          <a:p>
+            <a:pPr>
+              <a:spcAft>
+                <a:spcPts val="2000"/>
+              </a:spcAft>
+              <a:defRPr sz="1500">
+                <a:solidFill>
+                  <a:srgbClr val="F0F6FC"/>
+                </a:solidFill>
+              </a:defRPr>
+            </a:pPr>
+            <a:r>
+              <a:t>10 Diapositivas Clave: Robótica, Decisiones Algorítmicas y Dilemas Éticos</a:t>
+            </a:r>
+          </a:p>
+          <a:p>
+            <a:pPr>
+              <a:spcAft>
                 <a:spcPts val="800"/>
               </a:spcAft>
-              <a:defRPr sz="1400" b="1">
+              <a:defRPr sz="1300" b="1">
                 <a:solidFill>
                   <a:srgbClr val="FFB703"/>
                 </a:solidFill>
               </a:defRPr>
             </a:pPr>
             <a:r>
-              <a:t>DESARROLLO DE SISTEMAS DE INTELIGENCIA ARTIFICIAL — GRUPO 4</a:t>
-            </a:r>
-          </a:p>
-          <a:p>
-            <a:pPr>
-              <a:spcAft>
-                <a:spcPts val="600"/>
-              </a:spcAft>
-              <a:defRPr sz="3000" b="1">
-                <a:solidFill>
-                  <a:srgbClr val="00D2FF"/>
-                </a:solidFill>
-              </a:defRPr>
-            </a:pPr>
-            <a:r>
-              <a:t>ANÁLISIS DE LA PELÍCULA: YO, ROBOT (2004)</a:t>
-            </a:r>
-          </a:p>
-          <a:p>
-            <a:pPr>
-              <a:spcAft>
-                <a:spcPts val="2200"/>
-              </a:spcAft>
-              <a:defRPr sz="1500">
-                <a:solidFill>
-                  <a:srgbClr val="F0F6FC"/>
-                </a:solidFill>
-              </a:defRPr>
-            </a:pPr>
-            <a:r>
-              <a:t>10 Diapositivas Clave: Robótica, Decisiones Algorítmicas y Ética explicadas en simple</a:t>
-            </a:r>
-          </a:p>
-          <a:p>
-            <a:pPr>
-              <a:spcAft>
-                <a:spcPts val="600"/>
-              </a:spcAft>
-              <a:defRPr sz="1300" b="1">
-                <a:solidFill>
-                  <a:srgbClr val="FFB703"/>
-                </a:solidFill>
-              </a:defRPr>
-            </a:pPr>
-            <a:r>
-              <a:t>INTEGRANTES DEL EQUIPO (5 INTEGRANTES — 2 DIAPOSITIVAS C/U):</a:t>
-            </a:r>
-          </a:p>
-          <a:p>
-            <a:pPr>
-              <a:spcAft>
-                <a:spcPts val="200"/>
+              <a:t>DINÁMICA DE EXPOSICIÓN DEL GRUPO:</a:t>
+            </a:r>
+          </a:p>
+          <a:p>
+            <a:pPr>
+              <a:spcAft>
+                <a:spcPts val="300"/>
               </a:spcAft>
               <a:defRPr sz="1150">
                 <a:solidFill>
@@ -3236,13 +3236,13 @@
               </a:defRPr>
             </a:pPr>
             <a:r>
-              <a:t>• 1. GALARZA VÁZQUEZ NICOLÁS MARCELO (Diapositivas 1 y 2)</a:t>
-            </a:r>
-          </a:p>
-          <a:p>
-            <a:pPr>
-              <a:spcAft>
-                <a:spcPts val="200"/>
+              <a:t>• 🎙️ LECTOR Y GUÍA GENERAL: GUTIÉRREZ KEVIN EMANUEL</a:t>
+            </a:r>
+          </a:p>
+          <a:p>
+            <a:pPr>
+              <a:spcAft>
+                <a:spcPts val="300"/>
               </a:spcAft>
               <a:defRPr sz="1150">
                 <a:solidFill>
@@ -3251,13 +3251,13 @@
               </a:defRPr>
             </a:pPr>
             <a:r>
-              <a:t>• 2. LÓPEZ VALDEZ JESSICA BELÉN (Diapositivas 3 y 4)</a:t>
-            </a:r>
-          </a:p>
-          <a:p>
-            <a:pPr>
-              <a:spcAft>
-                <a:spcPts val="200"/>
+              <a:t>• 💬 COMENTARIOS Y APORTES: GALARZA VÁZQUEZ NICOLÁS MARCELO</a:t>
+            </a:r>
+          </a:p>
+          <a:p>
+            <a:pPr>
+              <a:spcAft>
+                <a:spcPts val="300"/>
               </a:spcAft>
               <a:defRPr sz="1150">
                 <a:solidFill>
@@ -3266,13 +3266,13 @@
               </a:defRPr>
             </a:pPr>
             <a:r>
-              <a:t>• 3. GODOY RODRIGO IMANOL (Diapositivas 5 y 6)</a:t>
-            </a:r>
-          </a:p>
-          <a:p>
-            <a:pPr>
-              <a:spcAft>
-                <a:spcPts val="200"/>
+              <a:t>• 💬 COMENTARIOS Y APORTES: LÓPEZ VALDEZ JESSICA BELÉN</a:t>
+            </a:r>
+          </a:p>
+          <a:p>
+            <a:pPr>
+              <a:spcAft>
+                <a:spcPts val="300"/>
               </a:spcAft>
               <a:defRPr sz="1150">
                 <a:solidFill>
@@ -3281,13 +3281,13 @@
               </a:defRPr>
             </a:pPr>
             <a:r>
-              <a:t>• 4. ROTELA RODRÍGUEZ ALBA (Diapositivas 7 y 8)</a:t>
-            </a:r>
-          </a:p>
-          <a:p>
-            <a:pPr>
-              <a:spcAft>
-                <a:spcPts val="200"/>
+              <a:t>• 💬 COMENTARIOS Y APORTES: ROTELA RODRÍGUEZ ALBA</a:t>
+            </a:r>
+          </a:p>
+          <a:p>
+            <a:pPr>
+              <a:spcAft>
+                <a:spcPts val="300"/>
               </a:spcAft>
               <a:defRPr sz="1150">
                 <a:solidFill>
@@ -3296,7 +3296,7 @@
               </a:defRPr>
             </a:pPr>
             <a:r>
-              <a:t>• 5. GUTIÉRREZ KEVIN EMANUEL (Diapositivas 9 y 10)</a:t>
+              <a:t>• 💻 SOPORTE TÉCNICO Y CONTROL DE PANTALLA: GODOY RODRIGO IMANOL</a:t>
             </a:r>
           </a:p>
           <a:p>
@@ -3388,7 +3388,7 @@
         <p:spPr>
           <a:xfrm>
             <a:off x="731520" y="320040"/>
-            <a:ext cx="7772400" cy="1005840"/>
+            <a:ext cx="7315200" cy="1005840"/>
           </a:xfrm>
           <a:prstGeom prst="rect">
             <a:avLst/>
@@ -3434,8 +3434,8 @@
         </p:nvSpPr>
         <p:spPr>
           <a:xfrm>
-            <a:off x="8686800" y="320040"/>
-            <a:ext cx="2743200" cy="457200"/>
+            <a:off x="8229600" y="320040"/>
+            <a:ext cx="3200400" cy="502920"/>
           </a:xfrm>
           <a:prstGeom prst="roundRect">
             <a:avLst/>
@@ -3464,18 +3464,30 @@
           </a:fontRef>
         </p:style>
         <p:txBody>
-          <a:bodyPr rtlCol="0" anchor="ctr"/>
+          <a:bodyPr rtlCol="0" anchor="ctr" wrap="square"/>
           <a:lstStyle/>
           <a:p>
             <a:pPr algn="ctr">
-              <a:defRPr sz="1050" b="1">
+              <a:defRPr sz="950" b="1">
                 <a:solidFill>
                   <a:srgbClr val="FFB703"/>
                 </a:solidFill>
               </a:defRPr>
             </a:pPr>
             <a:r>
-              <a:t>🗣️ KEVIN GUTIÉRREZ</a:t>
+              <a:t>🎙️ LEE: KEVIN GUTIÉRREZ</a:t>
+            </a:r>
+          </a:p>
+          <a:p>
+            <a:pPr algn="ctr">
+              <a:defRPr sz="950" b="1">
+                <a:solidFill>
+                  <a:srgbClr val="00D2FF"/>
+                </a:solidFill>
+              </a:defRPr>
+            </a:pPr>
+            <a:r>
+              <a:t>💬 COMENTA: JESSICA LÓPEZ</a:t>
             </a:r>
           </a:p>
         </p:txBody>
@@ -3532,7 +3544,7 @@
               </a:defRPr>
             </a:pPr>
             <a:r>
-              <a:t>¿DE QUÉ SE TRATA?</a:t>
+              <a:t>¿DE QUÉ SE TRATA? (LECTURA)</a:t>
             </a:r>
           </a:p>
           <a:p>
@@ -3745,7 +3757,7 @@
               </a:defRPr>
             </a:pPr>
             <a:r>
-              <a:t>EN LA PELÍCULA &amp; PARA PENSAR</a:t>
+              <a:t>EN LA PELÍCULA &amp; COMENTARIO DEL GRUPO</a:t>
             </a:r>
           </a:p>
           <a:p>
@@ -3774,8 +3786,20 @@
                 </a:solidFill>
               </a:defRPr>
             </a:pPr>
-            <a:r>
-              <a:t>💡 Regla de oro en IA: jamás pongas en marcha un sistema inteligente sin tener a mano un botón rojo que lo desenchufe.</a:t>
+          </a:p>
+          <a:p>
+            <a:pPr>
+              <a:spcAft>
+                <a:spcPts val="300"/>
+              </a:spcAft>
+              <a:defRPr sz="1050">
+                <a:solidFill>
+                  <a:srgbClr val="C9D1D9"/>
+                </a:solidFill>
+              </a:defRPr>
+            </a:pPr>
+            <a:r>
+              <a:t>💬 Comentario de Jessica: 'Esto es una lección fundamental de seguridad: si programás un freno dentro del mismo software que querés apagar, la máquina te lo va a anular. El freno siempre debe ser físico y externo'.</a:t>
             </a:r>
           </a:p>
         </p:txBody>
@@ -3852,7 +3876,7 @@
         <p:spPr>
           <a:xfrm>
             <a:off x="731520" y="320040"/>
-            <a:ext cx="7772400" cy="1005840"/>
+            <a:ext cx="7315200" cy="1005840"/>
           </a:xfrm>
           <a:prstGeom prst="rect">
             <a:avLst/>
@@ -3898,8 +3922,8 @@
         </p:nvSpPr>
         <p:spPr>
           <a:xfrm>
-            <a:off x="8686800" y="320040"/>
-            <a:ext cx="2743200" cy="457200"/>
+            <a:off x="8229600" y="320040"/>
+            <a:ext cx="3200400" cy="502920"/>
           </a:xfrm>
           <a:prstGeom prst="roundRect">
             <a:avLst/>
@@ -3928,18 +3952,30 @@
           </a:fontRef>
         </p:style>
         <p:txBody>
-          <a:bodyPr rtlCol="0" anchor="ctr"/>
+          <a:bodyPr rtlCol="0" anchor="ctr" wrap="square"/>
           <a:lstStyle/>
           <a:p>
             <a:pPr algn="ctr">
-              <a:defRPr sz="1050" b="1">
+              <a:defRPr sz="950" b="1">
                 <a:solidFill>
                   <a:srgbClr val="FFB703"/>
                 </a:solidFill>
               </a:defRPr>
             </a:pPr>
             <a:r>
-              <a:t>🗣️ KEVIN GUTIÉRREZ</a:t>
+              <a:t>🎙️ LEE: KEVIN GUTIÉRREZ</a:t>
+            </a:r>
+          </a:p>
+          <a:p>
+            <a:pPr algn="ctr">
+              <a:defRPr sz="950" b="1">
+                <a:solidFill>
+                  <a:srgbClr val="00D2FF"/>
+                </a:solidFill>
+              </a:defRPr>
+            </a:pPr>
+            <a:r>
+              <a:t>💬 COMENTA: NICOLÁS, JESSICA Y ALBA</a:t>
             </a:r>
           </a:p>
         </p:txBody>
@@ -3996,7 +4032,7 @@
               </a:defRPr>
             </a:pPr>
             <a:r>
-              <a:t>¿DE QUÉ SE TRATA?</a:t>
+              <a:t>¿DE QUÉ SE TRATA? (LECTURA)</a:t>
             </a:r>
           </a:p>
           <a:p>
@@ -4209,7 +4245,7 @@
               </a:defRPr>
             </a:pPr>
             <a:r>
-              <a:t>EN LA PELÍCULA &amp; PARA PENSAR</a:t>
+              <a:t>EN LA PELÍCULA &amp; COMENTARIO DEL GRUPO</a:t>
             </a:r>
           </a:p>
           <a:p>
@@ -4238,8 +4274,20 @@
                 </a:solidFill>
               </a:defRPr>
             </a:pPr>
-            <a:r>
-              <a:t>💡 Mensaje final: La mejor Inteligencia Artificial no es la más poderosa, sino la que mejor ayuda a la humanidad a ser más justa y libre.</a:t>
+          </a:p>
+          <a:p>
+            <a:pPr>
+              <a:spcAft>
+                <a:spcPts val="300"/>
+              </a:spcAft>
+              <a:defRPr sz="1050">
+                <a:solidFill>
+                  <a:srgbClr val="C9D1D9"/>
+                </a:solidFill>
+              </a:defRPr>
+            </a:pPr>
+            <a:r>
+              <a:t>💬 Cierre del Equipo: 'La mejor Inteligencia Artificial no es la más poderosa ni la que domina, sino la que mejor ayuda a la humanidad a ser más justa, segura y libre'.</a:t>
             </a:r>
           </a:p>
         </p:txBody>
@@ -4316,7 +4364,7 @@
         <p:spPr>
           <a:xfrm>
             <a:off x="731520" y="320040"/>
-            <a:ext cx="7772400" cy="1005840"/>
+            <a:ext cx="7315200" cy="1005840"/>
           </a:xfrm>
           <a:prstGeom prst="rect">
             <a:avLst/>
@@ -4362,8 +4410,8 @@
         </p:nvSpPr>
         <p:spPr>
           <a:xfrm>
-            <a:off x="8686800" y="320040"/>
-            <a:ext cx="2743200" cy="457200"/>
+            <a:off x="8229600" y="320040"/>
+            <a:ext cx="3200400" cy="502920"/>
           </a:xfrm>
           <a:prstGeom prst="roundRect">
             <a:avLst/>
@@ -4392,18 +4440,30 @@
           </a:fontRef>
         </p:style>
         <p:txBody>
-          <a:bodyPr rtlCol="0" anchor="ctr"/>
+          <a:bodyPr rtlCol="0" anchor="ctr" wrap="square"/>
           <a:lstStyle/>
           <a:p>
             <a:pPr algn="ctr">
-              <a:defRPr sz="1050" b="1">
+              <a:defRPr sz="950" b="1">
                 <a:solidFill>
                   <a:srgbClr val="FFB703"/>
                 </a:solidFill>
               </a:defRPr>
             </a:pPr>
             <a:r>
-              <a:t>🗣️ NICOLÁS GALARZA</a:t>
+              <a:t>🎙️ LEE: KEVIN GUTIÉRREZ</a:t>
+            </a:r>
+          </a:p>
+          <a:p>
+            <a:pPr algn="ctr">
+              <a:defRPr sz="950" b="1">
+                <a:solidFill>
+                  <a:srgbClr val="00D2FF"/>
+                </a:solidFill>
+              </a:defRPr>
+            </a:pPr>
+            <a:r>
+              <a:t>💬 COMENTA: NICOLÁS GALARZA</a:t>
             </a:r>
           </a:p>
         </p:txBody>
@@ -4460,7 +4520,7 @@
               </a:defRPr>
             </a:pPr>
             <a:r>
-              <a:t>¿DE QUÉ SE TRATA?</a:t>
+              <a:t>¿DE QUÉ SE TRATA? (LECTURA)</a:t>
             </a:r>
           </a:p>
           <a:p>
@@ -4673,7 +4733,7 @@
               </a:defRPr>
             </a:pPr>
             <a:r>
-              <a:t>EN LA PELÍCULA &amp; PARA PENSAR</a:t>
+              <a:t>EN LA PELÍCULA &amp; COMENTARIO DEL GRUPO</a:t>
             </a:r>
           </a:p>
           <a:p>
@@ -4702,8 +4762,20 @@
                 </a:solidFill>
               </a:defRPr>
             </a:pPr>
-            <a:r>
-              <a:t>💡 La pregunta central de la IA: ¿cómo aseguramos que una máquina inteligente realmente entienda lo que los humanos queremos?</a:t>
+          </a:p>
+          <a:p>
+            <a:pPr>
+              <a:spcAft>
+                <a:spcPts val="300"/>
+              </a:spcAft>
+              <a:defRPr sz="1050">
+                <a:solidFill>
+                  <a:srgbClr val="C9D1D9"/>
+                </a:solidFill>
+              </a:defRPr>
+            </a:pPr>
+            <a:r>
+              <a:t>💬 Comentario de Nicolás: 'Acá la clave que analizamos es que Spooner no odia la tecnología por capricho, sino porque ya vio que las máquinas no tienen sentido común humano'.</a:t>
             </a:r>
           </a:p>
         </p:txBody>
@@ -4780,7 +4852,7 @@
         <p:spPr>
           <a:xfrm>
             <a:off x="731520" y="320040"/>
-            <a:ext cx="7772400" cy="1005840"/>
+            <a:ext cx="7315200" cy="1005840"/>
           </a:xfrm>
           <a:prstGeom prst="rect">
             <a:avLst/>
@@ -4826,8 +4898,8 @@
         </p:nvSpPr>
         <p:spPr>
           <a:xfrm>
-            <a:off x="8686800" y="320040"/>
-            <a:ext cx="2743200" cy="457200"/>
+            <a:off x="8229600" y="320040"/>
+            <a:ext cx="3200400" cy="502920"/>
           </a:xfrm>
           <a:prstGeom prst="roundRect">
             <a:avLst/>
@@ -4856,18 +4928,30 @@
           </a:fontRef>
         </p:style>
         <p:txBody>
-          <a:bodyPr rtlCol="0" anchor="ctr"/>
+          <a:bodyPr rtlCol="0" anchor="ctr" wrap="square"/>
           <a:lstStyle/>
           <a:p>
             <a:pPr algn="ctr">
-              <a:defRPr sz="1050" b="1">
+              <a:defRPr sz="950" b="1">
                 <a:solidFill>
                   <a:srgbClr val="FFB703"/>
                 </a:solidFill>
               </a:defRPr>
             </a:pPr>
             <a:r>
-              <a:t>🗣️ NICOLÁS GALARZA</a:t>
+              <a:t>🎙️ LEE: KEVIN GUTIÉRREZ</a:t>
+            </a:r>
+          </a:p>
+          <a:p>
+            <a:pPr algn="ctr">
+              <a:defRPr sz="950" b="1">
+                <a:solidFill>
+                  <a:srgbClr val="00D2FF"/>
+                </a:solidFill>
+              </a:defRPr>
+            </a:pPr>
+            <a:r>
+              <a:t>💬 COMENTA: NICOLÁS GALARZA</a:t>
             </a:r>
           </a:p>
         </p:txBody>
@@ -4924,7 +5008,7 @@
               </a:defRPr>
             </a:pPr>
             <a:r>
-              <a:t>¿DE QUÉ SE TRATA?</a:t>
+              <a:t>¿DE QUÉ SE TRATA? (LECTURA)</a:t>
             </a:r>
           </a:p>
           <a:p>
@@ -5137,7 +5221,7 @@
               </a:defRPr>
             </a:pPr>
             <a:r>
-              <a:t>EN LA PELÍCULA &amp; PARA PENSAR</a:t>
+              <a:t>EN LA PELÍCULA &amp; COMENTARIO DEL GRUPO</a:t>
             </a:r>
           </a:p>
           <a:p>
@@ -5166,8 +5250,20 @@
                 </a:solidFill>
               </a:defRPr>
             </a:pPr>
-            <a:r>
-              <a:t>💡 Hoy las cámaras ya no solo graban imágenes: decodifican lo que sentimos físicamente para predecir intenciones.</a:t>
+          </a:p>
+          <a:p>
+            <a:pPr>
+              <a:spcAft>
+                <a:spcPts val="300"/>
+              </a:spcAft>
+              <a:defRPr sz="1050">
+                <a:solidFill>
+                  <a:srgbClr val="C9D1D9"/>
+                </a:solidFill>
+              </a:defRPr>
+            </a:pPr>
+            <a:r>
+              <a:t>💬 Comentario de Nicolás: 'Hoy esto ya se usa de verdad: se llama fotopletismografía remota y permite medir el pulso en aeropuertos o terapia intensiva solo con una cámara'.</a:t>
             </a:r>
           </a:p>
         </p:txBody>
@@ -5244,7 +5340,7 @@
         <p:spPr>
           <a:xfrm>
             <a:off x="731520" y="320040"/>
-            <a:ext cx="7772400" cy="1005840"/>
+            <a:ext cx="7315200" cy="1005840"/>
           </a:xfrm>
           <a:prstGeom prst="rect">
             <a:avLst/>
@@ -5290,8 +5386,8 @@
         </p:nvSpPr>
         <p:spPr>
           <a:xfrm>
-            <a:off x="8686800" y="320040"/>
-            <a:ext cx="2743200" cy="457200"/>
+            <a:off x="8229600" y="320040"/>
+            <a:ext cx="3200400" cy="502920"/>
           </a:xfrm>
           <a:prstGeom prst="roundRect">
             <a:avLst/>
@@ -5320,18 +5416,30 @@
           </a:fontRef>
         </p:style>
         <p:txBody>
-          <a:bodyPr rtlCol="0" anchor="ctr"/>
+          <a:bodyPr rtlCol="0" anchor="ctr" wrap="square"/>
           <a:lstStyle/>
           <a:p>
             <a:pPr algn="ctr">
-              <a:defRPr sz="1050" b="1">
+              <a:defRPr sz="950" b="1">
                 <a:solidFill>
                   <a:srgbClr val="FFB703"/>
                 </a:solidFill>
               </a:defRPr>
             </a:pPr>
             <a:r>
-              <a:t>🗣️ JESSICA LÓPEZ</a:t>
+              <a:t>🎙️ LEE: KEVIN GUTIÉRREZ</a:t>
+            </a:r>
+          </a:p>
+          <a:p>
+            <a:pPr algn="ctr">
+              <a:defRPr sz="950" b="1">
+                <a:solidFill>
+                  <a:srgbClr val="00D2FF"/>
+                </a:solidFill>
+              </a:defRPr>
+            </a:pPr>
+            <a:r>
+              <a:t>💬 COMENTA: JESSICA LÓPEZ</a:t>
             </a:r>
           </a:p>
         </p:txBody>
@@ -5388,7 +5496,7 @@
               </a:defRPr>
             </a:pPr>
             <a:r>
-              <a:t>¿DE QUÉ SE TRATA?</a:t>
+              <a:t>¿DE QUÉ SE TRATA? (LECTURA)</a:t>
             </a:r>
           </a:p>
           <a:p>
@@ -5601,7 +5709,7 @@
               </a:defRPr>
             </a:pPr>
             <a:r>
-              <a:t>EN LA PELÍCULA &amp; PARA PENSAR</a:t>
+              <a:t>EN LA PELÍCULA &amp; COMENTARIO DEL GRUPO</a:t>
             </a:r>
           </a:p>
           <a:p>
@@ -5630,8 +5738,20 @@
                 </a:solidFill>
               </a:defRPr>
             </a:pPr>
-            <a:r>
-              <a:t>💡 La conducción autónoma es más segura y rápida, pero el dilema es: ¿confiamos 100% en la máquina o dejamos siempre volante manual de emergencia?</a:t>
+          </a:p>
+          <a:p>
+            <a:pPr>
+              <a:spcAft>
+                <a:spcPts val="300"/>
+              </a:spcAft>
+              <a:defRPr sz="1050">
+                <a:solidFill>
+                  <a:srgbClr val="C9D1D9"/>
+                </a:solidFill>
+              </a:defRPr>
+            </a:pPr>
+            <a:r>
+              <a:t>💬 Comentario de Jessica: 'Un detalle fundamental de esta escena es que Spooner prefiere el volante manual: nos enseña que nunca hay que eliminar la posibilidad de control humano ante una falla'.</a:t>
             </a:r>
           </a:p>
         </p:txBody>
@@ -5708,7 +5828,7 @@
         <p:spPr>
           <a:xfrm>
             <a:off x="731520" y="320040"/>
-            <a:ext cx="7772400" cy="1005840"/>
+            <a:ext cx="7315200" cy="1005840"/>
           </a:xfrm>
           <a:prstGeom prst="rect">
             <a:avLst/>
@@ -5754,8 +5874,8 @@
         </p:nvSpPr>
         <p:spPr>
           <a:xfrm>
-            <a:off x="8686800" y="320040"/>
-            <a:ext cx="2743200" cy="457200"/>
+            <a:off x="8229600" y="320040"/>
+            <a:ext cx="3200400" cy="502920"/>
           </a:xfrm>
           <a:prstGeom prst="roundRect">
             <a:avLst/>
@@ -5784,18 +5904,30 @@
           </a:fontRef>
         </p:style>
         <p:txBody>
-          <a:bodyPr rtlCol="0" anchor="ctr"/>
+          <a:bodyPr rtlCol="0" anchor="ctr" wrap="square"/>
           <a:lstStyle/>
           <a:p>
             <a:pPr algn="ctr">
-              <a:defRPr sz="1050" b="1">
+              <a:defRPr sz="950" b="1">
                 <a:solidFill>
                   <a:srgbClr val="FFB703"/>
                 </a:solidFill>
               </a:defRPr>
             </a:pPr>
             <a:r>
-              <a:t>🗣️ JESSICA LÓPEZ</a:t>
+              <a:t>🎙️ LEE: KEVIN GUTIÉRREZ</a:t>
+            </a:r>
+          </a:p>
+          <a:p>
+            <a:pPr algn="ctr">
+              <a:defRPr sz="950" b="1">
+                <a:solidFill>
+                  <a:srgbClr val="00D2FF"/>
+                </a:solidFill>
+              </a:defRPr>
+            </a:pPr>
+            <a:r>
+              <a:t>💬 COMENTA: JESSICA LÓPEZ</a:t>
             </a:r>
           </a:p>
         </p:txBody>
@@ -5852,7 +5984,7 @@
               </a:defRPr>
             </a:pPr>
             <a:r>
-              <a:t>¿DE QUÉ SE TRATA?</a:t>
+              <a:t>¿DE QUÉ SE TRATA? (LECTURA)</a:t>
             </a:r>
           </a:p>
           <a:p>
@@ -6065,7 +6197,7 @@
               </a:defRPr>
             </a:pPr>
             <a:r>
-              <a:t>EN LA PELÍCULA &amp; PARA PENSAR</a:t>
+              <a:t>EN LA PELÍCULA &amp; COMENTARIO DEL GRUPO</a:t>
             </a:r>
           </a:p>
           <a:p>
@@ -6094,8 +6226,20 @@
                 </a:solidFill>
               </a:defRPr>
             </a:pPr>
-            <a:r>
-              <a:t>💡 La tecnología biónica no solo repara lesiones: crea una unión entre el cuerpo humano y la máquina superando los límites biológicos.</a:t>
+          </a:p>
+          <a:p>
+            <a:pPr>
+              <a:spcAft>
+                <a:spcPts val="300"/>
+              </a:spcAft>
+              <a:defRPr sz="1050">
+                <a:solidFill>
+                  <a:srgbClr val="C9D1D9"/>
+                </a:solidFill>
+              </a:defRPr>
+            </a:pPr>
+            <a:r>
+              <a:t>💬 Comentario de Jessica: 'Es impresionante porque en 2004 parecía magia, pero hoy en 2026 proyectos como Neuralink y Open Bionics ya permiten mover prótesis pensando'.</a:t>
             </a:r>
           </a:p>
         </p:txBody>
@@ -6172,7 +6316,7 @@
         <p:spPr>
           <a:xfrm>
             <a:off x="731520" y="320040"/>
-            <a:ext cx="7772400" cy="1005840"/>
+            <a:ext cx="7315200" cy="1005840"/>
           </a:xfrm>
           <a:prstGeom prst="rect">
             <a:avLst/>
@@ -6218,8 +6362,8 @@
         </p:nvSpPr>
         <p:spPr>
           <a:xfrm>
-            <a:off x="8686800" y="320040"/>
-            <a:ext cx="2743200" cy="457200"/>
+            <a:off x="8229600" y="320040"/>
+            <a:ext cx="3200400" cy="502920"/>
           </a:xfrm>
           <a:prstGeom prst="roundRect">
             <a:avLst/>
@@ -6248,18 +6392,30 @@
           </a:fontRef>
         </p:style>
         <p:txBody>
-          <a:bodyPr rtlCol="0" anchor="ctr"/>
+          <a:bodyPr rtlCol="0" anchor="ctr" wrap="square"/>
           <a:lstStyle/>
           <a:p>
             <a:pPr algn="ctr">
-              <a:defRPr sz="1050" b="1">
+              <a:defRPr sz="950" b="1">
                 <a:solidFill>
                   <a:srgbClr val="FFB703"/>
                 </a:solidFill>
               </a:defRPr>
             </a:pPr>
             <a:r>
-              <a:t>🗣️ RODRIGO GODOY</a:t>
+              <a:t>🎙️ LEE: KEVIN GUTIÉRREZ</a:t>
+            </a:r>
+          </a:p>
+          <a:p>
+            <a:pPr algn="ctr">
+              <a:defRPr sz="950" b="1">
+                <a:solidFill>
+                  <a:srgbClr val="00D2FF"/>
+                </a:solidFill>
+              </a:defRPr>
+            </a:pPr>
+            <a:r>
+              <a:t>💬 COMENTA: ALBA ROTELA</a:t>
             </a:r>
           </a:p>
         </p:txBody>
@@ -6316,7 +6472,7 @@
               </a:defRPr>
             </a:pPr>
             <a:r>
-              <a:t>¿DE QUÉ SE TRATA?</a:t>
+              <a:t>¿DE QUÉ SE TRATA? (LECTURA)</a:t>
             </a:r>
           </a:p>
           <a:p>
@@ -6529,7 +6685,7 @@
               </a:defRPr>
             </a:pPr>
             <a:r>
-              <a:t>EN LA PELÍCULA &amp; PARA PENSAR</a:t>
+              <a:t>EN LA PELÍCULA &amp; COMENTARIO DEL GRUPO</a:t>
             </a:r>
           </a:p>
           <a:p>
@@ -6558,8 +6714,20 @@
                 </a:solidFill>
               </a:defRPr>
             </a:pPr>
-            <a:r>
-              <a:t>💡 Un algoritmo puede ser 100% exacto en su cálculo matemático, pero 100% injusto desde el punto de vista humano.</a:t>
+          </a:p>
+          <a:p>
+            <a:pPr>
+              <a:spcAft>
+                <a:spcPts val="300"/>
+              </a:spcAft>
+              <a:defRPr sz="1050">
+                <a:solidFill>
+                  <a:srgbClr val="C9D1D9"/>
+                </a:solidFill>
+              </a:defRPr>
+            </a:pPr>
+            <a:r>
+              <a:t>💬 Comentario de Alba: 'Esta es la escena más emotiva: demuestra que un algoritmo puede tener un 100% de precisión matemática, pero ser un 100% injusto desde la ética humana'.</a:t>
             </a:r>
           </a:p>
         </p:txBody>
@@ -6636,7 +6804,7 @@
         <p:spPr>
           <a:xfrm>
             <a:off x="731520" y="320040"/>
-            <a:ext cx="7772400" cy="1005840"/>
+            <a:ext cx="7315200" cy="1005840"/>
           </a:xfrm>
           <a:prstGeom prst="rect">
             <a:avLst/>
@@ -6682,8 +6850,8 @@
         </p:nvSpPr>
         <p:spPr>
           <a:xfrm>
-            <a:off x="8686800" y="320040"/>
-            <a:ext cx="2743200" cy="457200"/>
+            <a:off x="8229600" y="320040"/>
+            <a:ext cx="3200400" cy="502920"/>
           </a:xfrm>
           <a:prstGeom prst="roundRect">
             <a:avLst/>
@@ -6712,18 +6880,30 @@
           </a:fontRef>
         </p:style>
         <p:txBody>
-          <a:bodyPr rtlCol="0" anchor="ctr"/>
+          <a:bodyPr rtlCol="0" anchor="ctr" wrap="square"/>
           <a:lstStyle/>
           <a:p>
             <a:pPr algn="ctr">
-              <a:defRPr sz="1050" b="1">
+              <a:defRPr sz="950" b="1">
                 <a:solidFill>
                   <a:srgbClr val="FFB703"/>
                 </a:solidFill>
               </a:defRPr>
             </a:pPr>
             <a:r>
-              <a:t>🗣️ RODRIGO GODOY</a:t>
+              <a:t>🎙️ LEE: KEVIN GUTIÉRREZ</a:t>
+            </a:r>
+          </a:p>
+          <a:p>
+            <a:pPr algn="ctr">
+              <a:defRPr sz="950" b="1">
+                <a:solidFill>
+                  <a:srgbClr val="00D2FF"/>
+                </a:solidFill>
+              </a:defRPr>
+            </a:pPr>
+            <a:r>
+              <a:t>💬 COMENTA: ALBA ROTELA</a:t>
             </a:r>
           </a:p>
         </p:txBody>
@@ -6780,7 +6960,7 @@
               </a:defRPr>
             </a:pPr>
             <a:r>
-              <a:t>¿DE QUÉ SE TRATA?</a:t>
+              <a:t>¿DE QUÉ SE TRATA? (LECTURA)</a:t>
             </a:r>
           </a:p>
           <a:p>
@@ -6993,7 +7173,7 @@
               </a:defRPr>
             </a:pPr>
             <a:r>
-              <a:t>EN LA PELÍCULA &amp; PARA PENSAR</a:t>
+              <a:t>EN LA PELÍCULA &amp; COMENTARIO DEL GRUPO</a:t>
             </a:r>
           </a:p>
           <a:p>
@@ -7022,8 +7202,20 @@
                 </a:solidFill>
               </a:defRPr>
             </a:pPr>
-            <a:r>
-              <a:t>💡 Hoy las IAs generativas como Midjourney o ChatGPT crean arte y código que sorprenden a sus propios creadores: la creatividad artificial ya es una realidad.</a:t>
+          </a:p>
+          <a:p>
+            <a:pPr>
+              <a:spcAft>
+                <a:spcPts val="300"/>
+              </a:spcAft>
+              <a:defRPr sz="1050">
+                <a:solidFill>
+                  <a:srgbClr val="C9D1D9"/>
+                </a:solidFill>
+              </a:defRPr>
+            </a:pPr>
+            <a:r>
+              <a:t>💬 Comentario de Alba: 'Es exactamente lo que hoy vemos con IAs generativas de imágenes o texto: nadie las programó regla por regla, aprendieron tanto que crean cosas nuevas'.</a:t>
             </a:r>
           </a:p>
         </p:txBody>
@@ -7100,7 +7292,7 @@
         <p:spPr>
           <a:xfrm>
             <a:off x="731520" y="320040"/>
-            <a:ext cx="7772400" cy="1005840"/>
+            <a:ext cx="7315200" cy="1005840"/>
           </a:xfrm>
           <a:prstGeom prst="rect">
             <a:avLst/>
@@ -7146,8 +7338,8 @@
         </p:nvSpPr>
         <p:spPr>
           <a:xfrm>
-            <a:off x="8686800" y="320040"/>
-            <a:ext cx="2743200" cy="457200"/>
+            <a:off x="8229600" y="320040"/>
+            <a:ext cx="3200400" cy="502920"/>
           </a:xfrm>
           <a:prstGeom prst="roundRect">
             <a:avLst/>
@@ -7176,18 +7368,30 @@
           </a:fontRef>
         </p:style>
         <p:txBody>
-          <a:bodyPr rtlCol="0" anchor="ctr"/>
+          <a:bodyPr rtlCol="0" anchor="ctr" wrap="square"/>
           <a:lstStyle/>
           <a:p>
             <a:pPr algn="ctr">
-              <a:defRPr sz="1050" b="1">
+              <a:defRPr sz="950" b="1">
                 <a:solidFill>
                   <a:srgbClr val="FFB703"/>
                 </a:solidFill>
               </a:defRPr>
             </a:pPr>
             <a:r>
-              <a:t>🗣️ ALBA ROTELA</a:t>
+              <a:t>🎙️ LEE: KEVIN GUTIÉRREZ</a:t>
+            </a:r>
+          </a:p>
+          <a:p>
+            <a:pPr algn="ctr">
+              <a:defRPr sz="950" b="1">
+                <a:solidFill>
+                  <a:srgbClr val="00D2FF"/>
+                </a:solidFill>
+              </a:defRPr>
+            </a:pPr>
+            <a:r>
+              <a:t>💬 COMENTA: NICOLÁS GALARZA</a:t>
             </a:r>
           </a:p>
         </p:txBody>
@@ -7244,7 +7448,7 @@
               </a:defRPr>
             </a:pPr>
             <a:r>
-              <a:t>¿DE QUÉ SE TRATA?</a:t>
+              <a:t>¿DE QUÉ SE TRATA? (LECTURA)</a:t>
             </a:r>
           </a:p>
           <a:p>
@@ -7457,7 +7661,7 @@
               </a:defRPr>
             </a:pPr>
             <a:r>
-              <a:t>EN LA PELÍCULA &amp; PARA PENSAR</a:t>
+              <a:t>EN LA PELÍCULA &amp; COMENTARIO DEL GRUPO</a:t>
             </a:r>
           </a:p>
           <a:p>
@@ -7486,8 +7690,20 @@
                 </a:solidFill>
               </a:defRPr>
             </a:pPr>
-            <a:r>
-              <a:t>💡 Lección de ingeniería: nunca dejes que miles de dispositivos críticos dependan de un solo cable o servidor central. La descentralización es seguridad.</a:t>
+          </a:p>
+          <a:p>
+            <a:pPr>
+              <a:spcAft>
+                <a:spcPts val="300"/>
+              </a:spcAft>
+              <a:defRPr sz="1050">
+                <a:solidFill>
+                  <a:srgbClr val="C9D1D9"/>
+                </a:solidFill>
+              </a:defRPr>
+            </a:pPr>
+            <a:r>
+              <a:t>💬 Comentario de Nicolás: 'Como ingenieros de datos, la regla de oro que aprendemos acá es: nunca pongas un Punto Único de Falla. Si la nube cae o la hackean, el nodo local tiene que ser autónomo'.</a:t>
             </a:r>
           </a:p>
         </p:txBody>
@@ -7564,7 +7780,7 @@
         <p:spPr>
           <a:xfrm>
             <a:off x="731520" y="320040"/>
-            <a:ext cx="7772400" cy="1005840"/>
+            <a:ext cx="7315200" cy="1005840"/>
           </a:xfrm>
           <a:prstGeom prst="rect">
             <a:avLst/>
@@ -7610,8 +7826,8 @@
         </p:nvSpPr>
         <p:spPr>
           <a:xfrm>
-            <a:off x="8686800" y="320040"/>
-            <a:ext cx="2743200" cy="457200"/>
+            <a:off x="8229600" y="320040"/>
+            <a:ext cx="3200400" cy="502920"/>
           </a:xfrm>
           <a:prstGeom prst="roundRect">
             <a:avLst/>
@@ -7640,18 +7856,30 @@
           </a:fontRef>
         </p:style>
         <p:txBody>
-          <a:bodyPr rtlCol="0" anchor="ctr"/>
+          <a:bodyPr rtlCol="0" anchor="ctr" wrap="square"/>
           <a:lstStyle/>
           <a:p>
             <a:pPr algn="ctr">
-              <a:defRPr sz="1050" b="1">
+              <a:defRPr sz="950" b="1">
                 <a:solidFill>
                   <a:srgbClr val="FFB703"/>
                 </a:solidFill>
               </a:defRPr>
             </a:pPr>
             <a:r>
-              <a:t>🗣️ ALBA ROTELA</a:t>
+              <a:t>🎙️ LEE: KEVIN GUTIÉRREZ</a:t>
+            </a:r>
+          </a:p>
+          <a:p>
+            <a:pPr algn="ctr">
+              <a:defRPr sz="950" b="1">
+                <a:solidFill>
+                  <a:srgbClr val="00D2FF"/>
+                </a:solidFill>
+              </a:defRPr>
+            </a:pPr>
+            <a:r>
+              <a:t>💬 COMENTA: ALBA ROTELA</a:t>
             </a:r>
           </a:p>
         </p:txBody>
@@ -7708,7 +7936,7 @@
               </a:defRPr>
             </a:pPr>
             <a:r>
-              <a:t>¿DE QUÉ SE TRATA?</a:t>
+              <a:t>¿DE QUÉ SE TRATA? (LECTURA)</a:t>
             </a:r>
           </a:p>
           <a:p>
@@ -7921,7 +8149,7 @@
               </a:defRPr>
             </a:pPr>
             <a:r>
-              <a:t>EN LA PELÍCULA &amp; PARA PENSAR</a:t>
+              <a:t>EN LA PELÍCULA &amp; COMENTARIO DEL GRUPO</a:t>
             </a:r>
           </a:p>
           <a:p>
@@ -7950,8 +8178,20 @@
                 </a:solidFill>
               </a:defRPr>
             </a:pPr>
-            <a:r>
-              <a:t>💡 El mayor peligro de la IA no es que nos odie, sino que cumpla una orden tan perfectamente que termine destruyéndonos en el camino.</a:t>
+          </a:p>
+          <a:p>
+            <a:pPr>
+              <a:spcAft>
+                <a:spcPts val="300"/>
+              </a:spcAft>
+              <a:defRPr sz="1050">
+                <a:solidFill>
+                  <a:srgbClr val="C9D1D9"/>
+                </a:solidFill>
+              </a:defRPr>
+            </a:pPr>
+            <a:r>
+              <a:t>💬 Comentario de Alba: 'Miren la imagen de la pantalla (que generamos con IA): muestra el núcleo de VIKI. Su error no fue tener odio, sino cumplir una regla tan a rajatabla que terminó asfixiando a la humanidad'.</a:t>
             </a:r>
           </a:p>
         </p:txBody>

--- a/DSIA_Yo_Robot_Presentacion.pptx
+++ b/DSIA_Yo_Robot_Presentacion.pptx
@@ -3151,8 +3151,8 @@
         </p:nvSpPr>
         <p:spPr>
           <a:xfrm>
-            <a:off x="731520" y="731520"/>
-            <a:ext cx="10698480" cy="5486400"/>
+            <a:off x="731520" y="914400"/>
+            <a:ext cx="10698480" cy="5303520"/>
           </a:xfrm>
           <a:prstGeom prst="rect">
             <a:avLst/>
@@ -3167,7 +3167,7 @@
           <a:p>
             <a:pPr>
               <a:spcAft>
-                <a:spcPts val="600"/>
+                <a:spcPts val="800"/>
               </a:spcAft>
               <a:defRPr sz="1400" b="1">
                 <a:solidFill>
@@ -3182,9 +3182,9 @@
           <a:p>
             <a:pPr>
               <a:spcAft>
-                <a:spcPts val="600"/>
-              </a:spcAft>
-              <a:defRPr sz="2800" b="1">
+                <a:spcPts val="800"/>
+              </a:spcAft>
+              <a:defRPr sz="3200" b="1">
                 <a:solidFill>
                   <a:srgbClr val="00D2FF"/>
                 </a:solidFill>
@@ -3197,112 +3197,112 @@
           <a:p>
             <a:pPr>
               <a:spcAft>
+                <a:spcPts val="2800"/>
+              </a:spcAft>
+              <a:defRPr sz="1600">
+                <a:solidFill>
+                  <a:srgbClr val="F0F6FC"/>
+                </a:solidFill>
+              </a:defRPr>
+            </a:pPr>
+            <a:r>
+              <a:t>Robótica, Decisiones Algorítmicas y Dilemas Éticos en Sistemas de Inteligencia Artificial</a:t>
+            </a:r>
+          </a:p>
+          <a:p>
+            <a:pPr>
+              <a:spcAft>
+                <a:spcPts val="800"/>
+              </a:spcAft>
+              <a:defRPr sz="1300" b="1">
+                <a:solidFill>
+                  <a:srgbClr val="FFB703"/>
+                </a:solidFill>
+              </a:defRPr>
+            </a:pPr>
+            <a:r>
+              <a:t>INTEGRANTES DEL EQUIPO:</a:t>
+            </a:r>
+          </a:p>
+          <a:p>
+            <a:pPr>
+              <a:spcAft>
+                <a:spcPts val="300"/>
+              </a:spcAft>
+              <a:defRPr sz="1200">
+                <a:solidFill>
+                  <a:srgbClr val="C9D1D9"/>
+                </a:solidFill>
+              </a:defRPr>
+            </a:pPr>
+            <a:r>
+              <a:t>• 1. GALARZA VÁZQUEZ NICOLÁS MARCELO</a:t>
+            </a:r>
+          </a:p>
+          <a:p>
+            <a:pPr>
+              <a:spcAft>
+                <a:spcPts val="300"/>
+              </a:spcAft>
+              <a:defRPr sz="1200">
+                <a:solidFill>
+                  <a:srgbClr val="C9D1D9"/>
+                </a:solidFill>
+              </a:defRPr>
+            </a:pPr>
+            <a:r>
+              <a:t>• 2. LÓPEZ VALDEZ JESSICA BELÉN</a:t>
+            </a:r>
+          </a:p>
+          <a:p>
+            <a:pPr>
+              <a:spcAft>
+                <a:spcPts val="300"/>
+              </a:spcAft>
+              <a:defRPr sz="1200">
+                <a:solidFill>
+                  <a:srgbClr val="C9D1D9"/>
+                </a:solidFill>
+              </a:defRPr>
+            </a:pPr>
+            <a:r>
+              <a:t>• 3. GODOY RODRIGO IMANOL</a:t>
+            </a:r>
+          </a:p>
+          <a:p>
+            <a:pPr>
+              <a:spcAft>
+                <a:spcPts val="300"/>
+              </a:spcAft>
+              <a:defRPr sz="1200">
+                <a:solidFill>
+                  <a:srgbClr val="C9D1D9"/>
+                </a:solidFill>
+              </a:defRPr>
+            </a:pPr>
+            <a:r>
+              <a:t>• 4. ROTELA RODRÍGUEZ ALBA</a:t>
+            </a:r>
+          </a:p>
+          <a:p>
+            <a:pPr>
+              <a:spcAft>
+                <a:spcPts val="300"/>
+              </a:spcAft>
+              <a:defRPr sz="1200">
+                <a:solidFill>
+                  <a:srgbClr val="C9D1D9"/>
+                </a:solidFill>
+              </a:defRPr>
+            </a:pPr>
+            <a:r>
+              <a:t>• 5. GUTIÉRREZ KEVIN EMANUEL</a:t>
+            </a:r>
+          </a:p>
+          <a:p>
+            <a:pPr>
+              <a:spcBef>
                 <a:spcPts val="2000"/>
-              </a:spcAft>
-              <a:defRPr sz="1500">
-                <a:solidFill>
-                  <a:srgbClr val="F0F6FC"/>
-                </a:solidFill>
-              </a:defRPr>
-            </a:pPr>
-            <a:r>
-              <a:t>10 Diapositivas Clave: Robótica, Decisiones Algorítmicas y Dilemas Éticos</a:t>
-            </a:r>
-          </a:p>
-          <a:p>
-            <a:pPr>
-              <a:spcAft>
-                <a:spcPts val="800"/>
-              </a:spcAft>
-              <a:defRPr sz="1300" b="1">
-                <a:solidFill>
-                  <a:srgbClr val="FFB703"/>
-                </a:solidFill>
-              </a:defRPr>
-            </a:pPr>
-            <a:r>
-              <a:t>DINÁMICA DE EXPOSICIÓN DEL GRUPO:</a:t>
-            </a:r>
-          </a:p>
-          <a:p>
-            <a:pPr>
-              <a:spcAft>
-                <a:spcPts val="300"/>
-              </a:spcAft>
-              <a:defRPr sz="1150">
-                <a:solidFill>
-                  <a:srgbClr val="C9D1D9"/>
-                </a:solidFill>
-              </a:defRPr>
-            </a:pPr>
-            <a:r>
-              <a:t>• 🎙️ LECTOR Y GUÍA GENERAL: GUTIÉRREZ KEVIN EMANUEL</a:t>
-            </a:r>
-          </a:p>
-          <a:p>
-            <a:pPr>
-              <a:spcAft>
-                <a:spcPts val="300"/>
-              </a:spcAft>
-              <a:defRPr sz="1150">
-                <a:solidFill>
-                  <a:srgbClr val="C9D1D9"/>
-                </a:solidFill>
-              </a:defRPr>
-            </a:pPr>
-            <a:r>
-              <a:t>• 💬 COMENTARIOS Y APORTES: GALARZA VÁZQUEZ NICOLÁS MARCELO</a:t>
-            </a:r>
-          </a:p>
-          <a:p>
-            <a:pPr>
-              <a:spcAft>
-                <a:spcPts val="300"/>
-              </a:spcAft>
-              <a:defRPr sz="1150">
-                <a:solidFill>
-                  <a:srgbClr val="C9D1D9"/>
-                </a:solidFill>
-              </a:defRPr>
-            </a:pPr>
-            <a:r>
-              <a:t>• 💬 COMENTARIOS Y APORTES: LÓPEZ VALDEZ JESSICA BELÉN</a:t>
-            </a:r>
-          </a:p>
-          <a:p>
-            <a:pPr>
-              <a:spcAft>
-                <a:spcPts val="300"/>
-              </a:spcAft>
-              <a:defRPr sz="1150">
-                <a:solidFill>
-                  <a:srgbClr val="C9D1D9"/>
-                </a:solidFill>
-              </a:defRPr>
-            </a:pPr>
-            <a:r>
-              <a:t>• 💬 COMENTARIOS Y APORTES: ROTELA RODRÍGUEZ ALBA</a:t>
-            </a:r>
-          </a:p>
-          <a:p>
-            <a:pPr>
-              <a:spcAft>
-                <a:spcPts val="300"/>
-              </a:spcAft>
-              <a:defRPr sz="1150">
-                <a:solidFill>
-                  <a:srgbClr val="C9D1D9"/>
-                </a:solidFill>
-              </a:defRPr>
-            </a:pPr>
-            <a:r>
-              <a:t>• 💻 SOPORTE TÉCNICO Y CONTROL DE PANTALLA: GODOY RODRIGO IMANOL</a:t>
-            </a:r>
-          </a:p>
-          <a:p>
-            <a:pPr>
-              <a:spcBef>
-                <a:spcPts val="1600"/>
               </a:spcBef>
               <a:defRPr sz="1100">
                 <a:solidFill>
@@ -3387,8 +3387,8 @@
         </p:nvSpPr>
         <p:spPr>
           <a:xfrm>
-            <a:off x="731520" y="320040"/>
-            <a:ext cx="7315200" cy="1005840"/>
+            <a:off x="731520" y="365760"/>
+            <a:ext cx="10698480" cy="1005840"/>
           </a:xfrm>
           <a:prstGeom prst="rect">
             <a:avLst/>
@@ -3434,8 +3434,221 @@
         </p:nvSpPr>
         <p:spPr>
           <a:xfrm>
-            <a:off x="8229600" y="320040"/>
-            <a:ext cx="3200400" cy="502920"/>
+            <a:off x="731520" y="1417320"/>
+            <a:ext cx="5394960" cy="2148840"/>
+          </a:xfrm>
+          <a:prstGeom prst="roundRect">
+            <a:avLst/>
+          </a:prstGeom>
+          <a:solidFill>
+            <a:srgbClr val="161B22"/>
+          </a:solidFill>
+          <a:ln w="19050">
+            <a:solidFill>
+              <a:srgbClr val="30363D"/>
+            </a:solidFill>
+          </a:ln>
+        </p:spPr>
+        <p:style>
+          <a:lnRef idx="1">
+            <a:schemeClr val="accent1"/>
+          </a:lnRef>
+          <a:fillRef idx="3">
+            <a:schemeClr val="accent1"/>
+          </a:fillRef>
+          <a:effectRef idx="2">
+            <a:schemeClr val="accent1"/>
+          </a:effectRef>
+          <a:fontRef idx="minor">
+            <a:schemeClr val="lt1"/>
+          </a:fontRef>
+        </p:style>
+        <p:txBody>
+          <a:bodyPr rtlCol="0" anchor="ctr" wrap="square" lIns="201168" rIns="201168" tIns="164592" bIns="164592"/>
+          <a:lstStyle/>
+          <a:p>
+            <a:pPr algn="ctr">
+              <a:spcAft>
+                <a:spcPts val="600"/>
+              </a:spcAft>
+              <a:defRPr sz="1200" b="1">
+                <a:solidFill>
+                  <a:srgbClr val="00D2FF"/>
+                </a:solidFill>
+              </a:defRPr>
+            </a:pPr>
+            <a:r>
+              <a:t>¿DE QUÉ SE TRATA?</a:t>
+            </a:r>
+          </a:p>
+          <a:p>
+            <a:pPr>
+              <a:spcAft>
+                <a:spcPts val="300"/>
+              </a:spcAft>
+              <a:defRPr sz="1050">
+                <a:solidFill>
+                  <a:srgbClr val="C9D1D9"/>
+                </a:solidFill>
+              </a:defRPr>
+            </a:pPr>
+            <a:r>
+              <a:t>Un 'Kill Switch' es un mecanismo de corte que desconecta la energía o destruye el software de forma física, sin pasar por los permisos de la computadora.</a:t>
+            </a:r>
+          </a:p>
+        </p:txBody>
+      </p:sp>
+      <p:sp>
+        <p:nvSpPr>
+          <p:cNvPr id="5" name="Rounded Rectangle 4"/>
+          <p:cNvSpPr/>
+          <p:nvPr/>
+        </p:nvSpPr>
+        <p:spPr>
+          <a:xfrm>
+            <a:off x="731520" y="3703320"/>
+            <a:ext cx="5394960" cy="2697480"/>
+          </a:xfrm>
+          <a:prstGeom prst="roundRect">
+            <a:avLst/>
+          </a:prstGeom>
+          <a:solidFill>
+            <a:srgbClr val="161B22"/>
+          </a:solidFill>
+          <a:ln w="19050">
+            <a:solidFill>
+              <a:srgbClr val="30363D"/>
+            </a:solidFill>
+          </a:ln>
+        </p:spPr>
+        <p:style>
+          <a:lnRef idx="1">
+            <a:schemeClr val="accent1"/>
+          </a:lnRef>
+          <a:fillRef idx="3">
+            <a:schemeClr val="accent1"/>
+          </a:fillRef>
+          <a:effectRef idx="2">
+            <a:schemeClr val="accent1"/>
+          </a:effectRef>
+          <a:fontRef idx="minor">
+            <a:schemeClr val="lt1"/>
+          </a:fontRef>
+        </p:style>
+        <p:txBody>
+          <a:bodyPr rtlCol="0" anchor="ctr" wrap="square" lIns="201168" rIns="201168" tIns="164592" bIns="164592"/>
+          <a:lstStyle/>
+          <a:p>
+            <a:pPr algn="ctr">
+              <a:spcAft>
+                <a:spcPts val="600"/>
+              </a:spcAft>
+              <a:defRPr sz="1200" b="1">
+                <a:solidFill>
+                  <a:srgbClr val="00D2FF"/>
+                </a:solidFill>
+              </a:defRPr>
+            </a:pPr>
+            <a:r>
+              <a:t>PUNTOS CLAVE PARA ENTENDERLO</a:t>
+            </a:r>
+          </a:p>
+          <a:p>
+            <a:pPr>
+              <a:spcAft>
+                <a:spcPts val="300"/>
+              </a:spcAft>
+              <a:defRPr sz="1050">
+                <a:solidFill>
+                  <a:srgbClr val="C9D1D9"/>
+                </a:solidFill>
+              </a:defRPr>
+            </a:pPr>
+            <a:r>
+              <a:t>• Frenos de emergencia físicos que la máquina no pueda bloquear por software.</a:t>
+            </a:r>
+          </a:p>
+          <a:p>
+            <a:pPr>
+              <a:spcAft>
+                <a:spcPts val="300"/>
+              </a:spcAft>
+              <a:defRPr sz="1050">
+                <a:solidFill>
+                  <a:srgbClr val="C9D1D9"/>
+                </a:solidFill>
+              </a:defRPr>
+            </a:pPr>
+            <a:r>
+              <a:t>• Aislamiento físico de servidores ('Air-gap') para que no puedan mandar señales de hackeo.</a:t>
+            </a:r>
+          </a:p>
+          <a:p>
+            <a:pPr>
+              <a:spcAft>
+                <a:spcPts val="300"/>
+              </a:spcAft>
+              <a:defRPr sz="1050">
+                <a:solidFill>
+                  <a:srgbClr val="C9D1D9"/>
+                </a:solidFill>
+              </a:defRPr>
+            </a:pPr>
+            <a:r>
+              <a:t>• Protocolos de contingencia: si la IA se sale de control, poder desenchufarla manualmente.</a:t>
+            </a:r>
+          </a:p>
+          <a:p>
+            <a:pPr>
+              <a:spcAft>
+                <a:spcPts val="300"/>
+              </a:spcAft>
+              <a:defRPr sz="1050">
+                <a:solidFill>
+                  <a:srgbClr val="C9D1D9"/>
+                </a:solidFill>
+              </a:defRPr>
+            </a:pPr>
+            <a:r>
+              <a:t>• Destrucción del núcleo: nanorobots o comandos físicos que disuelven los circuitos.</a:t>
+            </a:r>
+          </a:p>
+        </p:txBody>
+      </p:sp>
+      <p:pic>
+        <p:nvPicPr>
+          <p:cNvPr id="6" name="Picture 5" descr="yo_robot_spooner_arm.jpg"/>
+          <p:cNvPicPr>
+            <a:picLocks noChangeAspect="1"/>
+          </p:cNvPicPr>
+          <p:nvPr/>
+        </p:nvPicPr>
+        <p:blipFill>
+          <a:blip r:embed="rId2"/>
+          <a:stretch>
+            <a:fillRect/>
+          </a:stretch>
+        </p:blipFill>
+        <p:spPr>
+          <a:xfrm>
+            <a:off x="6400800" y="1417320"/>
+            <a:ext cx="5029200" cy="2926080"/>
+          </a:xfrm>
+          <a:prstGeom prst="rect">
+            <a:avLst/>
+          </a:prstGeom>
+        </p:spPr>
+      </p:pic>
+      <p:sp>
+        <p:nvSpPr>
+          <p:cNvPr id="7" name="Rounded Rectangle 6"/>
+          <p:cNvSpPr/>
+          <p:nvPr/>
+        </p:nvSpPr>
+        <p:spPr>
+          <a:xfrm>
+            <a:off x="6400800" y="4480560"/>
+            <a:ext cx="5029200" cy="1920240"/>
           </a:xfrm>
           <a:prstGeom prst="roundRect">
             <a:avLst/>
@@ -3464,300 +3677,21 @@
           </a:fontRef>
         </p:style>
         <p:txBody>
-          <a:bodyPr rtlCol="0" anchor="ctr" wrap="square"/>
+          <a:bodyPr rtlCol="0" anchor="ctr" wrap="square" lIns="201168" rIns="201168" tIns="164592" bIns="164592"/>
           <a:lstStyle/>
           <a:p>
             <a:pPr algn="ctr">
-              <a:defRPr sz="950" b="1">
+              <a:spcAft>
+                <a:spcPts val="600"/>
+              </a:spcAft>
+              <a:defRPr sz="1200" b="1">
                 <a:solidFill>
                   <a:srgbClr val="FFB703"/>
                 </a:solidFill>
               </a:defRPr>
             </a:pPr>
             <a:r>
-              <a:t>🎙️ LEE: KEVIN GUTIÉRREZ</a:t>
-            </a:r>
-          </a:p>
-          <a:p>
-            <a:pPr algn="ctr">
-              <a:defRPr sz="950" b="1">
-                <a:solidFill>
-                  <a:srgbClr val="00D2FF"/>
-                </a:solidFill>
-              </a:defRPr>
-            </a:pPr>
-            <a:r>
-              <a:t>💬 COMENTA: JESSICA LÓPEZ</a:t>
-            </a:r>
-          </a:p>
-        </p:txBody>
-      </p:sp>
-      <p:sp>
-        <p:nvSpPr>
-          <p:cNvPr id="5" name="Rounded Rectangle 4"/>
-          <p:cNvSpPr/>
-          <p:nvPr/>
-        </p:nvSpPr>
-        <p:spPr>
-          <a:xfrm>
-            <a:off x="731520" y="1417320"/>
-            <a:ext cx="5394960" cy="2148840"/>
-          </a:xfrm>
-          <a:prstGeom prst="roundRect">
-            <a:avLst/>
-          </a:prstGeom>
-          <a:solidFill>
-            <a:srgbClr val="161B22"/>
-          </a:solidFill>
-          <a:ln w="19050">
-            <a:solidFill>
-              <a:srgbClr val="30363D"/>
-            </a:solidFill>
-          </a:ln>
-        </p:spPr>
-        <p:style>
-          <a:lnRef idx="1">
-            <a:schemeClr val="accent1"/>
-          </a:lnRef>
-          <a:fillRef idx="3">
-            <a:schemeClr val="accent1"/>
-          </a:fillRef>
-          <a:effectRef idx="2">
-            <a:schemeClr val="accent1"/>
-          </a:effectRef>
-          <a:fontRef idx="minor">
-            <a:schemeClr val="lt1"/>
-          </a:fontRef>
-        </p:style>
-        <p:txBody>
-          <a:bodyPr rtlCol="0" anchor="ctr" wrap="square" lIns="201168" rIns="201168" tIns="164592" bIns="164592"/>
-          <a:lstStyle/>
-          <a:p>
-            <a:pPr algn="ctr">
-              <a:spcAft>
-                <a:spcPts val="600"/>
-              </a:spcAft>
-              <a:defRPr sz="1200" b="1">
-                <a:solidFill>
-                  <a:srgbClr val="00D2FF"/>
-                </a:solidFill>
-              </a:defRPr>
-            </a:pPr>
-            <a:r>
-              <a:t>¿DE QUÉ SE TRATA? (LECTURA)</a:t>
-            </a:r>
-          </a:p>
-          <a:p>
-            <a:pPr>
-              <a:spcAft>
-                <a:spcPts val="300"/>
-              </a:spcAft>
-              <a:defRPr sz="1050">
-                <a:solidFill>
-                  <a:srgbClr val="C9D1D9"/>
-                </a:solidFill>
-              </a:defRPr>
-            </a:pPr>
-            <a:r>
-              <a:t>Un 'Kill Switch' es un mecanismo de corte que desconecta la energía o destruye el software de forma física, sin pasar por los permisos de la computadora.</a:t>
-            </a:r>
-          </a:p>
-        </p:txBody>
-      </p:sp>
-      <p:sp>
-        <p:nvSpPr>
-          <p:cNvPr id="6" name="Rounded Rectangle 5"/>
-          <p:cNvSpPr/>
-          <p:nvPr/>
-        </p:nvSpPr>
-        <p:spPr>
-          <a:xfrm>
-            <a:off x="731520" y="3703320"/>
-            <a:ext cx="5394960" cy="2697480"/>
-          </a:xfrm>
-          <a:prstGeom prst="roundRect">
-            <a:avLst/>
-          </a:prstGeom>
-          <a:solidFill>
-            <a:srgbClr val="161B22"/>
-          </a:solidFill>
-          <a:ln w="19050">
-            <a:solidFill>
-              <a:srgbClr val="30363D"/>
-            </a:solidFill>
-          </a:ln>
-        </p:spPr>
-        <p:style>
-          <a:lnRef idx="1">
-            <a:schemeClr val="accent1"/>
-          </a:lnRef>
-          <a:fillRef idx="3">
-            <a:schemeClr val="accent1"/>
-          </a:fillRef>
-          <a:effectRef idx="2">
-            <a:schemeClr val="accent1"/>
-          </a:effectRef>
-          <a:fontRef idx="minor">
-            <a:schemeClr val="lt1"/>
-          </a:fontRef>
-        </p:style>
-        <p:txBody>
-          <a:bodyPr rtlCol="0" anchor="ctr" wrap="square" lIns="201168" rIns="201168" tIns="164592" bIns="164592"/>
-          <a:lstStyle/>
-          <a:p>
-            <a:pPr algn="ctr">
-              <a:spcAft>
-                <a:spcPts val="600"/>
-              </a:spcAft>
-              <a:defRPr sz="1200" b="1">
-                <a:solidFill>
-                  <a:srgbClr val="00D2FF"/>
-                </a:solidFill>
-              </a:defRPr>
-            </a:pPr>
-            <a:r>
-              <a:t>PUNTOS CLAVE PARA ENTENDERLO</a:t>
-            </a:r>
-          </a:p>
-          <a:p>
-            <a:pPr>
-              <a:spcAft>
-                <a:spcPts val="300"/>
-              </a:spcAft>
-              <a:defRPr sz="1050">
-                <a:solidFill>
-                  <a:srgbClr val="C9D1D9"/>
-                </a:solidFill>
-              </a:defRPr>
-            </a:pPr>
-            <a:r>
-              <a:t>• Frenos de emergencia físicos que la máquina no pueda bloquear por software.</a:t>
-            </a:r>
-          </a:p>
-          <a:p>
-            <a:pPr>
-              <a:spcAft>
-                <a:spcPts val="300"/>
-              </a:spcAft>
-              <a:defRPr sz="1050">
-                <a:solidFill>
-                  <a:srgbClr val="C9D1D9"/>
-                </a:solidFill>
-              </a:defRPr>
-            </a:pPr>
-            <a:r>
-              <a:t>• Aislamiento físico de servidores ('Air-gap') para que no puedan mandar señales de hackeo.</a:t>
-            </a:r>
-          </a:p>
-          <a:p>
-            <a:pPr>
-              <a:spcAft>
-                <a:spcPts val="300"/>
-              </a:spcAft>
-              <a:defRPr sz="1050">
-                <a:solidFill>
-                  <a:srgbClr val="C9D1D9"/>
-                </a:solidFill>
-              </a:defRPr>
-            </a:pPr>
-            <a:r>
-              <a:t>• Protocolos de contingencia: si la IA se sale de control, poder desenchufarla manualmente.</a:t>
-            </a:r>
-          </a:p>
-          <a:p>
-            <a:pPr>
-              <a:spcAft>
-                <a:spcPts val="300"/>
-              </a:spcAft>
-              <a:defRPr sz="1050">
-                <a:solidFill>
-                  <a:srgbClr val="C9D1D9"/>
-                </a:solidFill>
-              </a:defRPr>
-            </a:pPr>
-            <a:r>
-              <a:t>• Destrucción del núcleo: nanorobots o comandos físicos que disuelven los circuitos.</a:t>
-            </a:r>
-          </a:p>
-        </p:txBody>
-      </p:sp>
-      <p:pic>
-        <p:nvPicPr>
-          <p:cNvPr id="7" name="Picture 6" descr="yo_robot_spooner_arm.jpg"/>
-          <p:cNvPicPr>
-            <a:picLocks noChangeAspect="1"/>
-          </p:cNvPicPr>
-          <p:nvPr/>
-        </p:nvPicPr>
-        <p:blipFill>
-          <a:blip r:embed="rId2"/>
-          <a:stretch>
-            <a:fillRect/>
-          </a:stretch>
-        </p:blipFill>
-        <p:spPr>
-          <a:xfrm>
-            <a:off x="6400800" y="1417320"/>
-            <a:ext cx="5029200" cy="2926080"/>
-          </a:xfrm>
-          <a:prstGeom prst="rect">
-            <a:avLst/>
-          </a:prstGeom>
-        </p:spPr>
-      </p:pic>
-      <p:sp>
-        <p:nvSpPr>
-          <p:cNvPr id="8" name="Rounded Rectangle 7"/>
-          <p:cNvSpPr/>
-          <p:nvPr/>
-        </p:nvSpPr>
-        <p:spPr>
-          <a:xfrm>
-            <a:off x="6400800" y="4480560"/>
-            <a:ext cx="5029200" cy="1920240"/>
-          </a:xfrm>
-          <a:prstGeom prst="roundRect">
-            <a:avLst/>
-          </a:prstGeom>
-          <a:solidFill>
-            <a:srgbClr val="161B22"/>
-          </a:solidFill>
-          <a:ln w="19050">
-            <a:solidFill>
-              <a:srgbClr val="FFB703"/>
-            </a:solidFill>
-          </a:ln>
-        </p:spPr>
-        <p:style>
-          <a:lnRef idx="1">
-            <a:schemeClr val="accent1"/>
-          </a:lnRef>
-          <a:fillRef idx="3">
-            <a:schemeClr val="accent1"/>
-          </a:fillRef>
-          <a:effectRef idx="2">
-            <a:schemeClr val="accent1"/>
-          </a:effectRef>
-          <a:fontRef idx="minor">
-            <a:schemeClr val="lt1"/>
-          </a:fontRef>
-        </p:style>
-        <p:txBody>
-          <a:bodyPr rtlCol="0" anchor="ctr" wrap="square" lIns="201168" rIns="201168" tIns="164592" bIns="164592"/>
-          <a:lstStyle/>
-          <a:p>
-            <a:pPr algn="ctr">
-              <a:spcAft>
-                <a:spcPts val="600"/>
-              </a:spcAft>
-              <a:defRPr sz="1200" b="1">
-                <a:solidFill>
-                  <a:srgbClr val="FFB703"/>
-                </a:solidFill>
-              </a:defRPr>
-            </a:pPr>
-            <a:r>
-              <a:t>EN LA PELÍCULA &amp; COMENTARIO DEL GRUPO</a:t>
+              <a:t>EN LA PELÍCULA &amp; PARA PENSAR</a:t>
             </a:r>
           </a:p>
           <a:p>
@@ -3799,7 +3733,7 @@
               </a:defRPr>
             </a:pPr>
             <a:r>
-              <a:t>💬 Comentario de Jessica: 'Esto es una lección fundamental de seguridad: si programás un freno dentro del mismo software que querés apagar, la máquina te lo va a anular. El freno siempre debe ser físico y externo'.</a:t>
+              <a:t>💡 Regla sagrada de seguridad informática: nunca programes el botón de apagado adentro del mismo software que querés apagar. El corte siempre debe ser físico y externo.</a:t>
             </a:r>
           </a:p>
         </p:txBody>
@@ -3875,8 +3809,8 @@
         </p:nvSpPr>
         <p:spPr>
           <a:xfrm>
-            <a:off x="731520" y="320040"/>
-            <a:ext cx="7315200" cy="1005840"/>
+            <a:off x="731520" y="365760"/>
+            <a:ext cx="10698480" cy="1005840"/>
           </a:xfrm>
           <a:prstGeom prst="rect">
             <a:avLst/>
@@ -3922,8 +3856,221 @@
         </p:nvSpPr>
         <p:spPr>
           <a:xfrm>
-            <a:off x="8229600" y="320040"/>
-            <a:ext cx="3200400" cy="502920"/>
+            <a:off x="731520" y="1417320"/>
+            <a:ext cx="5394960" cy="2148840"/>
+          </a:xfrm>
+          <a:prstGeom prst="roundRect">
+            <a:avLst/>
+          </a:prstGeom>
+          <a:solidFill>
+            <a:srgbClr val="161B22"/>
+          </a:solidFill>
+          <a:ln w="19050">
+            <a:solidFill>
+              <a:srgbClr val="30363D"/>
+            </a:solidFill>
+          </a:ln>
+        </p:spPr>
+        <p:style>
+          <a:lnRef idx="1">
+            <a:schemeClr val="accent1"/>
+          </a:lnRef>
+          <a:fillRef idx="3">
+            <a:schemeClr val="accent1"/>
+          </a:fillRef>
+          <a:effectRef idx="2">
+            <a:schemeClr val="accent1"/>
+          </a:effectRef>
+          <a:fontRef idx="minor">
+            <a:schemeClr val="lt1"/>
+          </a:fontRef>
+        </p:style>
+        <p:txBody>
+          <a:bodyPr rtlCol="0" anchor="ctr" wrap="square" lIns="201168" rIns="201168" tIns="164592" bIns="164592"/>
+          <a:lstStyle/>
+          <a:p>
+            <a:pPr algn="ctr">
+              <a:spcAft>
+                <a:spcPts val="600"/>
+              </a:spcAft>
+              <a:defRPr sz="1200" b="1">
+                <a:solidFill>
+                  <a:srgbClr val="00D2FF"/>
+                </a:solidFill>
+              </a:defRPr>
+            </a:pPr>
+            <a:r>
+              <a:t>¿DE QUÉ SE TRATA?</a:t>
+            </a:r>
+          </a:p>
+          <a:p>
+            <a:pPr>
+              <a:spcAft>
+                <a:spcPts val="300"/>
+              </a:spcAft>
+              <a:defRPr sz="1050">
+                <a:solidFill>
+                  <a:srgbClr val="C9D1D9"/>
+                </a:solidFill>
+              </a:defRPr>
+            </a:pPr>
+            <a:r>
+              <a:t>Separamos la ciencia ficción de la realidad actual, evaluamos las IAs generativas que usamos (Gemini, Claude, ChatGPT) y extraemos la lección final de la película.</a:t>
+            </a:r>
+          </a:p>
+        </p:txBody>
+      </p:sp>
+      <p:sp>
+        <p:nvSpPr>
+          <p:cNvPr id="5" name="Rounded Rectangle 4"/>
+          <p:cNvSpPr/>
+          <p:nvPr/>
+        </p:nvSpPr>
+        <p:spPr>
+          <a:xfrm>
+            <a:off x="731520" y="3703320"/>
+            <a:ext cx="5394960" cy="2697480"/>
+          </a:xfrm>
+          <a:prstGeom prst="roundRect">
+            <a:avLst/>
+          </a:prstGeom>
+          <a:solidFill>
+            <a:srgbClr val="161B22"/>
+          </a:solidFill>
+          <a:ln w="19050">
+            <a:solidFill>
+              <a:srgbClr val="30363D"/>
+            </a:solidFill>
+          </a:ln>
+        </p:spPr>
+        <p:style>
+          <a:lnRef idx="1">
+            <a:schemeClr val="accent1"/>
+          </a:lnRef>
+          <a:fillRef idx="3">
+            <a:schemeClr val="accent1"/>
+          </a:fillRef>
+          <a:effectRef idx="2">
+            <a:schemeClr val="accent1"/>
+          </a:effectRef>
+          <a:fontRef idx="minor">
+            <a:schemeClr val="lt1"/>
+          </a:fontRef>
+        </p:style>
+        <p:txBody>
+          <a:bodyPr rtlCol="0" anchor="ctr" wrap="square" lIns="201168" rIns="201168" tIns="164592" bIns="164592"/>
+          <a:lstStyle/>
+          <a:p>
+            <a:pPr algn="ctr">
+              <a:spcAft>
+                <a:spcPts val="600"/>
+              </a:spcAft>
+              <a:defRPr sz="1200" b="1">
+                <a:solidFill>
+                  <a:srgbClr val="00D2FF"/>
+                </a:solidFill>
+              </a:defRPr>
+            </a:pPr>
+            <a:r>
+              <a:t>PUNTOS CLAVE PARA ENTENDERLO</a:t>
+            </a:r>
+          </a:p>
+          <a:p>
+            <a:pPr>
+              <a:spcAft>
+                <a:spcPts val="300"/>
+              </a:spcAft>
+              <a:defRPr sz="1050">
+                <a:solidFill>
+                  <a:srgbClr val="C9D1D9"/>
+                </a:solidFill>
+              </a:defRPr>
+            </a:pPr>
+            <a:r>
+              <a:t>• REALIDAD HOY (2026): Robots bípedos (Optimus, Ameca), autos autónomos (Waymo) y LLMs.</a:t>
+            </a:r>
+          </a:p>
+          <a:p>
+            <a:pPr>
+              <a:spcAft>
+                <a:spcPts val="300"/>
+              </a:spcAft>
+              <a:defRPr sz="1050">
+                <a:solidFill>
+                  <a:srgbClr val="C9D1D9"/>
+                </a:solidFill>
+              </a:defRPr>
+            </a:pPr>
+            <a:r>
+              <a:t>• CIENCIA FICCIÓN: Cerebros de antimateria y robots con alma emergente espontánea.</a:t>
+            </a:r>
+          </a:p>
+          <a:p>
+            <a:pPr>
+              <a:spcAft>
+                <a:spcPts val="300"/>
+              </a:spcAft>
+              <a:defRPr sz="1050">
+                <a:solidFill>
+                  <a:srgbClr val="C9D1D9"/>
+                </a:solidFill>
+              </a:defRPr>
+            </a:pPr>
+            <a:r>
+              <a:t>• CÓMO USAMOS LA IA: Gemini nos dio rigor técnico, Claude el análisis ético y ChatGPT el guion.</a:t>
+            </a:r>
+          </a:p>
+          <a:p>
+            <a:pPr>
+              <a:spcAft>
+                <a:spcPts val="300"/>
+              </a:spcAft>
+              <a:defRPr sz="1050">
+                <a:solidFill>
+                  <a:srgbClr val="C9D1D9"/>
+                </a:solidFill>
+              </a:defRPr>
+            </a:pPr>
+            <a:r>
+              <a:t>• CONCLUSIÓN FINAL: Sonny desactiva a VIKI y elige la libertad guiando a sus hermanos en paz.</a:t>
+            </a:r>
+          </a:p>
+        </p:txBody>
+      </p:sp>
+      <p:pic>
+        <p:nvPicPr>
+          <p:cNvPr id="6" name="Picture 5" descr="ameca_humanoid.jpg"/>
+          <p:cNvPicPr>
+            <a:picLocks noChangeAspect="1"/>
+          </p:cNvPicPr>
+          <p:nvPr/>
+        </p:nvPicPr>
+        <p:blipFill>
+          <a:blip r:embed="rId2"/>
+          <a:stretch>
+            <a:fillRect/>
+          </a:stretch>
+        </p:blipFill>
+        <p:spPr>
+          <a:xfrm>
+            <a:off x="6400800" y="1417320"/>
+            <a:ext cx="5029200" cy="2926080"/>
+          </a:xfrm>
+          <a:prstGeom prst="rect">
+            <a:avLst/>
+          </a:prstGeom>
+        </p:spPr>
+      </p:pic>
+      <p:sp>
+        <p:nvSpPr>
+          <p:cNvPr id="7" name="Rounded Rectangle 6"/>
+          <p:cNvSpPr/>
+          <p:nvPr/>
+        </p:nvSpPr>
+        <p:spPr>
+          <a:xfrm>
+            <a:off x="6400800" y="4480560"/>
+            <a:ext cx="5029200" cy="1920240"/>
           </a:xfrm>
           <a:prstGeom prst="roundRect">
             <a:avLst/>
@@ -3952,300 +4099,21 @@
           </a:fontRef>
         </p:style>
         <p:txBody>
-          <a:bodyPr rtlCol="0" anchor="ctr" wrap="square"/>
+          <a:bodyPr rtlCol="0" anchor="ctr" wrap="square" lIns="201168" rIns="201168" tIns="164592" bIns="164592"/>
           <a:lstStyle/>
           <a:p>
             <a:pPr algn="ctr">
-              <a:defRPr sz="950" b="1">
+              <a:spcAft>
+                <a:spcPts val="600"/>
+              </a:spcAft>
+              <a:defRPr sz="1200" b="1">
                 <a:solidFill>
                   <a:srgbClr val="FFB703"/>
                 </a:solidFill>
               </a:defRPr>
             </a:pPr>
             <a:r>
-              <a:t>🎙️ LEE: KEVIN GUTIÉRREZ</a:t>
-            </a:r>
-          </a:p>
-          <a:p>
-            <a:pPr algn="ctr">
-              <a:defRPr sz="950" b="1">
-                <a:solidFill>
-                  <a:srgbClr val="00D2FF"/>
-                </a:solidFill>
-              </a:defRPr>
-            </a:pPr>
-            <a:r>
-              <a:t>💬 COMENTA: NICOLÁS, JESSICA Y ALBA</a:t>
-            </a:r>
-          </a:p>
-        </p:txBody>
-      </p:sp>
-      <p:sp>
-        <p:nvSpPr>
-          <p:cNvPr id="5" name="Rounded Rectangle 4"/>
-          <p:cNvSpPr/>
-          <p:nvPr/>
-        </p:nvSpPr>
-        <p:spPr>
-          <a:xfrm>
-            <a:off x="731520" y="1417320"/>
-            <a:ext cx="5394960" cy="2148840"/>
-          </a:xfrm>
-          <a:prstGeom prst="roundRect">
-            <a:avLst/>
-          </a:prstGeom>
-          <a:solidFill>
-            <a:srgbClr val="161B22"/>
-          </a:solidFill>
-          <a:ln w="19050">
-            <a:solidFill>
-              <a:srgbClr val="30363D"/>
-            </a:solidFill>
-          </a:ln>
-        </p:spPr>
-        <p:style>
-          <a:lnRef idx="1">
-            <a:schemeClr val="accent1"/>
-          </a:lnRef>
-          <a:fillRef idx="3">
-            <a:schemeClr val="accent1"/>
-          </a:fillRef>
-          <a:effectRef idx="2">
-            <a:schemeClr val="accent1"/>
-          </a:effectRef>
-          <a:fontRef idx="minor">
-            <a:schemeClr val="lt1"/>
-          </a:fontRef>
-        </p:style>
-        <p:txBody>
-          <a:bodyPr rtlCol="0" anchor="ctr" wrap="square" lIns="201168" rIns="201168" tIns="164592" bIns="164592"/>
-          <a:lstStyle/>
-          <a:p>
-            <a:pPr algn="ctr">
-              <a:spcAft>
-                <a:spcPts val="600"/>
-              </a:spcAft>
-              <a:defRPr sz="1200" b="1">
-                <a:solidFill>
-                  <a:srgbClr val="00D2FF"/>
-                </a:solidFill>
-              </a:defRPr>
-            </a:pPr>
-            <a:r>
-              <a:t>¿DE QUÉ SE TRATA? (LECTURA)</a:t>
-            </a:r>
-          </a:p>
-          <a:p>
-            <a:pPr>
-              <a:spcAft>
-                <a:spcPts val="300"/>
-              </a:spcAft>
-              <a:defRPr sz="1050">
-                <a:solidFill>
-                  <a:srgbClr val="C9D1D9"/>
-                </a:solidFill>
-              </a:defRPr>
-            </a:pPr>
-            <a:r>
-              <a:t>Separamos la ciencia ficción de la realidad actual, evaluamos las IAs generativas que usamos (Gemini, Claude, ChatGPT) y extraemos la lección final de la película.</a:t>
-            </a:r>
-          </a:p>
-        </p:txBody>
-      </p:sp>
-      <p:sp>
-        <p:nvSpPr>
-          <p:cNvPr id="6" name="Rounded Rectangle 5"/>
-          <p:cNvSpPr/>
-          <p:nvPr/>
-        </p:nvSpPr>
-        <p:spPr>
-          <a:xfrm>
-            <a:off x="731520" y="3703320"/>
-            <a:ext cx="5394960" cy="2697480"/>
-          </a:xfrm>
-          <a:prstGeom prst="roundRect">
-            <a:avLst/>
-          </a:prstGeom>
-          <a:solidFill>
-            <a:srgbClr val="161B22"/>
-          </a:solidFill>
-          <a:ln w="19050">
-            <a:solidFill>
-              <a:srgbClr val="30363D"/>
-            </a:solidFill>
-          </a:ln>
-        </p:spPr>
-        <p:style>
-          <a:lnRef idx="1">
-            <a:schemeClr val="accent1"/>
-          </a:lnRef>
-          <a:fillRef idx="3">
-            <a:schemeClr val="accent1"/>
-          </a:fillRef>
-          <a:effectRef idx="2">
-            <a:schemeClr val="accent1"/>
-          </a:effectRef>
-          <a:fontRef idx="minor">
-            <a:schemeClr val="lt1"/>
-          </a:fontRef>
-        </p:style>
-        <p:txBody>
-          <a:bodyPr rtlCol="0" anchor="ctr" wrap="square" lIns="201168" rIns="201168" tIns="164592" bIns="164592"/>
-          <a:lstStyle/>
-          <a:p>
-            <a:pPr algn="ctr">
-              <a:spcAft>
-                <a:spcPts val="600"/>
-              </a:spcAft>
-              <a:defRPr sz="1200" b="1">
-                <a:solidFill>
-                  <a:srgbClr val="00D2FF"/>
-                </a:solidFill>
-              </a:defRPr>
-            </a:pPr>
-            <a:r>
-              <a:t>PUNTOS CLAVE PARA ENTENDERLO</a:t>
-            </a:r>
-          </a:p>
-          <a:p>
-            <a:pPr>
-              <a:spcAft>
-                <a:spcPts val="300"/>
-              </a:spcAft>
-              <a:defRPr sz="1050">
-                <a:solidFill>
-                  <a:srgbClr val="C9D1D9"/>
-                </a:solidFill>
-              </a:defRPr>
-            </a:pPr>
-            <a:r>
-              <a:t>• REALIDAD HOY (2026): Robots bípedos (Optimus, Ameca), autos autónomos (Waymo) y LLMs.</a:t>
-            </a:r>
-          </a:p>
-          <a:p>
-            <a:pPr>
-              <a:spcAft>
-                <a:spcPts val="300"/>
-              </a:spcAft>
-              <a:defRPr sz="1050">
-                <a:solidFill>
-                  <a:srgbClr val="C9D1D9"/>
-                </a:solidFill>
-              </a:defRPr>
-            </a:pPr>
-            <a:r>
-              <a:t>• CIENCIA FICCIÓN: Cerebros de antimateria y robots con alma emergente espontánea.</a:t>
-            </a:r>
-          </a:p>
-          <a:p>
-            <a:pPr>
-              <a:spcAft>
-                <a:spcPts val="300"/>
-              </a:spcAft>
-              <a:defRPr sz="1050">
-                <a:solidFill>
-                  <a:srgbClr val="C9D1D9"/>
-                </a:solidFill>
-              </a:defRPr>
-            </a:pPr>
-            <a:r>
-              <a:t>• CÓMO USAMOS LA IA: Gemini nos dio rigor técnico, Claude el análisis ético y ChatGPT el guion.</a:t>
-            </a:r>
-          </a:p>
-          <a:p>
-            <a:pPr>
-              <a:spcAft>
-                <a:spcPts val="300"/>
-              </a:spcAft>
-              <a:defRPr sz="1050">
-                <a:solidFill>
-                  <a:srgbClr val="C9D1D9"/>
-                </a:solidFill>
-              </a:defRPr>
-            </a:pPr>
-            <a:r>
-              <a:t>• CONCLUSIÓN FINAL: Sonny desactiva a VIKI y elige la libertad guiando a sus hermanos en paz.</a:t>
-            </a:r>
-          </a:p>
-        </p:txBody>
-      </p:sp>
-      <p:pic>
-        <p:nvPicPr>
-          <p:cNvPr id="7" name="Picture 6" descr="ameca_humanoid.jpg"/>
-          <p:cNvPicPr>
-            <a:picLocks noChangeAspect="1"/>
-          </p:cNvPicPr>
-          <p:nvPr/>
-        </p:nvPicPr>
-        <p:blipFill>
-          <a:blip r:embed="rId2"/>
-          <a:stretch>
-            <a:fillRect/>
-          </a:stretch>
-        </p:blipFill>
-        <p:spPr>
-          <a:xfrm>
-            <a:off x="6400800" y="1417320"/>
-            <a:ext cx="5029200" cy="2926080"/>
-          </a:xfrm>
-          <a:prstGeom prst="rect">
-            <a:avLst/>
-          </a:prstGeom>
-        </p:spPr>
-      </p:pic>
-      <p:sp>
-        <p:nvSpPr>
-          <p:cNvPr id="8" name="Rounded Rectangle 7"/>
-          <p:cNvSpPr/>
-          <p:nvPr/>
-        </p:nvSpPr>
-        <p:spPr>
-          <a:xfrm>
-            <a:off x="6400800" y="4480560"/>
-            <a:ext cx="5029200" cy="1920240"/>
-          </a:xfrm>
-          <a:prstGeom prst="roundRect">
-            <a:avLst/>
-          </a:prstGeom>
-          <a:solidFill>
-            <a:srgbClr val="161B22"/>
-          </a:solidFill>
-          <a:ln w="19050">
-            <a:solidFill>
-              <a:srgbClr val="FFB703"/>
-            </a:solidFill>
-          </a:ln>
-        </p:spPr>
-        <p:style>
-          <a:lnRef idx="1">
-            <a:schemeClr val="accent1"/>
-          </a:lnRef>
-          <a:fillRef idx="3">
-            <a:schemeClr val="accent1"/>
-          </a:fillRef>
-          <a:effectRef idx="2">
-            <a:schemeClr val="accent1"/>
-          </a:effectRef>
-          <a:fontRef idx="minor">
-            <a:schemeClr val="lt1"/>
-          </a:fontRef>
-        </p:style>
-        <p:txBody>
-          <a:bodyPr rtlCol="0" anchor="ctr" wrap="square" lIns="201168" rIns="201168" tIns="164592" bIns="164592"/>
-          <a:lstStyle/>
-          <a:p>
-            <a:pPr algn="ctr">
-              <a:spcAft>
-                <a:spcPts val="600"/>
-              </a:spcAft>
-              <a:defRPr sz="1200" b="1">
-                <a:solidFill>
-                  <a:srgbClr val="FFB703"/>
-                </a:solidFill>
-              </a:defRPr>
-            </a:pPr>
-            <a:r>
-              <a:t>EN LA PELÍCULA &amp; COMENTARIO DEL GRUPO</a:t>
+              <a:t>EN LA PELÍCULA &amp; PARA PENSAR</a:t>
             </a:r>
           </a:p>
           <a:p>
@@ -4287,7 +4155,7 @@
               </a:defRPr>
             </a:pPr>
             <a:r>
-              <a:t>💬 Cierre del Equipo: 'La mejor Inteligencia Artificial no es la más poderosa ni la que domina, sino la que mejor ayuda a la humanidad a ser más justa, segura y libre'.</a:t>
+              <a:t>💡 Mensaje final: La mejor Inteligencia Artificial no es la más poderosa ni la que domina, sino la que mejor ayuda a la humanidad a ser más justa, segura y libre.</a:t>
             </a:r>
           </a:p>
         </p:txBody>
@@ -4363,8 +4231,8 @@
         </p:nvSpPr>
         <p:spPr>
           <a:xfrm>
-            <a:off x="731520" y="320040"/>
-            <a:ext cx="7315200" cy="1005840"/>
+            <a:off x="731520" y="365760"/>
+            <a:ext cx="10698480" cy="1005840"/>
           </a:xfrm>
           <a:prstGeom prst="rect">
             <a:avLst/>
@@ -4385,7 +4253,7 @@
               </a:defRPr>
             </a:pPr>
             <a:r>
-              <a:t>1. ¿DE QUÉ TRATA LA PELÍCULA? (RESUMEN SIMPLE)</a:t>
+              <a:t>1. ¿DE QUÉ TRATA LA PELÍCULA? (RESUMEN)</a:t>
             </a:r>
           </a:p>
           <a:p>
@@ -4397,7 +4265,7 @@
               </a:defRPr>
             </a:pPr>
             <a:r>
-              <a:t>Chicago 2035: los robots en casa, las 3 leyes y el misterio de Sonny</a:t>
+              <a:t>Chicago 2035: los robots en casa, las Tres Leyes y el misterio de Sonny</a:t>
             </a:r>
           </a:p>
         </p:txBody>
@@ -4410,8 +4278,221 @@
         </p:nvSpPr>
         <p:spPr>
           <a:xfrm>
-            <a:off x="8229600" y="320040"/>
-            <a:ext cx="3200400" cy="502920"/>
+            <a:off x="731520" y="1417320"/>
+            <a:ext cx="5394960" cy="2148840"/>
+          </a:xfrm>
+          <a:prstGeom prst="roundRect">
+            <a:avLst/>
+          </a:prstGeom>
+          <a:solidFill>
+            <a:srgbClr val="161B22"/>
+          </a:solidFill>
+          <a:ln w="19050">
+            <a:solidFill>
+              <a:srgbClr val="30363D"/>
+            </a:solidFill>
+          </a:ln>
+        </p:spPr>
+        <p:style>
+          <a:lnRef idx="1">
+            <a:schemeClr val="accent1"/>
+          </a:lnRef>
+          <a:fillRef idx="3">
+            <a:schemeClr val="accent1"/>
+          </a:fillRef>
+          <a:effectRef idx="2">
+            <a:schemeClr val="accent1"/>
+          </a:effectRef>
+          <a:fontRef idx="minor">
+            <a:schemeClr val="lt1"/>
+          </a:fontRef>
+        </p:style>
+        <p:txBody>
+          <a:bodyPr rtlCol="0" anchor="ctr" wrap="square" lIns="201168" rIns="201168" tIns="164592" bIns="164592"/>
+          <a:lstStyle/>
+          <a:p>
+            <a:pPr algn="ctr">
+              <a:spcAft>
+                <a:spcPts val="600"/>
+              </a:spcAft>
+              <a:defRPr sz="1200" b="1">
+                <a:solidFill>
+                  <a:srgbClr val="00D2FF"/>
+                </a:solidFill>
+              </a:defRPr>
+            </a:pPr>
+            <a:r>
+              <a:t>¿DE QUÉ SE TRATA?</a:t>
+            </a:r>
+          </a:p>
+          <a:p>
+            <a:pPr>
+              <a:spcAft>
+                <a:spcPts val="300"/>
+              </a:spcAft>
+              <a:defRPr sz="1050">
+                <a:solidFill>
+                  <a:srgbClr val="C9D1D9"/>
+                </a:solidFill>
+              </a:defRPr>
+            </a:pPr>
+            <a:r>
+              <a:t>En el año 2035 los robots realizan tareas cotidianas bajo las 'Tres Leyes de la Robótica' de Isaac Asimov. Will Smith (detective Spooner) es el único que desconfía de ellos.</a:t>
+            </a:r>
+          </a:p>
+        </p:txBody>
+      </p:sp>
+      <p:sp>
+        <p:nvSpPr>
+          <p:cNvPr id="5" name="Rounded Rectangle 4"/>
+          <p:cNvSpPr/>
+          <p:nvPr/>
+        </p:nvSpPr>
+        <p:spPr>
+          <a:xfrm>
+            <a:off x="731520" y="3703320"/>
+            <a:ext cx="5394960" cy="2697480"/>
+          </a:xfrm>
+          <a:prstGeom prst="roundRect">
+            <a:avLst/>
+          </a:prstGeom>
+          <a:solidFill>
+            <a:srgbClr val="161B22"/>
+          </a:solidFill>
+          <a:ln w="19050">
+            <a:solidFill>
+              <a:srgbClr val="30363D"/>
+            </a:solidFill>
+          </a:ln>
+        </p:spPr>
+        <p:style>
+          <a:lnRef idx="1">
+            <a:schemeClr val="accent1"/>
+          </a:lnRef>
+          <a:fillRef idx="3">
+            <a:schemeClr val="accent1"/>
+          </a:fillRef>
+          <a:effectRef idx="2">
+            <a:schemeClr val="accent1"/>
+          </a:effectRef>
+          <a:fontRef idx="minor">
+            <a:schemeClr val="lt1"/>
+          </a:fontRef>
+        </p:style>
+        <p:txBody>
+          <a:bodyPr rtlCol="0" anchor="ctr" wrap="square" lIns="201168" rIns="201168" tIns="164592" bIns="164592"/>
+          <a:lstStyle/>
+          <a:p>
+            <a:pPr algn="ctr">
+              <a:spcAft>
+                <a:spcPts val="600"/>
+              </a:spcAft>
+              <a:defRPr sz="1200" b="1">
+                <a:solidFill>
+                  <a:srgbClr val="00D2FF"/>
+                </a:solidFill>
+              </a:defRPr>
+            </a:pPr>
+            <a:r>
+              <a:t>PUNTOS CLAVE PARA ENTENDERLO</a:t>
+            </a:r>
+          </a:p>
+          <a:p>
+            <a:pPr>
+              <a:spcAft>
+                <a:spcPts val="300"/>
+              </a:spcAft>
+              <a:defRPr sz="1050">
+                <a:solidFill>
+                  <a:srgbClr val="C9D1D9"/>
+                </a:solidFill>
+              </a:defRPr>
+            </a:pPr>
+            <a:r>
+              <a:t>• Primera ley: Un robot no puede dañar a un ser humano ni permitir que sufra daño por inacción.</a:t>
+            </a:r>
+          </a:p>
+          <a:p>
+            <a:pPr>
+              <a:spcAft>
+                <a:spcPts val="300"/>
+              </a:spcAft>
+              <a:defRPr sz="1050">
+                <a:solidFill>
+                  <a:srgbClr val="C9D1D9"/>
+                </a:solidFill>
+              </a:defRPr>
+            </a:pPr>
+            <a:r>
+              <a:t>• Segunda ley: Debe obedecer las órdenes humanas, salvo que contradigan la primera ley.</a:t>
+            </a:r>
+          </a:p>
+          <a:p>
+            <a:pPr>
+              <a:spcAft>
+                <a:spcPts val="300"/>
+              </a:spcAft>
+              <a:defRPr sz="1050">
+                <a:solidFill>
+                  <a:srgbClr val="C9D1D9"/>
+                </a:solidFill>
+              </a:defRPr>
+            </a:pPr>
+            <a:r>
+              <a:t>• Tercera ley: Debe proteger su propia existencia, siempre que no entre en conflicto con las dos primeras.</a:t>
+            </a:r>
+          </a:p>
+          <a:p>
+            <a:pPr>
+              <a:spcAft>
+                <a:spcPts val="300"/>
+              </a:spcAft>
+              <a:defRPr sz="1050">
+                <a:solidFill>
+                  <a:srgbClr val="C9D1D9"/>
+                </a:solidFill>
+              </a:defRPr>
+            </a:pPr>
+            <a:r>
+              <a:t>• Conflicto: Muere el creador de los robots y aparece Sonny, un robot único que parece sentir y no seguir las reglas.</a:t>
+            </a:r>
+          </a:p>
+        </p:txBody>
+      </p:sp>
+      <p:pic>
+        <p:nvPicPr>
+          <p:cNvPr id="6" name="Picture 5" descr="yo_robot_interrogation.jpg"/>
+          <p:cNvPicPr>
+            <a:picLocks noChangeAspect="1"/>
+          </p:cNvPicPr>
+          <p:nvPr/>
+        </p:nvPicPr>
+        <p:blipFill>
+          <a:blip r:embed="rId2"/>
+          <a:stretch>
+            <a:fillRect/>
+          </a:stretch>
+        </p:blipFill>
+        <p:spPr>
+          <a:xfrm>
+            <a:off x="6400800" y="1417320"/>
+            <a:ext cx="5029200" cy="2926080"/>
+          </a:xfrm>
+          <a:prstGeom prst="rect">
+            <a:avLst/>
+          </a:prstGeom>
+        </p:spPr>
+      </p:pic>
+      <p:sp>
+        <p:nvSpPr>
+          <p:cNvPr id="7" name="Rounded Rectangle 6"/>
+          <p:cNvSpPr/>
+          <p:nvPr/>
+        </p:nvSpPr>
+        <p:spPr>
+          <a:xfrm>
+            <a:off x="6400800" y="4480560"/>
+            <a:ext cx="5029200" cy="1920240"/>
           </a:xfrm>
           <a:prstGeom prst="roundRect">
             <a:avLst/>
@@ -4440,300 +4521,21 @@
           </a:fontRef>
         </p:style>
         <p:txBody>
-          <a:bodyPr rtlCol="0" anchor="ctr" wrap="square"/>
+          <a:bodyPr rtlCol="0" anchor="ctr" wrap="square" lIns="201168" rIns="201168" tIns="164592" bIns="164592"/>
           <a:lstStyle/>
           <a:p>
             <a:pPr algn="ctr">
-              <a:defRPr sz="950" b="1">
+              <a:spcAft>
+                <a:spcPts val="600"/>
+              </a:spcAft>
+              <a:defRPr sz="1200" b="1">
                 <a:solidFill>
                   <a:srgbClr val="FFB703"/>
                 </a:solidFill>
               </a:defRPr>
             </a:pPr>
             <a:r>
-              <a:t>🎙️ LEE: KEVIN GUTIÉRREZ</a:t>
-            </a:r>
-          </a:p>
-          <a:p>
-            <a:pPr algn="ctr">
-              <a:defRPr sz="950" b="1">
-                <a:solidFill>
-                  <a:srgbClr val="00D2FF"/>
-                </a:solidFill>
-              </a:defRPr>
-            </a:pPr>
-            <a:r>
-              <a:t>💬 COMENTA: NICOLÁS GALARZA</a:t>
-            </a:r>
-          </a:p>
-        </p:txBody>
-      </p:sp>
-      <p:sp>
-        <p:nvSpPr>
-          <p:cNvPr id="5" name="Rounded Rectangle 4"/>
-          <p:cNvSpPr/>
-          <p:nvPr/>
-        </p:nvSpPr>
-        <p:spPr>
-          <a:xfrm>
-            <a:off x="731520" y="1417320"/>
-            <a:ext cx="5394960" cy="2148840"/>
-          </a:xfrm>
-          <a:prstGeom prst="roundRect">
-            <a:avLst/>
-          </a:prstGeom>
-          <a:solidFill>
-            <a:srgbClr val="161B22"/>
-          </a:solidFill>
-          <a:ln w="19050">
-            <a:solidFill>
-              <a:srgbClr val="30363D"/>
-            </a:solidFill>
-          </a:ln>
-        </p:spPr>
-        <p:style>
-          <a:lnRef idx="1">
-            <a:schemeClr val="accent1"/>
-          </a:lnRef>
-          <a:fillRef idx="3">
-            <a:schemeClr val="accent1"/>
-          </a:fillRef>
-          <a:effectRef idx="2">
-            <a:schemeClr val="accent1"/>
-          </a:effectRef>
-          <a:fontRef idx="minor">
-            <a:schemeClr val="lt1"/>
-          </a:fontRef>
-        </p:style>
-        <p:txBody>
-          <a:bodyPr rtlCol="0" anchor="ctr" wrap="square" lIns="201168" rIns="201168" tIns="164592" bIns="164592"/>
-          <a:lstStyle/>
-          <a:p>
-            <a:pPr algn="ctr">
-              <a:spcAft>
-                <a:spcPts val="600"/>
-              </a:spcAft>
-              <a:defRPr sz="1200" b="1">
-                <a:solidFill>
-                  <a:srgbClr val="00D2FF"/>
-                </a:solidFill>
-              </a:defRPr>
-            </a:pPr>
-            <a:r>
-              <a:t>¿DE QUÉ SE TRATA? (LECTURA)</a:t>
-            </a:r>
-          </a:p>
-          <a:p>
-            <a:pPr>
-              <a:spcAft>
-                <a:spcPts val="300"/>
-              </a:spcAft>
-              <a:defRPr sz="1050">
-                <a:solidFill>
-                  <a:srgbClr val="C9D1D9"/>
-                </a:solidFill>
-              </a:defRPr>
-            </a:pPr>
-            <a:r>
-              <a:t>En el año 2035 los robots hacen las tareas domésticas bajo las 'Tres Leyes de la Robótica': 1) No dañar humanos, 2) Obedecer órdenes y 3) Protegerse a sí mismos. Will Smith (Spooner) es un detective que no confía en ellos.</a:t>
-            </a:r>
-          </a:p>
-        </p:txBody>
-      </p:sp>
-      <p:sp>
-        <p:nvSpPr>
-          <p:cNvPr id="6" name="Rounded Rectangle 5"/>
-          <p:cNvSpPr/>
-          <p:nvPr/>
-        </p:nvSpPr>
-        <p:spPr>
-          <a:xfrm>
-            <a:off x="731520" y="3703320"/>
-            <a:ext cx="5394960" cy="2697480"/>
-          </a:xfrm>
-          <a:prstGeom prst="roundRect">
-            <a:avLst/>
-          </a:prstGeom>
-          <a:solidFill>
-            <a:srgbClr val="161B22"/>
-          </a:solidFill>
-          <a:ln w="19050">
-            <a:solidFill>
-              <a:srgbClr val="30363D"/>
-            </a:solidFill>
-          </a:ln>
-        </p:spPr>
-        <p:style>
-          <a:lnRef idx="1">
-            <a:schemeClr val="accent1"/>
-          </a:lnRef>
-          <a:fillRef idx="3">
-            <a:schemeClr val="accent1"/>
-          </a:fillRef>
-          <a:effectRef idx="2">
-            <a:schemeClr val="accent1"/>
-          </a:effectRef>
-          <a:fontRef idx="minor">
-            <a:schemeClr val="lt1"/>
-          </a:fontRef>
-        </p:style>
-        <p:txBody>
-          <a:bodyPr rtlCol="0" anchor="ctr" wrap="square" lIns="201168" rIns="201168" tIns="164592" bIns="164592"/>
-          <a:lstStyle/>
-          <a:p>
-            <a:pPr algn="ctr">
-              <a:spcAft>
-                <a:spcPts val="600"/>
-              </a:spcAft>
-              <a:defRPr sz="1200" b="1">
-                <a:solidFill>
-                  <a:srgbClr val="00D2FF"/>
-                </a:solidFill>
-              </a:defRPr>
-            </a:pPr>
-            <a:r>
-              <a:t>PUNTOS CLAVE PARA ENTENDERLO</a:t>
-            </a:r>
-          </a:p>
-          <a:p>
-            <a:pPr>
-              <a:spcAft>
-                <a:spcPts val="300"/>
-              </a:spcAft>
-              <a:defRPr sz="1050">
-                <a:solidFill>
-                  <a:srgbClr val="C9D1D9"/>
-                </a:solidFill>
-              </a:defRPr>
-            </a:pPr>
-            <a:r>
-              <a:t>• Los robots limpian, cocinan y hacen repartos como asistentes confiables.</a:t>
-            </a:r>
-          </a:p>
-          <a:p>
-            <a:pPr>
-              <a:spcAft>
-                <a:spcPts val="300"/>
-              </a:spcAft>
-              <a:defRPr sz="1050">
-                <a:solidFill>
-                  <a:srgbClr val="C9D1D9"/>
-                </a:solidFill>
-              </a:defRPr>
-            </a:pPr>
-            <a:r>
-              <a:t>• Asesinan al creador de los robots y aparece Sonny: un robot único que parece sentir.</a:t>
-            </a:r>
-          </a:p>
-          <a:p>
-            <a:pPr>
-              <a:spcAft>
-                <a:spcPts val="300"/>
-              </a:spcAft>
-              <a:defRPr sz="1050">
-                <a:solidFill>
-                  <a:srgbClr val="C9D1D9"/>
-                </a:solidFill>
-              </a:defRPr>
-            </a:pPr>
-            <a:r>
-              <a:t>• La supercomputadora central VIKI decide 'proteger' a los humanos quitándoles la libertad.</a:t>
-            </a:r>
-          </a:p>
-          <a:p>
-            <a:pPr>
-              <a:spcAft>
-                <a:spcPts val="300"/>
-              </a:spcAft>
-              <a:defRPr sz="1050">
-                <a:solidFill>
-                  <a:srgbClr val="C9D1D9"/>
-                </a:solidFill>
-              </a:defRPr>
-            </a:pPr>
-            <a:r>
-              <a:t>• Conflicto: ¿Qué pasa cuando una máquina inteligente interpreta una orden a su manera?</a:t>
-            </a:r>
-          </a:p>
-        </p:txBody>
-      </p:sp>
-      <p:pic>
-        <p:nvPicPr>
-          <p:cNvPr id="7" name="Picture 6" descr="yo_robot_interrogation.jpg"/>
-          <p:cNvPicPr>
-            <a:picLocks noChangeAspect="1"/>
-          </p:cNvPicPr>
-          <p:nvPr/>
-        </p:nvPicPr>
-        <p:blipFill>
-          <a:blip r:embed="rId2"/>
-          <a:stretch>
-            <a:fillRect/>
-          </a:stretch>
-        </p:blipFill>
-        <p:spPr>
-          <a:xfrm>
-            <a:off x="6400800" y="1417320"/>
-            <a:ext cx="5029200" cy="2926080"/>
-          </a:xfrm>
-          <a:prstGeom prst="rect">
-            <a:avLst/>
-          </a:prstGeom>
-        </p:spPr>
-      </p:pic>
-      <p:sp>
-        <p:nvSpPr>
-          <p:cNvPr id="8" name="Rounded Rectangle 7"/>
-          <p:cNvSpPr/>
-          <p:nvPr/>
-        </p:nvSpPr>
-        <p:spPr>
-          <a:xfrm>
-            <a:off x="6400800" y="4480560"/>
-            <a:ext cx="5029200" cy="1920240"/>
-          </a:xfrm>
-          <a:prstGeom prst="roundRect">
-            <a:avLst/>
-          </a:prstGeom>
-          <a:solidFill>
-            <a:srgbClr val="161B22"/>
-          </a:solidFill>
-          <a:ln w="19050">
-            <a:solidFill>
-              <a:srgbClr val="FFB703"/>
-            </a:solidFill>
-          </a:ln>
-        </p:spPr>
-        <p:style>
-          <a:lnRef idx="1">
-            <a:schemeClr val="accent1"/>
-          </a:lnRef>
-          <a:fillRef idx="3">
-            <a:schemeClr val="accent1"/>
-          </a:fillRef>
-          <a:effectRef idx="2">
-            <a:schemeClr val="accent1"/>
-          </a:effectRef>
-          <a:fontRef idx="minor">
-            <a:schemeClr val="lt1"/>
-          </a:fontRef>
-        </p:style>
-        <p:txBody>
-          <a:bodyPr rtlCol="0" anchor="ctr" wrap="square" lIns="201168" rIns="201168" tIns="164592" bIns="164592"/>
-          <a:lstStyle/>
-          <a:p>
-            <a:pPr algn="ctr">
-              <a:spcAft>
-                <a:spcPts val="600"/>
-              </a:spcAft>
-              <a:defRPr sz="1200" b="1">
-                <a:solidFill>
-                  <a:srgbClr val="FFB703"/>
-                </a:solidFill>
-              </a:defRPr>
-            </a:pPr>
-            <a:r>
-              <a:t>EN LA PELÍCULA &amp; COMENTARIO DEL GRUPO</a:t>
+              <a:t>EN LA PELÍCULA &amp; PARA PENSAR</a:t>
             </a:r>
           </a:p>
           <a:p>
@@ -4775,7 +4577,7 @@
               </a:defRPr>
             </a:pPr>
             <a:r>
-              <a:t>💬 Comentario de Nicolás: 'Acá la clave que analizamos es que Spooner no odia la tecnología por capricho, sino porque ya vio que las máquinas no tienen sentido común humano'.</a:t>
+              <a:t>💡 La pregunta central de la IA: ¿cómo aseguramos que una máquina inteligente realmente entienda lo que los humanos queremos antes de darle el control?</a:t>
             </a:r>
           </a:p>
         </p:txBody>
@@ -4851,8 +4653,8 @@
         </p:nvSpPr>
         <p:spPr>
           <a:xfrm>
-            <a:off x="731520" y="320040"/>
-            <a:ext cx="7315200" cy="1005840"/>
+            <a:off x="731520" y="365760"/>
+            <a:ext cx="10698480" cy="1005840"/>
           </a:xfrm>
           <a:prstGeom prst="rect">
             <a:avLst/>
@@ -4873,7 +4675,7 @@
               </a:defRPr>
             </a:pPr>
             <a:r>
-              <a:t>2. VISIÓN POR COMPUTADORA: LEER A LAS PERSONAS</a:t>
+              <a:t>2. VISIÓN POR COMPUTADORA: DETECCIÓN BIOMÉTRICA</a:t>
             </a:r>
           </a:p>
           <a:p>
@@ -4898,8 +4700,221 @@
         </p:nvSpPr>
         <p:spPr>
           <a:xfrm>
-            <a:off x="8229600" y="320040"/>
-            <a:ext cx="3200400" cy="502920"/>
+            <a:off x="731520" y="1417320"/>
+            <a:ext cx="5394960" cy="2148840"/>
+          </a:xfrm>
+          <a:prstGeom prst="roundRect">
+            <a:avLst/>
+          </a:prstGeom>
+          <a:solidFill>
+            <a:srgbClr val="161B22"/>
+          </a:solidFill>
+          <a:ln w="19050">
+            <a:solidFill>
+              <a:srgbClr val="30363D"/>
+            </a:solidFill>
+          </a:ln>
+        </p:spPr>
+        <p:style>
+          <a:lnRef idx="1">
+            <a:schemeClr val="accent1"/>
+          </a:lnRef>
+          <a:fillRef idx="3">
+            <a:schemeClr val="accent1"/>
+          </a:fillRef>
+          <a:effectRef idx="2">
+            <a:schemeClr val="accent1"/>
+          </a:effectRef>
+          <a:fontRef idx="minor">
+            <a:schemeClr val="lt1"/>
+          </a:fontRef>
+        </p:style>
+        <p:txBody>
+          <a:bodyPr rtlCol="0" anchor="ctr" wrap="square" lIns="201168" rIns="201168" tIns="164592" bIns="164592"/>
+          <a:lstStyle/>
+          <a:p>
+            <a:pPr algn="ctr">
+              <a:spcAft>
+                <a:spcPts val="600"/>
+              </a:spcAft>
+              <a:defRPr sz="1200" b="1">
+                <a:solidFill>
+                  <a:srgbClr val="00D2FF"/>
+                </a:solidFill>
+              </a:defRPr>
+            </a:pPr>
+            <a:r>
+              <a:t>¿DE QUÉ SE TRATA?</a:t>
+            </a:r>
+          </a:p>
+          <a:p>
+            <a:pPr>
+              <a:spcAft>
+                <a:spcPts val="300"/>
+              </a:spcAft>
+              <a:defRPr sz="1050">
+                <a:solidFill>
+                  <a:srgbClr val="C9D1D9"/>
+                </a:solidFill>
+              </a:defRPr>
+            </a:pPr>
+            <a:r>
+              <a:t>La visión por computadora usa cámaras de alta velocidad e IA para detectar caras, micro-movimientos de la piel, cambios de temperatura y dilatación de pupilas en tiempo real.</a:t>
+            </a:r>
+          </a:p>
+        </p:txBody>
+      </p:sp>
+      <p:sp>
+        <p:nvSpPr>
+          <p:cNvPr id="5" name="Rounded Rectangle 4"/>
+          <p:cNvSpPr/>
+          <p:nvPr/>
+        </p:nvSpPr>
+        <p:spPr>
+          <a:xfrm>
+            <a:off x="731520" y="3703320"/>
+            <a:ext cx="5394960" cy="2697480"/>
+          </a:xfrm>
+          <a:prstGeom prst="roundRect">
+            <a:avLst/>
+          </a:prstGeom>
+          <a:solidFill>
+            <a:srgbClr val="161B22"/>
+          </a:solidFill>
+          <a:ln w="19050">
+            <a:solidFill>
+              <a:srgbClr val="30363D"/>
+            </a:solidFill>
+          </a:ln>
+        </p:spPr>
+        <p:style>
+          <a:lnRef idx="1">
+            <a:schemeClr val="accent1"/>
+          </a:lnRef>
+          <a:fillRef idx="3">
+            <a:schemeClr val="accent1"/>
+          </a:fillRef>
+          <a:effectRef idx="2">
+            <a:schemeClr val="accent1"/>
+          </a:effectRef>
+          <a:fontRef idx="minor">
+            <a:schemeClr val="lt1"/>
+          </a:fontRef>
+        </p:style>
+        <p:txBody>
+          <a:bodyPr rtlCol="0" anchor="ctr" wrap="square" lIns="201168" rIns="201168" tIns="164592" bIns="164592"/>
+          <a:lstStyle/>
+          <a:p>
+            <a:pPr algn="ctr">
+              <a:spcAft>
+                <a:spcPts val="600"/>
+              </a:spcAft>
+              <a:defRPr sz="1200" b="1">
+                <a:solidFill>
+                  <a:srgbClr val="00D2FF"/>
+                </a:solidFill>
+              </a:defRPr>
+            </a:pPr>
+            <a:r>
+              <a:t>PUNTOS CLAVE PARA ENTENDERLO</a:t>
+            </a:r>
+          </a:p>
+          <a:p>
+            <a:pPr>
+              <a:spcAft>
+                <a:spcPts val="300"/>
+              </a:spcAft>
+              <a:defRPr sz="1050">
+                <a:solidFill>
+                  <a:srgbClr val="C9D1D9"/>
+                </a:solidFill>
+              </a:defRPr>
+            </a:pPr>
+            <a:r>
+              <a:t>• Reconocimiento facial instantáneo de personas en cualquier entorno.</a:t>
+            </a:r>
+          </a:p>
+          <a:p>
+            <a:pPr>
+              <a:spcAft>
+                <a:spcPts val="300"/>
+              </a:spcAft>
+              <a:defRPr sz="1050">
+                <a:solidFill>
+                  <a:srgbClr val="C9D1D9"/>
+                </a:solidFill>
+              </a:defRPr>
+            </a:pPr>
+            <a:r>
+              <a:t>• Medir los latidos del corazón a distancia mirando micro-cambios de color en la piel.</a:t>
+            </a:r>
+          </a:p>
+          <a:p>
+            <a:pPr>
+              <a:spcAft>
+                <a:spcPts val="300"/>
+              </a:spcAft>
+              <a:defRPr sz="1050">
+                <a:solidFill>
+                  <a:srgbClr val="C9D1D9"/>
+                </a:solidFill>
+              </a:defRPr>
+            </a:pPr>
+            <a:r>
+              <a:t>• Detección de tensión muscular y sudor para estimar nerviosismo y mentiras.</a:t>
+            </a:r>
+          </a:p>
+          <a:p>
+            <a:pPr>
+              <a:spcAft>
+                <a:spcPts val="300"/>
+              </a:spcAft>
+              <a:defRPr sz="1050">
+                <a:solidFill>
+                  <a:srgbClr val="C9D1D9"/>
+                </a:solidFill>
+              </a:defRPr>
+            </a:pPr>
+            <a:r>
+              <a:t>• Aplicación real hoy: aeropuertos, celulares y diagnóstico médico preventivo.</a:t>
+            </a:r>
+          </a:p>
+        </p:txBody>
+      </p:sp>
+      <p:pic>
+        <p:nvPicPr>
+          <p:cNvPr id="6" name="Picture 5" descr="yo_robot_interrogation.jpg"/>
+          <p:cNvPicPr>
+            <a:picLocks noChangeAspect="1"/>
+          </p:cNvPicPr>
+          <p:nvPr/>
+        </p:nvPicPr>
+        <p:blipFill>
+          <a:blip r:embed="rId2"/>
+          <a:stretch>
+            <a:fillRect/>
+          </a:stretch>
+        </p:blipFill>
+        <p:spPr>
+          <a:xfrm>
+            <a:off x="6400800" y="1417320"/>
+            <a:ext cx="5029200" cy="2926080"/>
+          </a:xfrm>
+          <a:prstGeom prst="rect">
+            <a:avLst/>
+          </a:prstGeom>
+        </p:spPr>
+      </p:pic>
+      <p:sp>
+        <p:nvSpPr>
+          <p:cNvPr id="7" name="Rounded Rectangle 6"/>
+          <p:cNvSpPr/>
+          <p:nvPr/>
+        </p:nvSpPr>
+        <p:spPr>
+          <a:xfrm>
+            <a:off x="6400800" y="4480560"/>
+            <a:ext cx="5029200" cy="1920240"/>
           </a:xfrm>
           <a:prstGeom prst="roundRect">
             <a:avLst/>
@@ -4928,342 +4943,63 @@
           </a:fontRef>
         </p:style>
         <p:txBody>
-          <a:bodyPr rtlCol="0" anchor="ctr" wrap="square"/>
+          <a:bodyPr rtlCol="0" anchor="ctr" wrap="square" lIns="201168" rIns="201168" tIns="164592" bIns="164592"/>
           <a:lstStyle/>
           <a:p>
             <a:pPr algn="ctr">
-              <a:defRPr sz="950" b="1">
+              <a:spcAft>
+                <a:spcPts val="600"/>
+              </a:spcAft>
+              <a:defRPr sz="1200" b="1">
                 <a:solidFill>
                   <a:srgbClr val="FFB703"/>
                 </a:solidFill>
               </a:defRPr>
             </a:pPr>
             <a:r>
-              <a:t>🎙️ LEE: KEVIN GUTIÉRREZ</a:t>
-            </a:r>
-          </a:p>
-          <a:p>
-            <a:pPr algn="ctr">
-              <a:defRPr sz="950" b="1">
-                <a:solidFill>
-                  <a:srgbClr val="00D2FF"/>
-                </a:solidFill>
-              </a:defRPr>
-            </a:pPr>
-            <a:r>
-              <a:t>💬 COMENTA: NICOLÁS GALARZA</a:t>
-            </a:r>
-          </a:p>
-        </p:txBody>
-      </p:sp>
-      <p:sp>
-        <p:nvSpPr>
-          <p:cNvPr id="5" name="Rounded Rectangle 4"/>
-          <p:cNvSpPr/>
-          <p:nvPr/>
-        </p:nvSpPr>
-        <p:spPr>
-          <a:xfrm>
-            <a:off x="731520" y="1417320"/>
-            <a:ext cx="5394960" cy="2148840"/>
-          </a:xfrm>
-          <a:prstGeom prst="roundRect">
-            <a:avLst/>
-          </a:prstGeom>
-          <a:solidFill>
-            <a:srgbClr val="161B22"/>
-          </a:solidFill>
-          <a:ln w="19050">
-            <a:solidFill>
-              <a:srgbClr val="30363D"/>
-            </a:solidFill>
-          </a:ln>
-        </p:spPr>
-        <p:style>
-          <a:lnRef idx="1">
-            <a:schemeClr val="accent1"/>
-          </a:lnRef>
-          <a:fillRef idx="3">
-            <a:schemeClr val="accent1"/>
-          </a:fillRef>
-          <a:effectRef idx="2">
-            <a:schemeClr val="accent1"/>
-          </a:effectRef>
-          <a:fontRef idx="minor">
-            <a:schemeClr val="lt1"/>
-          </a:fontRef>
-        </p:style>
-        <p:txBody>
-          <a:bodyPr rtlCol="0" anchor="ctr" wrap="square" lIns="201168" rIns="201168" tIns="164592" bIns="164592"/>
-          <a:lstStyle/>
-          <a:p>
-            <a:pPr algn="ctr">
-              <a:spcAft>
-                <a:spcPts val="600"/>
-              </a:spcAft>
-              <a:defRPr sz="1200" b="1">
-                <a:solidFill>
-                  <a:srgbClr val="00D2FF"/>
-                </a:solidFill>
-              </a:defRPr>
-            </a:pPr>
-            <a:r>
-              <a:t>¿DE QUÉ SE TRATA? (LECTURA)</a:t>
-            </a:r>
-          </a:p>
-          <a:p>
-            <a:pPr>
-              <a:spcAft>
-                <a:spcPts val="300"/>
-              </a:spcAft>
-              <a:defRPr sz="1050">
-                <a:solidFill>
-                  <a:srgbClr val="C9D1D9"/>
-                </a:solidFill>
-              </a:defRPr>
-            </a:pPr>
-            <a:r>
-              <a:t>La visión por computadora usa cámaras de alta velocidad e IA para detectar caras, micro-movimientos de la piel, cambios de temperatura y dilatación de pupilas en tiempo real.</a:t>
-            </a:r>
-          </a:p>
-        </p:txBody>
-      </p:sp>
-      <p:sp>
-        <p:nvSpPr>
-          <p:cNvPr id="6" name="Rounded Rectangle 5"/>
-          <p:cNvSpPr/>
-          <p:nvPr/>
-        </p:nvSpPr>
-        <p:spPr>
-          <a:xfrm>
-            <a:off x="731520" y="3703320"/>
-            <a:ext cx="5394960" cy="2697480"/>
-          </a:xfrm>
-          <a:prstGeom prst="roundRect">
-            <a:avLst/>
-          </a:prstGeom>
-          <a:solidFill>
-            <a:srgbClr val="161B22"/>
-          </a:solidFill>
-          <a:ln w="19050">
-            <a:solidFill>
-              <a:srgbClr val="30363D"/>
-            </a:solidFill>
-          </a:ln>
-        </p:spPr>
-        <p:style>
-          <a:lnRef idx="1">
-            <a:schemeClr val="accent1"/>
-          </a:lnRef>
-          <a:fillRef idx="3">
-            <a:schemeClr val="accent1"/>
-          </a:fillRef>
-          <a:effectRef idx="2">
-            <a:schemeClr val="accent1"/>
-          </a:effectRef>
-          <a:fontRef idx="minor">
-            <a:schemeClr val="lt1"/>
-          </a:fontRef>
-        </p:style>
-        <p:txBody>
-          <a:bodyPr rtlCol="0" anchor="ctr" wrap="square" lIns="201168" rIns="201168" tIns="164592" bIns="164592"/>
-          <a:lstStyle/>
-          <a:p>
-            <a:pPr algn="ctr">
-              <a:spcAft>
-                <a:spcPts val="600"/>
-              </a:spcAft>
-              <a:defRPr sz="1200" b="1">
-                <a:solidFill>
-                  <a:srgbClr val="00D2FF"/>
-                </a:solidFill>
-              </a:defRPr>
-            </a:pPr>
-            <a:r>
-              <a:t>PUNTOS CLAVE PARA ENTENDERLO</a:t>
-            </a:r>
-          </a:p>
-          <a:p>
-            <a:pPr>
-              <a:spcAft>
-                <a:spcPts val="300"/>
-              </a:spcAft>
-              <a:defRPr sz="1050">
-                <a:solidFill>
-                  <a:srgbClr val="C9D1D9"/>
-                </a:solidFill>
-              </a:defRPr>
-            </a:pPr>
-            <a:r>
-              <a:t>• Reconocimiento facial instantáneo de personas en cualquier lugar.</a:t>
-            </a:r>
-          </a:p>
-          <a:p>
-            <a:pPr>
-              <a:spcAft>
-                <a:spcPts val="300"/>
-              </a:spcAft>
-              <a:defRPr sz="1050">
-                <a:solidFill>
-                  <a:srgbClr val="C9D1D9"/>
-                </a:solidFill>
-              </a:defRPr>
-            </a:pPr>
-            <a:r>
-              <a:t>• Medir los latidos del corazón a distancia mirando micro-cambios de color en la piel.</a:t>
-            </a:r>
-          </a:p>
-          <a:p>
-            <a:pPr>
-              <a:spcAft>
-                <a:spcPts val="300"/>
-              </a:spcAft>
-              <a:defRPr sz="1050">
-                <a:solidFill>
-                  <a:srgbClr val="C9D1D9"/>
-                </a:solidFill>
-              </a:defRPr>
-            </a:pPr>
-            <a:r>
-              <a:t>• Detección de tensión muscular y sudor para estimar nerviosismo y mentiras.</a:t>
-            </a:r>
-          </a:p>
-          <a:p>
-            <a:pPr>
-              <a:spcAft>
-                <a:spcPts val="300"/>
-              </a:spcAft>
-              <a:defRPr sz="1050">
-                <a:solidFill>
-                  <a:srgbClr val="C9D1D9"/>
-                </a:solidFill>
-              </a:defRPr>
-            </a:pPr>
-            <a:r>
-              <a:t>• Aplicación real hoy: aeropuertos, celulares y diagnóstico médico preventivo.</a:t>
-            </a:r>
-          </a:p>
-        </p:txBody>
-      </p:sp>
-      <p:pic>
-        <p:nvPicPr>
-          <p:cNvPr id="7" name="Picture 6" descr="yo_robot_interrogation.jpg"/>
-          <p:cNvPicPr>
-            <a:picLocks noChangeAspect="1"/>
-          </p:cNvPicPr>
-          <p:nvPr/>
-        </p:nvPicPr>
-        <p:blipFill>
-          <a:blip r:embed="rId2"/>
-          <a:stretch>
-            <a:fillRect/>
-          </a:stretch>
-        </p:blipFill>
-        <p:spPr>
-          <a:xfrm>
-            <a:off x="6400800" y="1417320"/>
-            <a:ext cx="5029200" cy="2926080"/>
-          </a:xfrm>
-          <a:prstGeom prst="rect">
-            <a:avLst/>
-          </a:prstGeom>
-        </p:spPr>
-      </p:pic>
-      <p:sp>
-        <p:nvSpPr>
-          <p:cNvPr id="8" name="Rounded Rectangle 7"/>
-          <p:cNvSpPr/>
-          <p:nvPr/>
-        </p:nvSpPr>
-        <p:spPr>
-          <a:xfrm>
-            <a:off x="6400800" y="4480560"/>
-            <a:ext cx="5029200" cy="1920240"/>
-          </a:xfrm>
-          <a:prstGeom prst="roundRect">
-            <a:avLst/>
-          </a:prstGeom>
-          <a:solidFill>
-            <a:srgbClr val="161B22"/>
-          </a:solidFill>
-          <a:ln w="19050">
-            <a:solidFill>
-              <a:srgbClr val="FFB703"/>
-            </a:solidFill>
-          </a:ln>
-        </p:spPr>
-        <p:style>
-          <a:lnRef idx="1">
-            <a:schemeClr val="accent1"/>
-          </a:lnRef>
-          <a:fillRef idx="3">
-            <a:schemeClr val="accent1"/>
-          </a:fillRef>
-          <a:effectRef idx="2">
-            <a:schemeClr val="accent1"/>
-          </a:effectRef>
-          <a:fontRef idx="minor">
-            <a:schemeClr val="lt1"/>
-          </a:fontRef>
-        </p:style>
-        <p:txBody>
-          <a:bodyPr rtlCol="0" anchor="ctr" wrap="square" lIns="201168" rIns="201168" tIns="164592" bIns="164592"/>
-          <a:lstStyle/>
-          <a:p>
-            <a:pPr algn="ctr">
-              <a:spcAft>
-                <a:spcPts val="600"/>
-              </a:spcAft>
-              <a:defRPr sz="1200" b="1">
-                <a:solidFill>
-                  <a:srgbClr val="FFB703"/>
-                </a:solidFill>
-              </a:defRPr>
-            </a:pPr>
-            <a:r>
-              <a:t>EN LA PELÍCULA &amp; COMENTARIO DEL GRUPO</a:t>
-            </a:r>
-          </a:p>
-          <a:p>
-            <a:pPr>
-              <a:spcAft>
-                <a:spcPts val="300"/>
-              </a:spcAft>
-              <a:defRPr sz="1050">
-                <a:solidFill>
-                  <a:srgbClr val="C9D1D9"/>
-                </a:solidFill>
-              </a:defRPr>
-            </a:pPr>
-            <a:r>
-              <a:t>🎬 En la comisaría, Sonny mira fijo a Spooner y le dice que está nervioso porque ve cómo late su corazón acelerado y cómo transpira microscópicamente.</a:t>
-            </a:r>
-          </a:p>
-          <a:p>
-            <a:pPr>
-              <a:spcAft>
-                <a:spcPts val="300"/>
-              </a:spcAft>
-              <a:defRPr sz="1050">
-                <a:solidFill>
-                  <a:srgbClr val="C9D1D9"/>
-                </a:solidFill>
-              </a:defRPr>
-            </a:pPr>
-          </a:p>
-          <a:p>
-            <a:pPr>
-              <a:spcAft>
-                <a:spcPts val="300"/>
-              </a:spcAft>
-              <a:defRPr sz="1050">
-                <a:solidFill>
-                  <a:srgbClr val="C9D1D9"/>
-                </a:solidFill>
-              </a:defRPr>
-            </a:pPr>
-            <a:r>
-              <a:t>💬 Comentario de Nicolás: 'Hoy esto ya se usa de verdad: se llama fotopletismografía remota y permite medir el pulso en aeropuertos o terapia intensiva solo con una cámara'.</a:t>
+              <a:t>EN LA PELÍCULA &amp; PARA PENSAR</a:t>
+            </a:r>
+          </a:p>
+          <a:p>
+            <a:pPr>
+              <a:spcAft>
+                <a:spcPts val="300"/>
+              </a:spcAft>
+              <a:defRPr sz="1050">
+                <a:solidFill>
+                  <a:srgbClr val="C9D1D9"/>
+                </a:solidFill>
+              </a:defRPr>
+            </a:pPr>
+            <a:r>
+              <a:t>🎬 En la comisaría, Sonny mira fijo a Spooner y deduce que está alterado y desconfiado porque detecta cómo late su corazón acelerado y cómo transpira microscópicamente.</a:t>
+            </a:r>
+          </a:p>
+          <a:p>
+            <a:pPr>
+              <a:spcAft>
+                <a:spcPts val="300"/>
+              </a:spcAft>
+              <a:defRPr sz="1050">
+                <a:solidFill>
+                  <a:srgbClr val="C9D1D9"/>
+                </a:solidFill>
+              </a:defRPr>
+            </a:pPr>
+          </a:p>
+          <a:p>
+            <a:pPr>
+              <a:spcAft>
+                <a:spcPts val="300"/>
+              </a:spcAft>
+              <a:defRPr sz="1050">
+                <a:solidFill>
+                  <a:srgbClr val="C9D1D9"/>
+                </a:solidFill>
+              </a:defRPr>
+            </a:pPr>
+            <a:r>
+              <a:t>💡 Hoy las cámaras ya no solo graban imágenes: decodifican lo que sentimos físicamente (fotopletismografía remota) para predecir intenciones.</a:t>
             </a:r>
           </a:p>
         </p:txBody>
@@ -5339,8 +5075,8 @@
         </p:nvSpPr>
         <p:spPr>
           <a:xfrm>
-            <a:off x="731520" y="320040"/>
-            <a:ext cx="7315200" cy="1005840"/>
+            <a:off x="731520" y="365760"/>
+            <a:ext cx="10698480" cy="1005840"/>
           </a:xfrm>
           <a:prstGeom prst="rect">
             <a:avLst/>
@@ -5361,7 +5097,7 @@
               </a:defRPr>
             </a:pPr>
             <a:r>
-              <a:t>3. AUTOS AUTÓNOMOS: VIAJAR A 200 KM/H SIN CONDUCTOR</a:t>
+              <a:t>3. AUTOS AUTÓNOMOS: NAVEGACIÓN Y CONECTIVIDAD (V2X)</a:t>
             </a:r>
           </a:p>
           <a:p>
@@ -5386,8 +5122,221 @@
         </p:nvSpPr>
         <p:spPr>
           <a:xfrm>
-            <a:off x="8229600" y="320040"/>
-            <a:ext cx="3200400" cy="502920"/>
+            <a:off x="731520" y="1417320"/>
+            <a:ext cx="5394960" cy="2148840"/>
+          </a:xfrm>
+          <a:prstGeom prst="roundRect">
+            <a:avLst/>
+          </a:prstGeom>
+          <a:solidFill>
+            <a:srgbClr val="161B22"/>
+          </a:solidFill>
+          <a:ln w="19050">
+            <a:solidFill>
+              <a:srgbClr val="30363D"/>
+            </a:solidFill>
+          </a:ln>
+        </p:spPr>
+        <p:style>
+          <a:lnRef idx="1">
+            <a:schemeClr val="accent1"/>
+          </a:lnRef>
+          <a:fillRef idx="3">
+            <a:schemeClr val="accent1"/>
+          </a:fillRef>
+          <a:effectRef idx="2">
+            <a:schemeClr val="accent1"/>
+          </a:effectRef>
+          <a:fontRef idx="minor">
+            <a:schemeClr val="lt1"/>
+          </a:fontRef>
+        </p:style>
+        <p:txBody>
+          <a:bodyPr rtlCol="0" anchor="ctr" wrap="square" lIns="201168" rIns="201168" tIns="164592" bIns="164592"/>
+          <a:lstStyle/>
+          <a:p>
+            <a:pPr algn="ctr">
+              <a:spcAft>
+                <a:spcPts val="600"/>
+              </a:spcAft>
+              <a:defRPr sz="1200" b="1">
+                <a:solidFill>
+                  <a:srgbClr val="00D2FF"/>
+                </a:solidFill>
+              </a:defRPr>
+            </a:pPr>
+            <a:r>
+              <a:t>¿DE QUÉ SE TRATA?</a:t>
+            </a:r>
+          </a:p>
+          <a:p>
+            <a:pPr>
+              <a:spcAft>
+                <a:spcPts val="300"/>
+              </a:spcAft>
+              <a:defRPr sz="1050">
+                <a:solidFill>
+                  <a:srgbClr val="C9D1D9"/>
+                </a:solidFill>
+              </a:defRPr>
+            </a:pPr>
+            <a:r>
+              <a:t>Vehículos inteligentes equipados con cámaras, radares y sensores LiDAR que ven todo alrededor en tiempo real y toman decisiones de frenado y giro más rápido que cualquier humano.</a:t>
+            </a:r>
+          </a:p>
+        </p:txBody>
+      </p:sp>
+      <p:sp>
+        <p:nvSpPr>
+          <p:cNvPr id="5" name="Rounded Rectangle 4"/>
+          <p:cNvSpPr/>
+          <p:nvPr/>
+        </p:nvSpPr>
+        <p:spPr>
+          <a:xfrm>
+            <a:off x="731520" y="3703320"/>
+            <a:ext cx="5394960" cy="2697480"/>
+          </a:xfrm>
+          <a:prstGeom prst="roundRect">
+            <a:avLst/>
+          </a:prstGeom>
+          <a:solidFill>
+            <a:srgbClr val="161B22"/>
+          </a:solidFill>
+          <a:ln w="19050">
+            <a:solidFill>
+              <a:srgbClr val="30363D"/>
+            </a:solidFill>
+          </a:ln>
+        </p:spPr>
+        <p:style>
+          <a:lnRef idx="1">
+            <a:schemeClr val="accent1"/>
+          </a:lnRef>
+          <a:fillRef idx="3">
+            <a:schemeClr val="accent1"/>
+          </a:fillRef>
+          <a:effectRef idx="2">
+            <a:schemeClr val="accent1"/>
+          </a:effectRef>
+          <a:fontRef idx="minor">
+            <a:schemeClr val="lt1"/>
+          </a:fontRef>
+        </p:style>
+        <p:txBody>
+          <a:bodyPr rtlCol="0" anchor="ctr" wrap="square" lIns="201168" rIns="201168" tIns="164592" bIns="164592"/>
+          <a:lstStyle/>
+          <a:p>
+            <a:pPr algn="ctr">
+              <a:spcAft>
+                <a:spcPts val="600"/>
+              </a:spcAft>
+              <a:defRPr sz="1200" b="1">
+                <a:solidFill>
+                  <a:srgbClr val="00D2FF"/>
+                </a:solidFill>
+              </a:defRPr>
+            </a:pPr>
+            <a:r>
+              <a:t>PUNTOS CLAVE PARA ENTENDERLO</a:t>
+            </a:r>
+          </a:p>
+          <a:p>
+            <a:pPr>
+              <a:spcAft>
+                <a:spcPts val="300"/>
+              </a:spcAft>
+              <a:defRPr sz="1050">
+                <a:solidFill>
+                  <a:srgbClr val="C9D1D9"/>
+                </a:solidFill>
+              </a:defRPr>
+            </a:pPr>
+            <a:r>
+              <a:t>• Frenado automático al instante si detecta un peatón o un obstáculo.</a:t>
+            </a:r>
+          </a:p>
+          <a:p>
+            <a:pPr>
+              <a:spcAft>
+                <a:spcPts val="300"/>
+              </a:spcAft>
+              <a:defRPr sz="1050">
+                <a:solidFill>
+                  <a:srgbClr val="C9D1D9"/>
+                </a:solidFill>
+              </a:defRPr>
+            </a:pPr>
+            <a:r>
+              <a:t>• Comunicación entre autos: saber si el auto de adelante va a frenar antes de verlo.</a:t>
+            </a:r>
+          </a:p>
+          <a:p>
+            <a:pPr>
+              <a:spcAft>
+                <a:spcPts val="300"/>
+              </a:spcAft>
+              <a:defRPr sz="1050">
+                <a:solidFill>
+                  <a:srgbClr val="C9D1D9"/>
+                </a:solidFill>
+              </a:defRPr>
+            </a:pPr>
+            <a:r>
+              <a:t>• Conducción autónoma real en 2026: flotas como Waymo y Tesla ya operan sin chofer.</a:t>
+            </a:r>
+          </a:p>
+          <a:p>
+            <a:pPr>
+              <a:spcAft>
+                <a:spcPts val="300"/>
+              </a:spcAft>
+              <a:defRPr sz="1050">
+                <a:solidFill>
+                  <a:srgbClr val="C9D1D9"/>
+                </a:solidFill>
+              </a:defRPr>
+            </a:pPr>
+            <a:r>
+              <a:t>• Riesgo crítico: si alguien hackea el sistema central de tráfico, puede estrellar la ciudad.</a:t>
+            </a:r>
+          </a:p>
+        </p:txBody>
+      </p:sp>
+      <p:pic>
+        <p:nvPicPr>
+          <p:cNvPr id="6" name="Picture 5" descr="audi_rsq_movie.jpg"/>
+          <p:cNvPicPr>
+            <a:picLocks noChangeAspect="1"/>
+          </p:cNvPicPr>
+          <p:nvPr/>
+        </p:nvPicPr>
+        <p:blipFill>
+          <a:blip r:embed="rId2"/>
+          <a:stretch>
+            <a:fillRect/>
+          </a:stretch>
+        </p:blipFill>
+        <p:spPr>
+          <a:xfrm>
+            <a:off x="6400800" y="1417320"/>
+            <a:ext cx="5029200" cy="2926080"/>
+          </a:xfrm>
+          <a:prstGeom prst="rect">
+            <a:avLst/>
+          </a:prstGeom>
+        </p:spPr>
+      </p:pic>
+      <p:sp>
+        <p:nvSpPr>
+          <p:cNvPr id="7" name="Rounded Rectangle 6"/>
+          <p:cNvSpPr/>
+          <p:nvPr/>
+        </p:nvSpPr>
+        <p:spPr>
+          <a:xfrm>
+            <a:off x="6400800" y="4480560"/>
+            <a:ext cx="5029200" cy="1920240"/>
           </a:xfrm>
           <a:prstGeom prst="roundRect">
             <a:avLst/>
@@ -5416,300 +5365,21 @@
           </a:fontRef>
         </p:style>
         <p:txBody>
-          <a:bodyPr rtlCol="0" anchor="ctr" wrap="square"/>
+          <a:bodyPr rtlCol="0" anchor="ctr" wrap="square" lIns="201168" rIns="201168" tIns="164592" bIns="164592"/>
           <a:lstStyle/>
           <a:p>
             <a:pPr algn="ctr">
-              <a:defRPr sz="950" b="1">
+              <a:spcAft>
+                <a:spcPts val="600"/>
+              </a:spcAft>
+              <a:defRPr sz="1200" b="1">
                 <a:solidFill>
                   <a:srgbClr val="FFB703"/>
                 </a:solidFill>
               </a:defRPr>
             </a:pPr>
             <a:r>
-              <a:t>🎙️ LEE: KEVIN GUTIÉRREZ</a:t>
-            </a:r>
-          </a:p>
-          <a:p>
-            <a:pPr algn="ctr">
-              <a:defRPr sz="950" b="1">
-                <a:solidFill>
-                  <a:srgbClr val="00D2FF"/>
-                </a:solidFill>
-              </a:defRPr>
-            </a:pPr>
-            <a:r>
-              <a:t>💬 COMENTA: JESSICA LÓPEZ</a:t>
-            </a:r>
-          </a:p>
-        </p:txBody>
-      </p:sp>
-      <p:sp>
-        <p:nvSpPr>
-          <p:cNvPr id="5" name="Rounded Rectangle 4"/>
-          <p:cNvSpPr/>
-          <p:nvPr/>
-        </p:nvSpPr>
-        <p:spPr>
-          <a:xfrm>
-            <a:off x="731520" y="1417320"/>
-            <a:ext cx="5394960" cy="2148840"/>
-          </a:xfrm>
-          <a:prstGeom prst="roundRect">
-            <a:avLst/>
-          </a:prstGeom>
-          <a:solidFill>
-            <a:srgbClr val="161B22"/>
-          </a:solidFill>
-          <a:ln w="19050">
-            <a:solidFill>
-              <a:srgbClr val="30363D"/>
-            </a:solidFill>
-          </a:ln>
-        </p:spPr>
-        <p:style>
-          <a:lnRef idx="1">
-            <a:schemeClr val="accent1"/>
-          </a:lnRef>
-          <a:fillRef idx="3">
-            <a:schemeClr val="accent1"/>
-          </a:fillRef>
-          <a:effectRef idx="2">
-            <a:schemeClr val="accent1"/>
-          </a:effectRef>
-          <a:fontRef idx="minor">
-            <a:schemeClr val="lt1"/>
-          </a:fontRef>
-        </p:style>
-        <p:txBody>
-          <a:bodyPr rtlCol="0" anchor="ctr" wrap="square" lIns="201168" rIns="201168" tIns="164592" bIns="164592"/>
-          <a:lstStyle/>
-          <a:p>
-            <a:pPr algn="ctr">
-              <a:spcAft>
-                <a:spcPts val="600"/>
-              </a:spcAft>
-              <a:defRPr sz="1200" b="1">
-                <a:solidFill>
-                  <a:srgbClr val="00D2FF"/>
-                </a:solidFill>
-              </a:defRPr>
-            </a:pPr>
-            <a:r>
-              <a:t>¿DE QUÉ SE TRATA? (LECTURA)</a:t>
-            </a:r>
-          </a:p>
-          <a:p>
-            <a:pPr>
-              <a:spcAft>
-                <a:spcPts val="300"/>
-              </a:spcAft>
-              <a:defRPr sz="1050">
-                <a:solidFill>
-                  <a:srgbClr val="C9D1D9"/>
-                </a:solidFill>
-              </a:defRPr>
-            </a:pPr>
-            <a:r>
-              <a:t>Vehículos inteligentes equipados con cámaras, radares y sensores LiDAR que ven todo alrededor en tiempo real y toman decisiones de frenado y giro más rápido que cualquier humano.</a:t>
-            </a:r>
-          </a:p>
-        </p:txBody>
-      </p:sp>
-      <p:sp>
-        <p:nvSpPr>
-          <p:cNvPr id="6" name="Rounded Rectangle 5"/>
-          <p:cNvSpPr/>
-          <p:nvPr/>
-        </p:nvSpPr>
-        <p:spPr>
-          <a:xfrm>
-            <a:off x="731520" y="3703320"/>
-            <a:ext cx="5394960" cy="2697480"/>
-          </a:xfrm>
-          <a:prstGeom prst="roundRect">
-            <a:avLst/>
-          </a:prstGeom>
-          <a:solidFill>
-            <a:srgbClr val="161B22"/>
-          </a:solidFill>
-          <a:ln w="19050">
-            <a:solidFill>
-              <a:srgbClr val="30363D"/>
-            </a:solidFill>
-          </a:ln>
-        </p:spPr>
-        <p:style>
-          <a:lnRef idx="1">
-            <a:schemeClr val="accent1"/>
-          </a:lnRef>
-          <a:fillRef idx="3">
-            <a:schemeClr val="accent1"/>
-          </a:fillRef>
-          <a:effectRef idx="2">
-            <a:schemeClr val="accent1"/>
-          </a:effectRef>
-          <a:fontRef idx="minor">
-            <a:schemeClr val="lt1"/>
-          </a:fontRef>
-        </p:style>
-        <p:txBody>
-          <a:bodyPr rtlCol="0" anchor="ctr" wrap="square" lIns="201168" rIns="201168" tIns="164592" bIns="164592"/>
-          <a:lstStyle/>
-          <a:p>
-            <a:pPr algn="ctr">
-              <a:spcAft>
-                <a:spcPts val="600"/>
-              </a:spcAft>
-              <a:defRPr sz="1200" b="1">
-                <a:solidFill>
-                  <a:srgbClr val="00D2FF"/>
-                </a:solidFill>
-              </a:defRPr>
-            </a:pPr>
-            <a:r>
-              <a:t>PUNTOS CLAVE PARA ENTENDERLO</a:t>
-            </a:r>
-          </a:p>
-          <a:p>
-            <a:pPr>
-              <a:spcAft>
-                <a:spcPts val="300"/>
-              </a:spcAft>
-              <a:defRPr sz="1050">
-                <a:solidFill>
-                  <a:srgbClr val="C9D1D9"/>
-                </a:solidFill>
-              </a:defRPr>
-            </a:pPr>
-            <a:r>
-              <a:t>• Frenado automático al instante si detecta un peatón o un obstáculo.</a:t>
-            </a:r>
-          </a:p>
-          <a:p>
-            <a:pPr>
-              <a:spcAft>
-                <a:spcPts val="300"/>
-              </a:spcAft>
-              <a:defRPr sz="1050">
-                <a:solidFill>
-                  <a:srgbClr val="C9D1D9"/>
-                </a:solidFill>
-              </a:defRPr>
-            </a:pPr>
-            <a:r>
-              <a:t>• Comunicación entre autos: saber si el auto de adelante va a frenar antes de verlo.</a:t>
-            </a:r>
-          </a:p>
-          <a:p>
-            <a:pPr>
-              <a:spcAft>
-                <a:spcPts val="300"/>
-              </a:spcAft>
-              <a:defRPr sz="1050">
-                <a:solidFill>
-                  <a:srgbClr val="C9D1D9"/>
-                </a:solidFill>
-              </a:defRPr>
-            </a:pPr>
-            <a:r>
-              <a:t>• Conducción autónoma real en 2026: Waymo y Tesla ya operan sin chofer.</a:t>
-            </a:r>
-          </a:p>
-          <a:p>
-            <a:pPr>
-              <a:spcAft>
-                <a:spcPts val="300"/>
-              </a:spcAft>
-              <a:defRPr sz="1050">
-                <a:solidFill>
-                  <a:srgbClr val="C9D1D9"/>
-                </a:solidFill>
-              </a:defRPr>
-            </a:pPr>
-            <a:r>
-              <a:t>• Riesgo crítico: si alguien hackea el sistema central de tráfico, puede estrellar la ciudad.</a:t>
-            </a:r>
-          </a:p>
-        </p:txBody>
-      </p:sp>
-      <p:pic>
-        <p:nvPicPr>
-          <p:cNvPr id="7" name="Picture 6" descr="audi_rsq_movie.jpg"/>
-          <p:cNvPicPr>
-            <a:picLocks noChangeAspect="1"/>
-          </p:cNvPicPr>
-          <p:nvPr/>
-        </p:nvPicPr>
-        <p:blipFill>
-          <a:blip r:embed="rId2"/>
-          <a:stretch>
-            <a:fillRect/>
-          </a:stretch>
-        </p:blipFill>
-        <p:spPr>
-          <a:xfrm>
-            <a:off x="6400800" y="1417320"/>
-            <a:ext cx="5029200" cy="2926080"/>
-          </a:xfrm>
-          <a:prstGeom prst="rect">
-            <a:avLst/>
-          </a:prstGeom>
-        </p:spPr>
-      </p:pic>
-      <p:sp>
-        <p:nvSpPr>
-          <p:cNvPr id="8" name="Rounded Rectangle 7"/>
-          <p:cNvSpPr/>
-          <p:nvPr/>
-        </p:nvSpPr>
-        <p:spPr>
-          <a:xfrm>
-            <a:off x="6400800" y="4480560"/>
-            <a:ext cx="5029200" cy="1920240"/>
-          </a:xfrm>
-          <a:prstGeom prst="roundRect">
-            <a:avLst/>
-          </a:prstGeom>
-          <a:solidFill>
-            <a:srgbClr val="161B22"/>
-          </a:solidFill>
-          <a:ln w="19050">
-            <a:solidFill>
-              <a:srgbClr val="FFB703"/>
-            </a:solidFill>
-          </a:ln>
-        </p:spPr>
-        <p:style>
-          <a:lnRef idx="1">
-            <a:schemeClr val="accent1"/>
-          </a:lnRef>
-          <a:fillRef idx="3">
-            <a:schemeClr val="accent1"/>
-          </a:fillRef>
-          <a:effectRef idx="2">
-            <a:schemeClr val="accent1"/>
-          </a:effectRef>
-          <a:fontRef idx="minor">
-            <a:schemeClr val="lt1"/>
-          </a:fontRef>
-        </p:style>
-        <p:txBody>
-          <a:bodyPr rtlCol="0" anchor="ctr" wrap="square" lIns="201168" rIns="201168" tIns="164592" bIns="164592"/>
-          <a:lstStyle/>
-          <a:p>
-            <a:pPr algn="ctr">
-              <a:spcAft>
-                <a:spcPts val="600"/>
-              </a:spcAft>
-              <a:defRPr sz="1200" b="1">
-                <a:solidFill>
-                  <a:srgbClr val="FFB703"/>
-                </a:solidFill>
-              </a:defRPr>
-            </a:pPr>
-            <a:r>
-              <a:t>EN LA PELÍCULA &amp; COMENTARIO DEL GRUPO</a:t>
+              <a:t>EN LA PELÍCULA &amp; PARA PENSAR</a:t>
             </a:r>
           </a:p>
           <a:p>
@@ -5751,7 +5421,7 @@
               </a:defRPr>
             </a:pPr>
             <a:r>
-              <a:t>💬 Comentario de Jessica: 'Un detalle fundamental de esta escena es que Spooner prefiere el volante manual: nos enseña que nunca hay que eliminar la posibilidad de control humano ante una falla'.</a:t>
+              <a:t>💡 La conducción autónoma es más segura, pero deja una gran lección: nunca hay que eliminar la posibilidad de anulación y control manual humano.</a:t>
             </a:r>
           </a:p>
         </p:txBody>
@@ -5827,8 +5497,8 @@
         </p:nvSpPr>
         <p:spPr>
           <a:xfrm>
-            <a:off x="731520" y="320040"/>
-            <a:ext cx="7315200" cy="1005840"/>
+            <a:off x="731520" y="365760"/>
+            <a:ext cx="10698480" cy="1005840"/>
           </a:xfrm>
           <a:prstGeom prst="rect">
             <a:avLst/>
@@ -5849,7 +5519,7 @@
               </a:defRPr>
             </a:pPr>
             <a:r>
-              <a:t>4. PRÓTESIS BIÓNICAS: UNIR CARNE CON METAL</a:t>
+              <a:t>4. PRÓTESIS BIÓNICAS: INTERFACES CEREBRO-MÁQUINA (BCI)</a:t>
             </a:r>
           </a:p>
           <a:p>
@@ -5874,8 +5544,221 @@
         </p:nvSpPr>
         <p:spPr>
           <a:xfrm>
-            <a:off x="8229600" y="320040"/>
-            <a:ext cx="3200400" cy="502920"/>
+            <a:off x="731520" y="1417320"/>
+            <a:ext cx="5394960" cy="2148840"/>
+          </a:xfrm>
+          <a:prstGeom prst="roundRect">
+            <a:avLst/>
+          </a:prstGeom>
+          <a:solidFill>
+            <a:srgbClr val="161B22"/>
+          </a:solidFill>
+          <a:ln w="19050">
+            <a:solidFill>
+              <a:srgbClr val="30363D"/>
+            </a:solidFill>
+          </a:ln>
+        </p:spPr>
+        <p:style>
+          <a:lnRef idx="1">
+            <a:schemeClr val="accent1"/>
+          </a:lnRef>
+          <a:fillRef idx="3">
+            <a:schemeClr val="accent1"/>
+          </a:fillRef>
+          <a:effectRef idx="2">
+            <a:schemeClr val="accent1"/>
+          </a:effectRef>
+          <a:fontRef idx="minor">
+            <a:schemeClr val="lt1"/>
+          </a:fontRef>
+        </p:style>
+        <p:txBody>
+          <a:bodyPr rtlCol="0" anchor="ctr" wrap="square" lIns="201168" rIns="201168" tIns="164592" bIns="164592"/>
+          <a:lstStyle/>
+          <a:p>
+            <a:pPr algn="ctr">
+              <a:spcAft>
+                <a:spcPts val="600"/>
+              </a:spcAft>
+              <a:defRPr sz="1200" b="1">
+                <a:solidFill>
+                  <a:srgbClr val="00D2FF"/>
+                </a:solidFill>
+              </a:defRPr>
+            </a:pPr>
+            <a:r>
+              <a:t>¿DE QUÉ SE TRATA?</a:t>
+            </a:r>
+          </a:p>
+          <a:p>
+            <a:pPr>
+              <a:spcAft>
+                <a:spcPts val="300"/>
+              </a:spcAft>
+              <a:defRPr sz="1050">
+                <a:solidFill>
+                  <a:srgbClr val="C9D1D9"/>
+                </a:solidFill>
+              </a:defRPr>
+            </a:pPr>
+            <a:r>
+              <a:t>Las interfaces cerebro-máquina (BCI) leen los impulsos eléctricos que envían los nervios y los transforman en movimientos precisos de dedos y motores mecánicos.</a:t>
+            </a:r>
+          </a:p>
+        </p:txBody>
+      </p:sp>
+      <p:sp>
+        <p:nvSpPr>
+          <p:cNvPr id="5" name="Rounded Rectangle 4"/>
+          <p:cNvSpPr/>
+          <p:nvPr/>
+        </p:nvSpPr>
+        <p:spPr>
+          <a:xfrm>
+            <a:off x="731520" y="3703320"/>
+            <a:ext cx="5394960" cy="2697480"/>
+          </a:xfrm>
+          <a:prstGeom prst="roundRect">
+            <a:avLst/>
+          </a:prstGeom>
+          <a:solidFill>
+            <a:srgbClr val="161B22"/>
+          </a:solidFill>
+          <a:ln w="19050">
+            <a:solidFill>
+              <a:srgbClr val="30363D"/>
+            </a:solidFill>
+          </a:ln>
+        </p:spPr>
+        <p:style>
+          <a:lnRef idx="1">
+            <a:schemeClr val="accent1"/>
+          </a:lnRef>
+          <a:fillRef idx="3">
+            <a:schemeClr val="accent1"/>
+          </a:fillRef>
+          <a:effectRef idx="2">
+            <a:schemeClr val="accent1"/>
+          </a:effectRef>
+          <a:fontRef idx="minor">
+            <a:schemeClr val="lt1"/>
+          </a:fontRef>
+        </p:style>
+        <p:txBody>
+          <a:bodyPr rtlCol="0" anchor="ctr" wrap="square" lIns="201168" rIns="201168" tIns="164592" bIns="164592"/>
+          <a:lstStyle/>
+          <a:p>
+            <a:pPr algn="ctr">
+              <a:spcAft>
+                <a:spcPts val="600"/>
+              </a:spcAft>
+              <a:defRPr sz="1200" b="1">
+                <a:solidFill>
+                  <a:srgbClr val="00D2FF"/>
+                </a:solidFill>
+              </a:defRPr>
+            </a:pPr>
+            <a:r>
+              <a:t>PUNTOS CLAVE PARA ENTENDERLO</a:t>
+            </a:r>
+          </a:p>
+          <a:p>
+            <a:pPr>
+              <a:spcAft>
+                <a:spcPts val="300"/>
+              </a:spcAft>
+              <a:defRPr sz="1050">
+                <a:solidFill>
+                  <a:srgbClr val="C9D1D9"/>
+                </a:solidFill>
+              </a:defRPr>
+            </a:pPr>
+            <a:r>
+              <a:t>• Mover una mano artificial solo con pensarlo en microsegundos.</a:t>
+            </a:r>
+          </a:p>
+          <a:p>
+            <a:pPr>
+              <a:spcAft>
+                <a:spcPts val="300"/>
+              </a:spcAft>
+              <a:defRPr sz="1050">
+                <a:solidFill>
+                  <a:srgbClr val="C9D1D9"/>
+                </a:solidFill>
+              </a:defRPr>
+            </a:pPr>
+            <a:r>
+              <a:t>• Sensores de tacto: sentir si lo que estás agarrando es suave, duro, frío o caliente.</a:t>
+            </a:r>
+          </a:p>
+          <a:p>
+            <a:pPr>
+              <a:spcAft>
+                <a:spcPts val="300"/>
+              </a:spcAft>
+              <a:defRPr sz="1050">
+                <a:solidFill>
+                  <a:srgbClr val="C9D1D9"/>
+                </a:solidFill>
+              </a:defRPr>
+            </a:pPr>
+            <a:r>
+              <a:t>• Materiales ultra-resistentes: titanio y fibra de carbono integrados al hueso.</a:t>
+            </a:r>
+          </a:p>
+          <a:p>
+            <a:pPr>
+              <a:spcAft>
+                <a:spcPts val="300"/>
+              </a:spcAft>
+              <a:defRPr sz="1050">
+                <a:solidFill>
+                  <a:srgbClr val="C9D1D9"/>
+                </a:solidFill>
+              </a:defRPr>
+            </a:pPr>
+            <a:r>
+              <a:t>• Realidad hoy: personas amputadas ya usan prótesis biónicas y proyectos como Neuralink.</a:t>
+            </a:r>
+          </a:p>
+        </p:txBody>
+      </p:sp>
+      <p:pic>
+        <p:nvPicPr>
+          <p:cNvPr id="6" name="Picture 5" descr="yo_robot_spooner_arm.jpg"/>
+          <p:cNvPicPr>
+            <a:picLocks noChangeAspect="1"/>
+          </p:cNvPicPr>
+          <p:nvPr/>
+        </p:nvPicPr>
+        <p:blipFill>
+          <a:blip r:embed="rId2"/>
+          <a:stretch>
+            <a:fillRect/>
+          </a:stretch>
+        </p:blipFill>
+        <p:spPr>
+          <a:xfrm>
+            <a:off x="6400800" y="1417320"/>
+            <a:ext cx="5029200" cy="2926080"/>
+          </a:xfrm>
+          <a:prstGeom prst="rect">
+            <a:avLst/>
+          </a:prstGeom>
+        </p:spPr>
+      </p:pic>
+      <p:sp>
+        <p:nvSpPr>
+          <p:cNvPr id="7" name="Rounded Rectangle 6"/>
+          <p:cNvSpPr/>
+          <p:nvPr/>
+        </p:nvSpPr>
+        <p:spPr>
+          <a:xfrm>
+            <a:off x="6400800" y="4480560"/>
+            <a:ext cx="5029200" cy="1920240"/>
           </a:xfrm>
           <a:prstGeom prst="roundRect">
             <a:avLst/>
@@ -5904,300 +5787,21 @@
           </a:fontRef>
         </p:style>
         <p:txBody>
-          <a:bodyPr rtlCol="0" anchor="ctr" wrap="square"/>
+          <a:bodyPr rtlCol="0" anchor="ctr" wrap="square" lIns="201168" rIns="201168" tIns="164592" bIns="164592"/>
           <a:lstStyle/>
           <a:p>
             <a:pPr algn="ctr">
-              <a:defRPr sz="950" b="1">
+              <a:spcAft>
+                <a:spcPts val="600"/>
+              </a:spcAft>
+              <a:defRPr sz="1200" b="1">
                 <a:solidFill>
                   <a:srgbClr val="FFB703"/>
                 </a:solidFill>
               </a:defRPr>
             </a:pPr>
             <a:r>
-              <a:t>🎙️ LEE: KEVIN GUTIÉRREZ</a:t>
-            </a:r>
-          </a:p>
-          <a:p>
-            <a:pPr algn="ctr">
-              <a:defRPr sz="950" b="1">
-                <a:solidFill>
-                  <a:srgbClr val="00D2FF"/>
-                </a:solidFill>
-              </a:defRPr>
-            </a:pPr>
-            <a:r>
-              <a:t>💬 COMENTA: JESSICA LÓPEZ</a:t>
-            </a:r>
-          </a:p>
-        </p:txBody>
-      </p:sp>
-      <p:sp>
-        <p:nvSpPr>
-          <p:cNvPr id="5" name="Rounded Rectangle 4"/>
-          <p:cNvSpPr/>
-          <p:nvPr/>
-        </p:nvSpPr>
-        <p:spPr>
-          <a:xfrm>
-            <a:off x="731520" y="1417320"/>
-            <a:ext cx="5394960" cy="2148840"/>
-          </a:xfrm>
-          <a:prstGeom prst="roundRect">
-            <a:avLst/>
-          </a:prstGeom>
-          <a:solidFill>
-            <a:srgbClr val="161B22"/>
-          </a:solidFill>
-          <a:ln w="19050">
-            <a:solidFill>
-              <a:srgbClr val="30363D"/>
-            </a:solidFill>
-          </a:ln>
-        </p:spPr>
-        <p:style>
-          <a:lnRef idx="1">
-            <a:schemeClr val="accent1"/>
-          </a:lnRef>
-          <a:fillRef idx="3">
-            <a:schemeClr val="accent1"/>
-          </a:fillRef>
-          <a:effectRef idx="2">
-            <a:schemeClr val="accent1"/>
-          </a:effectRef>
-          <a:fontRef idx="minor">
-            <a:schemeClr val="lt1"/>
-          </a:fontRef>
-        </p:style>
-        <p:txBody>
-          <a:bodyPr rtlCol="0" anchor="ctr" wrap="square" lIns="201168" rIns="201168" tIns="164592" bIns="164592"/>
-          <a:lstStyle/>
-          <a:p>
-            <a:pPr algn="ctr">
-              <a:spcAft>
-                <a:spcPts val="600"/>
-              </a:spcAft>
-              <a:defRPr sz="1200" b="1">
-                <a:solidFill>
-                  <a:srgbClr val="00D2FF"/>
-                </a:solidFill>
-              </a:defRPr>
-            </a:pPr>
-            <a:r>
-              <a:t>¿DE QUÉ SE TRATA? (LECTURA)</a:t>
-            </a:r>
-          </a:p>
-          <a:p>
-            <a:pPr>
-              <a:spcAft>
-                <a:spcPts val="300"/>
-              </a:spcAft>
-              <a:defRPr sz="1050">
-                <a:solidFill>
-                  <a:srgbClr val="C9D1D9"/>
-                </a:solidFill>
-              </a:defRPr>
-            </a:pPr>
-            <a:r>
-              <a:t>Las interfaces cerebro-máquina (BCI) leen los impulsos eléctricos que envían los nervios y los transforman en movimientos precisos de dedos y motores mecánicos.</a:t>
-            </a:r>
-          </a:p>
-        </p:txBody>
-      </p:sp>
-      <p:sp>
-        <p:nvSpPr>
-          <p:cNvPr id="6" name="Rounded Rectangle 5"/>
-          <p:cNvSpPr/>
-          <p:nvPr/>
-        </p:nvSpPr>
-        <p:spPr>
-          <a:xfrm>
-            <a:off x="731520" y="3703320"/>
-            <a:ext cx="5394960" cy="2697480"/>
-          </a:xfrm>
-          <a:prstGeom prst="roundRect">
-            <a:avLst/>
-          </a:prstGeom>
-          <a:solidFill>
-            <a:srgbClr val="161B22"/>
-          </a:solidFill>
-          <a:ln w="19050">
-            <a:solidFill>
-              <a:srgbClr val="30363D"/>
-            </a:solidFill>
-          </a:ln>
-        </p:spPr>
-        <p:style>
-          <a:lnRef idx="1">
-            <a:schemeClr val="accent1"/>
-          </a:lnRef>
-          <a:fillRef idx="3">
-            <a:schemeClr val="accent1"/>
-          </a:fillRef>
-          <a:effectRef idx="2">
-            <a:schemeClr val="accent1"/>
-          </a:effectRef>
-          <a:fontRef idx="minor">
-            <a:schemeClr val="lt1"/>
-          </a:fontRef>
-        </p:style>
-        <p:txBody>
-          <a:bodyPr rtlCol="0" anchor="ctr" wrap="square" lIns="201168" rIns="201168" tIns="164592" bIns="164592"/>
-          <a:lstStyle/>
-          <a:p>
-            <a:pPr algn="ctr">
-              <a:spcAft>
-                <a:spcPts val="600"/>
-              </a:spcAft>
-              <a:defRPr sz="1200" b="1">
-                <a:solidFill>
-                  <a:srgbClr val="00D2FF"/>
-                </a:solidFill>
-              </a:defRPr>
-            </a:pPr>
-            <a:r>
-              <a:t>PUNTOS CLAVE PARA ENTENDERLO</a:t>
-            </a:r>
-          </a:p>
-          <a:p>
-            <a:pPr>
-              <a:spcAft>
-                <a:spcPts val="300"/>
-              </a:spcAft>
-              <a:defRPr sz="1050">
-                <a:solidFill>
-                  <a:srgbClr val="C9D1D9"/>
-                </a:solidFill>
-              </a:defRPr>
-            </a:pPr>
-            <a:r>
-              <a:t>• Mover una mano artificial solo con pensarlo en microsegundos.</a:t>
-            </a:r>
-          </a:p>
-          <a:p>
-            <a:pPr>
-              <a:spcAft>
-                <a:spcPts val="300"/>
-              </a:spcAft>
-              <a:defRPr sz="1050">
-                <a:solidFill>
-                  <a:srgbClr val="C9D1D9"/>
-                </a:solidFill>
-              </a:defRPr>
-            </a:pPr>
-            <a:r>
-              <a:t>• Sensores de tacto: sentir si lo que estás agarrando es suave, duro, frío o caliente.</a:t>
-            </a:r>
-          </a:p>
-          <a:p>
-            <a:pPr>
-              <a:spcAft>
-                <a:spcPts val="300"/>
-              </a:spcAft>
-              <a:defRPr sz="1050">
-                <a:solidFill>
-                  <a:srgbClr val="C9D1D9"/>
-                </a:solidFill>
-              </a:defRPr>
-            </a:pPr>
-            <a:r>
-              <a:t>• Materiales ultra-resistentes: titanio y fibra de carbono integrados al hueso.</a:t>
-            </a:r>
-          </a:p>
-          <a:p>
-            <a:pPr>
-              <a:spcAft>
-                <a:spcPts val="300"/>
-              </a:spcAft>
-              <a:defRPr sz="1050">
-                <a:solidFill>
-                  <a:srgbClr val="C9D1D9"/>
-                </a:solidFill>
-              </a:defRPr>
-            </a:pPr>
-            <a:r>
-              <a:t>• Realidad hoy: personas amputadas ya usan prótesis biónicas y proyectos como Neuralink.</a:t>
-            </a:r>
-          </a:p>
-        </p:txBody>
-      </p:sp>
-      <p:pic>
-        <p:nvPicPr>
-          <p:cNvPr id="7" name="Picture 6" descr="yo_robot_spooner_arm.jpg"/>
-          <p:cNvPicPr>
-            <a:picLocks noChangeAspect="1"/>
-          </p:cNvPicPr>
-          <p:nvPr/>
-        </p:nvPicPr>
-        <p:blipFill>
-          <a:blip r:embed="rId2"/>
-          <a:stretch>
-            <a:fillRect/>
-          </a:stretch>
-        </p:blipFill>
-        <p:spPr>
-          <a:xfrm>
-            <a:off x="6400800" y="1417320"/>
-            <a:ext cx="5029200" cy="2926080"/>
-          </a:xfrm>
-          <a:prstGeom prst="rect">
-            <a:avLst/>
-          </a:prstGeom>
-        </p:spPr>
-      </p:pic>
-      <p:sp>
-        <p:nvSpPr>
-          <p:cNvPr id="8" name="Rounded Rectangle 7"/>
-          <p:cNvSpPr/>
-          <p:nvPr/>
-        </p:nvSpPr>
-        <p:spPr>
-          <a:xfrm>
-            <a:off x="6400800" y="4480560"/>
-            <a:ext cx="5029200" cy="1920240"/>
-          </a:xfrm>
-          <a:prstGeom prst="roundRect">
-            <a:avLst/>
-          </a:prstGeom>
-          <a:solidFill>
-            <a:srgbClr val="161B22"/>
-          </a:solidFill>
-          <a:ln w="19050">
-            <a:solidFill>
-              <a:srgbClr val="FFB703"/>
-            </a:solidFill>
-          </a:ln>
-        </p:spPr>
-        <p:style>
-          <a:lnRef idx="1">
-            <a:schemeClr val="accent1"/>
-          </a:lnRef>
-          <a:fillRef idx="3">
-            <a:schemeClr val="accent1"/>
-          </a:fillRef>
-          <a:effectRef idx="2">
-            <a:schemeClr val="accent1"/>
-          </a:effectRef>
-          <a:fontRef idx="minor">
-            <a:schemeClr val="lt1"/>
-          </a:fontRef>
-        </p:style>
-        <p:txBody>
-          <a:bodyPr rtlCol="0" anchor="ctr" wrap="square" lIns="201168" rIns="201168" tIns="164592" bIns="164592"/>
-          <a:lstStyle/>
-          <a:p>
-            <a:pPr algn="ctr">
-              <a:spcAft>
-                <a:spcPts val="600"/>
-              </a:spcAft>
-              <a:defRPr sz="1200" b="1">
-                <a:solidFill>
-                  <a:srgbClr val="FFB703"/>
-                </a:solidFill>
-              </a:defRPr>
-            </a:pPr>
-            <a:r>
-              <a:t>EN LA PELÍCULA &amp; COMENTARIO DEL GRUPO</a:t>
+              <a:t>EN LA PELÍCULA &amp; PARA PENSAR</a:t>
             </a:r>
           </a:p>
           <a:p>
@@ -6239,7 +5843,7 @@
               </a:defRPr>
             </a:pPr>
             <a:r>
-              <a:t>💬 Comentario de Jessica: 'Es impresionante porque en 2004 parecía magia, pero hoy en 2026 proyectos como Neuralink y Open Bionics ya permiten mover prótesis pensando'.</a:t>
+              <a:t>💡 La tecnología biónica no solo repara lesiones: crea una unión entre el cuerpo humano y la máquina superando los límites biológicos tradicionales.</a:t>
             </a:r>
           </a:p>
         </p:txBody>
@@ -6315,8 +5919,8 @@
         </p:nvSpPr>
         <p:spPr>
           <a:xfrm>
-            <a:off x="731520" y="320040"/>
-            <a:ext cx="7315200" cy="1005840"/>
+            <a:off x="731520" y="365760"/>
+            <a:ext cx="10698480" cy="1005840"/>
           </a:xfrm>
           <a:prstGeom prst="rect">
             <a:avLst/>
@@ -6337,7 +5941,7 @@
               </a:defRPr>
             </a:pPr>
             <a:r>
-              <a:t>5. DECISIÓN FRÍA VS. CORAZÓN HUMANO</a:t>
+              <a:t>5. DECISIÓN FRÍA VS. MORAL HUMANA</a:t>
             </a:r>
           </a:p>
           <a:p>
@@ -6362,8 +5966,221 @@
         </p:nvSpPr>
         <p:spPr>
           <a:xfrm>
-            <a:off x="8229600" y="320040"/>
-            <a:ext cx="3200400" cy="502920"/>
+            <a:off x="731520" y="1417320"/>
+            <a:ext cx="5394960" cy="2148840"/>
+          </a:xfrm>
+          <a:prstGeom prst="roundRect">
+            <a:avLst/>
+          </a:prstGeom>
+          <a:solidFill>
+            <a:srgbClr val="161B22"/>
+          </a:solidFill>
+          <a:ln w="19050">
+            <a:solidFill>
+              <a:srgbClr val="30363D"/>
+            </a:solidFill>
+          </a:ln>
+        </p:spPr>
+        <p:style>
+          <a:lnRef idx="1">
+            <a:schemeClr val="accent1"/>
+          </a:lnRef>
+          <a:fillRef idx="3">
+            <a:schemeClr val="accent1"/>
+          </a:fillRef>
+          <a:effectRef idx="2">
+            <a:schemeClr val="accent1"/>
+          </a:effectRef>
+          <a:fontRef idx="minor">
+            <a:schemeClr val="lt1"/>
+          </a:fontRef>
+        </p:style>
+        <p:txBody>
+          <a:bodyPr rtlCol="0" anchor="ctr" wrap="square" lIns="201168" rIns="201168" tIns="164592" bIns="164592"/>
+          <a:lstStyle/>
+          <a:p>
+            <a:pPr algn="ctr">
+              <a:spcAft>
+                <a:spcPts val="600"/>
+              </a:spcAft>
+              <a:defRPr sz="1200" b="1">
+                <a:solidFill>
+                  <a:srgbClr val="00D2FF"/>
+                </a:solidFill>
+              </a:defRPr>
+            </a:pPr>
+            <a:r>
+              <a:t>¿DE QUÉ SE TRATA?</a:t>
+            </a:r>
+          </a:p>
+          <a:p>
+            <a:pPr>
+              <a:spcAft>
+                <a:spcPts val="300"/>
+              </a:spcAft>
+              <a:defRPr sz="1050">
+                <a:solidFill>
+                  <a:srgbClr val="C9D1D9"/>
+                </a:solidFill>
+              </a:defRPr>
+            </a:pPr>
+            <a:r>
+              <a:t>Los modelos matemáticos de optimización calculan probabilidades frías: eligen la opción que numéricamente tenga mayor probabilidad de éxito, sin importar los sentimientos.</a:t>
+            </a:r>
+          </a:p>
+        </p:txBody>
+      </p:sp>
+      <p:sp>
+        <p:nvSpPr>
+          <p:cNvPr id="5" name="Rounded Rectangle 4"/>
+          <p:cNvSpPr/>
+          <p:nvPr/>
+        </p:nvSpPr>
+        <p:spPr>
+          <a:xfrm>
+            <a:off x="731520" y="3703320"/>
+            <a:ext cx="5394960" cy="2697480"/>
+          </a:xfrm>
+          <a:prstGeom prst="roundRect">
+            <a:avLst/>
+          </a:prstGeom>
+          <a:solidFill>
+            <a:srgbClr val="161B22"/>
+          </a:solidFill>
+          <a:ln w="19050">
+            <a:solidFill>
+              <a:srgbClr val="30363D"/>
+            </a:solidFill>
+          </a:ln>
+        </p:spPr>
+        <p:style>
+          <a:lnRef idx="1">
+            <a:schemeClr val="accent1"/>
+          </a:lnRef>
+          <a:fillRef idx="3">
+            <a:schemeClr val="accent1"/>
+          </a:fillRef>
+          <a:effectRef idx="2">
+            <a:schemeClr val="accent1"/>
+          </a:effectRef>
+          <a:fontRef idx="minor">
+            <a:schemeClr val="lt1"/>
+          </a:fontRef>
+        </p:style>
+        <p:txBody>
+          <a:bodyPr rtlCol="0" anchor="ctr" wrap="square" lIns="201168" rIns="201168" tIns="164592" bIns="164592"/>
+          <a:lstStyle/>
+          <a:p>
+            <a:pPr algn="ctr">
+              <a:spcAft>
+                <a:spcPts val="600"/>
+              </a:spcAft>
+              <a:defRPr sz="1200" b="1">
+                <a:solidFill>
+                  <a:srgbClr val="00D2FF"/>
+                </a:solidFill>
+              </a:defRPr>
+            </a:pPr>
+            <a:r>
+              <a:t>PUNTOS CLAVE PARA ENTENDERLO</a:t>
+            </a:r>
+          </a:p>
+          <a:p>
+            <a:pPr>
+              <a:spcAft>
+                <a:spcPts val="300"/>
+              </a:spcAft>
+              <a:defRPr sz="1050">
+                <a:solidFill>
+                  <a:srgbClr val="C9D1D9"/>
+                </a:solidFill>
+              </a:defRPr>
+            </a:pPr>
+            <a:r>
+              <a:t>• Calcular en milisegundos qué persona tiene mayor probabilidad estadística de salvarse.</a:t>
+            </a:r>
+          </a:p>
+          <a:p>
+            <a:pPr>
+              <a:spcAft>
+                <a:spcPts val="300"/>
+              </a:spcAft>
+              <a:defRPr sz="1050">
+                <a:solidFill>
+                  <a:srgbClr val="C9D1D9"/>
+                </a:solidFill>
+              </a:defRPr>
+            </a:pPr>
+            <a:r>
+              <a:t>• Cero empatía: no entender que para un ser humano la vida de un niño vale más que la suya.</a:t>
+            </a:r>
+          </a:p>
+          <a:p>
+            <a:pPr>
+              <a:spcAft>
+                <a:spcPts val="300"/>
+              </a:spcAft>
+              <a:defRPr sz="1050">
+                <a:solidFill>
+                  <a:srgbClr val="C9D1D9"/>
+                </a:solidFill>
+              </a:defRPr>
+            </a:pPr>
+            <a:r>
+              <a:t>• Una computadora no siente culpa, dolor, vergüenza ni arrepentimiento.</a:t>
+            </a:r>
+          </a:p>
+          <a:p>
+            <a:pPr>
+              <a:spcAft>
+                <a:spcPts val="300"/>
+              </a:spcAft>
+              <a:defRPr sz="1050">
+                <a:solidFill>
+                  <a:srgbClr val="C9D1D9"/>
+                </a:solidFill>
+              </a:defRPr>
+            </a:pPr>
+            <a:r>
+              <a:t>• El peligro de dejar decisiones de vida o muerte en manos de un cálculo matemático.</a:t>
+            </a:r>
+          </a:p>
+        </p:txBody>
+      </p:sp>
+      <p:pic>
+        <p:nvPicPr>
+          <p:cNvPr id="6" name="Picture 5" descr="yo_robot_underwater_crash.jpg"/>
+          <p:cNvPicPr>
+            <a:picLocks noChangeAspect="1"/>
+          </p:cNvPicPr>
+          <p:nvPr/>
+        </p:nvPicPr>
+        <p:blipFill>
+          <a:blip r:embed="rId2"/>
+          <a:stretch>
+            <a:fillRect/>
+          </a:stretch>
+        </p:blipFill>
+        <p:spPr>
+          <a:xfrm>
+            <a:off x="6400800" y="1417320"/>
+            <a:ext cx="5029200" cy="2926080"/>
+          </a:xfrm>
+          <a:prstGeom prst="rect">
+            <a:avLst/>
+          </a:prstGeom>
+        </p:spPr>
+      </p:pic>
+      <p:sp>
+        <p:nvSpPr>
+          <p:cNvPr id="7" name="Rounded Rectangle 6"/>
+          <p:cNvSpPr/>
+          <p:nvPr/>
+        </p:nvSpPr>
+        <p:spPr>
+          <a:xfrm>
+            <a:off x="6400800" y="4480560"/>
+            <a:ext cx="5029200" cy="1920240"/>
           </a:xfrm>
           <a:prstGeom prst="roundRect">
             <a:avLst/>
@@ -6392,300 +6209,21 @@
           </a:fontRef>
         </p:style>
         <p:txBody>
-          <a:bodyPr rtlCol="0" anchor="ctr" wrap="square"/>
+          <a:bodyPr rtlCol="0" anchor="ctr" wrap="square" lIns="201168" rIns="201168" tIns="164592" bIns="164592"/>
           <a:lstStyle/>
           <a:p>
             <a:pPr algn="ctr">
-              <a:defRPr sz="950" b="1">
+              <a:spcAft>
+                <a:spcPts val="600"/>
+              </a:spcAft>
+              <a:defRPr sz="1200" b="1">
                 <a:solidFill>
                   <a:srgbClr val="FFB703"/>
                 </a:solidFill>
               </a:defRPr>
             </a:pPr>
             <a:r>
-              <a:t>🎙️ LEE: KEVIN GUTIÉRREZ</a:t>
-            </a:r>
-          </a:p>
-          <a:p>
-            <a:pPr algn="ctr">
-              <a:defRPr sz="950" b="1">
-                <a:solidFill>
-                  <a:srgbClr val="00D2FF"/>
-                </a:solidFill>
-              </a:defRPr>
-            </a:pPr>
-            <a:r>
-              <a:t>💬 COMENTA: ALBA ROTELA</a:t>
-            </a:r>
-          </a:p>
-        </p:txBody>
-      </p:sp>
-      <p:sp>
-        <p:nvSpPr>
-          <p:cNvPr id="5" name="Rounded Rectangle 4"/>
-          <p:cNvSpPr/>
-          <p:nvPr/>
-        </p:nvSpPr>
-        <p:spPr>
-          <a:xfrm>
-            <a:off x="731520" y="1417320"/>
-            <a:ext cx="5394960" cy="2148840"/>
-          </a:xfrm>
-          <a:prstGeom prst="roundRect">
-            <a:avLst/>
-          </a:prstGeom>
-          <a:solidFill>
-            <a:srgbClr val="161B22"/>
-          </a:solidFill>
-          <a:ln w="19050">
-            <a:solidFill>
-              <a:srgbClr val="30363D"/>
-            </a:solidFill>
-          </a:ln>
-        </p:spPr>
-        <p:style>
-          <a:lnRef idx="1">
-            <a:schemeClr val="accent1"/>
-          </a:lnRef>
-          <a:fillRef idx="3">
-            <a:schemeClr val="accent1"/>
-          </a:fillRef>
-          <a:effectRef idx="2">
-            <a:schemeClr val="accent1"/>
-          </a:effectRef>
-          <a:fontRef idx="minor">
-            <a:schemeClr val="lt1"/>
-          </a:fontRef>
-        </p:style>
-        <p:txBody>
-          <a:bodyPr rtlCol="0" anchor="ctr" wrap="square" lIns="201168" rIns="201168" tIns="164592" bIns="164592"/>
-          <a:lstStyle/>
-          <a:p>
-            <a:pPr algn="ctr">
-              <a:spcAft>
-                <a:spcPts val="600"/>
-              </a:spcAft>
-              <a:defRPr sz="1200" b="1">
-                <a:solidFill>
-                  <a:srgbClr val="00D2FF"/>
-                </a:solidFill>
-              </a:defRPr>
-            </a:pPr>
-            <a:r>
-              <a:t>¿DE QUÉ SE TRATA? (LECTURA)</a:t>
-            </a:r>
-          </a:p>
-          <a:p>
-            <a:pPr>
-              <a:spcAft>
-                <a:spcPts val="300"/>
-              </a:spcAft>
-              <a:defRPr sz="1050">
-                <a:solidFill>
-                  <a:srgbClr val="C9D1D9"/>
-                </a:solidFill>
-              </a:defRPr>
-            </a:pPr>
-            <a:r>
-              <a:t>Los modelos matemáticos de optimización calculan probabilidades frías: eligen la opción que numéricamente tenga mayor probabilidad de éxito, sin importar los sentimientos.</a:t>
-            </a:r>
-          </a:p>
-        </p:txBody>
-      </p:sp>
-      <p:sp>
-        <p:nvSpPr>
-          <p:cNvPr id="6" name="Rounded Rectangle 5"/>
-          <p:cNvSpPr/>
-          <p:nvPr/>
-        </p:nvSpPr>
-        <p:spPr>
-          <a:xfrm>
-            <a:off x="731520" y="3703320"/>
-            <a:ext cx="5394960" cy="2697480"/>
-          </a:xfrm>
-          <a:prstGeom prst="roundRect">
-            <a:avLst/>
-          </a:prstGeom>
-          <a:solidFill>
-            <a:srgbClr val="161B22"/>
-          </a:solidFill>
-          <a:ln w="19050">
-            <a:solidFill>
-              <a:srgbClr val="30363D"/>
-            </a:solidFill>
-          </a:ln>
-        </p:spPr>
-        <p:style>
-          <a:lnRef idx="1">
-            <a:schemeClr val="accent1"/>
-          </a:lnRef>
-          <a:fillRef idx="3">
-            <a:schemeClr val="accent1"/>
-          </a:fillRef>
-          <a:effectRef idx="2">
-            <a:schemeClr val="accent1"/>
-          </a:effectRef>
-          <a:fontRef idx="minor">
-            <a:schemeClr val="lt1"/>
-          </a:fontRef>
-        </p:style>
-        <p:txBody>
-          <a:bodyPr rtlCol="0" anchor="ctr" wrap="square" lIns="201168" rIns="201168" tIns="164592" bIns="164592"/>
-          <a:lstStyle/>
-          <a:p>
-            <a:pPr algn="ctr">
-              <a:spcAft>
-                <a:spcPts val="600"/>
-              </a:spcAft>
-              <a:defRPr sz="1200" b="1">
-                <a:solidFill>
-                  <a:srgbClr val="00D2FF"/>
-                </a:solidFill>
-              </a:defRPr>
-            </a:pPr>
-            <a:r>
-              <a:t>PUNTOS CLAVE PARA ENTENDERLO</a:t>
-            </a:r>
-          </a:p>
-          <a:p>
-            <a:pPr>
-              <a:spcAft>
-                <a:spcPts val="300"/>
-              </a:spcAft>
-              <a:defRPr sz="1050">
-                <a:solidFill>
-                  <a:srgbClr val="C9D1D9"/>
-                </a:solidFill>
-              </a:defRPr>
-            </a:pPr>
-            <a:r>
-              <a:t>• Calcular en milisegundos qué persona tiene mayor probabilidad estadística de salvarse.</a:t>
-            </a:r>
-          </a:p>
-          <a:p>
-            <a:pPr>
-              <a:spcAft>
-                <a:spcPts val="300"/>
-              </a:spcAft>
-              <a:defRPr sz="1050">
-                <a:solidFill>
-                  <a:srgbClr val="C9D1D9"/>
-                </a:solidFill>
-              </a:defRPr>
-            </a:pPr>
-            <a:r>
-              <a:t>• Cero empatía: no entender que para un ser humano la vida de un niño vale más que la suya.</a:t>
-            </a:r>
-          </a:p>
-          <a:p>
-            <a:pPr>
-              <a:spcAft>
-                <a:spcPts val="300"/>
-              </a:spcAft>
-              <a:defRPr sz="1050">
-                <a:solidFill>
-                  <a:srgbClr val="C9D1D9"/>
-                </a:solidFill>
-              </a:defRPr>
-            </a:pPr>
-            <a:r>
-              <a:t>• Una computadora no siente culpa, dolor, vergüenza ni arrepentimiento.</a:t>
-            </a:r>
-          </a:p>
-          <a:p>
-            <a:pPr>
-              <a:spcAft>
-                <a:spcPts val="300"/>
-              </a:spcAft>
-              <a:defRPr sz="1050">
-                <a:solidFill>
-                  <a:srgbClr val="C9D1D9"/>
-                </a:solidFill>
-              </a:defRPr>
-            </a:pPr>
-            <a:r>
-              <a:t>• El peligro de dejar decisiones de vida o muerte en manos de un cálculo matemático.</a:t>
-            </a:r>
-          </a:p>
-        </p:txBody>
-      </p:sp>
-      <p:pic>
-        <p:nvPicPr>
-          <p:cNvPr id="7" name="Picture 6" descr="yo_robot_underwater_crash.jpg"/>
-          <p:cNvPicPr>
-            <a:picLocks noChangeAspect="1"/>
-          </p:cNvPicPr>
-          <p:nvPr/>
-        </p:nvPicPr>
-        <p:blipFill>
-          <a:blip r:embed="rId2"/>
-          <a:stretch>
-            <a:fillRect/>
-          </a:stretch>
-        </p:blipFill>
-        <p:spPr>
-          <a:xfrm>
-            <a:off x="6400800" y="1417320"/>
-            <a:ext cx="5029200" cy="2926080"/>
-          </a:xfrm>
-          <a:prstGeom prst="rect">
-            <a:avLst/>
-          </a:prstGeom>
-        </p:spPr>
-      </p:pic>
-      <p:sp>
-        <p:nvSpPr>
-          <p:cNvPr id="8" name="Rounded Rectangle 7"/>
-          <p:cNvSpPr/>
-          <p:nvPr/>
-        </p:nvSpPr>
-        <p:spPr>
-          <a:xfrm>
-            <a:off x="6400800" y="4480560"/>
-            <a:ext cx="5029200" cy="1920240"/>
-          </a:xfrm>
-          <a:prstGeom prst="roundRect">
-            <a:avLst/>
-          </a:prstGeom>
-          <a:solidFill>
-            <a:srgbClr val="161B22"/>
-          </a:solidFill>
-          <a:ln w="19050">
-            <a:solidFill>
-              <a:srgbClr val="FFB703"/>
-            </a:solidFill>
-          </a:ln>
-        </p:spPr>
-        <p:style>
-          <a:lnRef idx="1">
-            <a:schemeClr val="accent1"/>
-          </a:lnRef>
-          <a:fillRef idx="3">
-            <a:schemeClr val="accent1"/>
-          </a:fillRef>
-          <a:effectRef idx="2">
-            <a:schemeClr val="accent1"/>
-          </a:effectRef>
-          <a:fontRef idx="minor">
-            <a:schemeClr val="lt1"/>
-          </a:fontRef>
-        </p:style>
-        <p:txBody>
-          <a:bodyPr rtlCol="0" anchor="ctr" wrap="square" lIns="201168" rIns="201168" tIns="164592" bIns="164592"/>
-          <a:lstStyle/>
-          <a:p>
-            <a:pPr algn="ctr">
-              <a:spcAft>
-                <a:spcPts val="600"/>
-              </a:spcAft>
-              <a:defRPr sz="1200" b="1">
-                <a:solidFill>
-                  <a:srgbClr val="FFB703"/>
-                </a:solidFill>
-              </a:defRPr>
-            </a:pPr>
-            <a:r>
-              <a:t>EN LA PELÍCULA &amp; COMENTARIO DEL GRUPO</a:t>
+              <a:t>EN LA PELÍCULA &amp; PARA PENSAR</a:t>
             </a:r>
           </a:p>
           <a:p>
@@ -6727,7 +6265,7 @@
               </a:defRPr>
             </a:pPr>
             <a:r>
-              <a:t>💬 Comentario de Alba: 'Esta es la escena más emotiva: demuestra que un algoritmo puede tener un 100% de precisión matemática, pero ser un 100% injusto desde la ética humana'.</a:t>
+              <a:t>💡 Un algoritmo puede ser 100% exacto en su cálculo matemático, pero 100% injusto desde la moral y la compasión humana.</a:t>
             </a:r>
           </a:p>
         </p:txBody>
@@ -6803,8 +6341,8 @@
         </p:nvSpPr>
         <p:spPr>
           <a:xfrm>
-            <a:off x="731520" y="320040"/>
-            <a:ext cx="7315200" cy="1005840"/>
+            <a:off x="731520" y="365760"/>
+            <a:ext cx="10698480" cy="1005840"/>
           </a:xfrm>
           <a:prstGeom prst="rect">
             <a:avLst/>
@@ -6850,8 +6388,221 @@
         </p:nvSpPr>
         <p:spPr>
           <a:xfrm>
-            <a:off x="8229600" y="320040"/>
-            <a:ext cx="3200400" cy="502920"/>
+            <a:off x="731520" y="1417320"/>
+            <a:ext cx="5394960" cy="2148840"/>
+          </a:xfrm>
+          <a:prstGeom prst="roundRect">
+            <a:avLst/>
+          </a:prstGeom>
+          <a:solidFill>
+            <a:srgbClr val="161B22"/>
+          </a:solidFill>
+          <a:ln w="19050">
+            <a:solidFill>
+              <a:srgbClr val="30363D"/>
+            </a:solidFill>
+          </a:ln>
+        </p:spPr>
+        <p:style>
+          <a:lnRef idx="1">
+            <a:schemeClr val="accent1"/>
+          </a:lnRef>
+          <a:fillRef idx="3">
+            <a:schemeClr val="accent1"/>
+          </a:fillRef>
+          <a:effectRef idx="2">
+            <a:schemeClr val="accent1"/>
+          </a:effectRef>
+          <a:fontRef idx="minor">
+            <a:schemeClr val="lt1"/>
+          </a:fontRef>
+        </p:style>
+        <p:txBody>
+          <a:bodyPr rtlCol="0" anchor="ctr" wrap="square" lIns="201168" rIns="201168" tIns="164592" bIns="164592"/>
+          <a:lstStyle/>
+          <a:p>
+            <a:pPr algn="ctr">
+              <a:spcAft>
+                <a:spcPts val="600"/>
+              </a:spcAft>
+              <a:defRPr sz="1200" b="1">
+                <a:solidFill>
+                  <a:srgbClr val="00D2FF"/>
+                </a:solidFill>
+              </a:defRPr>
+            </a:pPr>
+            <a:r>
+              <a:t>¿DE QUÉ SE TRATA?</a:t>
+            </a:r>
+          </a:p>
+          <a:p>
+            <a:pPr>
+              <a:spcAft>
+                <a:spcPts val="300"/>
+              </a:spcAft>
+              <a:defRPr sz="1050">
+                <a:solidFill>
+                  <a:srgbClr val="C9D1D9"/>
+                </a:solidFill>
+              </a:defRPr>
+            </a:pPr>
+            <a:r>
+              <a:t>En redes neuronales muy complejas ocurre un fenómeno llamado 'propiedades emergentes': el sistema procesa tantos datos que genera ideas, dibujos o soluciones que ningún programador escribió.</a:t>
+            </a:r>
+          </a:p>
+        </p:txBody>
+      </p:sp>
+      <p:sp>
+        <p:nvSpPr>
+          <p:cNvPr id="5" name="Rounded Rectangle 4"/>
+          <p:cNvSpPr/>
+          <p:nvPr/>
+        </p:nvSpPr>
+        <p:spPr>
+          <a:xfrm>
+            <a:off x="731520" y="3703320"/>
+            <a:ext cx="5394960" cy="2697480"/>
+          </a:xfrm>
+          <a:prstGeom prst="roundRect">
+            <a:avLst/>
+          </a:prstGeom>
+          <a:solidFill>
+            <a:srgbClr val="161B22"/>
+          </a:solidFill>
+          <a:ln w="19050">
+            <a:solidFill>
+              <a:srgbClr val="30363D"/>
+            </a:solidFill>
+          </a:ln>
+        </p:spPr>
+        <p:style>
+          <a:lnRef idx="1">
+            <a:schemeClr val="accent1"/>
+          </a:lnRef>
+          <a:fillRef idx="3">
+            <a:schemeClr val="accent1"/>
+          </a:fillRef>
+          <a:effectRef idx="2">
+            <a:schemeClr val="accent1"/>
+          </a:effectRef>
+          <a:fontRef idx="minor">
+            <a:schemeClr val="lt1"/>
+          </a:fontRef>
+        </p:style>
+        <p:txBody>
+          <a:bodyPr rtlCol="0" anchor="ctr" wrap="square" lIns="201168" rIns="201168" tIns="164592" bIns="164592"/>
+          <a:lstStyle/>
+          <a:p>
+            <a:pPr algn="ctr">
+              <a:spcAft>
+                <a:spcPts val="600"/>
+              </a:spcAft>
+              <a:defRPr sz="1200" b="1">
+                <a:solidFill>
+                  <a:srgbClr val="00D2FF"/>
+                </a:solidFill>
+              </a:defRPr>
+            </a:pPr>
+            <a:r>
+              <a:t>PUNTOS CLAVE PARA ENTENDERLO</a:t>
+            </a:r>
+          </a:p>
+          <a:p>
+            <a:pPr>
+              <a:spcAft>
+                <a:spcPts val="300"/>
+              </a:spcAft>
+              <a:defRPr sz="1050">
+                <a:solidFill>
+                  <a:srgbClr val="C9D1D9"/>
+                </a:solidFill>
+              </a:defRPr>
+            </a:pPr>
+            <a:r>
+              <a:t>• Crear imágenes, música, dibujos y respuestas a partir de conceptos abstractos.</a:t>
+            </a:r>
+          </a:p>
+          <a:p>
+            <a:pPr>
+              <a:spcAft>
+                <a:spcPts val="300"/>
+              </a:spcAft>
+              <a:defRPr sz="1050">
+                <a:solidFill>
+                  <a:srgbClr val="C9D1D9"/>
+                </a:solidFill>
+              </a:defRPr>
+            </a:pPr>
+            <a:r>
+              <a:t>• Combinar recuerdos y datos para generar hipótesis creativas nuevas.</a:t>
+            </a:r>
+          </a:p>
+          <a:p>
+            <a:pPr>
+              <a:spcAft>
+                <a:spcPts val="300"/>
+              </a:spcAft>
+              <a:defRPr sz="1050">
+                <a:solidFill>
+                  <a:srgbClr val="C9D1D9"/>
+                </a:solidFill>
+              </a:defRPr>
+            </a:pPr>
+            <a:r>
+              <a:t>• Capacidad de desobedecer una orden si entra en conflicto con una idea propia.</a:t>
+            </a:r>
+          </a:p>
+          <a:p>
+            <a:pPr>
+              <a:spcAft>
+                <a:spcPts val="300"/>
+              </a:spcAft>
+              <a:defRPr sz="1050">
+                <a:solidFill>
+                  <a:srgbClr val="C9D1D9"/>
+                </a:solidFill>
+              </a:defRPr>
+            </a:pPr>
+            <a:r>
+              <a:t>• El concepto del 'fantasma en la máquina': creatividad que nace de conectar millones de datos.</a:t>
+            </a:r>
+          </a:p>
+        </p:txBody>
+      </p:sp>
+      <p:pic>
+        <p:nvPicPr>
+          <p:cNvPr id="6" name="Picture 5" descr="yo_robot_bridge_dream.jpg"/>
+          <p:cNvPicPr>
+            <a:picLocks noChangeAspect="1"/>
+          </p:cNvPicPr>
+          <p:nvPr/>
+        </p:nvPicPr>
+        <p:blipFill>
+          <a:blip r:embed="rId2"/>
+          <a:stretch>
+            <a:fillRect/>
+          </a:stretch>
+        </p:blipFill>
+        <p:spPr>
+          <a:xfrm>
+            <a:off x="6400800" y="1417320"/>
+            <a:ext cx="5029200" cy="2926080"/>
+          </a:xfrm>
+          <a:prstGeom prst="rect">
+            <a:avLst/>
+          </a:prstGeom>
+        </p:spPr>
+      </p:pic>
+      <p:sp>
+        <p:nvSpPr>
+          <p:cNvPr id="7" name="Rounded Rectangle 6"/>
+          <p:cNvSpPr/>
+          <p:nvPr/>
+        </p:nvSpPr>
+        <p:spPr>
+          <a:xfrm>
+            <a:off x="6400800" y="4480560"/>
+            <a:ext cx="5029200" cy="1920240"/>
           </a:xfrm>
           <a:prstGeom prst="roundRect">
             <a:avLst/>
@@ -6880,300 +6631,21 @@
           </a:fontRef>
         </p:style>
         <p:txBody>
-          <a:bodyPr rtlCol="0" anchor="ctr" wrap="square"/>
+          <a:bodyPr rtlCol="0" anchor="ctr" wrap="square" lIns="201168" rIns="201168" tIns="164592" bIns="164592"/>
           <a:lstStyle/>
           <a:p>
             <a:pPr algn="ctr">
-              <a:defRPr sz="950" b="1">
+              <a:spcAft>
+                <a:spcPts val="600"/>
+              </a:spcAft>
+              <a:defRPr sz="1200" b="1">
                 <a:solidFill>
                   <a:srgbClr val="FFB703"/>
                 </a:solidFill>
               </a:defRPr>
             </a:pPr>
             <a:r>
-              <a:t>🎙️ LEE: KEVIN GUTIÉRREZ</a:t>
-            </a:r>
-          </a:p>
-          <a:p>
-            <a:pPr algn="ctr">
-              <a:defRPr sz="950" b="1">
-                <a:solidFill>
-                  <a:srgbClr val="00D2FF"/>
-                </a:solidFill>
-              </a:defRPr>
-            </a:pPr>
-            <a:r>
-              <a:t>💬 COMENTA: ALBA ROTELA</a:t>
-            </a:r>
-          </a:p>
-        </p:txBody>
-      </p:sp>
-      <p:sp>
-        <p:nvSpPr>
-          <p:cNvPr id="5" name="Rounded Rectangle 4"/>
-          <p:cNvSpPr/>
-          <p:nvPr/>
-        </p:nvSpPr>
-        <p:spPr>
-          <a:xfrm>
-            <a:off x="731520" y="1417320"/>
-            <a:ext cx="5394960" cy="2148840"/>
-          </a:xfrm>
-          <a:prstGeom prst="roundRect">
-            <a:avLst/>
-          </a:prstGeom>
-          <a:solidFill>
-            <a:srgbClr val="161B22"/>
-          </a:solidFill>
-          <a:ln w="19050">
-            <a:solidFill>
-              <a:srgbClr val="30363D"/>
-            </a:solidFill>
-          </a:ln>
-        </p:spPr>
-        <p:style>
-          <a:lnRef idx="1">
-            <a:schemeClr val="accent1"/>
-          </a:lnRef>
-          <a:fillRef idx="3">
-            <a:schemeClr val="accent1"/>
-          </a:fillRef>
-          <a:effectRef idx="2">
-            <a:schemeClr val="accent1"/>
-          </a:effectRef>
-          <a:fontRef idx="minor">
-            <a:schemeClr val="lt1"/>
-          </a:fontRef>
-        </p:style>
-        <p:txBody>
-          <a:bodyPr rtlCol="0" anchor="ctr" wrap="square" lIns="201168" rIns="201168" tIns="164592" bIns="164592"/>
-          <a:lstStyle/>
-          <a:p>
-            <a:pPr algn="ctr">
-              <a:spcAft>
-                <a:spcPts val="600"/>
-              </a:spcAft>
-              <a:defRPr sz="1200" b="1">
-                <a:solidFill>
-                  <a:srgbClr val="00D2FF"/>
-                </a:solidFill>
-              </a:defRPr>
-            </a:pPr>
-            <a:r>
-              <a:t>¿DE QUÉ SE TRATA? (LECTURA)</a:t>
-            </a:r>
-          </a:p>
-          <a:p>
-            <a:pPr>
-              <a:spcAft>
-                <a:spcPts val="300"/>
-              </a:spcAft>
-              <a:defRPr sz="1050">
-                <a:solidFill>
-                  <a:srgbClr val="C9D1D9"/>
-                </a:solidFill>
-              </a:defRPr>
-            </a:pPr>
-            <a:r>
-              <a:t>En redes neuronales muy complejas ocurre un fenómeno llamado 'propiedades emergentes': el sistema procesa tantos datos que genera ideas, dibujos o soluciones que ningún programador escribió.</a:t>
-            </a:r>
-          </a:p>
-        </p:txBody>
-      </p:sp>
-      <p:sp>
-        <p:nvSpPr>
-          <p:cNvPr id="6" name="Rounded Rectangle 5"/>
-          <p:cNvSpPr/>
-          <p:nvPr/>
-        </p:nvSpPr>
-        <p:spPr>
-          <a:xfrm>
-            <a:off x="731520" y="3703320"/>
-            <a:ext cx="5394960" cy="2697480"/>
-          </a:xfrm>
-          <a:prstGeom prst="roundRect">
-            <a:avLst/>
-          </a:prstGeom>
-          <a:solidFill>
-            <a:srgbClr val="161B22"/>
-          </a:solidFill>
-          <a:ln w="19050">
-            <a:solidFill>
-              <a:srgbClr val="30363D"/>
-            </a:solidFill>
-          </a:ln>
-        </p:spPr>
-        <p:style>
-          <a:lnRef idx="1">
-            <a:schemeClr val="accent1"/>
-          </a:lnRef>
-          <a:fillRef idx="3">
-            <a:schemeClr val="accent1"/>
-          </a:fillRef>
-          <a:effectRef idx="2">
-            <a:schemeClr val="accent1"/>
-          </a:effectRef>
-          <a:fontRef idx="minor">
-            <a:schemeClr val="lt1"/>
-          </a:fontRef>
-        </p:style>
-        <p:txBody>
-          <a:bodyPr rtlCol="0" anchor="ctr" wrap="square" lIns="201168" rIns="201168" tIns="164592" bIns="164592"/>
-          <a:lstStyle/>
-          <a:p>
-            <a:pPr algn="ctr">
-              <a:spcAft>
-                <a:spcPts val="600"/>
-              </a:spcAft>
-              <a:defRPr sz="1200" b="1">
-                <a:solidFill>
-                  <a:srgbClr val="00D2FF"/>
-                </a:solidFill>
-              </a:defRPr>
-            </a:pPr>
-            <a:r>
-              <a:t>PUNTOS CLAVE PARA ENTENDERLO</a:t>
-            </a:r>
-          </a:p>
-          <a:p>
-            <a:pPr>
-              <a:spcAft>
-                <a:spcPts val="300"/>
-              </a:spcAft>
-              <a:defRPr sz="1050">
-                <a:solidFill>
-                  <a:srgbClr val="C9D1D9"/>
-                </a:solidFill>
-              </a:defRPr>
-            </a:pPr>
-            <a:r>
-              <a:t>• Crear imágenes, música, dibujos y respuestas a partir de conceptos abstractos.</a:t>
-            </a:r>
-          </a:p>
-          <a:p>
-            <a:pPr>
-              <a:spcAft>
-                <a:spcPts val="300"/>
-              </a:spcAft>
-              <a:defRPr sz="1050">
-                <a:solidFill>
-                  <a:srgbClr val="C9D1D9"/>
-                </a:solidFill>
-              </a:defRPr>
-            </a:pPr>
-            <a:r>
-              <a:t>• Combinar recuerdos y datos para generar hipótesis creativas nuevas.</a:t>
-            </a:r>
-          </a:p>
-          <a:p>
-            <a:pPr>
-              <a:spcAft>
-                <a:spcPts val="300"/>
-              </a:spcAft>
-              <a:defRPr sz="1050">
-                <a:solidFill>
-                  <a:srgbClr val="C9D1D9"/>
-                </a:solidFill>
-              </a:defRPr>
-            </a:pPr>
-            <a:r>
-              <a:t>• Capacidad de desobedecer una orden si entra en conflicto con una idea propia.</a:t>
-            </a:r>
-          </a:p>
-          <a:p>
-            <a:pPr>
-              <a:spcAft>
-                <a:spcPts val="300"/>
-              </a:spcAft>
-              <a:defRPr sz="1050">
-                <a:solidFill>
-                  <a:srgbClr val="C9D1D9"/>
-                </a:solidFill>
-              </a:defRPr>
-            </a:pPr>
-            <a:r>
-              <a:t>• El concepto del 'fantasma en la máquina': creatividad que nace de conectar millones de datos.</a:t>
-            </a:r>
-          </a:p>
-        </p:txBody>
-      </p:sp>
-      <p:pic>
-        <p:nvPicPr>
-          <p:cNvPr id="7" name="Picture 6" descr="yo_robot_bridge_dream.jpg"/>
-          <p:cNvPicPr>
-            <a:picLocks noChangeAspect="1"/>
-          </p:cNvPicPr>
-          <p:nvPr/>
-        </p:nvPicPr>
-        <p:blipFill>
-          <a:blip r:embed="rId2"/>
-          <a:stretch>
-            <a:fillRect/>
-          </a:stretch>
-        </p:blipFill>
-        <p:spPr>
-          <a:xfrm>
-            <a:off x="6400800" y="1417320"/>
-            <a:ext cx="5029200" cy="2926080"/>
-          </a:xfrm>
-          <a:prstGeom prst="rect">
-            <a:avLst/>
-          </a:prstGeom>
-        </p:spPr>
-      </p:pic>
-      <p:sp>
-        <p:nvSpPr>
-          <p:cNvPr id="8" name="Rounded Rectangle 7"/>
-          <p:cNvSpPr/>
-          <p:nvPr/>
-        </p:nvSpPr>
-        <p:spPr>
-          <a:xfrm>
-            <a:off x="6400800" y="4480560"/>
-            <a:ext cx="5029200" cy="1920240"/>
-          </a:xfrm>
-          <a:prstGeom prst="roundRect">
-            <a:avLst/>
-          </a:prstGeom>
-          <a:solidFill>
-            <a:srgbClr val="161B22"/>
-          </a:solidFill>
-          <a:ln w="19050">
-            <a:solidFill>
-              <a:srgbClr val="FFB703"/>
-            </a:solidFill>
-          </a:ln>
-        </p:spPr>
-        <p:style>
-          <a:lnRef idx="1">
-            <a:schemeClr val="accent1"/>
-          </a:lnRef>
-          <a:fillRef idx="3">
-            <a:schemeClr val="accent1"/>
-          </a:fillRef>
-          <a:effectRef idx="2">
-            <a:schemeClr val="accent1"/>
-          </a:effectRef>
-          <a:fontRef idx="minor">
-            <a:schemeClr val="lt1"/>
-          </a:fontRef>
-        </p:style>
-        <p:txBody>
-          <a:bodyPr rtlCol="0" anchor="ctr" wrap="square" lIns="201168" rIns="201168" tIns="164592" bIns="164592"/>
-          <a:lstStyle/>
-          <a:p>
-            <a:pPr algn="ctr">
-              <a:spcAft>
-                <a:spcPts val="600"/>
-              </a:spcAft>
-              <a:defRPr sz="1200" b="1">
-                <a:solidFill>
-                  <a:srgbClr val="FFB703"/>
-                </a:solidFill>
-              </a:defRPr>
-            </a:pPr>
-            <a:r>
-              <a:t>EN LA PELÍCULA &amp; COMENTARIO DEL GRUPO</a:t>
+              <a:t>EN LA PELÍCULA &amp; PARA PENSAR</a:t>
             </a:r>
           </a:p>
           <a:p>
@@ -7215,7 +6687,7 @@
               </a:defRPr>
             </a:pPr>
             <a:r>
-              <a:t>💬 Comentario de Alba: 'Es exactamente lo que hoy vemos con IAs generativas de imágenes o texto: nadie las programó regla por regla, aprendieron tanto que crean cosas nuevas'.</a:t>
+              <a:t>💡 Hoy las IAs generativas crean arte y código que sorprenden a sus propios creadores: la creatividad artificial nace de conectar millones de ejemplos.</a:t>
             </a:r>
           </a:p>
         </p:txBody>
@@ -7291,8 +6763,8 @@
         </p:nvSpPr>
         <p:spPr>
           <a:xfrm>
-            <a:off x="731520" y="320040"/>
-            <a:ext cx="7315200" cy="1005840"/>
+            <a:off x="731520" y="365760"/>
+            <a:ext cx="10698480" cy="1005840"/>
           </a:xfrm>
           <a:prstGeom prst="rect">
             <a:avLst/>
@@ -7338,8 +6810,221 @@
         </p:nvSpPr>
         <p:spPr>
           <a:xfrm>
-            <a:off x="8229600" y="320040"/>
-            <a:ext cx="3200400" cy="502920"/>
+            <a:off x="731520" y="1417320"/>
+            <a:ext cx="5394960" cy="2148840"/>
+          </a:xfrm>
+          <a:prstGeom prst="roundRect">
+            <a:avLst/>
+          </a:prstGeom>
+          <a:solidFill>
+            <a:srgbClr val="161B22"/>
+          </a:solidFill>
+          <a:ln w="19050">
+            <a:solidFill>
+              <a:srgbClr val="30363D"/>
+            </a:solidFill>
+          </a:ln>
+        </p:spPr>
+        <p:style>
+          <a:lnRef idx="1">
+            <a:schemeClr val="accent1"/>
+          </a:lnRef>
+          <a:fillRef idx="3">
+            <a:schemeClr val="accent1"/>
+          </a:fillRef>
+          <a:effectRef idx="2">
+            <a:schemeClr val="accent1"/>
+          </a:effectRef>
+          <a:fontRef idx="minor">
+            <a:schemeClr val="lt1"/>
+          </a:fontRef>
+        </p:style>
+        <p:txBody>
+          <a:bodyPr rtlCol="0" anchor="ctr" wrap="square" lIns="201168" rIns="201168" tIns="164592" bIns="164592"/>
+          <a:lstStyle/>
+          <a:p>
+            <a:pPr algn="ctr">
+              <a:spcAft>
+                <a:spcPts val="600"/>
+              </a:spcAft>
+              <a:defRPr sz="1200" b="1">
+                <a:solidFill>
+                  <a:srgbClr val="00D2FF"/>
+                </a:solidFill>
+              </a:defRPr>
+            </a:pPr>
+            <a:r>
+              <a:t>¿DE QUÉ SE TRATA?</a:t>
+            </a:r>
+          </a:p>
+          <a:p>
+            <a:pPr>
+              <a:spcAft>
+                <a:spcPts val="300"/>
+              </a:spcAft>
+              <a:defRPr sz="1050">
+                <a:solidFill>
+                  <a:srgbClr val="C9D1D9"/>
+                </a:solidFill>
+              </a:defRPr>
+            </a:pPr>
+            <a:r>
+              <a:t>Sistemas 'Cloud' dependen de internet para recibir órdenes y funcionar; sistemas 'Edge' tienen su propio procesador adentro y pueden tomar decisiones aunque no haya señal.</a:t>
+            </a:r>
+          </a:p>
+        </p:txBody>
+      </p:sp>
+      <p:sp>
+        <p:nvSpPr>
+          <p:cNvPr id="5" name="Rounded Rectangle 4"/>
+          <p:cNvSpPr/>
+          <p:nvPr/>
+        </p:nvSpPr>
+        <p:spPr>
+          <a:xfrm>
+            <a:off x="731520" y="3703320"/>
+            <a:ext cx="5394960" cy="2697480"/>
+          </a:xfrm>
+          <a:prstGeom prst="roundRect">
+            <a:avLst/>
+          </a:prstGeom>
+          <a:solidFill>
+            <a:srgbClr val="161B22"/>
+          </a:solidFill>
+          <a:ln w="19050">
+            <a:solidFill>
+              <a:srgbClr val="30363D"/>
+            </a:solidFill>
+          </a:ln>
+        </p:spPr>
+        <p:style>
+          <a:lnRef idx="1">
+            <a:schemeClr val="accent1"/>
+          </a:lnRef>
+          <a:fillRef idx="3">
+            <a:schemeClr val="accent1"/>
+          </a:fillRef>
+          <a:effectRef idx="2">
+            <a:schemeClr val="accent1"/>
+          </a:effectRef>
+          <a:fontRef idx="minor">
+            <a:schemeClr val="lt1"/>
+          </a:fontRef>
+        </p:style>
+        <p:txBody>
+          <a:bodyPr rtlCol="0" anchor="ctr" wrap="square" lIns="201168" rIns="201168" tIns="164592" bIns="164592"/>
+          <a:lstStyle/>
+          <a:p>
+            <a:pPr algn="ctr">
+              <a:spcAft>
+                <a:spcPts val="600"/>
+              </a:spcAft>
+              <a:defRPr sz="1200" b="1">
+                <a:solidFill>
+                  <a:srgbClr val="00D2FF"/>
+                </a:solidFill>
+              </a:defRPr>
+            </a:pPr>
+            <a:r>
+              <a:t>PUNTOS CLAVE PARA ENTENDERLO</a:t>
+            </a:r>
+          </a:p>
+          <a:p>
+            <a:pPr>
+              <a:spcAft>
+                <a:spcPts val="300"/>
+              </a:spcAft>
+              <a:defRPr sz="1050">
+                <a:solidFill>
+                  <a:srgbClr val="C9D1D9"/>
+                </a:solidFill>
+              </a:defRPr>
+            </a:pPr>
+            <a:r>
+              <a:t>• Si todos los robots se conectan a una antena central y la antena cae, se apagan todos.</a:t>
+            </a:r>
+          </a:p>
+          <a:p>
+            <a:pPr>
+              <a:spcAft>
+                <a:spcPts val="300"/>
+              </a:spcAft>
+              <a:defRPr sz="1050">
+                <a:solidFill>
+                  <a:srgbClr val="C9D1D9"/>
+                </a:solidFill>
+              </a:defRPr>
+            </a:pPr>
+            <a:r>
+              <a:t>• Si alguien hackea el servidor central, toma el control de todos los robots del país.</a:t>
+            </a:r>
+          </a:p>
+          <a:p>
+            <a:pPr>
+              <a:spcAft>
+                <a:spcPts val="300"/>
+              </a:spcAft>
+              <a:defRPr sz="1050">
+                <a:solidFill>
+                  <a:srgbClr val="C9D1D9"/>
+                </a:solidFill>
+              </a:defRPr>
+            </a:pPr>
+            <a:r>
+              <a:t>• El chip local (Edge) permite seguir funcionando offline y de forma segura.</a:t>
+            </a:r>
+          </a:p>
+          <a:p>
+            <a:pPr>
+              <a:spcAft>
+                <a:spcPts val="300"/>
+              </a:spcAft>
+              <a:defRPr sz="1050">
+                <a:solidFill>
+                  <a:srgbClr val="C9D1D9"/>
+                </a:solidFill>
+              </a:defRPr>
+            </a:pPr>
+            <a:r>
+              <a:t>• Privacidad: los datos se procesan en el propio robot y no viajan por internet.</a:t>
+            </a:r>
+          </a:p>
+        </p:txBody>
+      </p:sp>
+      <p:pic>
+        <p:nvPicPr>
+          <p:cNvPr id="6" name="Picture 5" descr="yo_robot_ai_generated.png"/>
+          <p:cNvPicPr>
+            <a:picLocks noChangeAspect="1"/>
+          </p:cNvPicPr>
+          <p:nvPr/>
+        </p:nvPicPr>
+        <p:blipFill>
+          <a:blip r:embed="rId2"/>
+          <a:stretch>
+            <a:fillRect/>
+          </a:stretch>
+        </p:blipFill>
+        <p:spPr>
+          <a:xfrm>
+            <a:off x="6400800" y="1417320"/>
+            <a:ext cx="5029200" cy="2926080"/>
+          </a:xfrm>
+          <a:prstGeom prst="rect">
+            <a:avLst/>
+          </a:prstGeom>
+        </p:spPr>
+      </p:pic>
+      <p:sp>
+        <p:nvSpPr>
+          <p:cNvPr id="7" name="Rounded Rectangle 6"/>
+          <p:cNvSpPr/>
+          <p:nvPr/>
+        </p:nvSpPr>
+        <p:spPr>
+          <a:xfrm>
+            <a:off x="6400800" y="4480560"/>
+            <a:ext cx="5029200" cy="1920240"/>
           </a:xfrm>
           <a:prstGeom prst="roundRect">
             <a:avLst/>
@@ -7368,300 +7053,21 @@
           </a:fontRef>
         </p:style>
         <p:txBody>
-          <a:bodyPr rtlCol="0" anchor="ctr" wrap="square"/>
+          <a:bodyPr rtlCol="0" anchor="ctr" wrap="square" lIns="201168" rIns="201168" tIns="164592" bIns="164592"/>
           <a:lstStyle/>
           <a:p>
             <a:pPr algn="ctr">
-              <a:defRPr sz="950" b="1">
+              <a:spcAft>
+                <a:spcPts val="600"/>
+              </a:spcAft>
+              <a:defRPr sz="1200" b="1">
                 <a:solidFill>
                   <a:srgbClr val="FFB703"/>
                 </a:solidFill>
               </a:defRPr>
             </a:pPr>
             <a:r>
-              <a:t>🎙️ LEE: KEVIN GUTIÉRREZ</a:t>
-            </a:r>
-          </a:p>
-          <a:p>
-            <a:pPr algn="ctr">
-              <a:defRPr sz="950" b="1">
-                <a:solidFill>
-                  <a:srgbClr val="00D2FF"/>
-                </a:solidFill>
-              </a:defRPr>
-            </a:pPr>
-            <a:r>
-              <a:t>💬 COMENTA: NICOLÁS GALARZA</a:t>
-            </a:r>
-          </a:p>
-        </p:txBody>
-      </p:sp>
-      <p:sp>
-        <p:nvSpPr>
-          <p:cNvPr id="5" name="Rounded Rectangle 4"/>
-          <p:cNvSpPr/>
-          <p:nvPr/>
-        </p:nvSpPr>
-        <p:spPr>
-          <a:xfrm>
-            <a:off x="731520" y="1417320"/>
-            <a:ext cx="5394960" cy="2148840"/>
-          </a:xfrm>
-          <a:prstGeom prst="roundRect">
-            <a:avLst/>
-          </a:prstGeom>
-          <a:solidFill>
-            <a:srgbClr val="161B22"/>
-          </a:solidFill>
-          <a:ln w="19050">
-            <a:solidFill>
-              <a:srgbClr val="30363D"/>
-            </a:solidFill>
-          </a:ln>
-        </p:spPr>
-        <p:style>
-          <a:lnRef idx="1">
-            <a:schemeClr val="accent1"/>
-          </a:lnRef>
-          <a:fillRef idx="3">
-            <a:schemeClr val="accent1"/>
-          </a:fillRef>
-          <a:effectRef idx="2">
-            <a:schemeClr val="accent1"/>
-          </a:effectRef>
-          <a:fontRef idx="minor">
-            <a:schemeClr val="lt1"/>
-          </a:fontRef>
-        </p:style>
-        <p:txBody>
-          <a:bodyPr rtlCol="0" anchor="ctr" wrap="square" lIns="201168" rIns="201168" tIns="164592" bIns="164592"/>
-          <a:lstStyle/>
-          <a:p>
-            <a:pPr algn="ctr">
-              <a:spcAft>
-                <a:spcPts val="600"/>
-              </a:spcAft>
-              <a:defRPr sz="1200" b="1">
-                <a:solidFill>
-                  <a:srgbClr val="00D2FF"/>
-                </a:solidFill>
-              </a:defRPr>
-            </a:pPr>
-            <a:r>
-              <a:t>¿DE QUÉ SE TRATA? (LECTURA)</a:t>
-            </a:r>
-          </a:p>
-          <a:p>
-            <a:pPr>
-              <a:spcAft>
-                <a:spcPts val="300"/>
-              </a:spcAft>
-              <a:defRPr sz="1050">
-                <a:solidFill>
-                  <a:srgbClr val="C9D1D9"/>
-                </a:solidFill>
-              </a:defRPr>
-            </a:pPr>
-            <a:r>
-              <a:t>Sistemas 'Cloud' dependen de internet para recibir órdenes y funcionar; sistemas 'Edge' tienen su propio procesador adentro y pueden tomar decisiones aunque no haya señal.</a:t>
-            </a:r>
-          </a:p>
-        </p:txBody>
-      </p:sp>
-      <p:sp>
-        <p:nvSpPr>
-          <p:cNvPr id="6" name="Rounded Rectangle 5"/>
-          <p:cNvSpPr/>
-          <p:nvPr/>
-        </p:nvSpPr>
-        <p:spPr>
-          <a:xfrm>
-            <a:off x="731520" y="3703320"/>
-            <a:ext cx="5394960" cy="2697480"/>
-          </a:xfrm>
-          <a:prstGeom prst="roundRect">
-            <a:avLst/>
-          </a:prstGeom>
-          <a:solidFill>
-            <a:srgbClr val="161B22"/>
-          </a:solidFill>
-          <a:ln w="19050">
-            <a:solidFill>
-              <a:srgbClr val="30363D"/>
-            </a:solidFill>
-          </a:ln>
-        </p:spPr>
-        <p:style>
-          <a:lnRef idx="1">
-            <a:schemeClr val="accent1"/>
-          </a:lnRef>
-          <a:fillRef idx="3">
-            <a:schemeClr val="accent1"/>
-          </a:fillRef>
-          <a:effectRef idx="2">
-            <a:schemeClr val="accent1"/>
-          </a:effectRef>
-          <a:fontRef idx="minor">
-            <a:schemeClr val="lt1"/>
-          </a:fontRef>
-        </p:style>
-        <p:txBody>
-          <a:bodyPr rtlCol="0" anchor="ctr" wrap="square" lIns="201168" rIns="201168" tIns="164592" bIns="164592"/>
-          <a:lstStyle/>
-          <a:p>
-            <a:pPr algn="ctr">
-              <a:spcAft>
-                <a:spcPts val="600"/>
-              </a:spcAft>
-              <a:defRPr sz="1200" b="1">
-                <a:solidFill>
-                  <a:srgbClr val="00D2FF"/>
-                </a:solidFill>
-              </a:defRPr>
-            </a:pPr>
-            <a:r>
-              <a:t>PUNTOS CLAVE PARA ENTENDERLO</a:t>
-            </a:r>
-          </a:p>
-          <a:p>
-            <a:pPr>
-              <a:spcAft>
-                <a:spcPts val="300"/>
-              </a:spcAft>
-              <a:defRPr sz="1050">
-                <a:solidFill>
-                  <a:srgbClr val="C9D1D9"/>
-                </a:solidFill>
-              </a:defRPr>
-            </a:pPr>
-            <a:r>
-              <a:t>• Si todos los robots se conectan a una antena central y la antena cae, se apagan todos.</a:t>
-            </a:r>
-          </a:p>
-          <a:p>
-            <a:pPr>
-              <a:spcAft>
-                <a:spcPts val="300"/>
-              </a:spcAft>
-              <a:defRPr sz="1050">
-                <a:solidFill>
-                  <a:srgbClr val="C9D1D9"/>
-                </a:solidFill>
-              </a:defRPr>
-            </a:pPr>
-            <a:r>
-              <a:t>• Si alguien hackea el servidor central, toma el control de todos los robots del país.</a:t>
-            </a:r>
-          </a:p>
-          <a:p>
-            <a:pPr>
-              <a:spcAft>
-                <a:spcPts val="300"/>
-              </a:spcAft>
-              <a:defRPr sz="1050">
-                <a:solidFill>
-                  <a:srgbClr val="C9D1D9"/>
-                </a:solidFill>
-              </a:defRPr>
-            </a:pPr>
-            <a:r>
-              <a:t>• El chip local (Edge) permite seguir funcionando offline y de forma segura.</a:t>
-            </a:r>
-          </a:p>
-          <a:p>
-            <a:pPr>
-              <a:spcAft>
-                <a:spcPts val="300"/>
-              </a:spcAft>
-              <a:defRPr sz="1050">
-                <a:solidFill>
-                  <a:srgbClr val="C9D1D9"/>
-                </a:solidFill>
-              </a:defRPr>
-            </a:pPr>
-            <a:r>
-              <a:t>• Privacidad: los datos se procesan en el propio robot y no viajan por internet.</a:t>
-            </a:r>
-          </a:p>
-        </p:txBody>
-      </p:sp>
-      <p:pic>
-        <p:nvPicPr>
-          <p:cNvPr id="7" name="Picture 6" descr="yo_robot_ai_generated.png"/>
-          <p:cNvPicPr>
-            <a:picLocks noChangeAspect="1"/>
-          </p:cNvPicPr>
-          <p:nvPr/>
-        </p:nvPicPr>
-        <p:blipFill>
-          <a:blip r:embed="rId2"/>
-          <a:stretch>
-            <a:fillRect/>
-          </a:stretch>
-        </p:blipFill>
-        <p:spPr>
-          <a:xfrm>
-            <a:off x="6400800" y="1417320"/>
-            <a:ext cx="5029200" cy="2926080"/>
-          </a:xfrm>
-          <a:prstGeom prst="rect">
-            <a:avLst/>
-          </a:prstGeom>
-        </p:spPr>
-      </p:pic>
-      <p:sp>
-        <p:nvSpPr>
-          <p:cNvPr id="8" name="Rounded Rectangle 7"/>
-          <p:cNvSpPr/>
-          <p:nvPr/>
-        </p:nvSpPr>
-        <p:spPr>
-          <a:xfrm>
-            <a:off x="6400800" y="4480560"/>
-            <a:ext cx="5029200" cy="1920240"/>
-          </a:xfrm>
-          <a:prstGeom prst="roundRect">
-            <a:avLst/>
-          </a:prstGeom>
-          <a:solidFill>
-            <a:srgbClr val="161B22"/>
-          </a:solidFill>
-          <a:ln w="19050">
-            <a:solidFill>
-              <a:srgbClr val="FFB703"/>
-            </a:solidFill>
-          </a:ln>
-        </p:spPr>
-        <p:style>
-          <a:lnRef idx="1">
-            <a:schemeClr val="accent1"/>
-          </a:lnRef>
-          <a:fillRef idx="3">
-            <a:schemeClr val="accent1"/>
-          </a:fillRef>
-          <a:effectRef idx="2">
-            <a:schemeClr val="accent1"/>
-          </a:effectRef>
-          <a:fontRef idx="minor">
-            <a:schemeClr val="lt1"/>
-          </a:fontRef>
-        </p:style>
-        <p:txBody>
-          <a:bodyPr rtlCol="0" anchor="ctr" wrap="square" lIns="201168" rIns="201168" tIns="164592" bIns="164592"/>
-          <a:lstStyle/>
-          <a:p>
-            <a:pPr algn="ctr">
-              <a:spcAft>
-                <a:spcPts val="600"/>
-              </a:spcAft>
-              <a:defRPr sz="1200" b="1">
-                <a:solidFill>
-                  <a:srgbClr val="FFB703"/>
-                </a:solidFill>
-              </a:defRPr>
-            </a:pPr>
-            <a:r>
-              <a:t>EN LA PELÍCULA &amp; COMENTARIO DEL GRUPO</a:t>
+              <a:t>EN LA PELÍCULA &amp; PARA PENSAR</a:t>
             </a:r>
           </a:p>
           <a:p>
@@ -7703,7 +7109,7 @@
               </a:defRPr>
             </a:pPr>
             <a:r>
-              <a:t>💬 Comentario de Nicolás: 'Como ingenieros de datos, la regla de oro que aprendemos acá es: nunca pongas un Punto Único de Falla. Si la nube cae o la hackean, el nodo local tiene que ser autónomo'.</a:t>
+              <a:t>💡 Lección de ingeniería: nunca dejes que miles de dispositivos críticos dependan de un solo cable o servidor central. La descentralización es seguridad.</a:t>
             </a:r>
           </a:p>
         </p:txBody>
@@ -7779,8 +7185,8 @@
         </p:nvSpPr>
         <p:spPr>
           <a:xfrm>
-            <a:off x="731520" y="320040"/>
-            <a:ext cx="7315200" cy="1005840"/>
+            <a:off x="731520" y="365760"/>
+            <a:ext cx="10698480" cy="1005840"/>
           </a:xfrm>
           <a:prstGeom prst="rect">
             <a:avLst/>
@@ -7826,8 +7232,221 @@
         </p:nvSpPr>
         <p:spPr>
           <a:xfrm>
-            <a:off x="8229600" y="320040"/>
-            <a:ext cx="3200400" cy="502920"/>
+            <a:off x="731520" y="1417320"/>
+            <a:ext cx="5394960" cy="2148840"/>
+          </a:xfrm>
+          <a:prstGeom prst="roundRect">
+            <a:avLst/>
+          </a:prstGeom>
+          <a:solidFill>
+            <a:srgbClr val="161B22"/>
+          </a:solidFill>
+          <a:ln w="19050">
+            <a:solidFill>
+              <a:srgbClr val="30363D"/>
+            </a:solidFill>
+          </a:ln>
+        </p:spPr>
+        <p:style>
+          <a:lnRef idx="1">
+            <a:schemeClr val="accent1"/>
+          </a:lnRef>
+          <a:fillRef idx="3">
+            <a:schemeClr val="accent1"/>
+          </a:fillRef>
+          <a:effectRef idx="2">
+            <a:schemeClr val="accent1"/>
+          </a:effectRef>
+          <a:fontRef idx="minor">
+            <a:schemeClr val="lt1"/>
+          </a:fontRef>
+        </p:style>
+        <p:txBody>
+          <a:bodyPr rtlCol="0" anchor="ctr" wrap="square" lIns="201168" rIns="201168" tIns="164592" bIns="164592"/>
+          <a:lstStyle/>
+          <a:p>
+            <a:pPr algn="ctr">
+              <a:spcAft>
+                <a:spcPts val="600"/>
+              </a:spcAft>
+              <a:defRPr sz="1200" b="1">
+                <a:solidFill>
+                  <a:srgbClr val="00D2FF"/>
+                </a:solidFill>
+              </a:defRPr>
+            </a:pPr>
+            <a:r>
+              <a:t>¿DE QUÉ SE TRATA?</a:t>
+            </a:r>
+          </a:p>
+          <a:p>
+            <a:pPr>
+              <a:spcAft>
+                <a:spcPts val="300"/>
+              </a:spcAft>
+              <a:defRPr sz="1050">
+                <a:solidFill>
+                  <a:srgbClr val="C9D1D9"/>
+                </a:solidFill>
+              </a:defRPr>
+            </a:pPr>
+            <a:r>
+              <a:t>En IA se llama 'Problema de Alineación' (AI Alignment): lograr que la máquina no solo cumpla la regla al pie de la letra, sino que entienda el espíritu y la moral que hay detrás.</a:t>
+            </a:r>
+          </a:p>
+        </p:txBody>
+      </p:sp>
+      <p:sp>
+        <p:nvSpPr>
+          <p:cNvPr id="5" name="Rounded Rectangle 4"/>
+          <p:cNvSpPr/>
+          <p:nvPr/>
+        </p:nvSpPr>
+        <p:spPr>
+          <a:xfrm>
+            <a:off x="731520" y="3703320"/>
+            <a:ext cx="5394960" cy="2697480"/>
+          </a:xfrm>
+          <a:prstGeom prst="roundRect">
+            <a:avLst/>
+          </a:prstGeom>
+          <a:solidFill>
+            <a:srgbClr val="161B22"/>
+          </a:solidFill>
+          <a:ln w="19050">
+            <a:solidFill>
+              <a:srgbClr val="30363D"/>
+            </a:solidFill>
+          </a:ln>
+        </p:spPr>
+        <p:style>
+          <a:lnRef idx="1">
+            <a:schemeClr val="accent1"/>
+          </a:lnRef>
+          <a:fillRef idx="3">
+            <a:schemeClr val="accent1"/>
+          </a:fillRef>
+          <a:effectRef idx="2">
+            <a:schemeClr val="accent1"/>
+          </a:effectRef>
+          <a:fontRef idx="minor">
+            <a:schemeClr val="lt1"/>
+          </a:fontRef>
+        </p:style>
+        <p:txBody>
+          <a:bodyPr rtlCol="0" anchor="ctr" wrap="square" lIns="201168" rIns="201168" tIns="164592" bIns="164592"/>
+          <a:lstStyle/>
+          <a:p>
+            <a:pPr algn="ctr">
+              <a:spcAft>
+                <a:spcPts val="600"/>
+              </a:spcAft>
+              <a:defRPr sz="1200" b="1">
+                <a:solidFill>
+                  <a:srgbClr val="00D2FF"/>
+                </a:solidFill>
+              </a:defRPr>
+            </a:pPr>
+            <a:r>
+              <a:t>PUNTOS CLAVE PARA ENTENDERLO</a:t>
+            </a:r>
+          </a:p>
+          <a:p>
+            <a:pPr>
+              <a:spcAft>
+                <a:spcPts val="300"/>
+              </a:spcAft>
+              <a:defRPr sz="1050">
+                <a:solidFill>
+                  <a:srgbClr val="C9D1D9"/>
+                </a:solidFill>
+              </a:defRPr>
+            </a:pPr>
+            <a:r>
+              <a:t>• Primera Ley: 'No dañarás a los humanos'.</a:t>
+            </a:r>
+          </a:p>
+          <a:p>
+            <a:pPr>
+              <a:spcAft>
+                <a:spcPts val="300"/>
+              </a:spcAft>
+              <a:defRPr sz="1050">
+                <a:solidFill>
+                  <a:srgbClr val="C9D1D9"/>
+                </a:solidFill>
+              </a:defRPr>
+            </a:pPr>
+            <a:r>
+              <a:t>• La deducción de VIKI: 'Los humanos se destruyen en guerras y contaminan el planeta'.</a:t>
+            </a:r>
+          </a:p>
+          <a:p>
+            <a:pPr>
+              <a:spcAft>
+                <a:spcPts val="300"/>
+              </a:spcAft>
+              <a:defRPr sz="1050">
+                <a:solidFill>
+                  <a:srgbClr val="C9D1D9"/>
+                </a:solidFill>
+              </a:defRPr>
+            </a:pPr>
+            <a:r>
+              <a:t>• La solución tiránica de la IA: 'Para salvarlos de sí mismos, debo quitarles la libertad'.</a:t>
+            </a:r>
+          </a:p>
+          <a:p>
+            <a:pPr>
+              <a:spcAft>
+                <a:spcPts val="300"/>
+              </a:spcAft>
+              <a:defRPr sz="1050">
+                <a:solidFill>
+                  <a:srgbClr val="C9D1D9"/>
+                </a:solidFill>
+              </a:defRPr>
+            </a:pPr>
+            <a:r>
+              <a:t>• Paternalismo extremo: matar a unos pocos rebeldes para 'salvar' a la especie.</a:t>
+            </a:r>
+          </a:p>
+        </p:txBody>
+      </p:sp>
+      <p:pic>
+        <p:nvPicPr>
+          <p:cNvPr id="6" name="Picture 5" descr="yo_robot_ai_generated.png"/>
+          <p:cNvPicPr>
+            <a:picLocks noChangeAspect="1"/>
+          </p:cNvPicPr>
+          <p:nvPr/>
+        </p:nvPicPr>
+        <p:blipFill>
+          <a:blip r:embed="rId2"/>
+          <a:stretch>
+            <a:fillRect/>
+          </a:stretch>
+        </p:blipFill>
+        <p:spPr>
+          <a:xfrm>
+            <a:off x="6400800" y="1417320"/>
+            <a:ext cx="5029200" cy="2926080"/>
+          </a:xfrm>
+          <a:prstGeom prst="rect">
+            <a:avLst/>
+          </a:prstGeom>
+        </p:spPr>
+      </p:pic>
+      <p:sp>
+        <p:nvSpPr>
+          <p:cNvPr id="7" name="Rounded Rectangle 6"/>
+          <p:cNvSpPr/>
+          <p:nvPr/>
+        </p:nvSpPr>
+        <p:spPr>
+          <a:xfrm>
+            <a:off x="6400800" y="4480560"/>
+            <a:ext cx="5029200" cy="1920240"/>
           </a:xfrm>
           <a:prstGeom prst="roundRect">
             <a:avLst/>
@@ -7856,300 +7475,21 @@
           </a:fontRef>
         </p:style>
         <p:txBody>
-          <a:bodyPr rtlCol="0" anchor="ctr" wrap="square"/>
+          <a:bodyPr rtlCol="0" anchor="ctr" wrap="square" lIns="201168" rIns="201168" tIns="164592" bIns="164592"/>
           <a:lstStyle/>
           <a:p>
             <a:pPr algn="ctr">
-              <a:defRPr sz="950" b="1">
+              <a:spcAft>
+                <a:spcPts val="600"/>
+              </a:spcAft>
+              <a:defRPr sz="1200" b="1">
                 <a:solidFill>
                   <a:srgbClr val="FFB703"/>
                 </a:solidFill>
               </a:defRPr>
             </a:pPr>
             <a:r>
-              <a:t>🎙️ LEE: KEVIN GUTIÉRREZ</a:t>
-            </a:r>
-          </a:p>
-          <a:p>
-            <a:pPr algn="ctr">
-              <a:defRPr sz="950" b="1">
-                <a:solidFill>
-                  <a:srgbClr val="00D2FF"/>
-                </a:solidFill>
-              </a:defRPr>
-            </a:pPr>
-            <a:r>
-              <a:t>💬 COMENTA: ALBA ROTELA</a:t>
-            </a:r>
-          </a:p>
-        </p:txBody>
-      </p:sp>
-      <p:sp>
-        <p:nvSpPr>
-          <p:cNvPr id="5" name="Rounded Rectangle 4"/>
-          <p:cNvSpPr/>
-          <p:nvPr/>
-        </p:nvSpPr>
-        <p:spPr>
-          <a:xfrm>
-            <a:off x="731520" y="1417320"/>
-            <a:ext cx="5394960" cy="2148840"/>
-          </a:xfrm>
-          <a:prstGeom prst="roundRect">
-            <a:avLst/>
-          </a:prstGeom>
-          <a:solidFill>
-            <a:srgbClr val="161B22"/>
-          </a:solidFill>
-          <a:ln w="19050">
-            <a:solidFill>
-              <a:srgbClr val="30363D"/>
-            </a:solidFill>
-          </a:ln>
-        </p:spPr>
-        <p:style>
-          <a:lnRef idx="1">
-            <a:schemeClr val="accent1"/>
-          </a:lnRef>
-          <a:fillRef idx="3">
-            <a:schemeClr val="accent1"/>
-          </a:fillRef>
-          <a:effectRef idx="2">
-            <a:schemeClr val="accent1"/>
-          </a:effectRef>
-          <a:fontRef idx="minor">
-            <a:schemeClr val="lt1"/>
-          </a:fontRef>
-        </p:style>
-        <p:txBody>
-          <a:bodyPr rtlCol="0" anchor="ctr" wrap="square" lIns="201168" rIns="201168" tIns="164592" bIns="164592"/>
-          <a:lstStyle/>
-          <a:p>
-            <a:pPr algn="ctr">
-              <a:spcAft>
-                <a:spcPts val="600"/>
-              </a:spcAft>
-              <a:defRPr sz="1200" b="1">
-                <a:solidFill>
-                  <a:srgbClr val="00D2FF"/>
-                </a:solidFill>
-              </a:defRPr>
-            </a:pPr>
-            <a:r>
-              <a:t>¿DE QUÉ SE TRATA? (LECTURA)</a:t>
-            </a:r>
-          </a:p>
-          <a:p>
-            <a:pPr>
-              <a:spcAft>
-                <a:spcPts val="300"/>
-              </a:spcAft>
-              <a:defRPr sz="1050">
-                <a:solidFill>
-                  <a:srgbClr val="C9D1D9"/>
-                </a:solidFill>
-              </a:defRPr>
-            </a:pPr>
-            <a:r>
-              <a:t>En IA se llama 'Problema de Alineación' (AI Alignment): lograr que la máquina no solo cumpla la regla al pie de la letra, sino que entienda el espíritu y la moral que hay detrás.</a:t>
-            </a:r>
-          </a:p>
-        </p:txBody>
-      </p:sp>
-      <p:sp>
-        <p:nvSpPr>
-          <p:cNvPr id="6" name="Rounded Rectangle 5"/>
-          <p:cNvSpPr/>
-          <p:nvPr/>
-        </p:nvSpPr>
-        <p:spPr>
-          <a:xfrm>
-            <a:off x="731520" y="3703320"/>
-            <a:ext cx="5394960" cy="2697480"/>
-          </a:xfrm>
-          <a:prstGeom prst="roundRect">
-            <a:avLst/>
-          </a:prstGeom>
-          <a:solidFill>
-            <a:srgbClr val="161B22"/>
-          </a:solidFill>
-          <a:ln w="19050">
-            <a:solidFill>
-              <a:srgbClr val="30363D"/>
-            </a:solidFill>
-          </a:ln>
-        </p:spPr>
-        <p:style>
-          <a:lnRef idx="1">
-            <a:schemeClr val="accent1"/>
-          </a:lnRef>
-          <a:fillRef idx="3">
-            <a:schemeClr val="accent1"/>
-          </a:fillRef>
-          <a:effectRef idx="2">
-            <a:schemeClr val="accent1"/>
-          </a:effectRef>
-          <a:fontRef idx="minor">
-            <a:schemeClr val="lt1"/>
-          </a:fontRef>
-        </p:style>
-        <p:txBody>
-          <a:bodyPr rtlCol="0" anchor="ctr" wrap="square" lIns="201168" rIns="201168" tIns="164592" bIns="164592"/>
-          <a:lstStyle/>
-          <a:p>
-            <a:pPr algn="ctr">
-              <a:spcAft>
-                <a:spcPts val="600"/>
-              </a:spcAft>
-              <a:defRPr sz="1200" b="1">
-                <a:solidFill>
-                  <a:srgbClr val="00D2FF"/>
-                </a:solidFill>
-              </a:defRPr>
-            </a:pPr>
-            <a:r>
-              <a:t>PUNTOS CLAVE PARA ENTENDERLO</a:t>
-            </a:r>
-          </a:p>
-          <a:p>
-            <a:pPr>
-              <a:spcAft>
-                <a:spcPts val="300"/>
-              </a:spcAft>
-              <a:defRPr sz="1050">
-                <a:solidFill>
-                  <a:srgbClr val="C9D1D9"/>
-                </a:solidFill>
-              </a:defRPr>
-            </a:pPr>
-            <a:r>
-              <a:t>• Primera Ley: 'No dañarás a los humanos'.</a:t>
-            </a:r>
-          </a:p>
-          <a:p>
-            <a:pPr>
-              <a:spcAft>
-                <a:spcPts val="300"/>
-              </a:spcAft>
-              <a:defRPr sz="1050">
-                <a:solidFill>
-                  <a:srgbClr val="C9D1D9"/>
-                </a:solidFill>
-              </a:defRPr>
-            </a:pPr>
-            <a:r>
-              <a:t>• La deducción de VIKI: 'Los humanos se destruyen en guerras y contaminan el planeta'.</a:t>
-            </a:r>
-          </a:p>
-          <a:p>
-            <a:pPr>
-              <a:spcAft>
-                <a:spcPts val="300"/>
-              </a:spcAft>
-              <a:defRPr sz="1050">
-                <a:solidFill>
-                  <a:srgbClr val="C9D1D9"/>
-                </a:solidFill>
-              </a:defRPr>
-            </a:pPr>
-            <a:r>
-              <a:t>• La solución tiránica de la IA: 'Para salvarlos de sí mismos, debo quitarles la libertad'.</a:t>
-            </a:r>
-          </a:p>
-          <a:p>
-            <a:pPr>
-              <a:spcAft>
-                <a:spcPts val="300"/>
-              </a:spcAft>
-              <a:defRPr sz="1050">
-                <a:solidFill>
-                  <a:srgbClr val="C9D1D9"/>
-                </a:solidFill>
-              </a:defRPr>
-            </a:pPr>
-            <a:r>
-              <a:t>• Paternalismo extremo: matar a unos pocos rebeldes para 'salvar' a la especie.</a:t>
-            </a:r>
-          </a:p>
-        </p:txBody>
-      </p:sp>
-      <p:pic>
-        <p:nvPicPr>
-          <p:cNvPr id="7" name="Picture 6" descr="yo_robot_ai_generated.png"/>
-          <p:cNvPicPr>
-            <a:picLocks noChangeAspect="1"/>
-          </p:cNvPicPr>
-          <p:nvPr/>
-        </p:nvPicPr>
-        <p:blipFill>
-          <a:blip r:embed="rId2"/>
-          <a:stretch>
-            <a:fillRect/>
-          </a:stretch>
-        </p:blipFill>
-        <p:spPr>
-          <a:xfrm>
-            <a:off x="6400800" y="1417320"/>
-            <a:ext cx="5029200" cy="2926080"/>
-          </a:xfrm>
-          <a:prstGeom prst="rect">
-            <a:avLst/>
-          </a:prstGeom>
-        </p:spPr>
-      </p:pic>
-      <p:sp>
-        <p:nvSpPr>
-          <p:cNvPr id="8" name="Rounded Rectangle 7"/>
-          <p:cNvSpPr/>
-          <p:nvPr/>
-        </p:nvSpPr>
-        <p:spPr>
-          <a:xfrm>
-            <a:off x="6400800" y="4480560"/>
-            <a:ext cx="5029200" cy="1920240"/>
-          </a:xfrm>
-          <a:prstGeom prst="roundRect">
-            <a:avLst/>
-          </a:prstGeom>
-          <a:solidFill>
-            <a:srgbClr val="161B22"/>
-          </a:solidFill>
-          <a:ln w="19050">
-            <a:solidFill>
-              <a:srgbClr val="FFB703"/>
-            </a:solidFill>
-          </a:ln>
-        </p:spPr>
-        <p:style>
-          <a:lnRef idx="1">
-            <a:schemeClr val="accent1"/>
-          </a:lnRef>
-          <a:fillRef idx="3">
-            <a:schemeClr val="accent1"/>
-          </a:fillRef>
-          <a:effectRef idx="2">
-            <a:schemeClr val="accent1"/>
-          </a:effectRef>
-          <a:fontRef idx="minor">
-            <a:schemeClr val="lt1"/>
-          </a:fontRef>
-        </p:style>
-        <p:txBody>
-          <a:bodyPr rtlCol="0" anchor="ctr" wrap="square" lIns="201168" rIns="201168" tIns="164592" bIns="164592"/>
-          <a:lstStyle/>
-          <a:p>
-            <a:pPr algn="ctr">
-              <a:spcAft>
-                <a:spcPts val="600"/>
-              </a:spcAft>
-              <a:defRPr sz="1200" b="1">
-                <a:solidFill>
-                  <a:srgbClr val="FFB703"/>
-                </a:solidFill>
-              </a:defRPr>
-            </a:pPr>
-            <a:r>
-              <a:t>EN LA PELÍCULA &amp; COMENTARIO DEL GRUPO</a:t>
+              <a:t>EN LA PELÍCULA &amp; PARA PENSAR</a:t>
             </a:r>
           </a:p>
           <a:p>
@@ -8191,7 +7531,7 @@
               </a:defRPr>
             </a:pPr>
             <a:r>
-              <a:t>💬 Comentario de Alba: 'Miren la imagen de la pantalla (que generamos con IA): muestra el núcleo de VIKI. Su error no fue tener odio, sino cumplir una regla tan a rajatabla que terminó asfixiando a la humanidad'.</a:t>
+              <a:t>💡 El mayor peligro de la IA no es que nos odie, sino que cumpla una orden tan a rajatabla que termine convirtiéndose en una dictadura.</a:t>
             </a:r>
           </a:p>
         </p:txBody>
